--- a/docs/plots/carbo/jx_carbo_linsubhr_egfrdisc_anyhosp.pptx
+++ b/docs/plots/carbo/jx_carbo_linsubhr_egfrdisc_anyhosp.pptx
@@ -3003,494 +3003,491 @@
           <p:spPr>
             <a:xfrm>
               <a:off x="1172049" y="2073503"/>
-              <a:ext cx="7090630" cy="3298597"/>
+              <a:ext cx="7090630" cy="3314793"/>
             </a:xfrm>
             <a:custGeom>
               <a:avLst/>
               <a:pathLst>
-                <a:path w="7090630" h="3298597">
+                <a:path w="7090630" h="3314793">
                   <a:moveTo>
-                    <a:pt x="2803289" y="0"/>
+                    <a:pt x="2923976" y="0"/>
                   </a:moveTo>
                   <a:lnTo>
-                    <a:pt x="2864901" y="144335"/>
-                  </a:lnTo>
-                  <a:lnTo>
-                    <a:pt x="2936523" y="304096"/>
-                  </a:lnTo>
-                  <a:lnTo>
-                    <a:pt x="3008146" y="456215"/>
-                  </a:lnTo>
-                  <a:lnTo>
-                    <a:pt x="3079768" y="601056"/>
-                  </a:lnTo>
-                  <a:lnTo>
-                    <a:pt x="3151391" y="738967"/>
-                  </a:lnTo>
-                  <a:lnTo>
-                    <a:pt x="3223013" y="870281"/>
-                  </a:lnTo>
-                  <a:lnTo>
-                    <a:pt x="3294636" y="995312"/>
-                  </a:lnTo>
-                  <a:lnTo>
-                    <a:pt x="3366258" y="1114362"/>
-                  </a:lnTo>
-                  <a:lnTo>
-                    <a:pt x="3437881" y="1227716"/>
-                  </a:lnTo>
-                  <a:lnTo>
-                    <a:pt x="3509503" y="1335648"/>
-                  </a:lnTo>
-                  <a:lnTo>
-                    <a:pt x="3581126" y="1438415"/>
-                  </a:lnTo>
-                  <a:lnTo>
-                    <a:pt x="3652748" y="1536267"/>
-                  </a:lnTo>
-                  <a:lnTo>
-                    <a:pt x="3724371" y="1629436"/>
-                  </a:lnTo>
-                  <a:lnTo>
-                    <a:pt x="3795993" y="1718149"/>
-                  </a:lnTo>
-                  <a:lnTo>
-                    <a:pt x="3867616" y="1802617"/>
-                  </a:lnTo>
-                  <a:lnTo>
-                    <a:pt x="3939238" y="1883045"/>
-                  </a:lnTo>
-                  <a:lnTo>
-                    <a:pt x="4010861" y="1959624"/>
-                  </a:lnTo>
-                  <a:lnTo>
-                    <a:pt x="4082483" y="2032540"/>
-                  </a:lnTo>
-                  <a:lnTo>
-                    <a:pt x="4154106" y="2101968"/>
-                  </a:lnTo>
-                  <a:lnTo>
-                    <a:pt x="4225729" y="2168074"/>
-                  </a:lnTo>
-                  <a:lnTo>
-                    <a:pt x="4297351" y="2231017"/>
-                  </a:lnTo>
-                  <a:lnTo>
-                    <a:pt x="4368974" y="2290949"/>
-                  </a:lnTo>
-                  <a:lnTo>
-                    <a:pt x="4440596" y="2348014"/>
-                  </a:lnTo>
-                  <a:lnTo>
-                    <a:pt x="4512219" y="2402349"/>
-                  </a:lnTo>
-                  <a:lnTo>
-                    <a:pt x="4583841" y="2454084"/>
-                  </a:lnTo>
-                  <a:lnTo>
-                    <a:pt x="4655464" y="2503345"/>
-                  </a:lnTo>
-                  <a:lnTo>
-                    <a:pt x="4727086" y="2550248"/>
-                  </a:lnTo>
-                  <a:lnTo>
-                    <a:pt x="4798709" y="2594908"/>
-                  </a:lnTo>
-                  <a:lnTo>
-                    <a:pt x="4870331" y="2637431"/>
-                  </a:lnTo>
-                  <a:lnTo>
-                    <a:pt x="4941954" y="2656925"/>
-                  </a:lnTo>
-                  <a:lnTo>
-                    <a:pt x="5013576" y="2661387"/>
-                  </a:lnTo>
-                  <a:lnTo>
-                    <a:pt x="5085199" y="2665824"/>
-                  </a:lnTo>
-                  <a:lnTo>
-                    <a:pt x="5156821" y="2670237"/>
-                  </a:lnTo>
-                  <a:lnTo>
-                    <a:pt x="5228444" y="2674627"/>
-                  </a:lnTo>
-                  <a:lnTo>
-                    <a:pt x="5300066" y="2678993"/>
-                  </a:lnTo>
-                  <a:lnTo>
-                    <a:pt x="5371689" y="2683335"/>
-                  </a:lnTo>
-                  <a:lnTo>
-                    <a:pt x="5443311" y="2687654"/>
-                  </a:lnTo>
-                  <a:lnTo>
-                    <a:pt x="5514934" y="2691950"/>
-                  </a:lnTo>
-                  <a:lnTo>
-                    <a:pt x="5586557" y="2696222"/>
-                  </a:lnTo>
-                  <a:lnTo>
-                    <a:pt x="5658179" y="2700471"/>
-                  </a:lnTo>
-                  <a:lnTo>
-                    <a:pt x="5729802" y="2704698"/>
-                  </a:lnTo>
-                  <a:lnTo>
-                    <a:pt x="5801424" y="2708901"/>
-                  </a:lnTo>
-                  <a:lnTo>
-                    <a:pt x="5873047" y="2713082"/>
-                  </a:lnTo>
-                  <a:lnTo>
-                    <a:pt x="5944669" y="2717241"/>
-                  </a:lnTo>
-                  <a:lnTo>
-                    <a:pt x="6016292" y="2721377"/>
-                  </a:lnTo>
-                  <a:lnTo>
-                    <a:pt x="6087914" y="2725490"/>
-                  </a:lnTo>
-                  <a:lnTo>
-                    <a:pt x="6159537" y="2729582"/>
-                  </a:lnTo>
-                  <a:lnTo>
-                    <a:pt x="6231159" y="2733651"/>
-                  </a:lnTo>
-                  <a:lnTo>
-                    <a:pt x="6302782" y="2737698"/>
-                  </a:lnTo>
-                  <a:lnTo>
-                    <a:pt x="6374404" y="2741724"/>
-                  </a:lnTo>
-                  <a:lnTo>
-                    <a:pt x="6446027" y="2745728"/>
-                  </a:lnTo>
-                  <a:lnTo>
-                    <a:pt x="6517649" y="2749710"/>
-                  </a:lnTo>
-                  <a:lnTo>
-                    <a:pt x="6589272" y="2753671"/>
-                  </a:lnTo>
-                  <a:lnTo>
-                    <a:pt x="6660894" y="2757610"/>
-                  </a:lnTo>
-                  <a:lnTo>
-                    <a:pt x="6732517" y="2761528"/>
-                  </a:lnTo>
-                  <a:lnTo>
-                    <a:pt x="6804139" y="2765425"/>
-                  </a:lnTo>
-                  <a:lnTo>
-                    <a:pt x="6875762" y="2769301"/>
-                  </a:lnTo>
-                  <a:lnTo>
-                    <a:pt x="6947385" y="2773156"/>
-                  </a:lnTo>
-                  <a:lnTo>
-                    <a:pt x="7019007" y="2776990"/>
-                  </a:lnTo>
-                  <a:lnTo>
-                    <a:pt x="7090630" y="2780804"/>
-                  </a:lnTo>
-                  <a:lnTo>
-                    <a:pt x="7090630" y="3298597"/>
-                  </a:lnTo>
-                  <a:lnTo>
-                    <a:pt x="7019007" y="3289294"/>
-                  </a:lnTo>
-                  <a:lnTo>
-                    <a:pt x="6947385" y="3279524"/>
-                  </a:lnTo>
-                  <a:lnTo>
-                    <a:pt x="6875762" y="3269263"/>
-                  </a:lnTo>
-                  <a:lnTo>
-                    <a:pt x="6804139" y="3258486"/>
-                  </a:lnTo>
-                  <a:lnTo>
-                    <a:pt x="6732517" y="3247168"/>
-                  </a:lnTo>
-                  <a:lnTo>
-                    <a:pt x="6660894" y="3235281"/>
-                  </a:lnTo>
-                  <a:lnTo>
-                    <a:pt x="6589272" y="3222797"/>
-                  </a:lnTo>
-                  <a:lnTo>
-                    <a:pt x="6517649" y="3209685"/>
-                  </a:lnTo>
-                  <a:lnTo>
-                    <a:pt x="6446027" y="3195915"/>
-                  </a:lnTo>
-                  <a:lnTo>
-                    <a:pt x="6374404" y="3181453"/>
-                  </a:lnTo>
-                  <a:lnTo>
-                    <a:pt x="6302782" y="3166264"/>
-                  </a:lnTo>
-                  <a:lnTo>
-                    <a:pt x="6231159" y="3150312"/>
-                  </a:lnTo>
-                  <a:lnTo>
-                    <a:pt x="6159537" y="3133559"/>
-                  </a:lnTo>
-                  <a:lnTo>
-                    <a:pt x="6087914" y="3115964"/>
-                  </a:lnTo>
-                  <a:lnTo>
-                    <a:pt x="6016292" y="3097484"/>
-                  </a:lnTo>
-                  <a:lnTo>
-                    <a:pt x="5944669" y="3078077"/>
-                  </a:lnTo>
-                  <a:lnTo>
-                    <a:pt x="5873047" y="3057694"/>
-                  </a:lnTo>
-                  <a:lnTo>
-                    <a:pt x="5801424" y="3036287"/>
-                  </a:lnTo>
-                  <a:lnTo>
-                    <a:pt x="5729802" y="3013804"/>
-                  </a:lnTo>
-                  <a:lnTo>
-                    <a:pt x="5658179" y="2990192"/>
-                  </a:lnTo>
-                  <a:lnTo>
-                    <a:pt x="5586557" y="2965393"/>
-                  </a:lnTo>
-                  <a:lnTo>
-                    <a:pt x="5514934" y="2939349"/>
-                  </a:lnTo>
-                  <a:lnTo>
-                    <a:pt x="5443311" y="2911995"/>
-                  </a:lnTo>
-                  <a:lnTo>
-                    <a:pt x="5371689" y="2883268"/>
-                  </a:lnTo>
-                  <a:lnTo>
-                    <a:pt x="5300066" y="2853097"/>
-                  </a:lnTo>
-                  <a:lnTo>
-                    <a:pt x="5228444" y="2821409"/>
-                  </a:lnTo>
-                  <a:lnTo>
-                    <a:pt x="5156821" y="2788130"/>
-                  </a:lnTo>
-                  <a:lnTo>
-                    <a:pt x="5085199" y="2753179"/>
-                  </a:lnTo>
-                  <a:lnTo>
-                    <a:pt x="5013576" y="2716472"/>
-                  </a:lnTo>
-                  <a:lnTo>
-                    <a:pt x="4941954" y="2677920"/>
-                  </a:lnTo>
-                  <a:lnTo>
-                    <a:pt x="4870331" y="2652440"/>
-                  </a:lnTo>
-                  <a:lnTo>
-                    <a:pt x="4798709" y="2647930"/>
-                  </a:lnTo>
-                  <a:lnTo>
-                    <a:pt x="4727086" y="2643395"/>
-                  </a:lnTo>
-                  <a:lnTo>
-                    <a:pt x="4655464" y="2638836"/>
-                  </a:lnTo>
-                  <a:lnTo>
-                    <a:pt x="4583841" y="2634253"/>
-                  </a:lnTo>
-                  <a:lnTo>
-                    <a:pt x="4512219" y="2629644"/>
-                  </a:lnTo>
-                  <a:lnTo>
-                    <a:pt x="4440596" y="2625010"/>
-                  </a:lnTo>
-                  <a:lnTo>
-                    <a:pt x="4368974" y="2620352"/>
-                  </a:lnTo>
-                  <a:lnTo>
-                    <a:pt x="4297351" y="2615668"/>
-                  </a:lnTo>
-                  <a:lnTo>
-                    <a:pt x="4225729" y="2610958"/>
-                  </a:lnTo>
-                  <a:lnTo>
-                    <a:pt x="4154106" y="2606223"/>
-                  </a:lnTo>
-                  <a:lnTo>
-                    <a:pt x="4082483" y="2601463"/>
-                  </a:lnTo>
-                  <a:lnTo>
-                    <a:pt x="4010861" y="2596676"/>
-                  </a:lnTo>
-                  <a:lnTo>
-                    <a:pt x="3939238" y="2591864"/>
-                  </a:lnTo>
-                  <a:lnTo>
-                    <a:pt x="3867616" y="2587025"/>
-                  </a:lnTo>
-                  <a:lnTo>
-                    <a:pt x="3795993" y="2582160"/>
-                  </a:lnTo>
-                  <a:lnTo>
-                    <a:pt x="3724371" y="2577269"/>
-                  </a:lnTo>
-                  <a:lnTo>
-                    <a:pt x="3652748" y="2572351"/>
-                  </a:lnTo>
-                  <a:lnTo>
-                    <a:pt x="3581126" y="2567407"/>
-                  </a:lnTo>
-                  <a:lnTo>
-                    <a:pt x="3509503" y="2562436"/>
-                  </a:lnTo>
-                  <a:lnTo>
-                    <a:pt x="3437881" y="2557438"/>
-                  </a:lnTo>
-                  <a:lnTo>
-                    <a:pt x="3366258" y="2552412"/>
-                  </a:lnTo>
-                  <a:lnTo>
-                    <a:pt x="3294636" y="2547360"/>
-                  </a:lnTo>
-                  <a:lnTo>
-                    <a:pt x="3223013" y="2542280"/>
-                  </a:lnTo>
-                  <a:lnTo>
-                    <a:pt x="3151391" y="2537172"/>
-                  </a:lnTo>
-                  <a:lnTo>
-                    <a:pt x="3079768" y="2532037"/>
-                  </a:lnTo>
-                  <a:lnTo>
-                    <a:pt x="3008146" y="2526874"/>
-                  </a:lnTo>
-                  <a:lnTo>
-                    <a:pt x="2936523" y="2521683"/>
-                  </a:lnTo>
-                  <a:lnTo>
-                    <a:pt x="2864901" y="2516463"/>
-                  </a:lnTo>
-                  <a:lnTo>
-                    <a:pt x="2793278" y="2511216"/>
-                  </a:lnTo>
-                  <a:lnTo>
-                    <a:pt x="2721655" y="2505940"/>
-                  </a:lnTo>
-                  <a:lnTo>
-                    <a:pt x="2650033" y="2500635"/>
-                  </a:lnTo>
-                  <a:lnTo>
-                    <a:pt x="2578410" y="2495301"/>
-                  </a:lnTo>
-                  <a:lnTo>
-                    <a:pt x="2506788" y="2489939"/>
-                  </a:lnTo>
-                  <a:lnTo>
-                    <a:pt x="2435165" y="2484547"/>
-                  </a:lnTo>
-                  <a:lnTo>
-                    <a:pt x="2363543" y="2479127"/>
-                  </a:lnTo>
-                  <a:lnTo>
-                    <a:pt x="2291920" y="2473676"/>
-                  </a:lnTo>
-                  <a:lnTo>
-                    <a:pt x="2220298" y="2468197"/>
-                  </a:lnTo>
-                  <a:lnTo>
-                    <a:pt x="2148675" y="2462687"/>
-                  </a:lnTo>
-                  <a:lnTo>
-                    <a:pt x="2077053" y="2457148"/>
-                  </a:lnTo>
-                  <a:lnTo>
-                    <a:pt x="2005430" y="2451579"/>
-                  </a:lnTo>
-                  <a:lnTo>
-                    <a:pt x="1933808" y="2445979"/>
-                  </a:lnTo>
-                  <a:lnTo>
-                    <a:pt x="1862185" y="2440349"/>
-                  </a:lnTo>
-                  <a:lnTo>
-                    <a:pt x="1790563" y="2434688"/>
-                  </a:lnTo>
-                  <a:lnTo>
-                    <a:pt x="1718940" y="2428997"/>
-                  </a:lnTo>
-                  <a:lnTo>
-                    <a:pt x="1647318" y="2423275"/>
-                  </a:lnTo>
-                  <a:lnTo>
-                    <a:pt x="1575695" y="2417522"/>
-                  </a:lnTo>
-                  <a:lnTo>
-                    <a:pt x="1504073" y="2411737"/>
-                  </a:lnTo>
-                  <a:lnTo>
-                    <a:pt x="1432450" y="2405922"/>
-                  </a:lnTo>
-                  <a:lnTo>
-                    <a:pt x="1360827" y="2400074"/>
-                  </a:lnTo>
-                  <a:lnTo>
-                    <a:pt x="1289205" y="2394195"/>
-                  </a:lnTo>
-                  <a:lnTo>
-                    <a:pt x="1217582" y="2388284"/>
-                  </a:lnTo>
-                  <a:lnTo>
-                    <a:pt x="1145960" y="2382341"/>
-                  </a:lnTo>
-                  <a:lnTo>
-                    <a:pt x="1074337" y="2376366"/>
-                  </a:lnTo>
-                  <a:lnTo>
-                    <a:pt x="1002715" y="2370359"/>
-                  </a:lnTo>
-                  <a:lnTo>
-                    <a:pt x="931092" y="2364318"/>
-                  </a:lnTo>
-                  <a:lnTo>
-                    <a:pt x="859470" y="2358245"/>
-                  </a:lnTo>
-                  <a:lnTo>
-                    <a:pt x="787847" y="2352139"/>
-                  </a:lnTo>
-                  <a:lnTo>
-                    <a:pt x="716225" y="2346000"/>
-                  </a:lnTo>
-                  <a:lnTo>
-                    <a:pt x="644602" y="2339828"/>
-                  </a:lnTo>
-                  <a:lnTo>
-                    <a:pt x="572980" y="2333622"/>
-                  </a:lnTo>
-                  <a:lnTo>
-                    <a:pt x="501357" y="2327382"/>
-                  </a:lnTo>
-                  <a:lnTo>
-                    <a:pt x="429735" y="2321109"/>
-                  </a:lnTo>
-                  <a:lnTo>
-                    <a:pt x="358112" y="2314802"/>
-                  </a:lnTo>
-                  <a:lnTo>
-                    <a:pt x="286490" y="2308460"/>
-                  </a:lnTo>
-                  <a:lnTo>
-                    <a:pt x="214867" y="2302084"/>
-                  </a:lnTo>
-                  <a:lnTo>
-                    <a:pt x="143245" y="2295673"/>
-                  </a:lnTo>
-                  <a:lnTo>
-                    <a:pt x="71622" y="2289228"/>
-                  </a:lnTo>
-                  <a:lnTo>
-                    <a:pt x="0" y="2282747"/>
+                    <a:pt x="2936523" y="32282"/>
+                  </a:lnTo>
+                  <a:lnTo>
+                    <a:pt x="3008146" y="207224"/>
+                  </a:lnTo>
+                  <a:lnTo>
+                    <a:pt x="3079768" y="373299"/>
+                  </a:lnTo>
+                  <a:lnTo>
+                    <a:pt x="3151391" y="530957"/>
+                  </a:lnTo>
+                  <a:lnTo>
+                    <a:pt x="3223013" y="680623"/>
+                  </a:lnTo>
+                  <a:lnTo>
+                    <a:pt x="3294636" y="822703"/>
+                  </a:lnTo>
+                  <a:lnTo>
+                    <a:pt x="3366258" y="957582"/>
+                  </a:lnTo>
+                  <a:lnTo>
+                    <a:pt x="3437881" y="1085624"/>
+                  </a:lnTo>
+                  <a:lnTo>
+                    <a:pt x="3509503" y="1207176"/>
+                  </a:lnTo>
+                  <a:lnTo>
+                    <a:pt x="3581126" y="1322568"/>
+                  </a:lnTo>
+                  <a:lnTo>
+                    <a:pt x="3652748" y="1432110"/>
+                  </a:lnTo>
+                  <a:lnTo>
+                    <a:pt x="3724371" y="1536100"/>
+                  </a:lnTo>
+                  <a:lnTo>
+                    <a:pt x="3795993" y="1634819"/>
+                  </a:lnTo>
+                  <a:lnTo>
+                    <a:pt x="3867616" y="1728535"/>
+                  </a:lnTo>
+                  <a:lnTo>
+                    <a:pt x="3939238" y="1817500"/>
+                  </a:lnTo>
+                  <a:lnTo>
+                    <a:pt x="4010861" y="1901956"/>
+                  </a:lnTo>
+                  <a:lnTo>
+                    <a:pt x="4082483" y="1982131"/>
+                  </a:lnTo>
+                  <a:lnTo>
+                    <a:pt x="4154106" y="2058243"/>
+                  </a:lnTo>
+                  <a:lnTo>
+                    <a:pt x="4225729" y="2130496"/>
+                  </a:lnTo>
+                  <a:lnTo>
+                    <a:pt x="4297351" y="2199088"/>
+                  </a:lnTo>
+                  <a:lnTo>
+                    <a:pt x="4368974" y="2264203"/>
+                  </a:lnTo>
+                  <a:lnTo>
+                    <a:pt x="4440596" y="2326017"/>
+                  </a:lnTo>
+                  <a:lnTo>
+                    <a:pt x="4512219" y="2384698"/>
+                  </a:lnTo>
+                  <a:lnTo>
+                    <a:pt x="4583841" y="2440405"/>
+                  </a:lnTo>
+                  <a:lnTo>
+                    <a:pt x="4655464" y="2493288"/>
+                  </a:lnTo>
+                  <a:lnTo>
+                    <a:pt x="4727086" y="2543491"/>
+                  </a:lnTo>
+                  <a:lnTo>
+                    <a:pt x="4798709" y="2591149"/>
+                  </a:lnTo>
+                  <a:lnTo>
+                    <a:pt x="4870331" y="2636392"/>
+                  </a:lnTo>
+                  <a:lnTo>
+                    <a:pt x="4941954" y="2656995"/>
+                  </a:lnTo>
+                  <a:lnTo>
+                    <a:pt x="5013576" y="2661574"/>
+                  </a:lnTo>
+                  <a:lnTo>
+                    <a:pt x="5085199" y="2666128"/>
+                  </a:lnTo>
+                  <a:lnTo>
+                    <a:pt x="5156821" y="2670656"/>
+                  </a:lnTo>
+                  <a:lnTo>
+                    <a:pt x="5228444" y="2675159"/>
+                  </a:lnTo>
+                  <a:lnTo>
+                    <a:pt x="5300066" y="2679637"/>
+                  </a:lnTo>
+                  <a:lnTo>
+                    <a:pt x="5371689" y="2684091"/>
+                  </a:lnTo>
+                  <a:lnTo>
+                    <a:pt x="5443311" y="2688520"/>
+                  </a:lnTo>
+                  <a:lnTo>
+                    <a:pt x="5514934" y="2692924"/>
+                  </a:lnTo>
+                  <a:lnTo>
+                    <a:pt x="5586557" y="2697304"/>
+                  </a:lnTo>
+                  <a:lnTo>
+                    <a:pt x="5658179" y="2701659"/>
+                  </a:lnTo>
+                  <a:lnTo>
+                    <a:pt x="5729802" y="2705991"/>
+                  </a:lnTo>
+                  <a:lnTo>
+                    <a:pt x="5801424" y="2710299"/>
+                  </a:lnTo>
+                  <a:lnTo>
+                    <a:pt x="5873047" y="2714582"/>
+                  </a:lnTo>
+                  <a:lnTo>
+                    <a:pt x="5944669" y="2718842"/>
+                  </a:lnTo>
+                  <a:lnTo>
+                    <a:pt x="6016292" y="2723078"/>
+                  </a:lnTo>
+                  <a:lnTo>
+                    <a:pt x="6087914" y="2727291"/>
+                  </a:lnTo>
+                  <a:lnTo>
+                    <a:pt x="6159537" y="2731481"/>
+                  </a:lnTo>
+                  <a:lnTo>
+                    <a:pt x="6231159" y="2735647"/>
+                  </a:lnTo>
+                  <a:lnTo>
+                    <a:pt x="6302782" y="2739791"/>
+                  </a:lnTo>
+                  <a:lnTo>
+                    <a:pt x="6374404" y="2743911"/>
+                  </a:lnTo>
+                  <a:lnTo>
+                    <a:pt x="6446027" y="2748008"/>
+                  </a:lnTo>
+                  <a:lnTo>
+                    <a:pt x="6517649" y="2752083"/>
+                  </a:lnTo>
+                  <a:lnTo>
+                    <a:pt x="6589272" y="2756135"/>
+                  </a:lnTo>
+                  <a:lnTo>
+                    <a:pt x="6660894" y="2760165"/>
+                  </a:lnTo>
+                  <a:lnTo>
+                    <a:pt x="6732517" y="2764173"/>
+                  </a:lnTo>
+                  <a:lnTo>
+                    <a:pt x="6804139" y="2768158"/>
+                  </a:lnTo>
+                  <a:lnTo>
+                    <a:pt x="6875762" y="2772121"/>
+                  </a:lnTo>
+                  <a:lnTo>
+                    <a:pt x="6947385" y="2776063"/>
+                  </a:lnTo>
+                  <a:lnTo>
+                    <a:pt x="7019007" y="2779982"/>
+                  </a:lnTo>
+                  <a:lnTo>
+                    <a:pt x="7090630" y="2783880"/>
+                  </a:lnTo>
+                  <a:lnTo>
+                    <a:pt x="7090630" y="3314793"/>
+                  </a:lnTo>
+                  <a:lnTo>
+                    <a:pt x="7019007" y="3305772"/>
+                  </a:lnTo>
+                  <a:lnTo>
+                    <a:pt x="6947385" y="3296270"/>
+                  </a:lnTo>
+                  <a:lnTo>
+                    <a:pt x="6875762" y="3286260"/>
+                  </a:lnTo>
+                  <a:lnTo>
+                    <a:pt x="6804139" y="3275716"/>
+                  </a:lnTo>
+                  <a:lnTo>
+                    <a:pt x="6732517" y="3264608"/>
+                  </a:lnTo>
+                  <a:lnTo>
+                    <a:pt x="6660894" y="3252908"/>
+                  </a:lnTo>
+                  <a:lnTo>
+                    <a:pt x="6589272" y="3240583"/>
+                  </a:lnTo>
+                  <a:lnTo>
+                    <a:pt x="6517649" y="3227600"/>
+                  </a:lnTo>
+                  <a:lnTo>
+                    <a:pt x="6446027" y="3213924"/>
+                  </a:lnTo>
+                  <a:lnTo>
+                    <a:pt x="6374404" y="3199517"/>
+                  </a:lnTo>
+                  <a:lnTo>
+                    <a:pt x="6302782" y="3184341"/>
+                  </a:lnTo>
+                  <a:lnTo>
+                    <a:pt x="6231159" y="3168355"/>
+                  </a:lnTo>
+                  <a:lnTo>
+                    <a:pt x="6159537" y="3151516"/>
+                  </a:lnTo>
+                  <a:lnTo>
+                    <a:pt x="6087914" y="3133777"/>
+                  </a:lnTo>
+                  <a:lnTo>
+                    <a:pt x="6016292" y="3115091"/>
+                  </a:lnTo>
+                  <a:lnTo>
+                    <a:pt x="5944669" y="3095408"/>
+                  </a:lnTo>
+                  <a:lnTo>
+                    <a:pt x="5873047" y="3074673"/>
+                  </a:lnTo>
+                  <a:lnTo>
+                    <a:pt x="5801424" y="3052832"/>
+                  </a:lnTo>
+                  <a:lnTo>
+                    <a:pt x="5729802" y="3029824"/>
+                  </a:lnTo>
+                  <a:lnTo>
+                    <a:pt x="5658179" y="3005588"/>
+                  </a:lnTo>
+                  <a:lnTo>
+                    <a:pt x="5586557" y="2980058"/>
+                  </a:lnTo>
+                  <a:lnTo>
+                    <a:pt x="5514934" y="2953164"/>
+                  </a:lnTo>
+                  <a:lnTo>
+                    <a:pt x="5443311" y="2924835"/>
+                  </a:lnTo>
+                  <a:lnTo>
+                    <a:pt x="5371689" y="2894993"/>
+                  </a:lnTo>
+                  <a:lnTo>
+                    <a:pt x="5300066" y="2863558"/>
+                  </a:lnTo>
+                  <a:lnTo>
+                    <a:pt x="5228444" y="2830445"/>
+                  </a:lnTo>
+                  <a:lnTo>
+                    <a:pt x="5156821" y="2795563"/>
+                  </a:lnTo>
+                  <a:lnTo>
+                    <a:pt x="5085199" y="2758819"/>
+                  </a:lnTo>
+                  <a:lnTo>
+                    <a:pt x="5013576" y="2720113"/>
+                  </a:lnTo>
+                  <a:lnTo>
+                    <a:pt x="4941954" y="2679341"/>
+                  </a:lnTo>
+                  <a:lnTo>
+                    <a:pt x="4870331" y="2652391"/>
+                  </a:lnTo>
+                  <a:lnTo>
+                    <a:pt x="4798709" y="2647761"/>
+                  </a:lnTo>
+                  <a:lnTo>
+                    <a:pt x="4727086" y="2643105"/>
+                  </a:lnTo>
+                  <a:lnTo>
+                    <a:pt x="4655464" y="2638423"/>
+                  </a:lnTo>
+                  <a:lnTo>
+                    <a:pt x="4583841" y="2633715"/>
+                  </a:lnTo>
+                  <a:lnTo>
+                    <a:pt x="4512219" y="2628981"/>
+                  </a:lnTo>
+                  <a:lnTo>
+                    <a:pt x="4440596" y="2624221"/>
+                  </a:lnTo>
+                  <a:lnTo>
+                    <a:pt x="4368974" y="2619434"/>
+                  </a:lnTo>
+                  <a:lnTo>
+                    <a:pt x="4297351" y="2614620"/>
+                  </a:lnTo>
+                  <a:lnTo>
+                    <a:pt x="4225729" y="2609780"/>
+                  </a:lnTo>
+                  <a:lnTo>
+                    <a:pt x="4154106" y="2604913"/>
+                  </a:lnTo>
+                  <a:lnTo>
+                    <a:pt x="4082483" y="2600018"/>
+                  </a:lnTo>
+                  <a:lnTo>
+                    <a:pt x="4010861" y="2595097"/>
+                  </a:lnTo>
+                  <a:lnTo>
+                    <a:pt x="3939238" y="2590147"/>
+                  </a:lnTo>
+                  <a:lnTo>
+                    <a:pt x="3867616" y="2585171"/>
+                  </a:lnTo>
+                  <a:lnTo>
+                    <a:pt x="3795993" y="2580166"/>
+                  </a:lnTo>
+                  <a:lnTo>
+                    <a:pt x="3724371" y="2575134"/>
+                  </a:lnTo>
+                  <a:lnTo>
+                    <a:pt x="3652748" y="2570074"/>
+                  </a:lnTo>
+                  <a:lnTo>
+                    <a:pt x="3581126" y="2564985"/>
+                  </a:lnTo>
+                  <a:lnTo>
+                    <a:pt x="3509503" y="2559869"/>
+                  </a:lnTo>
+                  <a:lnTo>
+                    <a:pt x="3437881" y="2554723"/>
+                  </a:lnTo>
+                  <a:lnTo>
+                    <a:pt x="3366258" y="2549549"/>
+                  </a:lnTo>
+                  <a:lnTo>
+                    <a:pt x="3294636" y="2544346"/>
+                  </a:lnTo>
+                  <a:lnTo>
+                    <a:pt x="3223013" y="2539115"/>
+                  </a:lnTo>
+                  <a:lnTo>
+                    <a:pt x="3151391" y="2533854"/>
+                  </a:lnTo>
+                  <a:lnTo>
+                    <a:pt x="3079768" y="2528564"/>
+                  </a:lnTo>
+                  <a:lnTo>
+                    <a:pt x="3008146" y="2523244"/>
+                  </a:lnTo>
+                  <a:lnTo>
+                    <a:pt x="2936523" y="2517895"/>
+                  </a:lnTo>
+                  <a:lnTo>
+                    <a:pt x="2864901" y="2512516"/>
+                  </a:lnTo>
+                  <a:lnTo>
+                    <a:pt x="2793278" y="2507107"/>
+                  </a:lnTo>
+                  <a:lnTo>
+                    <a:pt x="2721655" y="2501667"/>
+                  </a:lnTo>
+                  <a:lnTo>
+                    <a:pt x="2650033" y="2496198"/>
+                  </a:lnTo>
+                  <a:lnTo>
+                    <a:pt x="2578410" y="2490698"/>
+                  </a:lnTo>
+                  <a:lnTo>
+                    <a:pt x="2506788" y="2485168"/>
+                  </a:lnTo>
+                  <a:lnTo>
+                    <a:pt x="2435165" y="2479606"/>
+                  </a:lnTo>
+                  <a:lnTo>
+                    <a:pt x="2363543" y="2474014"/>
+                  </a:lnTo>
+                  <a:lnTo>
+                    <a:pt x="2291920" y="2468390"/>
+                  </a:lnTo>
+                  <a:lnTo>
+                    <a:pt x="2220298" y="2462736"/>
+                  </a:lnTo>
+                  <a:lnTo>
+                    <a:pt x="2148675" y="2457049"/>
+                  </a:lnTo>
+                  <a:lnTo>
+                    <a:pt x="2077053" y="2451332"/>
+                  </a:lnTo>
+                  <a:lnTo>
+                    <a:pt x="2005430" y="2445582"/>
+                  </a:lnTo>
+                  <a:lnTo>
+                    <a:pt x="1933808" y="2439800"/>
+                  </a:lnTo>
+                  <a:lnTo>
+                    <a:pt x="1862185" y="2433986"/>
+                  </a:lnTo>
+                  <a:lnTo>
+                    <a:pt x="1790563" y="2428140"/>
+                  </a:lnTo>
+                  <a:lnTo>
+                    <a:pt x="1718940" y="2422261"/>
+                  </a:lnTo>
+                  <a:lnTo>
+                    <a:pt x="1647318" y="2416349"/>
+                  </a:lnTo>
+                  <a:lnTo>
+                    <a:pt x="1575695" y="2410404"/>
+                  </a:lnTo>
+                  <a:lnTo>
+                    <a:pt x="1504073" y="2404427"/>
+                  </a:lnTo>
+                  <a:lnTo>
+                    <a:pt x="1432450" y="2398416"/>
+                  </a:lnTo>
+                  <a:lnTo>
+                    <a:pt x="1360827" y="2392371"/>
+                  </a:lnTo>
+                  <a:lnTo>
+                    <a:pt x="1289205" y="2386293"/>
+                  </a:lnTo>
+                  <a:lnTo>
+                    <a:pt x="1217582" y="2380181"/>
+                  </a:lnTo>
+                  <a:lnTo>
+                    <a:pt x="1145960" y="2374035"/>
+                  </a:lnTo>
+                  <a:lnTo>
+                    <a:pt x="1074337" y="2367855"/>
+                  </a:lnTo>
+                  <a:lnTo>
+                    <a:pt x="1002715" y="2361640"/>
+                  </a:lnTo>
+                  <a:lnTo>
+                    <a:pt x="931092" y="2355391"/>
+                  </a:lnTo>
+                  <a:lnTo>
+                    <a:pt x="859470" y="2349107"/>
+                  </a:lnTo>
+                  <a:lnTo>
+                    <a:pt x="787847" y="2342788"/>
+                  </a:lnTo>
+                  <a:lnTo>
+                    <a:pt x="716225" y="2336433"/>
+                  </a:lnTo>
+                  <a:lnTo>
+                    <a:pt x="644602" y="2330044"/>
+                  </a:lnTo>
+                  <a:lnTo>
+                    <a:pt x="572980" y="2323618"/>
+                  </a:lnTo>
+                  <a:lnTo>
+                    <a:pt x="501357" y="2317157"/>
+                  </a:lnTo>
+                  <a:lnTo>
+                    <a:pt x="429735" y="2310660"/>
+                  </a:lnTo>
+                  <a:lnTo>
+                    <a:pt x="358112" y="2304127"/>
+                  </a:lnTo>
+                  <a:lnTo>
+                    <a:pt x="286490" y="2297557"/>
+                  </a:lnTo>
+                  <a:lnTo>
+                    <a:pt x="214867" y="2290951"/>
+                  </a:lnTo>
+                  <a:lnTo>
+                    <a:pt x="143245" y="2284308"/>
+                  </a:lnTo>
+                  <a:lnTo>
+                    <a:pt x="71622" y="2277628"/>
+                  </a:lnTo>
+                  <a:lnTo>
+                    <a:pt x="0" y="2270911"/>
                   </a:lnTo>
                   <a:close/>
                 </a:path>
@@ -3516,195 +3513,192 @@
           </p:nvSpPr>
           <p:spPr>
             <a:xfrm>
-              <a:off x="3975339" y="2073503"/>
-              <a:ext cx="4287340" cy="2780804"/>
+              <a:off x="4096026" y="2073503"/>
+              <a:ext cx="4166653" cy="2783880"/>
             </a:xfrm>
             <a:custGeom>
               <a:avLst/>
               <a:pathLst>
-                <a:path w="4287340" h="2780804">
+                <a:path w="4166653" h="2783880">
                   <a:moveTo>
                     <a:pt x="0" y="0"/>
                   </a:moveTo>
                   <a:lnTo>
-                    <a:pt x="61611" y="144335"/>
-                  </a:lnTo>
-                  <a:lnTo>
-                    <a:pt x="133233" y="304096"/>
-                  </a:lnTo>
-                  <a:lnTo>
-                    <a:pt x="204856" y="456215"/>
-                  </a:lnTo>
-                  <a:lnTo>
-                    <a:pt x="276478" y="601056"/>
-                  </a:lnTo>
-                  <a:lnTo>
-                    <a:pt x="348101" y="738967"/>
-                  </a:lnTo>
-                  <a:lnTo>
-                    <a:pt x="419723" y="870281"/>
-                  </a:lnTo>
-                  <a:lnTo>
-                    <a:pt x="491346" y="995312"/>
-                  </a:lnTo>
-                  <a:lnTo>
-                    <a:pt x="562968" y="1114362"/>
-                  </a:lnTo>
-                  <a:lnTo>
-                    <a:pt x="634591" y="1227716"/>
-                  </a:lnTo>
-                  <a:lnTo>
-                    <a:pt x="706213" y="1335648"/>
-                  </a:lnTo>
-                  <a:lnTo>
-                    <a:pt x="777836" y="1438415"/>
-                  </a:lnTo>
-                  <a:lnTo>
-                    <a:pt x="849458" y="1536267"/>
-                  </a:lnTo>
-                  <a:lnTo>
-                    <a:pt x="921081" y="1629436"/>
-                  </a:lnTo>
-                  <a:lnTo>
-                    <a:pt x="992703" y="1718149"/>
-                  </a:lnTo>
-                  <a:lnTo>
-                    <a:pt x="1064326" y="1802617"/>
-                  </a:lnTo>
-                  <a:lnTo>
-                    <a:pt x="1135948" y="1883045"/>
-                  </a:lnTo>
-                  <a:lnTo>
-                    <a:pt x="1207571" y="1959624"/>
-                  </a:lnTo>
-                  <a:lnTo>
-                    <a:pt x="1279194" y="2032540"/>
-                  </a:lnTo>
-                  <a:lnTo>
-                    <a:pt x="1350816" y="2101968"/>
-                  </a:lnTo>
-                  <a:lnTo>
-                    <a:pt x="1422439" y="2168074"/>
-                  </a:lnTo>
-                  <a:lnTo>
-                    <a:pt x="1494061" y="2231017"/>
-                  </a:lnTo>
-                  <a:lnTo>
-                    <a:pt x="1565684" y="2290949"/>
-                  </a:lnTo>
-                  <a:lnTo>
-                    <a:pt x="1637306" y="2348014"/>
-                  </a:lnTo>
-                  <a:lnTo>
-                    <a:pt x="1708929" y="2402349"/>
-                  </a:lnTo>
-                  <a:lnTo>
-                    <a:pt x="1780551" y="2454084"/>
-                  </a:lnTo>
-                  <a:lnTo>
-                    <a:pt x="1852174" y="2503345"/>
-                  </a:lnTo>
-                  <a:lnTo>
-                    <a:pt x="1923796" y="2550248"/>
-                  </a:lnTo>
-                  <a:lnTo>
-                    <a:pt x="1995419" y="2594908"/>
-                  </a:lnTo>
-                  <a:lnTo>
-                    <a:pt x="2067041" y="2637431"/>
-                  </a:lnTo>
-                  <a:lnTo>
-                    <a:pt x="2138664" y="2656925"/>
-                  </a:lnTo>
-                  <a:lnTo>
-                    <a:pt x="2210286" y="2661387"/>
-                  </a:lnTo>
-                  <a:lnTo>
-                    <a:pt x="2281909" y="2665824"/>
-                  </a:lnTo>
-                  <a:lnTo>
-                    <a:pt x="2353531" y="2670237"/>
-                  </a:lnTo>
-                  <a:lnTo>
-                    <a:pt x="2425154" y="2674627"/>
-                  </a:lnTo>
-                  <a:lnTo>
-                    <a:pt x="2496776" y="2678993"/>
-                  </a:lnTo>
-                  <a:lnTo>
-                    <a:pt x="2568399" y="2683335"/>
-                  </a:lnTo>
-                  <a:lnTo>
-                    <a:pt x="2640022" y="2687654"/>
-                  </a:lnTo>
-                  <a:lnTo>
-                    <a:pt x="2711644" y="2691950"/>
-                  </a:lnTo>
-                  <a:lnTo>
-                    <a:pt x="2783267" y="2696222"/>
-                  </a:lnTo>
-                  <a:lnTo>
-                    <a:pt x="2854889" y="2700471"/>
-                  </a:lnTo>
-                  <a:lnTo>
-                    <a:pt x="2926512" y="2704698"/>
-                  </a:lnTo>
-                  <a:lnTo>
-                    <a:pt x="2998134" y="2708901"/>
-                  </a:lnTo>
-                  <a:lnTo>
-                    <a:pt x="3069757" y="2713082"/>
-                  </a:lnTo>
-                  <a:lnTo>
-                    <a:pt x="3141379" y="2717241"/>
-                  </a:lnTo>
-                  <a:lnTo>
-                    <a:pt x="3213002" y="2721377"/>
-                  </a:lnTo>
-                  <a:lnTo>
-                    <a:pt x="3284624" y="2725490"/>
-                  </a:lnTo>
-                  <a:lnTo>
-                    <a:pt x="3356247" y="2729582"/>
-                  </a:lnTo>
-                  <a:lnTo>
-                    <a:pt x="3427869" y="2733651"/>
-                  </a:lnTo>
-                  <a:lnTo>
-                    <a:pt x="3499492" y="2737698"/>
-                  </a:lnTo>
-                  <a:lnTo>
-                    <a:pt x="3571114" y="2741724"/>
-                  </a:lnTo>
-                  <a:lnTo>
-                    <a:pt x="3642737" y="2745728"/>
-                  </a:lnTo>
-                  <a:lnTo>
-                    <a:pt x="3714359" y="2749710"/>
-                  </a:lnTo>
-                  <a:lnTo>
-                    <a:pt x="3785982" y="2753671"/>
-                  </a:lnTo>
-                  <a:lnTo>
-                    <a:pt x="3857604" y="2757610"/>
-                  </a:lnTo>
-                  <a:lnTo>
-                    <a:pt x="3929227" y="2761528"/>
-                  </a:lnTo>
-                  <a:lnTo>
-                    <a:pt x="4000850" y="2765425"/>
-                  </a:lnTo>
-                  <a:lnTo>
-                    <a:pt x="4072472" y="2769301"/>
-                  </a:lnTo>
-                  <a:lnTo>
-                    <a:pt x="4144095" y="2773156"/>
-                  </a:lnTo>
-                  <a:lnTo>
-                    <a:pt x="4215717" y="2776990"/>
-                  </a:lnTo>
-                  <a:lnTo>
-                    <a:pt x="4287340" y="2780804"/>
+                    <a:pt x="12546" y="32282"/>
+                  </a:lnTo>
+                  <a:lnTo>
+                    <a:pt x="84169" y="207224"/>
+                  </a:lnTo>
+                  <a:lnTo>
+                    <a:pt x="155791" y="373299"/>
+                  </a:lnTo>
+                  <a:lnTo>
+                    <a:pt x="227414" y="530957"/>
+                  </a:lnTo>
+                  <a:lnTo>
+                    <a:pt x="299036" y="680623"/>
+                  </a:lnTo>
+                  <a:lnTo>
+                    <a:pt x="370659" y="822703"/>
+                  </a:lnTo>
+                  <a:lnTo>
+                    <a:pt x="442281" y="957582"/>
+                  </a:lnTo>
+                  <a:lnTo>
+                    <a:pt x="513904" y="1085624"/>
+                  </a:lnTo>
+                  <a:lnTo>
+                    <a:pt x="585526" y="1207176"/>
+                  </a:lnTo>
+                  <a:lnTo>
+                    <a:pt x="657149" y="1322568"/>
+                  </a:lnTo>
+                  <a:lnTo>
+                    <a:pt x="728772" y="1432110"/>
+                  </a:lnTo>
+                  <a:lnTo>
+                    <a:pt x="800394" y="1536100"/>
+                  </a:lnTo>
+                  <a:lnTo>
+                    <a:pt x="872017" y="1634819"/>
+                  </a:lnTo>
+                  <a:lnTo>
+                    <a:pt x="943639" y="1728535"/>
+                  </a:lnTo>
+                  <a:lnTo>
+                    <a:pt x="1015262" y="1817500"/>
+                  </a:lnTo>
+                  <a:lnTo>
+                    <a:pt x="1086884" y="1901956"/>
+                  </a:lnTo>
+                  <a:lnTo>
+                    <a:pt x="1158507" y="1982131"/>
+                  </a:lnTo>
+                  <a:lnTo>
+                    <a:pt x="1230129" y="2058243"/>
+                  </a:lnTo>
+                  <a:lnTo>
+                    <a:pt x="1301752" y="2130496"/>
+                  </a:lnTo>
+                  <a:lnTo>
+                    <a:pt x="1373374" y="2199088"/>
+                  </a:lnTo>
+                  <a:lnTo>
+                    <a:pt x="1444997" y="2264203"/>
+                  </a:lnTo>
+                  <a:lnTo>
+                    <a:pt x="1516619" y="2326017"/>
+                  </a:lnTo>
+                  <a:lnTo>
+                    <a:pt x="1588242" y="2384698"/>
+                  </a:lnTo>
+                  <a:lnTo>
+                    <a:pt x="1659864" y="2440405"/>
+                  </a:lnTo>
+                  <a:lnTo>
+                    <a:pt x="1731487" y="2493288"/>
+                  </a:lnTo>
+                  <a:lnTo>
+                    <a:pt x="1803109" y="2543491"/>
+                  </a:lnTo>
+                  <a:lnTo>
+                    <a:pt x="1874732" y="2591149"/>
+                  </a:lnTo>
+                  <a:lnTo>
+                    <a:pt x="1946354" y="2636392"/>
+                  </a:lnTo>
+                  <a:lnTo>
+                    <a:pt x="2017977" y="2656995"/>
+                  </a:lnTo>
+                  <a:lnTo>
+                    <a:pt x="2089600" y="2661574"/>
+                  </a:lnTo>
+                  <a:lnTo>
+                    <a:pt x="2161222" y="2666128"/>
+                  </a:lnTo>
+                  <a:lnTo>
+                    <a:pt x="2232845" y="2670656"/>
+                  </a:lnTo>
+                  <a:lnTo>
+                    <a:pt x="2304467" y="2675159"/>
+                  </a:lnTo>
+                  <a:lnTo>
+                    <a:pt x="2376090" y="2679637"/>
+                  </a:lnTo>
+                  <a:lnTo>
+                    <a:pt x="2447712" y="2684091"/>
+                  </a:lnTo>
+                  <a:lnTo>
+                    <a:pt x="2519335" y="2688520"/>
+                  </a:lnTo>
+                  <a:lnTo>
+                    <a:pt x="2590957" y="2692924"/>
+                  </a:lnTo>
+                  <a:lnTo>
+                    <a:pt x="2662580" y="2697304"/>
+                  </a:lnTo>
+                  <a:lnTo>
+                    <a:pt x="2734202" y="2701659"/>
+                  </a:lnTo>
+                  <a:lnTo>
+                    <a:pt x="2805825" y="2705991"/>
+                  </a:lnTo>
+                  <a:lnTo>
+                    <a:pt x="2877447" y="2710299"/>
+                  </a:lnTo>
+                  <a:lnTo>
+                    <a:pt x="2949070" y="2714582"/>
+                  </a:lnTo>
+                  <a:lnTo>
+                    <a:pt x="3020692" y="2718842"/>
+                  </a:lnTo>
+                  <a:lnTo>
+                    <a:pt x="3092315" y="2723078"/>
+                  </a:lnTo>
+                  <a:lnTo>
+                    <a:pt x="3163937" y="2727291"/>
+                  </a:lnTo>
+                  <a:lnTo>
+                    <a:pt x="3235560" y="2731481"/>
+                  </a:lnTo>
+                  <a:lnTo>
+                    <a:pt x="3307182" y="2735647"/>
+                  </a:lnTo>
+                  <a:lnTo>
+                    <a:pt x="3378805" y="2739791"/>
+                  </a:lnTo>
+                  <a:lnTo>
+                    <a:pt x="3450428" y="2743911"/>
+                  </a:lnTo>
+                  <a:lnTo>
+                    <a:pt x="3522050" y="2748008"/>
+                  </a:lnTo>
+                  <a:lnTo>
+                    <a:pt x="3593673" y="2752083"/>
+                  </a:lnTo>
+                  <a:lnTo>
+                    <a:pt x="3665295" y="2756135"/>
+                  </a:lnTo>
+                  <a:lnTo>
+                    <a:pt x="3736918" y="2760165"/>
+                  </a:lnTo>
+                  <a:lnTo>
+                    <a:pt x="3808540" y="2764173"/>
+                  </a:lnTo>
+                  <a:lnTo>
+                    <a:pt x="3880163" y="2768158"/>
+                  </a:lnTo>
+                  <a:lnTo>
+                    <a:pt x="3951785" y="2772121"/>
+                  </a:lnTo>
+                  <a:lnTo>
+                    <a:pt x="4023408" y="2776063"/>
+                  </a:lnTo>
+                  <a:lnTo>
+                    <a:pt x="4095030" y="2779982"/>
+                  </a:lnTo>
+                  <a:lnTo>
+                    <a:pt x="4166653" y="2783880"/>
                   </a:lnTo>
                 </a:path>
               </a:pathLst>
@@ -3724,309 +3718,309 @@
           </p:nvSpPr>
           <p:spPr>
             <a:xfrm>
-              <a:off x="1172049" y="4356250"/>
-              <a:ext cx="7090630" cy="1015849"/>
+              <a:off x="1172049" y="4344414"/>
+              <a:ext cx="7090630" cy="1043882"/>
             </a:xfrm>
             <a:custGeom>
               <a:avLst/>
               <a:pathLst>
-                <a:path w="7090630" h="1015849">
+                <a:path w="7090630" h="1043882">
                   <a:moveTo>
-                    <a:pt x="7090630" y="1015849"/>
+                    <a:pt x="7090630" y="1043882"/>
                   </a:moveTo>
                   <a:lnTo>
-                    <a:pt x="7019007" y="1006546"/>
-                  </a:lnTo>
-                  <a:lnTo>
-                    <a:pt x="6947385" y="996776"/>
-                  </a:lnTo>
-                  <a:lnTo>
-                    <a:pt x="6875762" y="986515"/>
-                  </a:lnTo>
-                  <a:lnTo>
-                    <a:pt x="6804139" y="975738"/>
-                  </a:lnTo>
-                  <a:lnTo>
-                    <a:pt x="6732517" y="964420"/>
-                  </a:lnTo>
-                  <a:lnTo>
-                    <a:pt x="6660894" y="952533"/>
-                  </a:lnTo>
-                  <a:lnTo>
-                    <a:pt x="6589272" y="940049"/>
-                  </a:lnTo>
-                  <a:lnTo>
-                    <a:pt x="6517649" y="926937"/>
-                  </a:lnTo>
-                  <a:lnTo>
-                    <a:pt x="6446027" y="913167"/>
-                  </a:lnTo>
-                  <a:lnTo>
-                    <a:pt x="6374404" y="898705"/>
-                  </a:lnTo>
-                  <a:lnTo>
-                    <a:pt x="6302782" y="883516"/>
-                  </a:lnTo>
-                  <a:lnTo>
-                    <a:pt x="6231159" y="867564"/>
-                  </a:lnTo>
-                  <a:lnTo>
-                    <a:pt x="6159537" y="850811"/>
-                  </a:lnTo>
-                  <a:lnTo>
-                    <a:pt x="6087914" y="833216"/>
-                  </a:lnTo>
-                  <a:lnTo>
-                    <a:pt x="6016292" y="814737"/>
-                  </a:lnTo>
-                  <a:lnTo>
-                    <a:pt x="5944669" y="795329"/>
-                  </a:lnTo>
-                  <a:lnTo>
-                    <a:pt x="5873047" y="774946"/>
-                  </a:lnTo>
-                  <a:lnTo>
-                    <a:pt x="5801424" y="753539"/>
-                  </a:lnTo>
-                  <a:lnTo>
-                    <a:pt x="5729802" y="731056"/>
-                  </a:lnTo>
-                  <a:lnTo>
-                    <a:pt x="5658179" y="707444"/>
-                  </a:lnTo>
-                  <a:lnTo>
-                    <a:pt x="5586557" y="682645"/>
-                  </a:lnTo>
-                  <a:lnTo>
-                    <a:pt x="5514934" y="656601"/>
-                  </a:lnTo>
-                  <a:lnTo>
-                    <a:pt x="5443311" y="629247"/>
-                  </a:lnTo>
-                  <a:lnTo>
-                    <a:pt x="5371689" y="600520"/>
-                  </a:lnTo>
-                  <a:lnTo>
-                    <a:pt x="5300066" y="570349"/>
-                  </a:lnTo>
-                  <a:lnTo>
-                    <a:pt x="5228444" y="538662"/>
-                  </a:lnTo>
-                  <a:lnTo>
-                    <a:pt x="5156821" y="505382"/>
-                  </a:lnTo>
-                  <a:lnTo>
-                    <a:pt x="5085199" y="470431"/>
-                  </a:lnTo>
-                  <a:lnTo>
-                    <a:pt x="5013576" y="433724"/>
-                  </a:lnTo>
-                  <a:lnTo>
-                    <a:pt x="4941954" y="395172"/>
-                  </a:lnTo>
-                  <a:lnTo>
-                    <a:pt x="4870331" y="369692"/>
-                  </a:lnTo>
-                  <a:lnTo>
-                    <a:pt x="4798709" y="365182"/>
-                  </a:lnTo>
-                  <a:lnTo>
-                    <a:pt x="4727086" y="360647"/>
-                  </a:lnTo>
-                  <a:lnTo>
-                    <a:pt x="4655464" y="356088"/>
-                  </a:lnTo>
-                  <a:lnTo>
-                    <a:pt x="4583841" y="351505"/>
-                  </a:lnTo>
-                  <a:lnTo>
-                    <a:pt x="4512219" y="346896"/>
-                  </a:lnTo>
-                  <a:lnTo>
-                    <a:pt x="4440596" y="342262"/>
-                  </a:lnTo>
-                  <a:lnTo>
-                    <a:pt x="4368974" y="337604"/>
-                  </a:lnTo>
-                  <a:lnTo>
-                    <a:pt x="4297351" y="332920"/>
-                  </a:lnTo>
-                  <a:lnTo>
-                    <a:pt x="4225729" y="328210"/>
-                  </a:lnTo>
-                  <a:lnTo>
-                    <a:pt x="4154106" y="323475"/>
-                  </a:lnTo>
-                  <a:lnTo>
-                    <a:pt x="4082483" y="318715"/>
-                  </a:lnTo>
-                  <a:lnTo>
-                    <a:pt x="4010861" y="313928"/>
-                  </a:lnTo>
-                  <a:lnTo>
-                    <a:pt x="3939238" y="309116"/>
-                  </a:lnTo>
-                  <a:lnTo>
-                    <a:pt x="3867616" y="304277"/>
-                  </a:lnTo>
-                  <a:lnTo>
-                    <a:pt x="3795993" y="299412"/>
-                  </a:lnTo>
-                  <a:lnTo>
-                    <a:pt x="3724371" y="294521"/>
-                  </a:lnTo>
-                  <a:lnTo>
-                    <a:pt x="3652748" y="289603"/>
-                  </a:lnTo>
-                  <a:lnTo>
-                    <a:pt x="3581126" y="284659"/>
-                  </a:lnTo>
-                  <a:lnTo>
-                    <a:pt x="3509503" y="279688"/>
-                  </a:lnTo>
-                  <a:lnTo>
-                    <a:pt x="3437881" y="274690"/>
-                  </a:lnTo>
-                  <a:lnTo>
-                    <a:pt x="3366258" y="269664"/>
-                  </a:lnTo>
-                  <a:lnTo>
-                    <a:pt x="3294636" y="264612"/>
-                  </a:lnTo>
-                  <a:lnTo>
-                    <a:pt x="3223013" y="259532"/>
-                  </a:lnTo>
-                  <a:lnTo>
-                    <a:pt x="3151391" y="254424"/>
-                  </a:lnTo>
-                  <a:lnTo>
-                    <a:pt x="3079768" y="249289"/>
-                  </a:lnTo>
-                  <a:lnTo>
-                    <a:pt x="3008146" y="244126"/>
-                  </a:lnTo>
-                  <a:lnTo>
-                    <a:pt x="2936523" y="238935"/>
-                  </a:lnTo>
-                  <a:lnTo>
-                    <a:pt x="2864901" y="233715"/>
-                  </a:lnTo>
-                  <a:lnTo>
-                    <a:pt x="2793278" y="228468"/>
-                  </a:lnTo>
-                  <a:lnTo>
-                    <a:pt x="2721655" y="223192"/>
-                  </a:lnTo>
-                  <a:lnTo>
-                    <a:pt x="2650033" y="217887"/>
-                  </a:lnTo>
-                  <a:lnTo>
-                    <a:pt x="2578410" y="212553"/>
-                  </a:lnTo>
-                  <a:lnTo>
-                    <a:pt x="2506788" y="207191"/>
-                  </a:lnTo>
-                  <a:lnTo>
-                    <a:pt x="2435165" y="201800"/>
-                  </a:lnTo>
-                  <a:lnTo>
-                    <a:pt x="2363543" y="196379"/>
-                  </a:lnTo>
-                  <a:lnTo>
-                    <a:pt x="2291920" y="190929"/>
-                  </a:lnTo>
-                  <a:lnTo>
-                    <a:pt x="2220298" y="185449"/>
-                  </a:lnTo>
-                  <a:lnTo>
-                    <a:pt x="2148675" y="179939"/>
-                  </a:lnTo>
-                  <a:lnTo>
-                    <a:pt x="2077053" y="174400"/>
-                  </a:lnTo>
-                  <a:lnTo>
-                    <a:pt x="2005430" y="168831"/>
-                  </a:lnTo>
-                  <a:lnTo>
-                    <a:pt x="1933808" y="163231"/>
-                  </a:lnTo>
-                  <a:lnTo>
-                    <a:pt x="1862185" y="157601"/>
-                  </a:lnTo>
-                  <a:lnTo>
-                    <a:pt x="1790563" y="151940"/>
-                  </a:lnTo>
-                  <a:lnTo>
-                    <a:pt x="1718940" y="146249"/>
-                  </a:lnTo>
-                  <a:lnTo>
-                    <a:pt x="1647318" y="140527"/>
-                  </a:lnTo>
-                  <a:lnTo>
-                    <a:pt x="1575695" y="134774"/>
-                  </a:lnTo>
-                  <a:lnTo>
-                    <a:pt x="1504073" y="128990"/>
-                  </a:lnTo>
-                  <a:lnTo>
-                    <a:pt x="1432450" y="123174"/>
-                  </a:lnTo>
-                  <a:lnTo>
-                    <a:pt x="1360827" y="117326"/>
-                  </a:lnTo>
-                  <a:lnTo>
-                    <a:pt x="1289205" y="111447"/>
-                  </a:lnTo>
-                  <a:lnTo>
-                    <a:pt x="1217582" y="105537"/>
-                  </a:lnTo>
-                  <a:lnTo>
-                    <a:pt x="1145960" y="99594"/>
-                  </a:lnTo>
-                  <a:lnTo>
-                    <a:pt x="1074337" y="93618"/>
-                  </a:lnTo>
-                  <a:lnTo>
-                    <a:pt x="1002715" y="87611"/>
-                  </a:lnTo>
-                  <a:lnTo>
-                    <a:pt x="931092" y="81570"/>
-                  </a:lnTo>
-                  <a:lnTo>
-                    <a:pt x="859470" y="75497"/>
-                  </a:lnTo>
-                  <a:lnTo>
-                    <a:pt x="787847" y="69391"/>
-                  </a:lnTo>
-                  <a:lnTo>
-                    <a:pt x="716225" y="63252"/>
-                  </a:lnTo>
-                  <a:lnTo>
-                    <a:pt x="644602" y="57080"/>
-                  </a:lnTo>
-                  <a:lnTo>
-                    <a:pt x="572980" y="50874"/>
-                  </a:lnTo>
-                  <a:lnTo>
-                    <a:pt x="501357" y="44634"/>
-                  </a:lnTo>
-                  <a:lnTo>
-                    <a:pt x="429735" y="38361"/>
-                  </a:lnTo>
-                  <a:lnTo>
-                    <a:pt x="358112" y="32054"/>
-                  </a:lnTo>
-                  <a:lnTo>
-                    <a:pt x="286490" y="25712"/>
-                  </a:lnTo>
-                  <a:lnTo>
-                    <a:pt x="214867" y="19336"/>
-                  </a:lnTo>
-                  <a:lnTo>
-                    <a:pt x="143245" y="12925"/>
-                  </a:lnTo>
-                  <a:lnTo>
-                    <a:pt x="71622" y="6480"/>
+                    <a:pt x="7019007" y="1034861"/>
+                  </a:lnTo>
+                  <a:lnTo>
+                    <a:pt x="6947385" y="1025358"/>
+                  </a:lnTo>
+                  <a:lnTo>
+                    <a:pt x="6875762" y="1015348"/>
+                  </a:lnTo>
+                  <a:lnTo>
+                    <a:pt x="6804139" y="1004804"/>
+                  </a:lnTo>
+                  <a:lnTo>
+                    <a:pt x="6732517" y="993697"/>
+                  </a:lnTo>
+                  <a:lnTo>
+                    <a:pt x="6660894" y="981996"/>
+                  </a:lnTo>
+                  <a:lnTo>
+                    <a:pt x="6589272" y="969671"/>
+                  </a:lnTo>
+                  <a:lnTo>
+                    <a:pt x="6517649" y="956688"/>
+                  </a:lnTo>
+                  <a:lnTo>
+                    <a:pt x="6446027" y="943012"/>
+                  </a:lnTo>
+                  <a:lnTo>
+                    <a:pt x="6374404" y="928605"/>
+                  </a:lnTo>
+                  <a:lnTo>
+                    <a:pt x="6302782" y="913430"/>
+                  </a:lnTo>
+                  <a:lnTo>
+                    <a:pt x="6231159" y="897443"/>
+                  </a:lnTo>
+                  <a:lnTo>
+                    <a:pt x="6159537" y="880604"/>
+                  </a:lnTo>
+                  <a:lnTo>
+                    <a:pt x="6087914" y="862865"/>
+                  </a:lnTo>
+                  <a:lnTo>
+                    <a:pt x="6016292" y="844179"/>
+                  </a:lnTo>
+                  <a:lnTo>
+                    <a:pt x="5944669" y="824496"/>
+                  </a:lnTo>
+                  <a:lnTo>
+                    <a:pt x="5873047" y="803761"/>
+                  </a:lnTo>
+                  <a:lnTo>
+                    <a:pt x="5801424" y="781920"/>
+                  </a:lnTo>
+                  <a:lnTo>
+                    <a:pt x="5729802" y="758912"/>
+                  </a:lnTo>
+                  <a:lnTo>
+                    <a:pt x="5658179" y="734676"/>
+                  </a:lnTo>
+                  <a:lnTo>
+                    <a:pt x="5586557" y="709146"/>
+                  </a:lnTo>
+                  <a:lnTo>
+                    <a:pt x="5514934" y="682253"/>
+                  </a:lnTo>
+                  <a:lnTo>
+                    <a:pt x="5443311" y="653923"/>
+                  </a:lnTo>
+                  <a:lnTo>
+                    <a:pt x="5371689" y="624082"/>
+                  </a:lnTo>
+                  <a:lnTo>
+                    <a:pt x="5300066" y="592646"/>
+                  </a:lnTo>
+                  <a:lnTo>
+                    <a:pt x="5228444" y="559533"/>
+                  </a:lnTo>
+                  <a:lnTo>
+                    <a:pt x="5156821" y="524651"/>
+                  </a:lnTo>
+                  <a:lnTo>
+                    <a:pt x="5085199" y="487907"/>
+                  </a:lnTo>
+                  <a:lnTo>
+                    <a:pt x="5013576" y="449202"/>
+                  </a:lnTo>
+                  <a:lnTo>
+                    <a:pt x="4941954" y="408429"/>
+                  </a:lnTo>
+                  <a:lnTo>
+                    <a:pt x="4870331" y="381479"/>
+                  </a:lnTo>
+                  <a:lnTo>
+                    <a:pt x="4798709" y="376849"/>
+                  </a:lnTo>
+                  <a:lnTo>
+                    <a:pt x="4727086" y="372193"/>
+                  </a:lnTo>
+                  <a:lnTo>
+                    <a:pt x="4655464" y="367512"/>
+                  </a:lnTo>
+                  <a:lnTo>
+                    <a:pt x="4583841" y="362804"/>
+                  </a:lnTo>
+                  <a:lnTo>
+                    <a:pt x="4512219" y="358070"/>
+                  </a:lnTo>
+                  <a:lnTo>
+                    <a:pt x="4440596" y="353309"/>
+                  </a:lnTo>
+                  <a:lnTo>
+                    <a:pt x="4368974" y="348522"/>
+                  </a:lnTo>
+                  <a:lnTo>
+                    <a:pt x="4297351" y="343709"/>
+                  </a:lnTo>
+                  <a:lnTo>
+                    <a:pt x="4225729" y="338868"/>
+                  </a:lnTo>
+                  <a:lnTo>
+                    <a:pt x="4154106" y="334001"/>
+                  </a:lnTo>
+                  <a:lnTo>
+                    <a:pt x="4082483" y="329107"/>
+                  </a:lnTo>
+                  <a:lnTo>
+                    <a:pt x="4010861" y="324185"/>
+                  </a:lnTo>
+                  <a:lnTo>
+                    <a:pt x="3939238" y="319236"/>
+                  </a:lnTo>
+                  <a:lnTo>
+                    <a:pt x="3867616" y="314259"/>
+                  </a:lnTo>
+                  <a:lnTo>
+                    <a:pt x="3795993" y="309255"/>
+                  </a:lnTo>
+                  <a:lnTo>
+                    <a:pt x="3724371" y="304222"/>
+                  </a:lnTo>
+                  <a:lnTo>
+                    <a:pt x="3652748" y="299162"/>
+                  </a:lnTo>
+                  <a:lnTo>
+                    <a:pt x="3581126" y="294074"/>
+                  </a:lnTo>
+                  <a:lnTo>
+                    <a:pt x="3509503" y="288957"/>
+                  </a:lnTo>
+                  <a:lnTo>
+                    <a:pt x="3437881" y="283812"/>
+                  </a:lnTo>
+                  <a:lnTo>
+                    <a:pt x="3366258" y="278638"/>
+                  </a:lnTo>
+                  <a:lnTo>
+                    <a:pt x="3294636" y="273435"/>
+                  </a:lnTo>
+                  <a:lnTo>
+                    <a:pt x="3223013" y="268203"/>
+                  </a:lnTo>
+                  <a:lnTo>
+                    <a:pt x="3151391" y="262942"/>
+                  </a:lnTo>
+                  <a:lnTo>
+                    <a:pt x="3079768" y="257652"/>
+                  </a:lnTo>
+                  <a:lnTo>
+                    <a:pt x="3008146" y="252332"/>
+                  </a:lnTo>
+                  <a:lnTo>
+                    <a:pt x="2936523" y="246983"/>
+                  </a:lnTo>
+                  <a:lnTo>
+                    <a:pt x="2864901" y="241604"/>
+                  </a:lnTo>
+                  <a:lnTo>
+                    <a:pt x="2793278" y="236195"/>
+                  </a:lnTo>
+                  <a:lnTo>
+                    <a:pt x="2721655" y="230756"/>
+                  </a:lnTo>
+                  <a:lnTo>
+                    <a:pt x="2650033" y="225286"/>
+                  </a:lnTo>
+                  <a:lnTo>
+                    <a:pt x="2578410" y="219786"/>
+                  </a:lnTo>
+                  <a:lnTo>
+                    <a:pt x="2506788" y="214256"/>
+                  </a:lnTo>
+                  <a:lnTo>
+                    <a:pt x="2435165" y="208695"/>
+                  </a:lnTo>
+                  <a:lnTo>
+                    <a:pt x="2363543" y="203102"/>
+                  </a:lnTo>
+                  <a:lnTo>
+                    <a:pt x="2291920" y="197479"/>
+                  </a:lnTo>
+                  <a:lnTo>
+                    <a:pt x="2220298" y="191824"/>
+                  </a:lnTo>
+                  <a:lnTo>
+                    <a:pt x="2148675" y="186138"/>
+                  </a:lnTo>
+                  <a:lnTo>
+                    <a:pt x="2077053" y="180420"/>
+                  </a:lnTo>
+                  <a:lnTo>
+                    <a:pt x="2005430" y="174670"/>
+                  </a:lnTo>
+                  <a:lnTo>
+                    <a:pt x="1933808" y="168888"/>
+                  </a:lnTo>
+                  <a:lnTo>
+                    <a:pt x="1862185" y="163074"/>
+                  </a:lnTo>
+                  <a:lnTo>
+                    <a:pt x="1790563" y="157228"/>
+                  </a:lnTo>
+                  <a:lnTo>
+                    <a:pt x="1718940" y="151349"/>
+                  </a:lnTo>
+                  <a:lnTo>
+                    <a:pt x="1647318" y="145437"/>
+                  </a:lnTo>
+                  <a:lnTo>
+                    <a:pt x="1575695" y="139493"/>
+                  </a:lnTo>
+                  <a:lnTo>
+                    <a:pt x="1504073" y="133515"/>
+                  </a:lnTo>
+                  <a:lnTo>
+                    <a:pt x="1432450" y="127504"/>
+                  </a:lnTo>
+                  <a:lnTo>
+                    <a:pt x="1360827" y="121459"/>
+                  </a:lnTo>
+                  <a:lnTo>
+                    <a:pt x="1289205" y="115381"/>
+                  </a:lnTo>
+                  <a:lnTo>
+                    <a:pt x="1217582" y="109269"/>
+                  </a:lnTo>
+                  <a:lnTo>
+                    <a:pt x="1145960" y="103123"/>
+                  </a:lnTo>
+                  <a:lnTo>
+                    <a:pt x="1074337" y="96943"/>
+                  </a:lnTo>
+                  <a:lnTo>
+                    <a:pt x="1002715" y="90728"/>
+                  </a:lnTo>
+                  <a:lnTo>
+                    <a:pt x="931092" y="84479"/>
+                  </a:lnTo>
+                  <a:lnTo>
+                    <a:pt x="859470" y="78195"/>
+                  </a:lnTo>
+                  <a:lnTo>
+                    <a:pt x="787847" y="71876"/>
+                  </a:lnTo>
+                  <a:lnTo>
+                    <a:pt x="716225" y="65522"/>
+                  </a:lnTo>
+                  <a:lnTo>
+                    <a:pt x="644602" y="59132"/>
+                  </a:lnTo>
+                  <a:lnTo>
+                    <a:pt x="572980" y="52707"/>
+                  </a:lnTo>
+                  <a:lnTo>
+                    <a:pt x="501357" y="46246"/>
+                  </a:lnTo>
+                  <a:lnTo>
+                    <a:pt x="429735" y="39749"/>
+                  </a:lnTo>
+                  <a:lnTo>
+                    <a:pt x="358112" y="33215"/>
+                  </a:lnTo>
+                  <a:lnTo>
+                    <a:pt x="286490" y="26646"/>
+                  </a:lnTo>
+                  <a:lnTo>
+                    <a:pt x="214867" y="20040"/>
+                  </a:lnTo>
+                  <a:lnTo>
+                    <a:pt x="143245" y="13397"/>
+                  </a:lnTo>
+                  <a:lnTo>
+                    <a:pt x="71622" y="6717"/>
                   </a:lnTo>
                   <a:lnTo>
                     <a:pt x="0" y="0"/>
@@ -4049,267 +4043,258 @@
           </p:nvSpPr>
           <p:spPr>
             <a:xfrm>
-              <a:off x="2295495" y="2073503"/>
-              <a:ext cx="5967184" cy="3122984"/>
+              <a:off x="2501250" y="2073503"/>
+              <a:ext cx="5761428" cy="3139879"/>
             </a:xfrm>
             <a:custGeom>
               <a:avLst/>
               <a:pathLst>
-                <a:path w="5967184" h="3122984">
+                <a:path w="5761428" h="3139879">
                   <a:moveTo>
                     <a:pt x="0" y="0"/>
                   </a:moveTo>
                   <a:lnTo>
-                    <a:pt x="22514" y="29955"/>
-                  </a:lnTo>
-                  <a:lnTo>
-                    <a:pt x="94137" y="122689"/>
-                  </a:lnTo>
-                  <a:lnTo>
-                    <a:pt x="165759" y="212933"/>
-                  </a:lnTo>
-                  <a:lnTo>
-                    <a:pt x="237382" y="300754"/>
-                  </a:lnTo>
-                  <a:lnTo>
-                    <a:pt x="309004" y="386217"/>
-                  </a:lnTo>
-                  <a:lnTo>
-                    <a:pt x="380627" y="469386"/>
-                  </a:lnTo>
-                  <a:lnTo>
-                    <a:pt x="452249" y="550321"/>
-                  </a:lnTo>
-                  <a:lnTo>
-                    <a:pt x="523872" y="629083"/>
-                  </a:lnTo>
-                  <a:lnTo>
-                    <a:pt x="595494" y="705731"/>
-                  </a:lnTo>
-                  <a:lnTo>
-                    <a:pt x="667117" y="780320"/>
-                  </a:lnTo>
-                  <a:lnTo>
-                    <a:pt x="738739" y="852907"/>
-                  </a:lnTo>
-                  <a:lnTo>
-                    <a:pt x="810362" y="923545"/>
-                  </a:lnTo>
-                  <a:lnTo>
-                    <a:pt x="881984" y="992286"/>
-                  </a:lnTo>
-                  <a:lnTo>
-                    <a:pt x="953607" y="1059182"/>
-                  </a:lnTo>
-                  <a:lnTo>
-                    <a:pt x="1025229" y="1124281"/>
-                  </a:lnTo>
-                  <a:lnTo>
-                    <a:pt x="1096852" y="1187633"/>
-                  </a:lnTo>
-                  <a:lnTo>
-                    <a:pt x="1168474" y="1249283"/>
-                  </a:lnTo>
-                  <a:lnTo>
-                    <a:pt x="1240097" y="1309278"/>
-                  </a:lnTo>
-                  <a:lnTo>
-                    <a:pt x="1311720" y="1367663"/>
-                  </a:lnTo>
-                  <a:lnTo>
-                    <a:pt x="1383342" y="1424479"/>
-                  </a:lnTo>
-                  <a:lnTo>
-                    <a:pt x="1454965" y="1479770"/>
-                  </a:lnTo>
-                  <a:lnTo>
-                    <a:pt x="1526587" y="1533577"/>
-                  </a:lnTo>
-                  <a:lnTo>
-                    <a:pt x="1598210" y="1585939"/>
-                  </a:lnTo>
-                  <a:lnTo>
-                    <a:pt x="1669832" y="1636895"/>
-                  </a:lnTo>
-                  <a:lnTo>
-                    <a:pt x="1741455" y="1686483"/>
-                  </a:lnTo>
-                  <a:lnTo>
-                    <a:pt x="1813077" y="1734739"/>
-                  </a:lnTo>
-                  <a:lnTo>
-                    <a:pt x="1884700" y="1781700"/>
-                  </a:lnTo>
-                  <a:lnTo>
-                    <a:pt x="1956322" y="1827400"/>
-                  </a:lnTo>
-                  <a:lnTo>
-                    <a:pt x="2027945" y="1871872"/>
-                  </a:lnTo>
-                  <a:lnTo>
-                    <a:pt x="2099567" y="1915151"/>
-                  </a:lnTo>
-                  <a:lnTo>
-                    <a:pt x="2171190" y="1957268"/>
-                  </a:lnTo>
-                  <a:lnTo>
-                    <a:pt x="2242812" y="1998254"/>
-                  </a:lnTo>
-                  <a:lnTo>
-                    <a:pt x="2314435" y="2038139"/>
-                  </a:lnTo>
-                  <a:lnTo>
-                    <a:pt x="2386057" y="2076954"/>
-                  </a:lnTo>
-                  <a:lnTo>
-                    <a:pt x="2457680" y="2114726"/>
-                  </a:lnTo>
-                  <a:lnTo>
-                    <a:pt x="2529302" y="2151484"/>
-                  </a:lnTo>
-                  <a:lnTo>
-                    <a:pt x="2600925" y="2187255"/>
-                  </a:lnTo>
-                  <a:lnTo>
-                    <a:pt x="2672548" y="2222066"/>
-                  </a:lnTo>
-                  <a:lnTo>
-                    <a:pt x="2744170" y="2255942"/>
-                  </a:lnTo>
-                  <a:lnTo>
-                    <a:pt x="2815793" y="2288908"/>
-                  </a:lnTo>
-                  <a:lnTo>
-                    <a:pt x="2887415" y="2320990"/>
-                  </a:lnTo>
-                  <a:lnTo>
-                    <a:pt x="2959038" y="2352210"/>
-                  </a:lnTo>
-                  <a:lnTo>
-                    <a:pt x="3030660" y="2382591"/>
-                  </a:lnTo>
-                  <a:lnTo>
-                    <a:pt x="3102283" y="2412157"/>
-                  </a:lnTo>
-                  <a:lnTo>
-                    <a:pt x="3173905" y="2440929"/>
-                  </a:lnTo>
-                  <a:lnTo>
-                    <a:pt x="3245528" y="2468929"/>
-                  </a:lnTo>
-                  <a:lnTo>
-                    <a:pt x="3317150" y="2496177"/>
-                  </a:lnTo>
-                  <a:lnTo>
-                    <a:pt x="3388773" y="2522693"/>
-                  </a:lnTo>
-                  <a:lnTo>
-                    <a:pt x="3460395" y="2548497"/>
-                  </a:lnTo>
-                  <a:lnTo>
-                    <a:pt x="3532018" y="2573608"/>
-                  </a:lnTo>
-                  <a:lnTo>
-                    <a:pt x="3603640" y="2598045"/>
-                  </a:lnTo>
-                  <a:lnTo>
-                    <a:pt x="3675263" y="2621827"/>
-                  </a:lnTo>
-                  <a:lnTo>
-                    <a:pt x="3746885" y="2644969"/>
-                  </a:lnTo>
-                  <a:lnTo>
-                    <a:pt x="3818508" y="2667490"/>
-                  </a:lnTo>
-                  <a:lnTo>
-                    <a:pt x="3890130" y="2689407"/>
-                  </a:lnTo>
-                  <a:lnTo>
-                    <a:pt x="3961753" y="2710734"/>
-                  </a:lnTo>
-                  <a:lnTo>
-                    <a:pt x="4033376" y="2731490"/>
-                  </a:lnTo>
-                  <a:lnTo>
-                    <a:pt x="4104998" y="2751688"/>
-                  </a:lnTo>
-                  <a:lnTo>
-                    <a:pt x="4176621" y="2771344"/>
-                  </a:lnTo>
-                  <a:lnTo>
-                    <a:pt x="4248243" y="2790472"/>
-                  </a:lnTo>
-                  <a:lnTo>
-                    <a:pt x="4319866" y="2809086"/>
-                  </a:lnTo>
-                  <a:lnTo>
-                    <a:pt x="4391488" y="2827200"/>
-                  </a:lnTo>
-                  <a:lnTo>
-                    <a:pt x="4463111" y="2844829"/>
-                  </a:lnTo>
-                  <a:lnTo>
-                    <a:pt x="4534733" y="2861984"/>
-                  </a:lnTo>
-                  <a:lnTo>
-                    <a:pt x="4606356" y="2878678"/>
-                  </a:lnTo>
-                  <a:lnTo>
-                    <a:pt x="4677978" y="2894924"/>
-                  </a:lnTo>
-                  <a:lnTo>
-                    <a:pt x="4749601" y="2910734"/>
-                  </a:lnTo>
-                  <a:lnTo>
-                    <a:pt x="4821223" y="2926119"/>
-                  </a:lnTo>
-                  <a:lnTo>
-                    <a:pt x="4892846" y="2941091"/>
-                  </a:lnTo>
-                  <a:lnTo>
-                    <a:pt x="4964468" y="2955662"/>
-                  </a:lnTo>
-                  <a:lnTo>
-                    <a:pt x="5036091" y="2969841"/>
-                  </a:lnTo>
-                  <a:lnTo>
-                    <a:pt x="5107713" y="2983639"/>
-                  </a:lnTo>
-                  <a:lnTo>
-                    <a:pt x="5179336" y="2997067"/>
-                  </a:lnTo>
-                  <a:lnTo>
-                    <a:pt x="5250958" y="3010134"/>
-                  </a:lnTo>
-                  <a:lnTo>
-                    <a:pt x="5322581" y="3022851"/>
-                  </a:lnTo>
-                  <a:lnTo>
-                    <a:pt x="5394204" y="3035226"/>
-                  </a:lnTo>
-                  <a:lnTo>
-                    <a:pt x="5465826" y="3047268"/>
-                  </a:lnTo>
-                  <a:lnTo>
-                    <a:pt x="5537449" y="3058988"/>
-                  </a:lnTo>
-                  <a:lnTo>
-                    <a:pt x="5609071" y="3070393"/>
-                  </a:lnTo>
-                  <a:lnTo>
-                    <a:pt x="5680694" y="3081491"/>
-                  </a:lnTo>
-                  <a:lnTo>
-                    <a:pt x="5752316" y="3092292"/>
-                  </a:lnTo>
-                  <a:lnTo>
-                    <a:pt x="5823939" y="3102802"/>
-                  </a:lnTo>
-                  <a:lnTo>
-                    <a:pt x="5895561" y="3113030"/>
-                  </a:lnTo>
-                  <a:lnTo>
-                    <a:pt x="5967184" y="3122984"/>
+                    <a:pt x="31626" y="44352"/>
+                  </a:lnTo>
+                  <a:lnTo>
+                    <a:pt x="103249" y="141943"/>
+                  </a:lnTo>
+                  <a:lnTo>
+                    <a:pt x="174871" y="236765"/>
+                  </a:lnTo>
+                  <a:lnTo>
+                    <a:pt x="246494" y="328897"/>
+                  </a:lnTo>
+                  <a:lnTo>
+                    <a:pt x="318116" y="418415"/>
+                  </a:lnTo>
+                  <a:lnTo>
+                    <a:pt x="389739" y="505392"/>
+                  </a:lnTo>
+                  <a:lnTo>
+                    <a:pt x="461361" y="589902"/>
+                  </a:lnTo>
+                  <a:lnTo>
+                    <a:pt x="532984" y="672014"/>
+                  </a:lnTo>
+                  <a:lnTo>
+                    <a:pt x="604606" y="751795"/>
+                  </a:lnTo>
+                  <a:lnTo>
+                    <a:pt x="676229" y="829313"/>
+                  </a:lnTo>
+                  <a:lnTo>
+                    <a:pt x="747851" y="904632"/>
+                  </a:lnTo>
+                  <a:lnTo>
+                    <a:pt x="819474" y="977813"/>
+                  </a:lnTo>
+                  <a:lnTo>
+                    <a:pt x="891096" y="1048918"/>
+                  </a:lnTo>
+                  <a:lnTo>
+                    <a:pt x="962719" y="1118005"/>
+                  </a:lnTo>
+                  <a:lnTo>
+                    <a:pt x="1034341" y="1185132"/>
+                  </a:lnTo>
+                  <a:lnTo>
+                    <a:pt x="1105964" y="1250355"/>
+                  </a:lnTo>
+                  <a:lnTo>
+                    <a:pt x="1177586" y="1313726"/>
+                  </a:lnTo>
+                  <a:lnTo>
+                    <a:pt x="1249209" y="1375300"/>
+                  </a:lnTo>
+                  <a:lnTo>
+                    <a:pt x="1320831" y="1435126"/>
+                  </a:lnTo>
+                  <a:lnTo>
+                    <a:pt x="1392454" y="1493255"/>
+                  </a:lnTo>
+                  <a:lnTo>
+                    <a:pt x="1464077" y="1549734"/>
+                  </a:lnTo>
+                  <a:lnTo>
+                    <a:pt x="1535699" y="1604611"/>
+                  </a:lnTo>
+                  <a:lnTo>
+                    <a:pt x="1607322" y="1657931"/>
+                  </a:lnTo>
+                  <a:lnTo>
+                    <a:pt x="1678944" y="1709738"/>
+                  </a:lnTo>
+                  <a:lnTo>
+                    <a:pt x="1750567" y="1760074"/>
+                  </a:lnTo>
+                  <a:lnTo>
+                    <a:pt x="1822189" y="1808983"/>
+                  </a:lnTo>
+                  <a:lnTo>
+                    <a:pt x="1893812" y="1856504"/>
+                  </a:lnTo>
+                  <a:lnTo>
+                    <a:pt x="1965434" y="1902676"/>
+                  </a:lnTo>
+                  <a:lnTo>
+                    <a:pt x="2037057" y="1947538"/>
+                  </a:lnTo>
+                  <a:lnTo>
+                    <a:pt x="2108679" y="1991128"/>
+                  </a:lnTo>
+                  <a:lnTo>
+                    <a:pt x="2180302" y="2033480"/>
+                  </a:lnTo>
+                  <a:lnTo>
+                    <a:pt x="2251924" y="2074631"/>
+                  </a:lnTo>
+                  <a:lnTo>
+                    <a:pt x="2323547" y="2114614"/>
+                  </a:lnTo>
+                  <a:lnTo>
+                    <a:pt x="2395169" y="2153462"/>
+                  </a:lnTo>
+                  <a:lnTo>
+                    <a:pt x="2466792" y="2191209"/>
+                  </a:lnTo>
+                  <a:lnTo>
+                    <a:pt x="2538414" y="2227884"/>
+                  </a:lnTo>
+                  <a:lnTo>
+                    <a:pt x="2610037" y="2263519"/>
+                  </a:lnTo>
+                  <a:lnTo>
+                    <a:pt x="2681659" y="2298142"/>
+                  </a:lnTo>
+                  <a:lnTo>
+                    <a:pt x="2753282" y="2331783"/>
+                  </a:lnTo>
+                  <a:lnTo>
+                    <a:pt x="2824905" y="2364470"/>
+                  </a:lnTo>
+                  <a:lnTo>
+                    <a:pt x="2896527" y="2396229"/>
+                  </a:lnTo>
+                  <a:lnTo>
+                    <a:pt x="2968150" y="2427086"/>
+                  </a:lnTo>
+                  <a:lnTo>
+                    <a:pt x="3039772" y="2457069"/>
+                  </a:lnTo>
+                  <a:lnTo>
+                    <a:pt x="3111395" y="2486200"/>
+                  </a:lnTo>
+                  <a:lnTo>
+                    <a:pt x="3183017" y="2514505"/>
+                  </a:lnTo>
+                  <a:lnTo>
+                    <a:pt x="3254640" y="2542007"/>
+                  </a:lnTo>
+                  <a:lnTo>
+                    <a:pt x="3326262" y="2568729"/>
+                  </a:lnTo>
+                  <a:lnTo>
+                    <a:pt x="3397885" y="2594692"/>
+                  </a:lnTo>
+                  <a:lnTo>
+                    <a:pt x="3469507" y="2619918"/>
+                  </a:lnTo>
+                  <a:lnTo>
+                    <a:pt x="3541130" y="2644429"/>
+                  </a:lnTo>
+                  <a:lnTo>
+                    <a:pt x="3612752" y="2668245"/>
+                  </a:lnTo>
+                  <a:lnTo>
+                    <a:pt x="3684375" y="2691384"/>
+                  </a:lnTo>
+                  <a:lnTo>
+                    <a:pt x="3755997" y="2713867"/>
+                  </a:lnTo>
+                  <a:lnTo>
+                    <a:pt x="3827620" y="2735712"/>
+                  </a:lnTo>
+                  <a:lnTo>
+                    <a:pt x="3899242" y="2756937"/>
+                  </a:lnTo>
+                  <a:lnTo>
+                    <a:pt x="3970865" y="2777560"/>
+                  </a:lnTo>
+                  <a:lnTo>
+                    <a:pt x="4042487" y="2797598"/>
+                  </a:lnTo>
+                  <a:lnTo>
+                    <a:pt x="4114110" y="2817067"/>
+                  </a:lnTo>
+                  <a:lnTo>
+                    <a:pt x="4185733" y="2835984"/>
+                  </a:lnTo>
+                  <a:lnTo>
+                    <a:pt x="4257355" y="2854364"/>
+                  </a:lnTo>
+                  <a:lnTo>
+                    <a:pt x="4328978" y="2872222"/>
+                  </a:lnTo>
+                  <a:lnTo>
+                    <a:pt x="4400600" y="2889574"/>
+                  </a:lnTo>
+                  <a:lnTo>
+                    <a:pt x="4472223" y="2906434"/>
+                  </a:lnTo>
+                  <a:lnTo>
+                    <a:pt x="4543845" y="2922815"/>
+                  </a:lnTo>
+                  <a:lnTo>
+                    <a:pt x="4615468" y="2938731"/>
+                  </a:lnTo>
+                  <a:lnTo>
+                    <a:pt x="4687090" y="2954195"/>
+                  </a:lnTo>
+                  <a:lnTo>
+                    <a:pt x="4758713" y="2969221"/>
+                  </a:lnTo>
+                  <a:lnTo>
+                    <a:pt x="4830335" y="2983821"/>
+                  </a:lnTo>
+                  <a:lnTo>
+                    <a:pt x="4901958" y="2998006"/>
+                  </a:lnTo>
+                  <a:lnTo>
+                    <a:pt x="4973580" y="3011788"/>
+                  </a:lnTo>
+                  <a:lnTo>
+                    <a:pt x="5045203" y="3025180"/>
+                  </a:lnTo>
+                  <a:lnTo>
+                    <a:pt x="5116825" y="3038192"/>
+                  </a:lnTo>
+                  <a:lnTo>
+                    <a:pt x="5188448" y="3050834"/>
+                  </a:lnTo>
+                  <a:lnTo>
+                    <a:pt x="5260070" y="3063118"/>
+                  </a:lnTo>
+                  <a:lnTo>
+                    <a:pt x="5331693" y="3075053"/>
+                  </a:lnTo>
+                  <a:lnTo>
+                    <a:pt x="5403315" y="3086650"/>
+                  </a:lnTo>
+                  <a:lnTo>
+                    <a:pt x="5474938" y="3097917"/>
+                  </a:lnTo>
+                  <a:lnTo>
+                    <a:pt x="5546561" y="3108865"/>
+                  </a:lnTo>
+                  <a:lnTo>
+                    <a:pt x="5618183" y="3119502"/>
+                  </a:lnTo>
+                  <a:lnTo>
+                    <a:pt x="5689806" y="3129837"/>
+                  </a:lnTo>
+                  <a:lnTo>
+                    <a:pt x="5761428" y="3139879"/>
                   </a:lnTo>
                 </a:path>
               </a:pathLst>
@@ -5049,7 +5034,7 @@
                   <a:latin typeface="Helvetica"/>
                   <a:cs typeface="Helvetica"/>
                 </a:rPr>
-                <a:t>subHR per 1 mL/min: 0.97 (0.94-0.99)  |  per IQR (Δ = 18.2): 0.53 (0.32-0.88)  |  IQR: [-11.5, 6.7]</a:t>
+                <a:t>subHR per 1 mL/min: 0.96 (0.94-0.99)  |  per IQR (Δ = 18.2): 0.51 (0.29-0.88)  |  IQR: [-11.5, 6.7]</a:t>
               </a:r>
             </a:p>
           </p:txBody>

--- a/docs/plots/carbo/jx_carbo_linsubhr_egfrdisc_anyhosp.pptx
+++ b/docs/plots/carbo/jx_carbo_linsubhr_egfrdisc_anyhosp.pptx
@@ -3003,491 +3003,494 @@
           <p:spPr>
             <a:xfrm>
               <a:off x="1172049" y="2073503"/>
-              <a:ext cx="7090630" cy="3314793"/>
+              <a:ext cx="7090630" cy="3306040"/>
             </a:xfrm>
             <a:custGeom>
               <a:avLst/>
               <a:pathLst>
-                <a:path w="7090630" h="3314793">
+                <a:path w="7090630" h="3306040">
                   <a:moveTo>
-                    <a:pt x="2923976" y="0"/>
+                    <a:pt x="2859053" y="0"/>
                   </a:moveTo>
                   <a:lnTo>
-                    <a:pt x="2936523" y="32282"/>
-                  </a:lnTo>
-                  <a:lnTo>
-                    <a:pt x="3008146" y="207224"/>
-                  </a:lnTo>
-                  <a:lnTo>
-                    <a:pt x="3079768" y="373299"/>
-                  </a:lnTo>
-                  <a:lnTo>
-                    <a:pt x="3151391" y="530957"/>
-                  </a:lnTo>
-                  <a:lnTo>
-                    <a:pt x="3223013" y="680623"/>
-                  </a:lnTo>
-                  <a:lnTo>
-                    <a:pt x="3294636" y="822703"/>
-                  </a:lnTo>
-                  <a:lnTo>
-                    <a:pt x="3366258" y="957582"/>
-                  </a:lnTo>
-                  <a:lnTo>
-                    <a:pt x="3437881" y="1085624"/>
-                  </a:lnTo>
-                  <a:lnTo>
-                    <a:pt x="3509503" y="1207176"/>
-                  </a:lnTo>
-                  <a:lnTo>
-                    <a:pt x="3581126" y="1322568"/>
-                  </a:lnTo>
-                  <a:lnTo>
-                    <a:pt x="3652748" y="1432110"/>
-                  </a:lnTo>
-                  <a:lnTo>
-                    <a:pt x="3724371" y="1536100"/>
-                  </a:lnTo>
-                  <a:lnTo>
-                    <a:pt x="3795993" y="1634819"/>
-                  </a:lnTo>
-                  <a:lnTo>
-                    <a:pt x="3867616" y="1728535"/>
-                  </a:lnTo>
-                  <a:lnTo>
-                    <a:pt x="3939238" y="1817500"/>
-                  </a:lnTo>
-                  <a:lnTo>
-                    <a:pt x="4010861" y="1901956"/>
-                  </a:lnTo>
-                  <a:lnTo>
-                    <a:pt x="4082483" y="1982131"/>
-                  </a:lnTo>
-                  <a:lnTo>
-                    <a:pt x="4154106" y="2058243"/>
-                  </a:lnTo>
-                  <a:lnTo>
-                    <a:pt x="4225729" y="2130496"/>
-                  </a:lnTo>
-                  <a:lnTo>
-                    <a:pt x="4297351" y="2199088"/>
-                  </a:lnTo>
-                  <a:lnTo>
-                    <a:pt x="4368974" y="2264203"/>
-                  </a:lnTo>
-                  <a:lnTo>
-                    <a:pt x="4440596" y="2326017"/>
-                  </a:lnTo>
-                  <a:lnTo>
-                    <a:pt x="4512219" y="2384698"/>
-                  </a:lnTo>
-                  <a:lnTo>
-                    <a:pt x="4583841" y="2440405"/>
-                  </a:lnTo>
-                  <a:lnTo>
-                    <a:pt x="4655464" y="2493288"/>
-                  </a:lnTo>
-                  <a:lnTo>
-                    <a:pt x="4727086" y="2543491"/>
-                  </a:lnTo>
-                  <a:lnTo>
-                    <a:pt x="4798709" y="2591149"/>
-                  </a:lnTo>
-                  <a:lnTo>
-                    <a:pt x="4870331" y="2636392"/>
-                  </a:lnTo>
-                  <a:lnTo>
-                    <a:pt x="4941954" y="2656995"/>
-                  </a:lnTo>
-                  <a:lnTo>
-                    <a:pt x="5013576" y="2661574"/>
-                  </a:lnTo>
-                  <a:lnTo>
-                    <a:pt x="5085199" y="2666128"/>
-                  </a:lnTo>
-                  <a:lnTo>
-                    <a:pt x="5156821" y="2670656"/>
-                  </a:lnTo>
-                  <a:lnTo>
-                    <a:pt x="5228444" y="2675159"/>
-                  </a:lnTo>
-                  <a:lnTo>
-                    <a:pt x="5300066" y="2679637"/>
-                  </a:lnTo>
-                  <a:lnTo>
-                    <a:pt x="5371689" y="2684091"/>
-                  </a:lnTo>
-                  <a:lnTo>
-                    <a:pt x="5443311" y="2688520"/>
-                  </a:lnTo>
-                  <a:lnTo>
-                    <a:pt x="5514934" y="2692924"/>
-                  </a:lnTo>
-                  <a:lnTo>
-                    <a:pt x="5586557" y="2697304"/>
-                  </a:lnTo>
-                  <a:lnTo>
-                    <a:pt x="5658179" y="2701659"/>
-                  </a:lnTo>
-                  <a:lnTo>
-                    <a:pt x="5729802" y="2705991"/>
-                  </a:lnTo>
-                  <a:lnTo>
-                    <a:pt x="5801424" y="2710299"/>
-                  </a:lnTo>
-                  <a:lnTo>
-                    <a:pt x="5873047" y="2714582"/>
-                  </a:lnTo>
-                  <a:lnTo>
-                    <a:pt x="5944669" y="2718842"/>
-                  </a:lnTo>
-                  <a:lnTo>
-                    <a:pt x="6016292" y="2723078"/>
-                  </a:lnTo>
-                  <a:lnTo>
-                    <a:pt x="6087914" y="2727291"/>
-                  </a:lnTo>
-                  <a:lnTo>
-                    <a:pt x="6159537" y="2731481"/>
-                  </a:lnTo>
-                  <a:lnTo>
-                    <a:pt x="6231159" y="2735647"/>
-                  </a:lnTo>
-                  <a:lnTo>
-                    <a:pt x="6302782" y="2739791"/>
-                  </a:lnTo>
-                  <a:lnTo>
-                    <a:pt x="6374404" y="2743911"/>
-                  </a:lnTo>
-                  <a:lnTo>
-                    <a:pt x="6446027" y="2748008"/>
-                  </a:lnTo>
-                  <a:lnTo>
-                    <a:pt x="6517649" y="2752083"/>
-                  </a:lnTo>
-                  <a:lnTo>
-                    <a:pt x="6589272" y="2756135"/>
-                  </a:lnTo>
-                  <a:lnTo>
-                    <a:pt x="6660894" y="2760165"/>
-                  </a:lnTo>
-                  <a:lnTo>
-                    <a:pt x="6732517" y="2764173"/>
-                  </a:lnTo>
-                  <a:lnTo>
-                    <a:pt x="6804139" y="2768158"/>
-                  </a:lnTo>
-                  <a:lnTo>
-                    <a:pt x="6875762" y="2772121"/>
-                  </a:lnTo>
-                  <a:lnTo>
-                    <a:pt x="6947385" y="2776063"/>
-                  </a:lnTo>
-                  <a:lnTo>
-                    <a:pt x="7019007" y="2779982"/>
-                  </a:lnTo>
-                  <a:lnTo>
-                    <a:pt x="7090630" y="2783880"/>
-                  </a:lnTo>
-                  <a:lnTo>
-                    <a:pt x="7090630" y="3314793"/>
-                  </a:lnTo>
-                  <a:lnTo>
-                    <a:pt x="7019007" y="3305772"/>
-                  </a:lnTo>
-                  <a:lnTo>
-                    <a:pt x="6947385" y="3296270"/>
-                  </a:lnTo>
-                  <a:lnTo>
-                    <a:pt x="6875762" y="3286260"/>
-                  </a:lnTo>
-                  <a:lnTo>
-                    <a:pt x="6804139" y="3275716"/>
-                  </a:lnTo>
-                  <a:lnTo>
-                    <a:pt x="6732517" y="3264608"/>
-                  </a:lnTo>
-                  <a:lnTo>
-                    <a:pt x="6660894" y="3252908"/>
-                  </a:lnTo>
-                  <a:lnTo>
-                    <a:pt x="6589272" y="3240583"/>
-                  </a:lnTo>
-                  <a:lnTo>
-                    <a:pt x="6517649" y="3227600"/>
-                  </a:lnTo>
-                  <a:lnTo>
-                    <a:pt x="6446027" y="3213924"/>
-                  </a:lnTo>
-                  <a:lnTo>
-                    <a:pt x="6374404" y="3199517"/>
-                  </a:lnTo>
-                  <a:lnTo>
-                    <a:pt x="6302782" y="3184341"/>
-                  </a:lnTo>
-                  <a:lnTo>
-                    <a:pt x="6231159" y="3168355"/>
-                  </a:lnTo>
-                  <a:lnTo>
-                    <a:pt x="6159537" y="3151516"/>
-                  </a:lnTo>
-                  <a:lnTo>
-                    <a:pt x="6087914" y="3133777"/>
-                  </a:lnTo>
-                  <a:lnTo>
-                    <a:pt x="6016292" y="3115091"/>
-                  </a:lnTo>
-                  <a:lnTo>
-                    <a:pt x="5944669" y="3095408"/>
-                  </a:lnTo>
-                  <a:lnTo>
-                    <a:pt x="5873047" y="3074673"/>
-                  </a:lnTo>
-                  <a:lnTo>
-                    <a:pt x="5801424" y="3052832"/>
-                  </a:lnTo>
-                  <a:lnTo>
-                    <a:pt x="5729802" y="3029824"/>
-                  </a:lnTo>
-                  <a:lnTo>
-                    <a:pt x="5658179" y="3005588"/>
-                  </a:lnTo>
-                  <a:lnTo>
-                    <a:pt x="5586557" y="2980058"/>
-                  </a:lnTo>
-                  <a:lnTo>
-                    <a:pt x="5514934" y="2953164"/>
-                  </a:lnTo>
-                  <a:lnTo>
-                    <a:pt x="5443311" y="2924835"/>
-                  </a:lnTo>
-                  <a:lnTo>
-                    <a:pt x="5371689" y="2894993"/>
-                  </a:lnTo>
-                  <a:lnTo>
-                    <a:pt x="5300066" y="2863558"/>
-                  </a:lnTo>
-                  <a:lnTo>
-                    <a:pt x="5228444" y="2830445"/>
-                  </a:lnTo>
-                  <a:lnTo>
-                    <a:pt x="5156821" y="2795563"/>
-                  </a:lnTo>
-                  <a:lnTo>
-                    <a:pt x="5085199" y="2758819"/>
-                  </a:lnTo>
-                  <a:lnTo>
-                    <a:pt x="5013576" y="2720113"/>
-                  </a:lnTo>
-                  <a:lnTo>
-                    <a:pt x="4941954" y="2679341"/>
-                  </a:lnTo>
-                  <a:lnTo>
-                    <a:pt x="4870331" y="2652391"/>
-                  </a:lnTo>
-                  <a:lnTo>
-                    <a:pt x="4798709" y="2647761"/>
-                  </a:lnTo>
-                  <a:lnTo>
-                    <a:pt x="4727086" y="2643105"/>
-                  </a:lnTo>
-                  <a:lnTo>
-                    <a:pt x="4655464" y="2638423"/>
-                  </a:lnTo>
-                  <a:lnTo>
-                    <a:pt x="4583841" y="2633715"/>
-                  </a:lnTo>
-                  <a:lnTo>
-                    <a:pt x="4512219" y="2628981"/>
-                  </a:lnTo>
-                  <a:lnTo>
-                    <a:pt x="4440596" y="2624221"/>
-                  </a:lnTo>
-                  <a:lnTo>
-                    <a:pt x="4368974" y="2619434"/>
-                  </a:lnTo>
-                  <a:lnTo>
-                    <a:pt x="4297351" y="2614620"/>
-                  </a:lnTo>
-                  <a:lnTo>
-                    <a:pt x="4225729" y="2609780"/>
-                  </a:lnTo>
-                  <a:lnTo>
-                    <a:pt x="4154106" y="2604913"/>
-                  </a:lnTo>
-                  <a:lnTo>
-                    <a:pt x="4082483" y="2600018"/>
-                  </a:lnTo>
-                  <a:lnTo>
-                    <a:pt x="4010861" y="2595097"/>
-                  </a:lnTo>
-                  <a:lnTo>
-                    <a:pt x="3939238" y="2590147"/>
-                  </a:lnTo>
-                  <a:lnTo>
-                    <a:pt x="3867616" y="2585171"/>
-                  </a:lnTo>
-                  <a:lnTo>
-                    <a:pt x="3795993" y="2580166"/>
-                  </a:lnTo>
-                  <a:lnTo>
-                    <a:pt x="3724371" y="2575134"/>
-                  </a:lnTo>
-                  <a:lnTo>
-                    <a:pt x="3652748" y="2570074"/>
-                  </a:lnTo>
-                  <a:lnTo>
-                    <a:pt x="3581126" y="2564985"/>
-                  </a:lnTo>
-                  <a:lnTo>
-                    <a:pt x="3509503" y="2559869"/>
-                  </a:lnTo>
-                  <a:lnTo>
-                    <a:pt x="3437881" y="2554723"/>
-                  </a:lnTo>
-                  <a:lnTo>
-                    <a:pt x="3366258" y="2549549"/>
-                  </a:lnTo>
-                  <a:lnTo>
-                    <a:pt x="3294636" y="2544346"/>
-                  </a:lnTo>
-                  <a:lnTo>
-                    <a:pt x="3223013" y="2539115"/>
-                  </a:lnTo>
-                  <a:lnTo>
-                    <a:pt x="3151391" y="2533854"/>
-                  </a:lnTo>
-                  <a:lnTo>
-                    <a:pt x="3079768" y="2528564"/>
-                  </a:lnTo>
-                  <a:lnTo>
-                    <a:pt x="3008146" y="2523244"/>
-                  </a:lnTo>
-                  <a:lnTo>
-                    <a:pt x="2936523" y="2517895"/>
-                  </a:lnTo>
-                  <a:lnTo>
-                    <a:pt x="2864901" y="2512516"/>
-                  </a:lnTo>
-                  <a:lnTo>
-                    <a:pt x="2793278" y="2507107"/>
-                  </a:lnTo>
-                  <a:lnTo>
-                    <a:pt x="2721655" y="2501667"/>
-                  </a:lnTo>
-                  <a:lnTo>
-                    <a:pt x="2650033" y="2496198"/>
-                  </a:lnTo>
-                  <a:lnTo>
-                    <a:pt x="2578410" y="2490698"/>
-                  </a:lnTo>
-                  <a:lnTo>
-                    <a:pt x="2506788" y="2485168"/>
-                  </a:lnTo>
-                  <a:lnTo>
-                    <a:pt x="2435165" y="2479606"/>
-                  </a:lnTo>
-                  <a:lnTo>
-                    <a:pt x="2363543" y="2474014"/>
-                  </a:lnTo>
-                  <a:lnTo>
-                    <a:pt x="2291920" y="2468390"/>
-                  </a:lnTo>
-                  <a:lnTo>
-                    <a:pt x="2220298" y="2462736"/>
-                  </a:lnTo>
-                  <a:lnTo>
-                    <a:pt x="2148675" y="2457049"/>
-                  </a:lnTo>
-                  <a:lnTo>
-                    <a:pt x="2077053" y="2451332"/>
-                  </a:lnTo>
-                  <a:lnTo>
-                    <a:pt x="2005430" y="2445582"/>
-                  </a:lnTo>
-                  <a:lnTo>
-                    <a:pt x="1933808" y="2439800"/>
-                  </a:lnTo>
-                  <a:lnTo>
-                    <a:pt x="1862185" y="2433986"/>
-                  </a:lnTo>
-                  <a:lnTo>
-                    <a:pt x="1790563" y="2428140"/>
-                  </a:lnTo>
-                  <a:lnTo>
-                    <a:pt x="1718940" y="2422261"/>
-                  </a:lnTo>
-                  <a:lnTo>
-                    <a:pt x="1647318" y="2416349"/>
-                  </a:lnTo>
-                  <a:lnTo>
-                    <a:pt x="1575695" y="2410404"/>
-                  </a:lnTo>
-                  <a:lnTo>
-                    <a:pt x="1504073" y="2404427"/>
-                  </a:lnTo>
-                  <a:lnTo>
-                    <a:pt x="1432450" y="2398416"/>
-                  </a:lnTo>
-                  <a:lnTo>
-                    <a:pt x="1360827" y="2392371"/>
-                  </a:lnTo>
-                  <a:lnTo>
-                    <a:pt x="1289205" y="2386293"/>
-                  </a:lnTo>
-                  <a:lnTo>
-                    <a:pt x="1217582" y="2380181"/>
-                  </a:lnTo>
-                  <a:lnTo>
-                    <a:pt x="1145960" y="2374035"/>
-                  </a:lnTo>
-                  <a:lnTo>
-                    <a:pt x="1074337" y="2367855"/>
-                  </a:lnTo>
-                  <a:lnTo>
-                    <a:pt x="1002715" y="2361640"/>
-                  </a:lnTo>
-                  <a:lnTo>
-                    <a:pt x="931092" y="2355391"/>
-                  </a:lnTo>
-                  <a:lnTo>
-                    <a:pt x="859470" y="2349107"/>
-                  </a:lnTo>
-                  <a:lnTo>
-                    <a:pt x="787847" y="2342788"/>
-                  </a:lnTo>
-                  <a:lnTo>
-                    <a:pt x="716225" y="2336433"/>
-                  </a:lnTo>
-                  <a:lnTo>
-                    <a:pt x="644602" y="2330044"/>
-                  </a:lnTo>
-                  <a:lnTo>
-                    <a:pt x="572980" y="2323618"/>
-                  </a:lnTo>
-                  <a:lnTo>
-                    <a:pt x="501357" y="2317157"/>
-                  </a:lnTo>
-                  <a:lnTo>
-                    <a:pt x="429735" y="2310660"/>
-                  </a:lnTo>
-                  <a:lnTo>
-                    <a:pt x="358112" y="2304127"/>
-                  </a:lnTo>
-                  <a:lnTo>
-                    <a:pt x="286490" y="2297557"/>
-                  </a:lnTo>
-                  <a:lnTo>
-                    <a:pt x="214867" y="2290951"/>
-                  </a:lnTo>
-                  <a:lnTo>
-                    <a:pt x="143245" y="2284308"/>
-                  </a:lnTo>
-                  <a:lnTo>
-                    <a:pt x="71622" y="2277628"/>
-                  </a:lnTo>
-                  <a:lnTo>
-                    <a:pt x="0" y="2270911"/>
+                    <a:pt x="2864901" y="14630"/>
+                  </a:lnTo>
+                  <a:lnTo>
+                    <a:pt x="2936523" y="185024"/>
+                  </a:lnTo>
+                  <a:lnTo>
+                    <a:pt x="3008146" y="347049"/>
+                  </a:lnTo>
+                  <a:lnTo>
+                    <a:pt x="3079768" y="501116"/>
+                  </a:lnTo>
+                  <a:lnTo>
+                    <a:pt x="3151391" y="647615"/>
+                  </a:lnTo>
+                  <a:lnTo>
+                    <a:pt x="3223013" y="786919"/>
+                  </a:lnTo>
+                  <a:lnTo>
+                    <a:pt x="3294636" y="919380"/>
+                  </a:lnTo>
+                  <a:lnTo>
+                    <a:pt x="3366258" y="1045335"/>
+                  </a:lnTo>
+                  <a:lnTo>
+                    <a:pt x="3437881" y="1165104"/>
+                  </a:lnTo>
+                  <a:lnTo>
+                    <a:pt x="3509503" y="1278990"/>
+                  </a:lnTo>
+                  <a:lnTo>
+                    <a:pt x="3581126" y="1387282"/>
+                  </a:lnTo>
+                  <a:lnTo>
+                    <a:pt x="3652748" y="1490255"/>
+                  </a:lnTo>
+                  <a:lnTo>
+                    <a:pt x="3724371" y="1588170"/>
+                  </a:lnTo>
+                  <a:lnTo>
+                    <a:pt x="3795993" y="1681276"/>
+                  </a:lnTo>
+                  <a:lnTo>
+                    <a:pt x="3867616" y="1769809"/>
+                  </a:lnTo>
+                  <a:lnTo>
+                    <a:pt x="3939238" y="1853993"/>
+                  </a:lnTo>
+                  <a:lnTo>
+                    <a:pt x="4010861" y="1934043"/>
+                  </a:lnTo>
+                  <a:lnTo>
+                    <a:pt x="4082483" y="2010160"/>
+                  </a:lnTo>
+                  <a:lnTo>
+                    <a:pt x="4154106" y="2082539"/>
+                  </a:lnTo>
+                  <a:lnTo>
+                    <a:pt x="4225729" y="2151363"/>
+                  </a:lnTo>
+                  <a:lnTo>
+                    <a:pt x="4297351" y="2216806"/>
+                  </a:lnTo>
+                  <a:lnTo>
+                    <a:pt x="4368974" y="2279035"/>
+                  </a:lnTo>
+                  <a:lnTo>
+                    <a:pt x="4440596" y="2338207"/>
+                  </a:lnTo>
+                  <a:lnTo>
+                    <a:pt x="4512219" y="2394473"/>
+                  </a:lnTo>
+                  <a:lnTo>
+                    <a:pt x="4583841" y="2447976"/>
+                  </a:lnTo>
+                  <a:lnTo>
+                    <a:pt x="4655464" y="2498850"/>
+                  </a:lnTo>
+                  <a:lnTo>
+                    <a:pt x="4727086" y="2547226"/>
+                  </a:lnTo>
+                  <a:lnTo>
+                    <a:pt x="4798709" y="2593225"/>
+                  </a:lnTo>
+                  <a:lnTo>
+                    <a:pt x="4870331" y="2636965"/>
+                  </a:lnTo>
+                  <a:lnTo>
+                    <a:pt x="4941954" y="2657185"/>
+                  </a:lnTo>
+                  <a:lnTo>
+                    <a:pt x="5013576" y="2662084"/>
+                  </a:lnTo>
+                  <a:lnTo>
+                    <a:pt x="5085199" y="2666954"/>
+                  </a:lnTo>
+                  <a:lnTo>
+                    <a:pt x="5156821" y="2671795"/>
+                  </a:lnTo>
+                  <a:lnTo>
+                    <a:pt x="5228444" y="2676607"/>
+                  </a:lnTo>
+                  <a:lnTo>
+                    <a:pt x="5300066" y="2681391"/>
+                  </a:lnTo>
+                  <a:lnTo>
+                    <a:pt x="5371689" y="2686146"/>
+                  </a:lnTo>
+                  <a:lnTo>
+                    <a:pt x="5443311" y="2690873"/>
+                  </a:lnTo>
+                  <a:lnTo>
+                    <a:pt x="5514934" y="2695572"/>
+                  </a:lnTo>
+                  <a:lnTo>
+                    <a:pt x="5586557" y="2700243"/>
+                  </a:lnTo>
+                  <a:lnTo>
+                    <a:pt x="5658179" y="2704887"/>
+                  </a:lnTo>
+                  <a:lnTo>
+                    <a:pt x="5729802" y="2709503"/>
+                  </a:lnTo>
+                  <a:lnTo>
+                    <a:pt x="5801424" y="2714092"/>
+                  </a:lnTo>
+                  <a:lnTo>
+                    <a:pt x="5873047" y="2718653"/>
+                  </a:lnTo>
+                  <a:lnTo>
+                    <a:pt x="5944669" y="2723188"/>
+                  </a:lnTo>
+                  <a:lnTo>
+                    <a:pt x="6016292" y="2727695"/>
+                  </a:lnTo>
+                  <a:lnTo>
+                    <a:pt x="6087914" y="2732176"/>
+                  </a:lnTo>
+                  <a:lnTo>
+                    <a:pt x="6159537" y="2736630"/>
+                  </a:lnTo>
+                  <a:lnTo>
+                    <a:pt x="6231159" y="2741058"/>
+                  </a:lnTo>
+                  <a:lnTo>
+                    <a:pt x="6302782" y="2745460"/>
+                  </a:lnTo>
+                  <a:lnTo>
+                    <a:pt x="6374404" y="2749836"/>
+                  </a:lnTo>
+                  <a:lnTo>
+                    <a:pt x="6446027" y="2754185"/>
+                  </a:lnTo>
+                  <a:lnTo>
+                    <a:pt x="6517649" y="2758509"/>
+                  </a:lnTo>
+                  <a:lnTo>
+                    <a:pt x="6589272" y="2762807"/>
+                  </a:lnTo>
+                  <a:lnTo>
+                    <a:pt x="6660894" y="2767080"/>
+                  </a:lnTo>
+                  <a:lnTo>
+                    <a:pt x="6732517" y="2771327"/>
+                  </a:lnTo>
+                  <a:lnTo>
+                    <a:pt x="6804139" y="2775550"/>
+                  </a:lnTo>
+                  <a:lnTo>
+                    <a:pt x="6875762" y="2779747"/>
+                  </a:lnTo>
+                  <a:lnTo>
+                    <a:pt x="6947385" y="2783919"/>
+                  </a:lnTo>
+                  <a:lnTo>
+                    <a:pt x="7019007" y="2788067"/>
+                  </a:lnTo>
+                  <a:lnTo>
+                    <a:pt x="7090630" y="2792190"/>
+                  </a:lnTo>
+                  <a:lnTo>
+                    <a:pt x="7090630" y="3306040"/>
+                  </a:lnTo>
+                  <a:lnTo>
+                    <a:pt x="7019007" y="3296860"/>
+                  </a:lnTo>
+                  <a:lnTo>
+                    <a:pt x="6947385" y="3287207"/>
+                  </a:lnTo>
+                  <a:lnTo>
+                    <a:pt x="6875762" y="3277055"/>
+                  </a:lnTo>
+                  <a:lnTo>
+                    <a:pt x="6804139" y="3266378"/>
+                  </a:lnTo>
+                  <a:lnTo>
+                    <a:pt x="6732517" y="3255150"/>
+                  </a:lnTo>
+                  <a:lnTo>
+                    <a:pt x="6660894" y="3243342"/>
+                  </a:lnTo>
+                  <a:lnTo>
+                    <a:pt x="6589272" y="3230924"/>
+                  </a:lnTo>
+                  <a:lnTo>
+                    <a:pt x="6517649" y="3217864"/>
+                  </a:lnTo>
+                  <a:lnTo>
+                    <a:pt x="6446027" y="3204130"/>
+                  </a:lnTo>
+                  <a:lnTo>
+                    <a:pt x="6374404" y="3189687"/>
+                  </a:lnTo>
+                  <a:lnTo>
+                    <a:pt x="6302782" y="3174497"/>
+                  </a:lnTo>
+                  <a:lnTo>
+                    <a:pt x="6231159" y="3158523"/>
+                  </a:lnTo>
+                  <a:lnTo>
+                    <a:pt x="6159537" y="3141724"/>
+                  </a:lnTo>
+                  <a:lnTo>
+                    <a:pt x="6087914" y="3124057"/>
+                  </a:lnTo>
+                  <a:lnTo>
+                    <a:pt x="6016292" y="3105477"/>
+                  </a:lnTo>
+                  <a:lnTo>
+                    <a:pt x="5944669" y="3085938"/>
+                  </a:lnTo>
+                  <a:lnTo>
+                    <a:pt x="5873047" y="3065389"/>
+                  </a:lnTo>
+                  <a:lnTo>
+                    <a:pt x="5801424" y="3043779"/>
+                  </a:lnTo>
+                  <a:lnTo>
+                    <a:pt x="5729802" y="3021053"/>
+                  </a:lnTo>
+                  <a:lnTo>
+                    <a:pt x="5658179" y="2997153"/>
+                  </a:lnTo>
+                  <a:lnTo>
+                    <a:pt x="5586557" y="2972018"/>
+                  </a:lnTo>
+                  <a:lnTo>
+                    <a:pt x="5514934" y="2945585"/>
+                  </a:lnTo>
+                  <a:lnTo>
+                    <a:pt x="5443311" y="2917786"/>
+                  </a:lnTo>
+                  <a:lnTo>
+                    <a:pt x="5371689" y="2888552"/>
+                  </a:lnTo>
+                  <a:lnTo>
+                    <a:pt x="5300066" y="2857807"/>
+                  </a:lnTo>
+                  <a:lnTo>
+                    <a:pt x="5228444" y="2825474"/>
+                  </a:lnTo>
+                  <a:lnTo>
+                    <a:pt x="5156821" y="2791472"/>
+                  </a:lnTo>
+                  <a:lnTo>
+                    <a:pt x="5085199" y="2755712"/>
+                  </a:lnTo>
+                  <a:lnTo>
+                    <a:pt x="5013576" y="2718106"/>
+                  </a:lnTo>
+                  <a:lnTo>
+                    <a:pt x="4941954" y="2678557"/>
+                  </a:lnTo>
+                  <a:lnTo>
+                    <a:pt x="4870331" y="2652258"/>
+                  </a:lnTo>
+                  <a:lnTo>
+                    <a:pt x="4798709" y="2647300"/>
+                  </a:lnTo>
+                  <a:lnTo>
+                    <a:pt x="4727086" y="2642313"/>
+                  </a:lnTo>
+                  <a:lnTo>
+                    <a:pt x="4655464" y="2637297"/>
+                  </a:lnTo>
+                  <a:lnTo>
+                    <a:pt x="4583841" y="2632250"/>
+                  </a:lnTo>
+                  <a:lnTo>
+                    <a:pt x="4512219" y="2627174"/>
+                  </a:lnTo>
+                  <a:lnTo>
+                    <a:pt x="4440596" y="2622067"/>
+                  </a:lnTo>
+                  <a:lnTo>
+                    <a:pt x="4368974" y="2616929"/>
+                  </a:lnTo>
+                  <a:lnTo>
+                    <a:pt x="4297351" y="2611761"/>
+                  </a:lnTo>
+                  <a:lnTo>
+                    <a:pt x="4225729" y="2606563"/>
+                  </a:lnTo>
+                  <a:lnTo>
+                    <a:pt x="4154106" y="2601333"/>
+                  </a:lnTo>
+                  <a:lnTo>
+                    <a:pt x="4082483" y="2596072"/>
+                  </a:lnTo>
+                  <a:lnTo>
+                    <a:pt x="4010861" y="2590780"/>
+                  </a:lnTo>
+                  <a:lnTo>
+                    <a:pt x="3939238" y="2585456"/>
+                  </a:lnTo>
+                  <a:lnTo>
+                    <a:pt x="3867616" y="2580100"/>
+                  </a:lnTo>
+                  <a:lnTo>
+                    <a:pt x="3795993" y="2574712"/>
+                  </a:lnTo>
+                  <a:lnTo>
+                    <a:pt x="3724371" y="2569293"/>
+                  </a:lnTo>
+                  <a:lnTo>
+                    <a:pt x="3652748" y="2563841"/>
+                  </a:lnTo>
+                  <a:lnTo>
+                    <a:pt x="3581126" y="2558356"/>
+                  </a:lnTo>
+                  <a:lnTo>
+                    <a:pt x="3509503" y="2552839"/>
+                  </a:lnTo>
+                  <a:lnTo>
+                    <a:pt x="3437881" y="2547289"/>
+                  </a:lnTo>
+                  <a:lnTo>
+                    <a:pt x="3366258" y="2541706"/>
+                  </a:lnTo>
+                  <a:lnTo>
+                    <a:pt x="3294636" y="2536090"/>
+                  </a:lnTo>
+                  <a:lnTo>
+                    <a:pt x="3223013" y="2530440"/>
+                  </a:lnTo>
+                  <a:lnTo>
+                    <a:pt x="3151391" y="2524756"/>
+                  </a:lnTo>
+                  <a:lnTo>
+                    <a:pt x="3079768" y="2519038"/>
+                  </a:lnTo>
+                  <a:lnTo>
+                    <a:pt x="3008146" y="2513287"/>
+                  </a:lnTo>
+                  <a:lnTo>
+                    <a:pt x="2936523" y="2507501"/>
+                  </a:lnTo>
+                  <a:lnTo>
+                    <a:pt x="2864901" y="2501681"/>
+                  </a:lnTo>
+                  <a:lnTo>
+                    <a:pt x="2793278" y="2495826"/>
+                  </a:lnTo>
+                  <a:lnTo>
+                    <a:pt x="2721655" y="2489936"/>
+                  </a:lnTo>
+                  <a:lnTo>
+                    <a:pt x="2650033" y="2484010"/>
+                  </a:lnTo>
+                  <a:lnTo>
+                    <a:pt x="2578410" y="2478050"/>
+                  </a:lnTo>
+                  <a:lnTo>
+                    <a:pt x="2506788" y="2472054"/>
+                  </a:lnTo>
+                  <a:lnTo>
+                    <a:pt x="2435165" y="2466022"/>
+                  </a:lnTo>
+                  <a:lnTo>
+                    <a:pt x="2363543" y="2459955"/>
+                  </a:lnTo>
+                  <a:lnTo>
+                    <a:pt x="2291920" y="2453851"/>
+                  </a:lnTo>
+                  <a:lnTo>
+                    <a:pt x="2220298" y="2447711"/>
+                  </a:lnTo>
+                  <a:lnTo>
+                    <a:pt x="2148675" y="2441534"/>
+                  </a:lnTo>
+                  <a:lnTo>
+                    <a:pt x="2077053" y="2435320"/>
+                  </a:lnTo>
+                  <a:lnTo>
+                    <a:pt x="2005430" y="2429069"/>
+                  </a:lnTo>
+                  <a:lnTo>
+                    <a:pt x="1933808" y="2422781"/>
+                  </a:lnTo>
+                  <a:lnTo>
+                    <a:pt x="1862185" y="2416456"/>
+                  </a:lnTo>
+                  <a:lnTo>
+                    <a:pt x="1790563" y="2410093"/>
+                  </a:lnTo>
+                  <a:lnTo>
+                    <a:pt x="1718940" y="2403692"/>
+                  </a:lnTo>
+                  <a:lnTo>
+                    <a:pt x="1647318" y="2397252"/>
+                  </a:lnTo>
+                  <a:lnTo>
+                    <a:pt x="1575695" y="2390775"/>
+                  </a:lnTo>
+                  <a:lnTo>
+                    <a:pt x="1504073" y="2384258"/>
+                  </a:lnTo>
+                  <a:lnTo>
+                    <a:pt x="1432450" y="2377703"/>
+                  </a:lnTo>
+                  <a:lnTo>
+                    <a:pt x="1360827" y="2371109"/>
+                  </a:lnTo>
+                  <a:lnTo>
+                    <a:pt x="1289205" y="2364475"/>
+                  </a:lnTo>
+                  <a:lnTo>
+                    <a:pt x="1217582" y="2357802"/>
+                  </a:lnTo>
+                  <a:lnTo>
+                    <a:pt x="1145960" y="2351089"/>
+                  </a:lnTo>
+                  <a:lnTo>
+                    <a:pt x="1074337" y="2344336"/>
+                  </a:lnTo>
+                  <a:lnTo>
+                    <a:pt x="1002715" y="2337543"/>
+                  </a:lnTo>
+                  <a:lnTo>
+                    <a:pt x="931092" y="2330710"/>
+                  </a:lnTo>
+                  <a:lnTo>
+                    <a:pt x="859470" y="2323835"/>
+                  </a:lnTo>
+                  <a:lnTo>
+                    <a:pt x="787847" y="2316920"/>
+                  </a:lnTo>
+                  <a:lnTo>
+                    <a:pt x="716225" y="2309963"/>
+                  </a:lnTo>
+                  <a:lnTo>
+                    <a:pt x="644602" y="2302965"/>
+                  </a:lnTo>
+                  <a:lnTo>
+                    <a:pt x="572980" y="2295925"/>
+                  </a:lnTo>
+                  <a:lnTo>
+                    <a:pt x="501357" y="2288844"/>
+                  </a:lnTo>
+                  <a:lnTo>
+                    <a:pt x="429735" y="2281720"/>
+                  </a:lnTo>
+                  <a:lnTo>
+                    <a:pt x="358112" y="2274553"/>
+                  </a:lnTo>
+                  <a:lnTo>
+                    <a:pt x="286490" y="2267344"/>
+                  </a:lnTo>
+                  <a:lnTo>
+                    <a:pt x="214867" y="2260092"/>
+                  </a:lnTo>
+                  <a:lnTo>
+                    <a:pt x="143245" y="2252796"/>
+                  </a:lnTo>
+                  <a:lnTo>
+                    <a:pt x="71622" y="2245457"/>
+                  </a:lnTo>
+                  <a:lnTo>
+                    <a:pt x="0" y="2238075"/>
                   </a:lnTo>
                   <a:close/>
                 </a:path>
@@ -3513,192 +3516,195 @@
           </p:nvSpPr>
           <p:spPr>
             <a:xfrm>
-              <a:off x="4096026" y="2073503"/>
-              <a:ext cx="4166653" cy="2783880"/>
+              <a:off x="4031102" y="2073503"/>
+              <a:ext cx="4231576" cy="2792190"/>
             </a:xfrm>
             <a:custGeom>
               <a:avLst/>
               <a:pathLst>
-                <a:path w="4166653" h="2783880">
+                <a:path w="4231576" h="2792190">
                   <a:moveTo>
                     <a:pt x="0" y="0"/>
                   </a:moveTo>
                   <a:lnTo>
-                    <a:pt x="12546" y="32282"/>
-                  </a:lnTo>
-                  <a:lnTo>
-                    <a:pt x="84169" y="207224"/>
-                  </a:lnTo>
-                  <a:lnTo>
-                    <a:pt x="155791" y="373299"/>
-                  </a:lnTo>
-                  <a:lnTo>
-                    <a:pt x="227414" y="530957"/>
-                  </a:lnTo>
-                  <a:lnTo>
-                    <a:pt x="299036" y="680623"/>
-                  </a:lnTo>
-                  <a:lnTo>
-                    <a:pt x="370659" y="822703"/>
-                  </a:lnTo>
-                  <a:lnTo>
-                    <a:pt x="442281" y="957582"/>
-                  </a:lnTo>
-                  <a:lnTo>
-                    <a:pt x="513904" y="1085624"/>
-                  </a:lnTo>
-                  <a:lnTo>
-                    <a:pt x="585526" y="1207176"/>
-                  </a:lnTo>
-                  <a:lnTo>
-                    <a:pt x="657149" y="1322568"/>
-                  </a:lnTo>
-                  <a:lnTo>
-                    <a:pt x="728772" y="1432110"/>
-                  </a:lnTo>
-                  <a:lnTo>
-                    <a:pt x="800394" y="1536100"/>
-                  </a:lnTo>
-                  <a:lnTo>
-                    <a:pt x="872017" y="1634819"/>
-                  </a:lnTo>
-                  <a:lnTo>
-                    <a:pt x="943639" y="1728535"/>
-                  </a:lnTo>
-                  <a:lnTo>
-                    <a:pt x="1015262" y="1817500"/>
-                  </a:lnTo>
-                  <a:lnTo>
-                    <a:pt x="1086884" y="1901956"/>
-                  </a:lnTo>
-                  <a:lnTo>
-                    <a:pt x="1158507" y="1982131"/>
-                  </a:lnTo>
-                  <a:lnTo>
-                    <a:pt x="1230129" y="2058243"/>
-                  </a:lnTo>
-                  <a:lnTo>
-                    <a:pt x="1301752" y="2130496"/>
-                  </a:lnTo>
-                  <a:lnTo>
-                    <a:pt x="1373374" y="2199088"/>
-                  </a:lnTo>
-                  <a:lnTo>
-                    <a:pt x="1444997" y="2264203"/>
-                  </a:lnTo>
-                  <a:lnTo>
-                    <a:pt x="1516619" y="2326017"/>
-                  </a:lnTo>
-                  <a:lnTo>
-                    <a:pt x="1588242" y="2384698"/>
-                  </a:lnTo>
-                  <a:lnTo>
-                    <a:pt x="1659864" y="2440405"/>
-                  </a:lnTo>
-                  <a:lnTo>
-                    <a:pt x="1731487" y="2493288"/>
-                  </a:lnTo>
-                  <a:lnTo>
-                    <a:pt x="1803109" y="2543491"/>
-                  </a:lnTo>
-                  <a:lnTo>
-                    <a:pt x="1874732" y="2591149"/>
-                  </a:lnTo>
-                  <a:lnTo>
-                    <a:pt x="1946354" y="2636392"/>
-                  </a:lnTo>
-                  <a:lnTo>
-                    <a:pt x="2017977" y="2656995"/>
-                  </a:lnTo>
-                  <a:lnTo>
-                    <a:pt x="2089600" y="2661574"/>
-                  </a:lnTo>
-                  <a:lnTo>
-                    <a:pt x="2161222" y="2666128"/>
-                  </a:lnTo>
-                  <a:lnTo>
-                    <a:pt x="2232845" y="2670656"/>
-                  </a:lnTo>
-                  <a:lnTo>
-                    <a:pt x="2304467" y="2675159"/>
-                  </a:lnTo>
-                  <a:lnTo>
-                    <a:pt x="2376090" y="2679637"/>
-                  </a:lnTo>
-                  <a:lnTo>
-                    <a:pt x="2447712" y="2684091"/>
-                  </a:lnTo>
-                  <a:lnTo>
-                    <a:pt x="2519335" y="2688520"/>
-                  </a:lnTo>
-                  <a:lnTo>
-                    <a:pt x="2590957" y="2692924"/>
-                  </a:lnTo>
-                  <a:lnTo>
-                    <a:pt x="2662580" y="2697304"/>
-                  </a:lnTo>
-                  <a:lnTo>
-                    <a:pt x="2734202" y="2701659"/>
-                  </a:lnTo>
-                  <a:lnTo>
-                    <a:pt x="2805825" y="2705991"/>
-                  </a:lnTo>
-                  <a:lnTo>
-                    <a:pt x="2877447" y="2710299"/>
-                  </a:lnTo>
-                  <a:lnTo>
-                    <a:pt x="2949070" y="2714582"/>
-                  </a:lnTo>
-                  <a:lnTo>
-                    <a:pt x="3020692" y="2718842"/>
-                  </a:lnTo>
-                  <a:lnTo>
-                    <a:pt x="3092315" y="2723078"/>
-                  </a:lnTo>
-                  <a:lnTo>
-                    <a:pt x="3163937" y="2727291"/>
-                  </a:lnTo>
-                  <a:lnTo>
-                    <a:pt x="3235560" y="2731481"/>
-                  </a:lnTo>
-                  <a:lnTo>
-                    <a:pt x="3307182" y="2735647"/>
-                  </a:lnTo>
-                  <a:lnTo>
-                    <a:pt x="3378805" y="2739791"/>
-                  </a:lnTo>
-                  <a:lnTo>
-                    <a:pt x="3450428" y="2743911"/>
-                  </a:lnTo>
-                  <a:lnTo>
-                    <a:pt x="3522050" y="2748008"/>
-                  </a:lnTo>
-                  <a:lnTo>
-                    <a:pt x="3593673" y="2752083"/>
-                  </a:lnTo>
-                  <a:lnTo>
-                    <a:pt x="3665295" y="2756135"/>
-                  </a:lnTo>
-                  <a:lnTo>
-                    <a:pt x="3736918" y="2760165"/>
-                  </a:lnTo>
-                  <a:lnTo>
-                    <a:pt x="3808540" y="2764173"/>
-                  </a:lnTo>
-                  <a:lnTo>
-                    <a:pt x="3880163" y="2768158"/>
-                  </a:lnTo>
-                  <a:lnTo>
-                    <a:pt x="3951785" y="2772121"/>
-                  </a:lnTo>
-                  <a:lnTo>
-                    <a:pt x="4023408" y="2776063"/>
-                  </a:lnTo>
-                  <a:lnTo>
-                    <a:pt x="4095030" y="2779982"/>
-                  </a:lnTo>
-                  <a:lnTo>
-                    <a:pt x="4166653" y="2783880"/>
+                    <a:pt x="5847" y="14630"/>
+                  </a:lnTo>
+                  <a:lnTo>
+                    <a:pt x="77470" y="185024"/>
+                  </a:lnTo>
+                  <a:lnTo>
+                    <a:pt x="149092" y="347049"/>
+                  </a:lnTo>
+                  <a:lnTo>
+                    <a:pt x="220715" y="501116"/>
+                  </a:lnTo>
+                  <a:lnTo>
+                    <a:pt x="292337" y="647615"/>
+                  </a:lnTo>
+                  <a:lnTo>
+                    <a:pt x="363960" y="786919"/>
+                  </a:lnTo>
+                  <a:lnTo>
+                    <a:pt x="435582" y="919380"/>
+                  </a:lnTo>
+                  <a:lnTo>
+                    <a:pt x="507205" y="1045335"/>
+                  </a:lnTo>
+                  <a:lnTo>
+                    <a:pt x="578827" y="1165104"/>
+                  </a:lnTo>
+                  <a:lnTo>
+                    <a:pt x="650450" y="1278990"/>
+                  </a:lnTo>
+                  <a:lnTo>
+                    <a:pt x="722072" y="1387282"/>
+                  </a:lnTo>
+                  <a:lnTo>
+                    <a:pt x="793695" y="1490255"/>
+                  </a:lnTo>
+                  <a:lnTo>
+                    <a:pt x="865317" y="1588170"/>
+                  </a:lnTo>
+                  <a:lnTo>
+                    <a:pt x="936940" y="1681276"/>
+                  </a:lnTo>
+                  <a:lnTo>
+                    <a:pt x="1008563" y="1769809"/>
+                  </a:lnTo>
+                  <a:lnTo>
+                    <a:pt x="1080185" y="1853993"/>
+                  </a:lnTo>
+                  <a:lnTo>
+                    <a:pt x="1151808" y="1934043"/>
+                  </a:lnTo>
+                  <a:lnTo>
+                    <a:pt x="1223430" y="2010160"/>
+                  </a:lnTo>
+                  <a:lnTo>
+                    <a:pt x="1295053" y="2082539"/>
+                  </a:lnTo>
+                  <a:lnTo>
+                    <a:pt x="1366675" y="2151363"/>
+                  </a:lnTo>
+                  <a:lnTo>
+                    <a:pt x="1438298" y="2216806"/>
+                  </a:lnTo>
+                  <a:lnTo>
+                    <a:pt x="1509920" y="2279035"/>
+                  </a:lnTo>
+                  <a:lnTo>
+                    <a:pt x="1581543" y="2338207"/>
+                  </a:lnTo>
+                  <a:lnTo>
+                    <a:pt x="1653165" y="2394473"/>
+                  </a:lnTo>
+                  <a:lnTo>
+                    <a:pt x="1724788" y="2447976"/>
+                  </a:lnTo>
+                  <a:lnTo>
+                    <a:pt x="1796410" y="2498850"/>
+                  </a:lnTo>
+                  <a:lnTo>
+                    <a:pt x="1868033" y="2547226"/>
+                  </a:lnTo>
+                  <a:lnTo>
+                    <a:pt x="1939655" y="2593225"/>
+                  </a:lnTo>
+                  <a:lnTo>
+                    <a:pt x="2011278" y="2636965"/>
+                  </a:lnTo>
+                  <a:lnTo>
+                    <a:pt x="2082900" y="2657185"/>
+                  </a:lnTo>
+                  <a:lnTo>
+                    <a:pt x="2154523" y="2662084"/>
+                  </a:lnTo>
+                  <a:lnTo>
+                    <a:pt x="2226145" y="2666954"/>
+                  </a:lnTo>
+                  <a:lnTo>
+                    <a:pt x="2297768" y="2671795"/>
+                  </a:lnTo>
+                  <a:lnTo>
+                    <a:pt x="2369391" y="2676607"/>
+                  </a:lnTo>
+                  <a:lnTo>
+                    <a:pt x="2441013" y="2681391"/>
+                  </a:lnTo>
+                  <a:lnTo>
+                    <a:pt x="2512636" y="2686146"/>
+                  </a:lnTo>
+                  <a:lnTo>
+                    <a:pt x="2584258" y="2690873"/>
+                  </a:lnTo>
+                  <a:lnTo>
+                    <a:pt x="2655881" y="2695572"/>
+                  </a:lnTo>
+                  <a:lnTo>
+                    <a:pt x="2727503" y="2700243"/>
+                  </a:lnTo>
+                  <a:lnTo>
+                    <a:pt x="2799126" y="2704887"/>
+                  </a:lnTo>
+                  <a:lnTo>
+                    <a:pt x="2870748" y="2709503"/>
+                  </a:lnTo>
+                  <a:lnTo>
+                    <a:pt x="2942371" y="2714092"/>
+                  </a:lnTo>
+                  <a:lnTo>
+                    <a:pt x="3013993" y="2718653"/>
+                  </a:lnTo>
+                  <a:lnTo>
+                    <a:pt x="3085616" y="2723188"/>
+                  </a:lnTo>
+                  <a:lnTo>
+                    <a:pt x="3157238" y="2727695"/>
+                  </a:lnTo>
+                  <a:lnTo>
+                    <a:pt x="3228861" y="2732176"/>
+                  </a:lnTo>
+                  <a:lnTo>
+                    <a:pt x="3300483" y="2736630"/>
+                  </a:lnTo>
+                  <a:lnTo>
+                    <a:pt x="3372106" y="2741058"/>
+                  </a:lnTo>
+                  <a:lnTo>
+                    <a:pt x="3443728" y="2745460"/>
+                  </a:lnTo>
+                  <a:lnTo>
+                    <a:pt x="3515351" y="2749836"/>
+                  </a:lnTo>
+                  <a:lnTo>
+                    <a:pt x="3586973" y="2754185"/>
+                  </a:lnTo>
+                  <a:lnTo>
+                    <a:pt x="3658596" y="2758509"/>
+                  </a:lnTo>
+                  <a:lnTo>
+                    <a:pt x="3730219" y="2762807"/>
+                  </a:lnTo>
+                  <a:lnTo>
+                    <a:pt x="3801841" y="2767080"/>
+                  </a:lnTo>
+                  <a:lnTo>
+                    <a:pt x="3873464" y="2771327"/>
+                  </a:lnTo>
+                  <a:lnTo>
+                    <a:pt x="3945086" y="2775550"/>
+                  </a:lnTo>
+                  <a:lnTo>
+                    <a:pt x="4016709" y="2779747"/>
+                  </a:lnTo>
+                  <a:lnTo>
+                    <a:pt x="4088331" y="2783919"/>
+                  </a:lnTo>
+                  <a:lnTo>
+                    <a:pt x="4159954" y="2788067"/>
+                  </a:lnTo>
+                  <a:lnTo>
+                    <a:pt x="4231576" y="2792190"/>
                   </a:lnTo>
                 </a:path>
               </a:pathLst>
@@ -3718,309 +3724,309 @@
           </p:nvSpPr>
           <p:spPr>
             <a:xfrm>
-              <a:off x="1172049" y="4344414"/>
-              <a:ext cx="7090630" cy="1043882"/>
+              <a:off x="1172049" y="4311578"/>
+              <a:ext cx="7090630" cy="1067965"/>
             </a:xfrm>
             <a:custGeom>
               <a:avLst/>
               <a:pathLst>
-                <a:path w="7090630" h="1043882">
+                <a:path w="7090630" h="1067965">
                   <a:moveTo>
-                    <a:pt x="7090630" y="1043882"/>
+                    <a:pt x="7090630" y="1067965"/>
                   </a:moveTo>
                   <a:lnTo>
-                    <a:pt x="7019007" y="1034861"/>
-                  </a:lnTo>
-                  <a:lnTo>
-                    <a:pt x="6947385" y="1025358"/>
-                  </a:lnTo>
-                  <a:lnTo>
-                    <a:pt x="6875762" y="1015348"/>
-                  </a:lnTo>
-                  <a:lnTo>
-                    <a:pt x="6804139" y="1004804"/>
-                  </a:lnTo>
-                  <a:lnTo>
-                    <a:pt x="6732517" y="993697"/>
-                  </a:lnTo>
-                  <a:lnTo>
-                    <a:pt x="6660894" y="981996"/>
-                  </a:lnTo>
-                  <a:lnTo>
-                    <a:pt x="6589272" y="969671"/>
-                  </a:lnTo>
-                  <a:lnTo>
-                    <a:pt x="6517649" y="956688"/>
-                  </a:lnTo>
-                  <a:lnTo>
-                    <a:pt x="6446027" y="943012"/>
-                  </a:lnTo>
-                  <a:lnTo>
-                    <a:pt x="6374404" y="928605"/>
-                  </a:lnTo>
-                  <a:lnTo>
-                    <a:pt x="6302782" y="913430"/>
-                  </a:lnTo>
-                  <a:lnTo>
-                    <a:pt x="6231159" y="897443"/>
-                  </a:lnTo>
-                  <a:lnTo>
-                    <a:pt x="6159537" y="880604"/>
-                  </a:lnTo>
-                  <a:lnTo>
-                    <a:pt x="6087914" y="862865"/>
-                  </a:lnTo>
-                  <a:lnTo>
-                    <a:pt x="6016292" y="844179"/>
-                  </a:lnTo>
-                  <a:lnTo>
-                    <a:pt x="5944669" y="824496"/>
-                  </a:lnTo>
-                  <a:lnTo>
-                    <a:pt x="5873047" y="803761"/>
-                  </a:lnTo>
-                  <a:lnTo>
-                    <a:pt x="5801424" y="781920"/>
-                  </a:lnTo>
-                  <a:lnTo>
-                    <a:pt x="5729802" y="758912"/>
-                  </a:lnTo>
-                  <a:lnTo>
-                    <a:pt x="5658179" y="734676"/>
-                  </a:lnTo>
-                  <a:lnTo>
-                    <a:pt x="5586557" y="709146"/>
-                  </a:lnTo>
-                  <a:lnTo>
-                    <a:pt x="5514934" y="682253"/>
-                  </a:lnTo>
-                  <a:lnTo>
-                    <a:pt x="5443311" y="653923"/>
-                  </a:lnTo>
-                  <a:lnTo>
-                    <a:pt x="5371689" y="624082"/>
-                  </a:lnTo>
-                  <a:lnTo>
-                    <a:pt x="5300066" y="592646"/>
-                  </a:lnTo>
-                  <a:lnTo>
-                    <a:pt x="5228444" y="559533"/>
-                  </a:lnTo>
-                  <a:lnTo>
-                    <a:pt x="5156821" y="524651"/>
-                  </a:lnTo>
-                  <a:lnTo>
-                    <a:pt x="5085199" y="487907"/>
-                  </a:lnTo>
-                  <a:lnTo>
-                    <a:pt x="5013576" y="449202"/>
-                  </a:lnTo>
-                  <a:lnTo>
-                    <a:pt x="4941954" y="408429"/>
-                  </a:lnTo>
-                  <a:lnTo>
-                    <a:pt x="4870331" y="381479"/>
-                  </a:lnTo>
-                  <a:lnTo>
-                    <a:pt x="4798709" y="376849"/>
-                  </a:lnTo>
-                  <a:lnTo>
-                    <a:pt x="4727086" y="372193"/>
-                  </a:lnTo>
-                  <a:lnTo>
-                    <a:pt x="4655464" y="367512"/>
-                  </a:lnTo>
-                  <a:lnTo>
-                    <a:pt x="4583841" y="362804"/>
-                  </a:lnTo>
-                  <a:lnTo>
-                    <a:pt x="4512219" y="358070"/>
-                  </a:lnTo>
-                  <a:lnTo>
-                    <a:pt x="4440596" y="353309"/>
-                  </a:lnTo>
-                  <a:lnTo>
-                    <a:pt x="4368974" y="348522"/>
-                  </a:lnTo>
-                  <a:lnTo>
-                    <a:pt x="4297351" y="343709"/>
-                  </a:lnTo>
-                  <a:lnTo>
-                    <a:pt x="4225729" y="338868"/>
-                  </a:lnTo>
-                  <a:lnTo>
-                    <a:pt x="4154106" y="334001"/>
-                  </a:lnTo>
-                  <a:lnTo>
-                    <a:pt x="4082483" y="329107"/>
-                  </a:lnTo>
-                  <a:lnTo>
-                    <a:pt x="4010861" y="324185"/>
-                  </a:lnTo>
-                  <a:lnTo>
-                    <a:pt x="3939238" y="319236"/>
-                  </a:lnTo>
-                  <a:lnTo>
-                    <a:pt x="3867616" y="314259"/>
-                  </a:lnTo>
-                  <a:lnTo>
-                    <a:pt x="3795993" y="309255"/>
-                  </a:lnTo>
-                  <a:lnTo>
-                    <a:pt x="3724371" y="304222"/>
-                  </a:lnTo>
-                  <a:lnTo>
-                    <a:pt x="3652748" y="299162"/>
-                  </a:lnTo>
-                  <a:lnTo>
-                    <a:pt x="3581126" y="294074"/>
-                  </a:lnTo>
-                  <a:lnTo>
-                    <a:pt x="3509503" y="288957"/>
-                  </a:lnTo>
-                  <a:lnTo>
-                    <a:pt x="3437881" y="283812"/>
-                  </a:lnTo>
-                  <a:lnTo>
-                    <a:pt x="3366258" y="278638"/>
-                  </a:lnTo>
-                  <a:lnTo>
-                    <a:pt x="3294636" y="273435"/>
-                  </a:lnTo>
-                  <a:lnTo>
-                    <a:pt x="3223013" y="268203"/>
-                  </a:lnTo>
-                  <a:lnTo>
-                    <a:pt x="3151391" y="262942"/>
-                  </a:lnTo>
-                  <a:lnTo>
-                    <a:pt x="3079768" y="257652"/>
-                  </a:lnTo>
-                  <a:lnTo>
-                    <a:pt x="3008146" y="252332"/>
-                  </a:lnTo>
-                  <a:lnTo>
-                    <a:pt x="2936523" y="246983"/>
-                  </a:lnTo>
-                  <a:lnTo>
-                    <a:pt x="2864901" y="241604"/>
-                  </a:lnTo>
-                  <a:lnTo>
-                    <a:pt x="2793278" y="236195"/>
-                  </a:lnTo>
-                  <a:lnTo>
-                    <a:pt x="2721655" y="230756"/>
-                  </a:lnTo>
-                  <a:lnTo>
-                    <a:pt x="2650033" y="225286"/>
-                  </a:lnTo>
-                  <a:lnTo>
-                    <a:pt x="2578410" y="219786"/>
-                  </a:lnTo>
-                  <a:lnTo>
-                    <a:pt x="2506788" y="214256"/>
-                  </a:lnTo>
-                  <a:lnTo>
-                    <a:pt x="2435165" y="208695"/>
-                  </a:lnTo>
-                  <a:lnTo>
-                    <a:pt x="2363543" y="203102"/>
-                  </a:lnTo>
-                  <a:lnTo>
-                    <a:pt x="2291920" y="197479"/>
-                  </a:lnTo>
-                  <a:lnTo>
-                    <a:pt x="2220298" y="191824"/>
-                  </a:lnTo>
-                  <a:lnTo>
-                    <a:pt x="2148675" y="186138"/>
-                  </a:lnTo>
-                  <a:lnTo>
-                    <a:pt x="2077053" y="180420"/>
-                  </a:lnTo>
-                  <a:lnTo>
-                    <a:pt x="2005430" y="174670"/>
-                  </a:lnTo>
-                  <a:lnTo>
-                    <a:pt x="1933808" y="168888"/>
-                  </a:lnTo>
-                  <a:lnTo>
-                    <a:pt x="1862185" y="163074"/>
-                  </a:lnTo>
-                  <a:lnTo>
-                    <a:pt x="1790563" y="157228"/>
-                  </a:lnTo>
-                  <a:lnTo>
-                    <a:pt x="1718940" y="151349"/>
-                  </a:lnTo>
-                  <a:lnTo>
-                    <a:pt x="1647318" y="145437"/>
-                  </a:lnTo>
-                  <a:lnTo>
-                    <a:pt x="1575695" y="139493"/>
-                  </a:lnTo>
-                  <a:lnTo>
-                    <a:pt x="1504073" y="133515"/>
-                  </a:lnTo>
-                  <a:lnTo>
-                    <a:pt x="1432450" y="127504"/>
-                  </a:lnTo>
-                  <a:lnTo>
-                    <a:pt x="1360827" y="121459"/>
-                  </a:lnTo>
-                  <a:lnTo>
-                    <a:pt x="1289205" y="115381"/>
-                  </a:lnTo>
-                  <a:lnTo>
-                    <a:pt x="1217582" y="109269"/>
-                  </a:lnTo>
-                  <a:lnTo>
-                    <a:pt x="1145960" y="103123"/>
-                  </a:lnTo>
-                  <a:lnTo>
-                    <a:pt x="1074337" y="96943"/>
-                  </a:lnTo>
-                  <a:lnTo>
-                    <a:pt x="1002715" y="90728"/>
-                  </a:lnTo>
-                  <a:lnTo>
-                    <a:pt x="931092" y="84479"/>
-                  </a:lnTo>
-                  <a:lnTo>
-                    <a:pt x="859470" y="78195"/>
-                  </a:lnTo>
-                  <a:lnTo>
-                    <a:pt x="787847" y="71876"/>
-                  </a:lnTo>
-                  <a:lnTo>
-                    <a:pt x="716225" y="65522"/>
-                  </a:lnTo>
-                  <a:lnTo>
-                    <a:pt x="644602" y="59132"/>
-                  </a:lnTo>
-                  <a:lnTo>
-                    <a:pt x="572980" y="52707"/>
-                  </a:lnTo>
-                  <a:lnTo>
-                    <a:pt x="501357" y="46246"/>
-                  </a:lnTo>
-                  <a:lnTo>
-                    <a:pt x="429735" y="39749"/>
-                  </a:lnTo>
-                  <a:lnTo>
-                    <a:pt x="358112" y="33215"/>
-                  </a:lnTo>
-                  <a:lnTo>
-                    <a:pt x="286490" y="26646"/>
-                  </a:lnTo>
-                  <a:lnTo>
-                    <a:pt x="214867" y="20040"/>
-                  </a:lnTo>
-                  <a:lnTo>
-                    <a:pt x="143245" y="13397"/>
-                  </a:lnTo>
-                  <a:lnTo>
-                    <a:pt x="71622" y="6717"/>
+                    <a:pt x="7019007" y="1058785"/>
+                  </a:lnTo>
+                  <a:lnTo>
+                    <a:pt x="6947385" y="1049132"/>
+                  </a:lnTo>
+                  <a:lnTo>
+                    <a:pt x="6875762" y="1038979"/>
+                  </a:lnTo>
+                  <a:lnTo>
+                    <a:pt x="6804139" y="1028303"/>
+                  </a:lnTo>
+                  <a:lnTo>
+                    <a:pt x="6732517" y="1017075"/>
+                  </a:lnTo>
+                  <a:lnTo>
+                    <a:pt x="6660894" y="1005267"/>
+                  </a:lnTo>
+                  <a:lnTo>
+                    <a:pt x="6589272" y="992849"/>
+                  </a:lnTo>
+                  <a:lnTo>
+                    <a:pt x="6517649" y="979789"/>
+                  </a:lnTo>
+                  <a:lnTo>
+                    <a:pt x="6446027" y="966055"/>
+                  </a:lnTo>
+                  <a:lnTo>
+                    <a:pt x="6374404" y="951612"/>
+                  </a:lnTo>
+                  <a:lnTo>
+                    <a:pt x="6302782" y="936422"/>
+                  </a:lnTo>
+                  <a:lnTo>
+                    <a:pt x="6231159" y="920448"/>
+                  </a:lnTo>
+                  <a:lnTo>
+                    <a:pt x="6159537" y="903649"/>
+                  </a:lnTo>
+                  <a:lnTo>
+                    <a:pt x="6087914" y="885982"/>
+                  </a:lnTo>
+                  <a:lnTo>
+                    <a:pt x="6016292" y="867402"/>
+                  </a:lnTo>
+                  <a:lnTo>
+                    <a:pt x="5944669" y="847863"/>
+                  </a:lnTo>
+                  <a:lnTo>
+                    <a:pt x="5873047" y="827314"/>
+                  </a:lnTo>
+                  <a:lnTo>
+                    <a:pt x="5801424" y="805704"/>
+                  </a:lnTo>
+                  <a:lnTo>
+                    <a:pt x="5729802" y="782978"/>
+                  </a:lnTo>
+                  <a:lnTo>
+                    <a:pt x="5658179" y="759077"/>
+                  </a:lnTo>
+                  <a:lnTo>
+                    <a:pt x="5586557" y="733943"/>
+                  </a:lnTo>
+                  <a:lnTo>
+                    <a:pt x="5514934" y="707509"/>
+                  </a:lnTo>
+                  <a:lnTo>
+                    <a:pt x="5443311" y="679711"/>
+                  </a:lnTo>
+                  <a:lnTo>
+                    <a:pt x="5371689" y="650476"/>
+                  </a:lnTo>
+                  <a:lnTo>
+                    <a:pt x="5300066" y="619732"/>
+                  </a:lnTo>
+                  <a:lnTo>
+                    <a:pt x="5228444" y="587399"/>
+                  </a:lnTo>
+                  <a:lnTo>
+                    <a:pt x="5156821" y="553396"/>
+                  </a:lnTo>
+                  <a:lnTo>
+                    <a:pt x="5085199" y="517637"/>
+                  </a:lnTo>
+                  <a:lnTo>
+                    <a:pt x="5013576" y="480031"/>
+                  </a:lnTo>
+                  <a:lnTo>
+                    <a:pt x="4941954" y="440482"/>
+                  </a:lnTo>
+                  <a:lnTo>
+                    <a:pt x="4870331" y="414182"/>
+                  </a:lnTo>
+                  <a:lnTo>
+                    <a:pt x="4798709" y="409225"/>
+                  </a:lnTo>
+                  <a:lnTo>
+                    <a:pt x="4727086" y="404238"/>
+                  </a:lnTo>
+                  <a:lnTo>
+                    <a:pt x="4655464" y="399222"/>
+                  </a:lnTo>
+                  <a:lnTo>
+                    <a:pt x="4583841" y="394175"/>
+                  </a:lnTo>
+                  <a:lnTo>
+                    <a:pt x="4512219" y="389098"/>
+                  </a:lnTo>
+                  <a:lnTo>
+                    <a:pt x="4440596" y="383992"/>
+                  </a:lnTo>
+                  <a:lnTo>
+                    <a:pt x="4368974" y="378854"/>
+                  </a:lnTo>
+                  <a:lnTo>
+                    <a:pt x="4297351" y="373686"/>
+                  </a:lnTo>
+                  <a:lnTo>
+                    <a:pt x="4225729" y="368487"/>
+                  </a:lnTo>
+                  <a:lnTo>
+                    <a:pt x="4154106" y="363258"/>
+                  </a:lnTo>
+                  <a:lnTo>
+                    <a:pt x="4082483" y="357997"/>
+                  </a:lnTo>
+                  <a:lnTo>
+                    <a:pt x="4010861" y="352704"/>
+                  </a:lnTo>
+                  <a:lnTo>
+                    <a:pt x="3939238" y="347381"/>
+                  </a:lnTo>
+                  <a:lnTo>
+                    <a:pt x="3867616" y="342025"/>
+                  </a:lnTo>
+                  <a:lnTo>
+                    <a:pt x="3795993" y="336637"/>
+                  </a:lnTo>
+                  <a:lnTo>
+                    <a:pt x="3724371" y="331218"/>
+                  </a:lnTo>
+                  <a:lnTo>
+                    <a:pt x="3652748" y="325766"/>
+                  </a:lnTo>
+                  <a:lnTo>
+                    <a:pt x="3581126" y="320281"/>
+                  </a:lnTo>
+                  <a:lnTo>
+                    <a:pt x="3509503" y="314764"/>
+                  </a:lnTo>
+                  <a:lnTo>
+                    <a:pt x="3437881" y="309214"/>
+                  </a:lnTo>
+                  <a:lnTo>
+                    <a:pt x="3366258" y="303631"/>
+                  </a:lnTo>
+                  <a:lnTo>
+                    <a:pt x="3294636" y="298014"/>
+                  </a:lnTo>
+                  <a:lnTo>
+                    <a:pt x="3223013" y="292365"/>
+                  </a:lnTo>
+                  <a:lnTo>
+                    <a:pt x="3151391" y="286681"/>
+                  </a:lnTo>
+                  <a:lnTo>
+                    <a:pt x="3079768" y="280963"/>
+                  </a:lnTo>
+                  <a:lnTo>
+                    <a:pt x="3008146" y="275212"/>
+                  </a:lnTo>
+                  <a:lnTo>
+                    <a:pt x="2936523" y="269426"/>
+                  </a:lnTo>
+                  <a:lnTo>
+                    <a:pt x="2864901" y="263606"/>
+                  </a:lnTo>
+                  <a:lnTo>
+                    <a:pt x="2793278" y="257750"/>
+                  </a:lnTo>
+                  <a:lnTo>
+                    <a:pt x="2721655" y="251860"/>
+                  </a:lnTo>
+                  <a:lnTo>
+                    <a:pt x="2650033" y="245935"/>
+                  </a:lnTo>
+                  <a:lnTo>
+                    <a:pt x="2578410" y="239975"/>
+                  </a:lnTo>
+                  <a:lnTo>
+                    <a:pt x="2506788" y="233979"/>
+                  </a:lnTo>
+                  <a:lnTo>
+                    <a:pt x="2435165" y="227947"/>
+                  </a:lnTo>
+                  <a:lnTo>
+                    <a:pt x="2363543" y="221880"/>
+                  </a:lnTo>
+                  <a:lnTo>
+                    <a:pt x="2291920" y="215776"/>
+                  </a:lnTo>
+                  <a:lnTo>
+                    <a:pt x="2220298" y="209636"/>
+                  </a:lnTo>
+                  <a:lnTo>
+                    <a:pt x="2148675" y="203459"/>
+                  </a:lnTo>
+                  <a:lnTo>
+                    <a:pt x="2077053" y="197245"/>
+                  </a:lnTo>
+                  <a:lnTo>
+                    <a:pt x="2005430" y="190994"/>
+                  </a:lnTo>
+                  <a:lnTo>
+                    <a:pt x="1933808" y="184706"/>
+                  </a:lnTo>
+                  <a:lnTo>
+                    <a:pt x="1862185" y="178381"/>
+                  </a:lnTo>
+                  <a:lnTo>
+                    <a:pt x="1790563" y="172018"/>
+                  </a:lnTo>
+                  <a:lnTo>
+                    <a:pt x="1718940" y="165616"/>
+                  </a:lnTo>
+                  <a:lnTo>
+                    <a:pt x="1647318" y="159177"/>
+                  </a:lnTo>
+                  <a:lnTo>
+                    <a:pt x="1575695" y="152700"/>
+                  </a:lnTo>
+                  <a:lnTo>
+                    <a:pt x="1504073" y="146183"/>
+                  </a:lnTo>
+                  <a:lnTo>
+                    <a:pt x="1432450" y="139628"/>
+                  </a:lnTo>
+                  <a:lnTo>
+                    <a:pt x="1360827" y="133034"/>
+                  </a:lnTo>
+                  <a:lnTo>
+                    <a:pt x="1289205" y="126400"/>
+                  </a:lnTo>
+                  <a:lnTo>
+                    <a:pt x="1217582" y="119727"/>
+                  </a:lnTo>
+                  <a:lnTo>
+                    <a:pt x="1145960" y="113014"/>
+                  </a:lnTo>
+                  <a:lnTo>
+                    <a:pt x="1074337" y="106261"/>
+                  </a:lnTo>
+                  <a:lnTo>
+                    <a:pt x="1002715" y="99468"/>
+                  </a:lnTo>
+                  <a:lnTo>
+                    <a:pt x="931092" y="92635"/>
+                  </a:lnTo>
+                  <a:lnTo>
+                    <a:pt x="859470" y="85760"/>
+                  </a:lnTo>
+                  <a:lnTo>
+                    <a:pt x="787847" y="78845"/>
+                  </a:lnTo>
+                  <a:lnTo>
+                    <a:pt x="716225" y="71888"/>
+                  </a:lnTo>
+                  <a:lnTo>
+                    <a:pt x="644602" y="64890"/>
+                  </a:lnTo>
+                  <a:lnTo>
+                    <a:pt x="572980" y="57850"/>
+                  </a:lnTo>
+                  <a:lnTo>
+                    <a:pt x="501357" y="50768"/>
+                  </a:lnTo>
+                  <a:lnTo>
+                    <a:pt x="429735" y="43644"/>
+                  </a:lnTo>
+                  <a:lnTo>
+                    <a:pt x="358112" y="36478"/>
+                  </a:lnTo>
+                  <a:lnTo>
+                    <a:pt x="286490" y="29269"/>
+                  </a:lnTo>
+                  <a:lnTo>
+                    <a:pt x="214867" y="22017"/>
+                  </a:lnTo>
+                  <a:lnTo>
+                    <a:pt x="143245" y="14721"/>
+                  </a:lnTo>
+                  <a:lnTo>
+                    <a:pt x="71622" y="7382"/>
                   </a:lnTo>
                   <a:lnTo>
                     <a:pt x="0" y="0"/>
@@ -4043,258 +4049,261 @@
           </p:nvSpPr>
           <p:spPr>
             <a:xfrm>
-              <a:off x="2501250" y="2073503"/>
-              <a:ext cx="5761428" cy="3139879"/>
+              <a:off x="2421290" y="2073503"/>
+              <a:ext cx="5841388" cy="3133184"/>
             </a:xfrm>
             <a:custGeom>
               <a:avLst/>
               <a:pathLst>
-                <a:path w="5761428" h="3139879">
+                <a:path w="5841388" h="3133184">
                   <a:moveTo>
                     <a:pt x="0" y="0"/>
                   </a:moveTo>
                   <a:lnTo>
-                    <a:pt x="31626" y="44352"/>
-                  </a:lnTo>
-                  <a:lnTo>
-                    <a:pt x="103249" y="141943"/>
-                  </a:lnTo>
-                  <a:lnTo>
-                    <a:pt x="174871" y="236765"/>
-                  </a:lnTo>
-                  <a:lnTo>
-                    <a:pt x="246494" y="328897"/>
-                  </a:lnTo>
-                  <a:lnTo>
-                    <a:pt x="318116" y="418415"/>
-                  </a:lnTo>
-                  <a:lnTo>
-                    <a:pt x="389739" y="505392"/>
-                  </a:lnTo>
-                  <a:lnTo>
-                    <a:pt x="461361" y="589902"/>
-                  </a:lnTo>
-                  <a:lnTo>
-                    <a:pt x="532984" y="672014"/>
-                  </a:lnTo>
-                  <a:lnTo>
-                    <a:pt x="604606" y="751795"/>
-                  </a:lnTo>
-                  <a:lnTo>
-                    <a:pt x="676229" y="829313"/>
-                  </a:lnTo>
-                  <a:lnTo>
-                    <a:pt x="747851" y="904632"/>
-                  </a:lnTo>
-                  <a:lnTo>
-                    <a:pt x="819474" y="977813"/>
-                  </a:lnTo>
-                  <a:lnTo>
-                    <a:pt x="891096" y="1048918"/>
-                  </a:lnTo>
-                  <a:lnTo>
-                    <a:pt x="962719" y="1118005"/>
-                  </a:lnTo>
-                  <a:lnTo>
-                    <a:pt x="1034341" y="1185132"/>
-                  </a:lnTo>
-                  <a:lnTo>
-                    <a:pt x="1105964" y="1250355"/>
-                  </a:lnTo>
-                  <a:lnTo>
-                    <a:pt x="1177586" y="1313726"/>
-                  </a:lnTo>
-                  <a:lnTo>
-                    <a:pt x="1249209" y="1375300"/>
-                  </a:lnTo>
-                  <a:lnTo>
-                    <a:pt x="1320831" y="1435126"/>
-                  </a:lnTo>
-                  <a:lnTo>
-                    <a:pt x="1392454" y="1493255"/>
-                  </a:lnTo>
-                  <a:lnTo>
-                    <a:pt x="1464077" y="1549734"/>
-                  </a:lnTo>
-                  <a:lnTo>
-                    <a:pt x="1535699" y="1604611"/>
-                  </a:lnTo>
-                  <a:lnTo>
-                    <a:pt x="1607322" y="1657931"/>
-                  </a:lnTo>
-                  <a:lnTo>
-                    <a:pt x="1678944" y="1709738"/>
-                  </a:lnTo>
-                  <a:lnTo>
-                    <a:pt x="1750567" y="1760074"/>
-                  </a:lnTo>
-                  <a:lnTo>
-                    <a:pt x="1822189" y="1808983"/>
-                  </a:lnTo>
-                  <a:lnTo>
-                    <a:pt x="1893812" y="1856504"/>
-                  </a:lnTo>
-                  <a:lnTo>
-                    <a:pt x="1965434" y="1902676"/>
-                  </a:lnTo>
-                  <a:lnTo>
-                    <a:pt x="2037057" y="1947538"/>
-                  </a:lnTo>
-                  <a:lnTo>
-                    <a:pt x="2108679" y="1991128"/>
-                  </a:lnTo>
-                  <a:lnTo>
-                    <a:pt x="2180302" y="2033480"/>
-                  </a:lnTo>
-                  <a:lnTo>
-                    <a:pt x="2251924" y="2074631"/>
-                  </a:lnTo>
-                  <a:lnTo>
-                    <a:pt x="2323547" y="2114614"/>
-                  </a:lnTo>
-                  <a:lnTo>
-                    <a:pt x="2395169" y="2153462"/>
-                  </a:lnTo>
-                  <a:lnTo>
-                    <a:pt x="2466792" y="2191209"/>
-                  </a:lnTo>
-                  <a:lnTo>
-                    <a:pt x="2538414" y="2227884"/>
-                  </a:lnTo>
-                  <a:lnTo>
-                    <a:pt x="2610037" y="2263519"/>
-                  </a:lnTo>
-                  <a:lnTo>
-                    <a:pt x="2681659" y="2298142"/>
-                  </a:lnTo>
-                  <a:lnTo>
-                    <a:pt x="2753282" y="2331783"/>
-                  </a:lnTo>
-                  <a:lnTo>
-                    <a:pt x="2824905" y="2364470"/>
-                  </a:lnTo>
-                  <a:lnTo>
-                    <a:pt x="2896527" y="2396229"/>
-                  </a:lnTo>
-                  <a:lnTo>
-                    <a:pt x="2968150" y="2427086"/>
-                  </a:lnTo>
-                  <a:lnTo>
-                    <a:pt x="3039772" y="2457069"/>
-                  </a:lnTo>
-                  <a:lnTo>
-                    <a:pt x="3111395" y="2486200"/>
-                  </a:lnTo>
-                  <a:lnTo>
-                    <a:pt x="3183017" y="2514505"/>
-                  </a:lnTo>
-                  <a:lnTo>
-                    <a:pt x="3254640" y="2542007"/>
-                  </a:lnTo>
-                  <a:lnTo>
-                    <a:pt x="3326262" y="2568729"/>
-                  </a:lnTo>
-                  <a:lnTo>
-                    <a:pt x="3397885" y="2594692"/>
-                  </a:lnTo>
-                  <a:lnTo>
-                    <a:pt x="3469507" y="2619918"/>
-                  </a:lnTo>
-                  <a:lnTo>
-                    <a:pt x="3541130" y="2644429"/>
-                  </a:lnTo>
-                  <a:lnTo>
-                    <a:pt x="3612752" y="2668245"/>
-                  </a:lnTo>
-                  <a:lnTo>
-                    <a:pt x="3684375" y="2691384"/>
-                  </a:lnTo>
-                  <a:lnTo>
-                    <a:pt x="3755997" y="2713867"/>
-                  </a:lnTo>
-                  <a:lnTo>
-                    <a:pt x="3827620" y="2735712"/>
-                  </a:lnTo>
-                  <a:lnTo>
-                    <a:pt x="3899242" y="2756937"/>
-                  </a:lnTo>
-                  <a:lnTo>
-                    <a:pt x="3970865" y="2777560"/>
-                  </a:lnTo>
-                  <a:lnTo>
-                    <a:pt x="4042487" y="2797598"/>
-                  </a:lnTo>
-                  <a:lnTo>
-                    <a:pt x="4114110" y="2817067"/>
-                  </a:lnTo>
-                  <a:lnTo>
-                    <a:pt x="4185733" y="2835984"/>
-                  </a:lnTo>
-                  <a:lnTo>
-                    <a:pt x="4257355" y="2854364"/>
-                  </a:lnTo>
-                  <a:lnTo>
-                    <a:pt x="4328978" y="2872222"/>
-                  </a:lnTo>
-                  <a:lnTo>
-                    <a:pt x="4400600" y="2889574"/>
-                  </a:lnTo>
-                  <a:lnTo>
-                    <a:pt x="4472223" y="2906434"/>
-                  </a:lnTo>
-                  <a:lnTo>
-                    <a:pt x="4543845" y="2922815"/>
-                  </a:lnTo>
-                  <a:lnTo>
-                    <a:pt x="4615468" y="2938731"/>
-                  </a:lnTo>
-                  <a:lnTo>
-                    <a:pt x="4687090" y="2954195"/>
-                  </a:lnTo>
-                  <a:lnTo>
-                    <a:pt x="4758713" y="2969221"/>
-                  </a:lnTo>
-                  <a:lnTo>
-                    <a:pt x="4830335" y="2983821"/>
-                  </a:lnTo>
-                  <a:lnTo>
-                    <a:pt x="4901958" y="2998006"/>
-                  </a:lnTo>
-                  <a:lnTo>
-                    <a:pt x="4973580" y="3011788"/>
-                  </a:lnTo>
-                  <a:lnTo>
-                    <a:pt x="5045203" y="3025180"/>
-                  </a:lnTo>
-                  <a:lnTo>
-                    <a:pt x="5116825" y="3038192"/>
-                  </a:lnTo>
-                  <a:lnTo>
-                    <a:pt x="5188448" y="3050834"/>
-                  </a:lnTo>
-                  <a:lnTo>
-                    <a:pt x="5260070" y="3063118"/>
-                  </a:lnTo>
-                  <a:lnTo>
-                    <a:pt x="5331693" y="3075053"/>
-                  </a:lnTo>
-                  <a:lnTo>
-                    <a:pt x="5403315" y="3086650"/>
-                  </a:lnTo>
-                  <a:lnTo>
-                    <a:pt x="5474938" y="3097917"/>
-                  </a:lnTo>
-                  <a:lnTo>
-                    <a:pt x="5546561" y="3108865"/>
-                  </a:lnTo>
-                  <a:lnTo>
-                    <a:pt x="5618183" y="3119502"/>
-                  </a:lnTo>
-                  <a:lnTo>
-                    <a:pt x="5689806" y="3129837"/>
-                  </a:lnTo>
-                  <a:lnTo>
-                    <a:pt x="5761428" y="3139879"/>
+                    <a:pt x="39964" y="54635"/>
+                  </a:lnTo>
+                  <a:lnTo>
+                    <a:pt x="111586" y="149834"/>
+                  </a:lnTo>
+                  <a:lnTo>
+                    <a:pt x="183209" y="242390"/>
+                  </a:lnTo>
+                  <a:lnTo>
+                    <a:pt x="254831" y="332376"/>
+                  </a:lnTo>
+                  <a:lnTo>
+                    <a:pt x="326454" y="419864"/>
+                  </a:lnTo>
+                  <a:lnTo>
+                    <a:pt x="398076" y="504923"/>
+                  </a:lnTo>
+                  <a:lnTo>
+                    <a:pt x="469699" y="587621"/>
+                  </a:lnTo>
+                  <a:lnTo>
+                    <a:pt x="541321" y="668023"/>
+                  </a:lnTo>
+                  <a:lnTo>
+                    <a:pt x="612944" y="746192"/>
+                  </a:lnTo>
+                  <a:lnTo>
+                    <a:pt x="684566" y="822192"/>
+                  </a:lnTo>
+                  <a:lnTo>
+                    <a:pt x="756189" y="896082"/>
+                  </a:lnTo>
+                  <a:lnTo>
+                    <a:pt x="827811" y="967920"/>
+                  </a:lnTo>
+                  <a:lnTo>
+                    <a:pt x="899434" y="1037764"/>
+                  </a:lnTo>
+                  <a:lnTo>
+                    <a:pt x="971056" y="1105669"/>
+                  </a:lnTo>
+                  <a:lnTo>
+                    <a:pt x="1042679" y="1171689"/>
+                  </a:lnTo>
+                  <a:lnTo>
+                    <a:pt x="1114302" y="1235876"/>
+                  </a:lnTo>
+                  <a:lnTo>
+                    <a:pt x="1185924" y="1298281"/>
+                  </a:lnTo>
+                  <a:lnTo>
+                    <a:pt x="1257547" y="1358954"/>
+                  </a:lnTo>
+                  <a:lnTo>
+                    <a:pt x="1329169" y="1417942"/>
+                  </a:lnTo>
+                  <a:lnTo>
+                    <a:pt x="1400792" y="1475293"/>
+                  </a:lnTo>
+                  <a:lnTo>
+                    <a:pt x="1472414" y="1531051"/>
+                  </a:lnTo>
+                  <a:lnTo>
+                    <a:pt x="1544037" y="1585262"/>
+                  </a:lnTo>
+                  <a:lnTo>
+                    <a:pt x="1615659" y="1637967"/>
+                  </a:lnTo>
+                  <a:lnTo>
+                    <a:pt x="1687282" y="1689210"/>
+                  </a:lnTo>
+                  <a:lnTo>
+                    <a:pt x="1758904" y="1739029"/>
+                  </a:lnTo>
+                  <a:lnTo>
+                    <a:pt x="1830527" y="1787466"/>
+                  </a:lnTo>
+                  <a:lnTo>
+                    <a:pt x="1902149" y="1834558"/>
+                  </a:lnTo>
+                  <a:lnTo>
+                    <a:pt x="1973772" y="1880342"/>
+                  </a:lnTo>
+                  <a:lnTo>
+                    <a:pt x="2045394" y="1924856"/>
+                  </a:lnTo>
+                  <a:lnTo>
+                    <a:pt x="2117017" y="1968134"/>
+                  </a:lnTo>
+                  <a:lnTo>
+                    <a:pt x="2188639" y="2010210"/>
+                  </a:lnTo>
+                  <a:lnTo>
+                    <a:pt x="2260262" y="2051118"/>
+                  </a:lnTo>
+                  <a:lnTo>
+                    <a:pt x="2331884" y="2090891"/>
+                  </a:lnTo>
+                  <a:lnTo>
+                    <a:pt x="2403507" y="2129559"/>
+                  </a:lnTo>
+                  <a:lnTo>
+                    <a:pt x="2475130" y="2167154"/>
+                  </a:lnTo>
+                  <a:lnTo>
+                    <a:pt x="2546752" y="2203705"/>
+                  </a:lnTo>
+                  <a:lnTo>
+                    <a:pt x="2618375" y="2239241"/>
+                  </a:lnTo>
+                  <a:lnTo>
+                    <a:pt x="2689997" y="2273791"/>
+                  </a:lnTo>
+                  <a:lnTo>
+                    <a:pt x="2761620" y="2307382"/>
+                  </a:lnTo>
+                  <a:lnTo>
+                    <a:pt x="2833242" y="2340040"/>
+                  </a:lnTo>
+                  <a:lnTo>
+                    <a:pt x="2904865" y="2371791"/>
+                  </a:lnTo>
+                  <a:lnTo>
+                    <a:pt x="2976487" y="2402661"/>
+                  </a:lnTo>
+                  <a:lnTo>
+                    <a:pt x="3048110" y="2432674"/>
+                  </a:lnTo>
+                  <a:lnTo>
+                    <a:pt x="3119732" y="2461854"/>
+                  </a:lnTo>
+                  <a:lnTo>
+                    <a:pt x="3191355" y="2490223"/>
+                  </a:lnTo>
+                  <a:lnTo>
+                    <a:pt x="3262977" y="2517806"/>
+                  </a:lnTo>
+                  <a:lnTo>
+                    <a:pt x="3334600" y="2544622"/>
+                  </a:lnTo>
+                  <a:lnTo>
+                    <a:pt x="3406222" y="2570694"/>
+                  </a:lnTo>
+                  <a:lnTo>
+                    <a:pt x="3477845" y="2596042"/>
+                  </a:lnTo>
+                  <a:lnTo>
+                    <a:pt x="3549467" y="2620686"/>
+                  </a:lnTo>
+                  <a:lnTo>
+                    <a:pt x="3621090" y="2644646"/>
+                  </a:lnTo>
+                  <a:lnTo>
+                    <a:pt x="3692712" y="2667941"/>
+                  </a:lnTo>
+                  <a:lnTo>
+                    <a:pt x="3764335" y="2690590"/>
+                  </a:lnTo>
+                  <a:lnTo>
+                    <a:pt x="3835958" y="2712609"/>
+                  </a:lnTo>
+                  <a:lnTo>
+                    <a:pt x="3907580" y="2734017"/>
+                  </a:lnTo>
+                  <a:lnTo>
+                    <a:pt x="3979203" y="2754831"/>
+                  </a:lnTo>
+                  <a:lnTo>
+                    <a:pt x="4050825" y="2775067"/>
+                  </a:lnTo>
+                  <a:lnTo>
+                    <a:pt x="4122448" y="2794742"/>
+                  </a:lnTo>
+                  <a:lnTo>
+                    <a:pt x="4194070" y="2813870"/>
+                  </a:lnTo>
+                  <a:lnTo>
+                    <a:pt x="4265693" y="2832467"/>
+                  </a:lnTo>
+                  <a:lnTo>
+                    <a:pt x="4337315" y="2850547"/>
+                  </a:lnTo>
+                  <a:lnTo>
+                    <a:pt x="4408938" y="2868126"/>
+                  </a:lnTo>
+                  <a:lnTo>
+                    <a:pt x="4480560" y="2885217"/>
+                  </a:lnTo>
+                  <a:lnTo>
+                    <a:pt x="4552183" y="2901833"/>
+                  </a:lnTo>
+                  <a:lnTo>
+                    <a:pt x="4623805" y="2917988"/>
+                  </a:lnTo>
+                  <a:lnTo>
+                    <a:pt x="4695428" y="2933695"/>
+                  </a:lnTo>
+                  <a:lnTo>
+                    <a:pt x="4767050" y="2948965"/>
+                  </a:lnTo>
+                  <a:lnTo>
+                    <a:pt x="4838673" y="2963812"/>
+                  </a:lnTo>
+                  <a:lnTo>
+                    <a:pt x="4910295" y="2978246"/>
+                  </a:lnTo>
+                  <a:lnTo>
+                    <a:pt x="4981918" y="2992280"/>
+                  </a:lnTo>
+                  <a:lnTo>
+                    <a:pt x="5053540" y="3005924"/>
+                  </a:lnTo>
+                  <a:lnTo>
+                    <a:pt x="5125163" y="3019189"/>
+                  </a:lnTo>
+                  <a:lnTo>
+                    <a:pt x="5196786" y="3032086"/>
+                  </a:lnTo>
+                  <a:lnTo>
+                    <a:pt x="5268408" y="3044625"/>
+                  </a:lnTo>
+                  <a:lnTo>
+                    <a:pt x="5340031" y="3056816"/>
+                  </a:lnTo>
+                  <a:lnTo>
+                    <a:pt x="5411653" y="3068668"/>
+                  </a:lnTo>
+                  <a:lnTo>
+                    <a:pt x="5483276" y="3080192"/>
+                  </a:lnTo>
+                  <a:lnTo>
+                    <a:pt x="5554898" y="3091395"/>
+                  </a:lnTo>
+                  <a:lnTo>
+                    <a:pt x="5626521" y="3102287"/>
+                  </a:lnTo>
+                  <a:lnTo>
+                    <a:pt x="5698143" y="3112877"/>
+                  </a:lnTo>
+                  <a:lnTo>
+                    <a:pt x="5769766" y="3123173"/>
+                  </a:lnTo>
+                  <a:lnTo>
+                    <a:pt x="5841388" y="3133184"/>
                   </a:lnTo>
                 </a:path>
               </a:pathLst>
@@ -5034,7 +5043,7 @@
                   <a:latin typeface="Helvetica"/>
                   <a:cs typeface="Helvetica"/>
                 </a:rPr>
-                <a:t>subHR per 1 mL/min: 0.96 (0.94-0.99)  |  per IQR (Δ = 18.2): 0.51 (0.29-0.88)  |  IQR: [-11.5, 6.7]</a:t>
+                <a:t>subHR per 1 mL/min: 0.96 (0.94-0.99)  |  per IQR (Δ = 18.2): 0.52 (0.31-0.87)  |  IQR: [-11.5, 6.7]</a:t>
               </a:r>
             </a:p>
           </p:txBody>

--- a/docs/plots/carbo/jx_carbo_linsubhr_egfrdisc_anyhosp.pptx
+++ b/docs/plots/carbo/jx_carbo_linsubhr_egfrdisc_anyhosp.pptx
@@ -3003,494 +3003,491 @@
           <p:spPr>
             <a:xfrm>
               <a:off x="1172049" y="2073503"/>
-              <a:ext cx="7090630" cy="3306040"/>
+              <a:ext cx="7090630" cy="3314793"/>
             </a:xfrm>
             <a:custGeom>
               <a:avLst/>
               <a:pathLst>
-                <a:path w="7090630" h="3306040">
+                <a:path w="7090630" h="3314793">
                   <a:moveTo>
-                    <a:pt x="2859053" y="0"/>
+                    <a:pt x="2923976" y="0"/>
                   </a:moveTo>
                   <a:lnTo>
-                    <a:pt x="2864901" y="14630"/>
-                  </a:lnTo>
-                  <a:lnTo>
-                    <a:pt x="2936523" y="185024"/>
-                  </a:lnTo>
-                  <a:lnTo>
-                    <a:pt x="3008146" y="347049"/>
-                  </a:lnTo>
-                  <a:lnTo>
-                    <a:pt x="3079768" y="501116"/>
-                  </a:lnTo>
-                  <a:lnTo>
-                    <a:pt x="3151391" y="647615"/>
-                  </a:lnTo>
-                  <a:lnTo>
-                    <a:pt x="3223013" y="786919"/>
-                  </a:lnTo>
-                  <a:lnTo>
-                    <a:pt x="3294636" y="919380"/>
-                  </a:lnTo>
-                  <a:lnTo>
-                    <a:pt x="3366258" y="1045335"/>
-                  </a:lnTo>
-                  <a:lnTo>
-                    <a:pt x="3437881" y="1165104"/>
-                  </a:lnTo>
-                  <a:lnTo>
-                    <a:pt x="3509503" y="1278990"/>
-                  </a:lnTo>
-                  <a:lnTo>
-                    <a:pt x="3581126" y="1387282"/>
-                  </a:lnTo>
-                  <a:lnTo>
-                    <a:pt x="3652748" y="1490255"/>
-                  </a:lnTo>
-                  <a:lnTo>
-                    <a:pt x="3724371" y="1588170"/>
-                  </a:lnTo>
-                  <a:lnTo>
-                    <a:pt x="3795993" y="1681276"/>
-                  </a:lnTo>
-                  <a:lnTo>
-                    <a:pt x="3867616" y="1769809"/>
-                  </a:lnTo>
-                  <a:lnTo>
-                    <a:pt x="3939238" y="1853993"/>
-                  </a:lnTo>
-                  <a:lnTo>
-                    <a:pt x="4010861" y="1934043"/>
-                  </a:lnTo>
-                  <a:lnTo>
-                    <a:pt x="4082483" y="2010160"/>
-                  </a:lnTo>
-                  <a:lnTo>
-                    <a:pt x="4154106" y="2082539"/>
-                  </a:lnTo>
-                  <a:lnTo>
-                    <a:pt x="4225729" y="2151363"/>
-                  </a:lnTo>
-                  <a:lnTo>
-                    <a:pt x="4297351" y="2216806"/>
-                  </a:lnTo>
-                  <a:lnTo>
-                    <a:pt x="4368974" y="2279035"/>
-                  </a:lnTo>
-                  <a:lnTo>
-                    <a:pt x="4440596" y="2338207"/>
-                  </a:lnTo>
-                  <a:lnTo>
-                    <a:pt x="4512219" y="2394473"/>
-                  </a:lnTo>
-                  <a:lnTo>
-                    <a:pt x="4583841" y="2447976"/>
-                  </a:lnTo>
-                  <a:lnTo>
-                    <a:pt x="4655464" y="2498850"/>
-                  </a:lnTo>
-                  <a:lnTo>
-                    <a:pt x="4727086" y="2547226"/>
-                  </a:lnTo>
-                  <a:lnTo>
-                    <a:pt x="4798709" y="2593225"/>
-                  </a:lnTo>
-                  <a:lnTo>
-                    <a:pt x="4870331" y="2636965"/>
-                  </a:lnTo>
-                  <a:lnTo>
-                    <a:pt x="4941954" y="2657185"/>
-                  </a:lnTo>
-                  <a:lnTo>
-                    <a:pt x="5013576" y="2662084"/>
-                  </a:lnTo>
-                  <a:lnTo>
-                    <a:pt x="5085199" y="2666954"/>
-                  </a:lnTo>
-                  <a:lnTo>
-                    <a:pt x="5156821" y="2671795"/>
-                  </a:lnTo>
-                  <a:lnTo>
-                    <a:pt x="5228444" y="2676607"/>
-                  </a:lnTo>
-                  <a:lnTo>
-                    <a:pt x="5300066" y="2681391"/>
-                  </a:lnTo>
-                  <a:lnTo>
-                    <a:pt x="5371689" y="2686146"/>
-                  </a:lnTo>
-                  <a:lnTo>
-                    <a:pt x="5443311" y="2690873"/>
-                  </a:lnTo>
-                  <a:lnTo>
-                    <a:pt x="5514934" y="2695572"/>
-                  </a:lnTo>
-                  <a:lnTo>
-                    <a:pt x="5586557" y="2700243"/>
-                  </a:lnTo>
-                  <a:lnTo>
-                    <a:pt x="5658179" y="2704887"/>
-                  </a:lnTo>
-                  <a:lnTo>
-                    <a:pt x="5729802" y="2709503"/>
-                  </a:lnTo>
-                  <a:lnTo>
-                    <a:pt x="5801424" y="2714092"/>
-                  </a:lnTo>
-                  <a:lnTo>
-                    <a:pt x="5873047" y="2718653"/>
-                  </a:lnTo>
-                  <a:lnTo>
-                    <a:pt x="5944669" y="2723188"/>
-                  </a:lnTo>
-                  <a:lnTo>
-                    <a:pt x="6016292" y="2727695"/>
-                  </a:lnTo>
-                  <a:lnTo>
-                    <a:pt x="6087914" y="2732176"/>
-                  </a:lnTo>
-                  <a:lnTo>
-                    <a:pt x="6159537" y="2736630"/>
-                  </a:lnTo>
-                  <a:lnTo>
-                    <a:pt x="6231159" y="2741058"/>
-                  </a:lnTo>
-                  <a:lnTo>
-                    <a:pt x="6302782" y="2745460"/>
-                  </a:lnTo>
-                  <a:lnTo>
-                    <a:pt x="6374404" y="2749836"/>
-                  </a:lnTo>
-                  <a:lnTo>
-                    <a:pt x="6446027" y="2754185"/>
-                  </a:lnTo>
-                  <a:lnTo>
-                    <a:pt x="6517649" y="2758509"/>
-                  </a:lnTo>
-                  <a:lnTo>
-                    <a:pt x="6589272" y="2762807"/>
-                  </a:lnTo>
-                  <a:lnTo>
-                    <a:pt x="6660894" y="2767080"/>
-                  </a:lnTo>
-                  <a:lnTo>
-                    <a:pt x="6732517" y="2771327"/>
-                  </a:lnTo>
-                  <a:lnTo>
-                    <a:pt x="6804139" y="2775550"/>
-                  </a:lnTo>
-                  <a:lnTo>
-                    <a:pt x="6875762" y="2779747"/>
-                  </a:lnTo>
-                  <a:lnTo>
-                    <a:pt x="6947385" y="2783919"/>
-                  </a:lnTo>
-                  <a:lnTo>
-                    <a:pt x="7019007" y="2788067"/>
-                  </a:lnTo>
-                  <a:lnTo>
-                    <a:pt x="7090630" y="2792190"/>
-                  </a:lnTo>
-                  <a:lnTo>
-                    <a:pt x="7090630" y="3306040"/>
-                  </a:lnTo>
-                  <a:lnTo>
-                    <a:pt x="7019007" y="3296860"/>
-                  </a:lnTo>
-                  <a:lnTo>
-                    <a:pt x="6947385" y="3287207"/>
-                  </a:lnTo>
-                  <a:lnTo>
-                    <a:pt x="6875762" y="3277055"/>
-                  </a:lnTo>
-                  <a:lnTo>
-                    <a:pt x="6804139" y="3266378"/>
-                  </a:lnTo>
-                  <a:lnTo>
-                    <a:pt x="6732517" y="3255150"/>
-                  </a:lnTo>
-                  <a:lnTo>
-                    <a:pt x="6660894" y="3243342"/>
-                  </a:lnTo>
-                  <a:lnTo>
-                    <a:pt x="6589272" y="3230924"/>
-                  </a:lnTo>
-                  <a:lnTo>
-                    <a:pt x="6517649" y="3217864"/>
-                  </a:lnTo>
-                  <a:lnTo>
-                    <a:pt x="6446027" y="3204130"/>
-                  </a:lnTo>
-                  <a:lnTo>
-                    <a:pt x="6374404" y="3189687"/>
-                  </a:lnTo>
-                  <a:lnTo>
-                    <a:pt x="6302782" y="3174497"/>
-                  </a:lnTo>
-                  <a:lnTo>
-                    <a:pt x="6231159" y="3158523"/>
-                  </a:lnTo>
-                  <a:lnTo>
-                    <a:pt x="6159537" y="3141724"/>
-                  </a:lnTo>
-                  <a:lnTo>
-                    <a:pt x="6087914" y="3124057"/>
-                  </a:lnTo>
-                  <a:lnTo>
-                    <a:pt x="6016292" y="3105477"/>
-                  </a:lnTo>
-                  <a:lnTo>
-                    <a:pt x="5944669" y="3085938"/>
-                  </a:lnTo>
-                  <a:lnTo>
-                    <a:pt x="5873047" y="3065389"/>
-                  </a:lnTo>
-                  <a:lnTo>
-                    <a:pt x="5801424" y="3043779"/>
-                  </a:lnTo>
-                  <a:lnTo>
-                    <a:pt x="5729802" y="3021053"/>
-                  </a:lnTo>
-                  <a:lnTo>
-                    <a:pt x="5658179" y="2997153"/>
-                  </a:lnTo>
-                  <a:lnTo>
-                    <a:pt x="5586557" y="2972018"/>
-                  </a:lnTo>
-                  <a:lnTo>
-                    <a:pt x="5514934" y="2945585"/>
-                  </a:lnTo>
-                  <a:lnTo>
-                    <a:pt x="5443311" y="2917786"/>
-                  </a:lnTo>
-                  <a:lnTo>
-                    <a:pt x="5371689" y="2888552"/>
-                  </a:lnTo>
-                  <a:lnTo>
-                    <a:pt x="5300066" y="2857807"/>
-                  </a:lnTo>
-                  <a:lnTo>
-                    <a:pt x="5228444" y="2825474"/>
-                  </a:lnTo>
-                  <a:lnTo>
-                    <a:pt x="5156821" y="2791472"/>
-                  </a:lnTo>
-                  <a:lnTo>
-                    <a:pt x="5085199" y="2755712"/>
-                  </a:lnTo>
-                  <a:lnTo>
-                    <a:pt x="5013576" y="2718106"/>
-                  </a:lnTo>
-                  <a:lnTo>
-                    <a:pt x="4941954" y="2678557"/>
-                  </a:lnTo>
-                  <a:lnTo>
-                    <a:pt x="4870331" y="2652258"/>
-                  </a:lnTo>
-                  <a:lnTo>
-                    <a:pt x="4798709" y="2647300"/>
-                  </a:lnTo>
-                  <a:lnTo>
-                    <a:pt x="4727086" y="2642313"/>
-                  </a:lnTo>
-                  <a:lnTo>
-                    <a:pt x="4655464" y="2637297"/>
-                  </a:lnTo>
-                  <a:lnTo>
-                    <a:pt x="4583841" y="2632250"/>
-                  </a:lnTo>
-                  <a:lnTo>
-                    <a:pt x="4512219" y="2627174"/>
-                  </a:lnTo>
-                  <a:lnTo>
-                    <a:pt x="4440596" y="2622067"/>
-                  </a:lnTo>
-                  <a:lnTo>
-                    <a:pt x="4368974" y="2616929"/>
-                  </a:lnTo>
-                  <a:lnTo>
-                    <a:pt x="4297351" y="2611761"/>
-                  </a:lnTo>
-                  <a:lnTo>
-                    <a:pt x="4225729" y="2606563"/>
-                  </a:lnTo>
-                  <a:lnTo>
-                    <a:pt x="4154106" y="2601333"/>
-                  </a:lnTo>
-                  <a:lnTo>
-                    <a:pt x="4082483" y="2596072"/>
-                  </a:lnTo>
-                  <a:lnTo>
-                    <a:pt x="4010861" y="2590780"/>
-                  </a:lnTo>
-                  <a:lnTo>
-                    <a:pt x="3939238" y="2585456"/>
-                  </a:lnTo>
-                  <a:lnTo>
-                    <a:pt x="3867616" y="2580100"/>
-                  </a:lnTo>
-                  <a:lnTo>
-                    <a:pt x="3795993" y="2574712"/>
-                  </a:lnTo>
-                  <a:lnTo>
-                    <a:pt x="3724371" y="2569293"/>
-                  </a:lnTo>
-                  <a:lnTo>
-                    <a:pt x="3652748" y="2563841"/>
-                  </a:lnTo>
-                  <a:lnTo>
-                    <a:pt x="3581126" y="2558356"/>
-                  </a:lnTo>
-                  <a:lnTo>
-                    <a:pt x="3509503" y="2552839"/>
-                  </a:lnTo>
-                  <a:lnTo>
-                    <a:pt x="3437881" y="2547289"/>
-                  </a:lnTo>
-                  <a:lnTo>
-                    <a:pt x="3366258" y="2541706"/>
-                  </a:lnTo>
-                  <a:lnTo>
-                    <a:pt x="3294636" y="2536090"/>
-                  </a:lnTo>
-                  <a:lnTo>
-                    <a:pt x="3223013" y="2530440"/>
-                  </a:lnTo>
-                  <a:lnTo>
-                    <a:pt x="3151391" y="2524756"/>
-                  </a:lnTo>
-                  <a:lnTo>
-                    <a:pt x="3079768" y="2519038"/>
-                  </a:lnTo>
-                  <a:lnTo>
-                    <a:pt x="3008146" y="2513287"/>
-                  </a:lnTo>
-                  <a:lnTo>
-                    <a:pt x="2936523" y="2507501"/>
-                  </a:lnTo>
-                  <a:lnTo>
-                    <a:pt x="2864901" y="2501681"/>
-                  </a:lnTo>
-                  <a:lnTo>
-                    <a:pt x="2793278" y="2495826"/>
-                  </a:lnTo>
-                  <a:lnTo>
-                    <a:pt x="2721655" y="2489936"/>
-                  </a:lnTo>
-                  <a:lnTo>
-                    <a:pt x="2650033" y="2484010"/>
-                  </a:lnTo>
-                  <a:lnTo>
-                    <a:pt x="2578410" y="2478050"/>
-                  </a:lnTo>
-                  <a:lnTo>
-                    <a:pt x="2506788" y="2472054"/>
-                  </a:lnTo>
-                  <a:lnTo>
-                    <a:pt x="2435165" y="2466022"/>
-                  </a:lnTo>
-                  <a:lnTo>
-                    <a:pt x="2363543" y="2459955"/>
-                  </a:lnTo>
-                  <a:lnTo>
-                    <a:pt x="2291920" y="2453851"/>
-                  </a:lnTo>
-                  <a:lnTo>
-                    <a:pt x="2220298" y="2447711"/>
-                  </a:lnTo>
-                  <a:lnTo>
-                    <a:pt x="2148675" y="2441534"/>
-                  </a:lnTo>
-                  <a:lnTo>
-                    <a:pt x="2077053" y="2435320"/>
-                  </a:lnTo>
-                  <a:lnTo>
-                    <a:pt x="2005430" y="2429069"/>
-                  </a:lnTo>
-                  <a:lnTo>
-                    <a:pt x="1933808" y="2422781"/>
-                  </a:lnTo>
-                  <a:lnTo>
-                    <a:pt x="1862185" y="2416456"/>
-                  </a:lnTo>
-                  <a:lnTo>
-                    <a:pt x="1790563" y="2410093"/>
-                  </a:lnTo>
-                  <a:lnTo>
-                    <a:pt x="1718940" y="2403692"/>
-                  </a:lnTo>
-                  <a:lnTo>
-                    <a:pt x="1647318" y="2397252"/>
-                  </a:lnTo>
-                  <a:lnTo>
-                    <a:pt x="1575695" y="2390775"/>
-                  </a:lnTo>
-                  <a:lnTo>
-                    <a:pt x="1504073" y="2384258"/>
-                  </a:lnTo>
-                  <a:lnTo>
-                    <a:pt x="1432450" y="2377703"/>
-                  </a:lnTo>
-                  <a:lnTo>
-                    <a:pt x="1360827" y="2371109"/>
-                  </a:lnTo>
-                  <a:lnTo>
-                    <a:pt x="1289205" y="2364475"/>
-                  </a:lnTo>
-                  <a:lnTo>
-                    <a:pt x="1217582" y="2357802"/>
-                  </a:lnTo>
-                  <a:lnTo>
-                    <a:pt x="1145960" y="2351089"/>
-                  </a:lnTo>
-                  <a:lnTo>
-                    <a:pt x="1074337" y="2344336"/>
-                  </a:lnTo>
-                  <a:lnTo>
-                    <a:pt x="1002715" y="2337543"/>
-                  </a:lnTo>
-                  <a:lnTo>
-                    <a:pt x="931092" y="2330710"/>
-                  </a:lnTo>
-                  <a:lnTo>
-                    <a:pt x="859470" y="2323835"/>
-                  </a:lnTo>
-                  <a:lnTo>
-                    <a:pt x="787847" y="2316920"/>
-                  </a:lnTo>
-                  <a:lnTo>
-                    <a:pt x="716225" y="2309963"/>
-                  </a:lnTo>
-                  <a:lnTo>
-                    <a:pt x="644602" y="2302965"/>
-                  </a:lnTo>
-                  <a:lnTo>
-                    <a:pt x="572980" y="2295925"/>
-                  </a:lnTo>
-                  <a:lnTo>
-                    <a:pt x="501357" y="2288844"/>
-                  </a:lnTo>
-                  <a:lnTo>
-                    <a:pt x="429735" y="2281720"/>
-                  </a:lnTo>
-                  <a:lnTo>
-                    <a:pt x="358112" y="2274553"/>
-                  </a:lnTo>
-                  <a:lnTo>
-                    <a:pt x="286490" y="2267344"/>
-                  </a:lnTo>
-                  <a:lnTo>
-                    <a:pt x="214867" y="2260092"/>
-                  </a:lnTo>
-                  <a:lnTo>
-                    <a:pt x="143245" y="2252796"/>
-                  </a:lnTo>
-                  <a:lnTo>
-                    <a:pt x="71622" y="2245457"/>
-                  </a:lnTo>
-                  <a:lnTo>
-                    <a:pt x="0" y="2238075"/>
+                    <a:pt x="2936523" y="32282"/>
+                  </a:lnTo>
+                  <a:lnTo>
+                    <a:pt x="3008146" y="207224"/>
+                  </a:lnTo>
+                  <a:lnTo>
+                    <a:pt x="3079768" y="373299"/>
+                  </a:lnTo>
+                  <a:lnTo>
+                    <a:pt x="3151391" y="530957"/>
+                  </a:lnTo>
+                  <a:lnTo>
+                    <a:pt x="3223013" y="680623"/>
+                  </a:lnTo>
+                  <a:lnTo>
+                    <a:pt x="3294636" y="822703"/>
+                  </a:lnTo>
+                  <a:lnTo>
+                    <a:pt x="3366258" y="957582"/>
+                  </a:lnTo>
+                  <a:lnTo>
+                    <a:pt x="3437881" y="1085624"/>
+                  </a:lnTo>
+                  <a:lnTo>
+                    <a:pt x="3509503" y="1207176"/>
+                  </a:lnTo>
+                  <a:lnTo>
+                    <a:pt x="3581126" y="1322568"/>
+                  </a:lnTo>
+                  <a:lnTo>
+                    <a:pt x="3652748" y="1432110"/>
+                  </a:lnTo>
+                  <a:lnTo>
+                    <a:pt x="3724371" y="1536100"/>
+                  </a:lnTo>
+                  <a:lnTo>
+                    <a:pt x="3795993" y="1634819"/>
+                  </a:lnTo>
+                  <a:lnTo>
+                    <a:pt x="3867616" y="1728535"/>
+                  </a:lnTo>
+                  <a:lnTo>
+                    <a:pt x="3939238" y="1817500"/>
+                  </a:lnTo>
+                  <a:lnTo>
+                    <a:pt x="4010861" y="1901956"/>
+                  </a:lnTo>
+                  <a:lnTo>
+                    <a:pt x="4082483" y="1982131"/>
+                  </a:lnTo>
+                  <a:lnTo>
+                    <a:pt x="4154106" y="2058243"/>
+                  </a:lnTo>
+                  <a:lnTo>
+                    <a:pt x="4225729" y="2130496"/>
+                  </a:lnTo>
+                  <a:lnTo>
+                    <a:pt x="4297351" y="2199088"/>
+                  </a:lnTo>
+                  <a:lnTo>
+                    <a:pt x="4368974" y="2264203"/>
+                  </a:lnTo>
+                  <a:lnTo>
+                    <a:pt x="4440596" y="2326017"/>
+                  </a:lnTo>
+                  <a:lnTo>
+                    <a:pt x="4512219" y="2384698"/>
+                  </a:lnTo>
+                  <a:lnTo>
+                    <a:pt x="4583841" y="2440405"/>
+                  </a:lnTo>
+                  <a:lnTo>
+                    <a:pt x="4655464" y="2493288"/>
+                  </a:lnTo>
+                  <a:lnTo>
+                    <a:pt x="4727086" y="2543491"/>
+                  </a:lnTo>
+                  <a:lnTo>
+                    <a:pt x="4798709" y="2591149"/>
+                  </a:lnTo>
+                  <a:lnTo>
+                    <a:pt x="4870331" y="2636392"/>
+                  </a:lnTo>
+                  <a:lnTo>
+                    <a:pt x="4941954" y="2656995"/>
+                  </a:lnTo>
+                  <a:lnTo>
+                    <a:pt x="5013576" y="2661574"/>
+                  </a:lnTo>
+                  <a:lnTo>
+                    <a:pt x="5085199" y="2666128"/>
+                  </a:lnTo>
+                  <a:lnTo>
+                    <a:pt x="5156821" y="2670656"/>
+                  </a:lnTo>
+                  <a:lnTo>
+                    <a:pt x="5228444" y="2675159"/>
+                  </a:lnTo>
+                  <a:lnTo>
+                    <a:pt x="5300066" y="2679637"/>
+                  </a:lnTo>
+                  <a:lnTo>
+                    <a:pt x="5371689" y="2684091"/>
+                  </a:lnTo>
+                  <a:lnTo>
+                    <a:pt x="5443311" y="2688520"/>
+                  </a:lnTo>
+                  <a:lnTo>
+                    <a:pt x="5514934" y="2692924"/>
+                  </a:lnTo>
+                  <a:lnTo>
+                    <a:pt x="5586557" y="2697304"/>
+                  </a:lnTo>
+                  <a:lnTo>
+                    <a:pt x="5658179" y="2701659"/>
+                  </a:lnTo>
+                  <a:lnTo>
+                    <a:pt x="5729802" y="2705991"/>
+                  </a:lnTo>
+                  <a:lnTo>
+                    <a:pt x="5801424" y="2710299"/>
+                  </a:lnTo>
+                  <a:lnTo>
+                    <a:pt x="5873047" y="2714582"/>
+                  </a:lnTo>
+                  <a:lnTo>
+                    <a:pt x="5944669" y="2718842"/>
+                  </a:lnTo>
+                  <a:lnTo>
+                    <a:pt x="6016292" y="2723078"/>
+                  </a:lnTo>
+                  <a:lnTo>
+                    <a:pt x="6087914" y="2727291"/>
+                  </a:lnTo>
+                  <a:lnTo>
+                    <a:pt x="6159537" y="2731481"/>
+                  </a:lnTo>
+                  <a:lnTo>
+                    <a:pt x="6231159" y="2735647"/>
+                  </a:lnTo>
+                  <a:lnTo>
+                    <a:pt x="6302782" y="2739791"/>
+                  </a:lnTo>
+                  <a:lnTo>
+                    <a:pt x="6374404" y="2743911"/>
+                  </a:lnTo>
+                  <a:lnTo>
+                    <a:pt x="6446027" y="2748008"/>
+                  </a:lnTo>
+                  <a:lnTo>
+                    <a:pt x="6517649" y="2752083"/>
+                  </a:lnTo>
+                  <a:lnTo>
+                    <a:pt x="6589272" y="2756135"/>
+                  </a:lnTo>
+                  <a:lnTo>
+                    <a:pt x="6660894" y="2760165"/>
+                  </a:lnTo>
+                  <a:lnTo>
+                    <a:pt x="6732517" y="2764173"/>
+                  </a:lnTo>
+                  <a:lnTo>
+                    <a:pt x="6804139" y="2768158"/>
+                  </a:lnTo>
+                  <a:lnTo>
+                    <a:pt x="6875762" y="2772121"/>
+                  </a:lnTo>
+                  <a:lnTo>
+                    <a:pt x="6947385" y="2776063"/>
+                  </a:lnTo>
+                  <a:lnTo>
+                    <a:pt x="7019007" y="2779982"/>
+                  </a:lnTo>
+                  <a:lnTo>
+                    <a:pt x="7090630" y="2783880"/>
+                  </a:lnTo>
+                  <a:lnTo>
+                    <a:pt x="7090630" y="3314793"/>
+                  </a:lnTo>
+                  <a:lnTo>
+                    <a:pt x="7019007" y="3305772"/>
+                  </a:lnTo>
+                  <a:lnTo>
+                    <a:pt x="6947385" y="3296270"/>
+                  </a:lnTo>
+                  <a:lnTo>
+                    <a:pt x="6875762" y="3286260"/>
+                  </a:lnTo>
+                  <a:lnTo>
+                    <a:pt x="6804139" y="3275716"/>
+                  </a:lnTo>
+                  <a:lnTo>
+                    <a:pt x="6732517" y="3264608"/>
+                  </a:lnTo>
+                  <a:lnTo>
+                    <a:pt x="6660894" y="3252908"/>
+                  </a:lnTo>
+                  <a:lnTo>
+                    <a:pt x="6589272" y="3240583"/>
+                  </a:lnTo>
+                  <a:lnTo>
+                    <a:pt x="6517649" y="3227600"/>
+                  </a:lnTo>
+                  <a:lnTo>
+                    <a:pt x="6446027" y="3213924"/>
+                  </a:lnTo>
+                  <a:lnTo>
+                    <a:pt x="6374404" y="3199517"/>
+                  </a:lnTo>
+                  <a:lnTo>
+                    <a:pt x="6302782" y="3184341"/>
+                  </a:lnTo>
+                  <a:lnTo>
+                    <a:pt x="6231159" y="3168355"/>
+                  </a:lnTo>
+                  <a:lnTo>
+                    <a:pt x="6159537" y="3151516"/>
+                  </a:lnTo>
+                  <a:lnTo>
+                    <a:pt x="6087914" y="3133777"/>
+                  </a:lnTo>
+                  <a:lnTo>
+                    <a:pt x="6016292" y="3115091"/>
+                  </a:lnTo>
+                  <a:lnTo>
+                    <a:pt x="5944669" y="3095408"/>
+                  </a:lnTo>
+                  <a:lnTo>
+                    <a:pt x="5873047" y="3074673"/>
+                  </a:lnTo>
+                  <a:lnTo>
+                    <a:pt x="5801424" y="3052832"/>
+                  </a:lnTo>
+                  <a:lnTo>
+                    <a:pt x="5729802" y="3029824"/>
+                  </a:lnTo>
+                  <a:lnTo>
+                    <a:pt x="5658179" y="3005588"/>
+                  </a:lnTo>
+                  <a:lnTo>
+                    <a:pt x="5586557" y="2980058"/>
+                  </a:lnTo>
+                  <a:lnTo>
+                    <a:pt x="5514934" y="2953164"/>
+                  </a:lnTo>
+                  <a:lnTo>
+                    <a:pt x="5443311" y="2924835"/>
+                  </a:lnTo>
+                  <a:lnTo>
+                    <a:pt x="5371689" y="2894993"/>
+                  </a:lnTo>
+                  <a:lnTo>
+                    <a:pt x="5300066" y="2863558"/>
+                  </a:lnTo>
+                  <a:lnTo>
+                    <a:pt x="5228444" y="2830445"/>
+                  </a:lnTo>
+                  <a:lnTo>
+                    <a:pt x="5156821" y="2795563"/>
+                  </a:lnTo>
+                  <a:lnTo>
+                    <a:pt x="5085199" y="2758819"/>
+                  </a:lnTo>
+                  <a:lnTo>
+                    <a:pt x="5013576" y="2720113"/>
+                  </a:lnTo>
+                  <a:lnTo>
+                    <a:pt x="4941954" y="2679341"/>
+                  </a:lnTo>
+                  <a:lnTo>
+                    <a:pt x="4870331" y="2652391"/>
+                  </a:lnTo>
+                  <a:lnTo>
+                    <a:pt x="4798709" y="2647761"/>
+                  </a:lnTo>
+                  <a:lnTo>
+                    <a:pt x="4727086" y="2643105"/>
+                  </a:lnTo>
+                  <a:lnTo>
+                    <a:pt x="4655464" y="2638423"/>
+                  </a:lnTo>
+                  <a:lnTo>
+                    <a:pt x="4583841" y="2633715"/>
+                  </a:lnTo>
+                  <a:lnTo>
+                    <a:pt x="4512219" y="2628981"/>
+                  </a:lnTo>
+                  <a:lnTo>
+                    <a:pt x="4440596" y="2624221"/>
+                  </a:lnTo>
+                  <a:lnTo>
+                    <a:pt x="4368974" y="2619434"/>
+                  </a:lnTo>
+                  <a:lnTo>
+                    <a:pt x="4297351" y="2614620"/>
+                  </a:lnTo>
+                  <a:lnTo>
+                    <a:pt x="4225729" y="2609780"/>
+                  </a:lnTo>
+                  <a:lnTo>
+                    <a:pt x="4154106" y="2604913"/>
+                  </a:lnTo>
+                  <a:lnTo>
+                    <a:pt x="4082483" y="2600018"/>
+                  </a:lnTo>
+                  <a:lnTo>
+                    <a:pt x="4010861" y="2595097"/>
+                  </a:lnTo>
+                  <a:lnTo>
+                    <a:pt x="3939238" y="2590147"/>
+                  </a:lnTo>
+                  <a:lnTo>
+                    <a:pt x="3867616" y="2585171"/>
+                  </a:lnTo>
+                  <a:lnTo>
+                    <a:pt x="3795993" y="2580166"/>
+                  </a:lnTo>
+                  <a:lnTo>
+                    <a:pt x="3724371" y="2575134"/>
+                  </a:lnTo>
+                  <a:lnTo>
+                    <a:pt x="3652748" y="2570074"/>
+                  </a:lnTo>
+                  <a:lnTo>
+                    <a:pt x="3581126" y="2564985"/>
+                  </a:lnTo>
+                  <a:lnTo>
+                    <a:pt x="3509503" y="2559869"/>
+                  </a:lnTo>
+                  <a:lnTo>
+                    <a:pt x="3437881" y="2554723"/>
+                  </a:lnTo>
+                  <a:lnTo>
+                    <a:pt x="3366258" y="2549549"/>
+                  </a:lnTo>
+                  <a:lnTo>
+                    <a:pt x="3294636" y="2544346"/>
+                  </a:lnTo>
+                  <a:lnTo>
+                    <a:pt x="3223013" y="2539115"/>
+                  </a:lnTo>
+                  <a:lnTo>
+                    <a:pt x="3151391" y="2533854"/>
+                  </a:lnTo>
+                  <a:lnTo>
+                    <a:pt x="3079768" y="2528564"/>
+                  </a:lnTo>
+                  <a:lnTo>
+                    <a:pt x="3008146" y="2523244"/>
+                  </a:lnTo>
+                  <a:lnTo>
+                    <a:pt x="2936523" y="2517895"/>
+                  </a:lnTo>
+                  <a:lnTo>
+                    <a:pt x="2864901" y="2512516"/>
+                  </a:lnTo>
+                  <a:lnTo>
+                    <a:pt x="2793278" y="2507107"/>
+                  </a:lnTo>
+                  <a:lnTo>
+                    <a:pt x="2721655" y="2501667"/>
+                  </a:lnTo>
+                  <a:lnTo>
+                    <a:pt x="2650033" y="2496198"/>
+                  </a:lnTo>
+                  <a:lnTo>
+                    <a:pt x="2578410" y="2490698"/>
+                  </a:lnTo>
+                  <a:lnTo>
+                    <a:pt x="2506788" y="2485168"/>
+                  </a:lnTo>
+                  <a:lnTo>
+                    <a:pt x="2435165" y="2479606"/>
+                  </a:lnTo>
+                  <a:lnTo>
+                    <a:pt x="2363543" y="2474014"/>
+                  </a:lnTo>
+                  <a:lnTo>
+                    <a:pt x="2291920" y="2468390"/>
+                  </a:lnTo>
+                  <a:lnTo>
+                    <a:pt x="2220298" y="2462736"/>
+                  </a:lnTo>
+                  <a:lnTo>
+                    <a:pt x="2148675" y="2457049"/>
+                  </a:lnTo>
+                  <a:lnTo>
+                    <a:pt x="2077053" y="2451332"/>
+                  </a:lnTo>
+                  <a:lnTo>
+                    <a:pt x="2005430" y="2445582"/>
+                  </a:lnTo>
+                  <a:lnTo>
+                    <a:pt x="1933808" y="2439800"/>
+                  </a:lnTo>
+                  <a:lnTo>
+                    <a:pt x="1862185" y="2433986"/>
+                  </a:lnTo>
+                  <a:lnTo>
+                    <a:pt x="1790563" y="2428140"/>
+                  </a:lnTo>
+                  <a:lnTo>
+                    <a:pt x="1718940" y="2422261"/>
+                  </a:lnTo>
+                  <a:lnTo>
+                    <a:pt x="1647318" y="2416349"/>
+                  </a:lnTo>
+                  <a:lnTo>
+                    <a:pt x="1575695" y="2410404"/>
+                  </a:lnTo>
+                  <a:lnTo>
+                    <a:pt x="1504073" y="2404427"/>
+                  </a:lnTo>
+                  <a:lnTo>
+                    <a:pt x="1432450" y="2398416"/>
+                  </a:lnTo>
+                  <a:lnTo>
+                    <a:pt x="1360827" y="2392371"/>
+                  </a:lnTo>
+                  <a:lnTo>
+                    <a:pt x="1289205" y="2386293"/>
+                  </a:lnTo>
+                  <a:lnTo>
+                    <a:pt x="1217582" y="2380181"/>
+                  </a:lnTo>
+                  <a:lnTo>
+                    <a:pt x="1145960" y="2374035"/>
+                  </a:lnTo>
+                  <a:lnTo>
+                    <a:pt x="1074337" y="2367855"/>
+                  </a:lnTo>
+                  <a:lnTo>
+                    <a:pt x="1002715" y="2361640"/>
+                  </a:lnTo>
+                  <a:lnTo>
+                    <a:pt x="931092" y="2355391"/>
+                  </a:lnTo>
+                  <a:lnTo>
+                    <a:pt x="859470" y="2349107"/>
+                  </a:lnTo>
+                  <a:lnTo>
+                    <a:pt x="787847" y="2342788"/>
+                  </a:lnTo>
+                  <a:lnTo>
+                    <a:pt x="716225" y="2336433"/>
+                  </a:lnTo>
+                  <a:lnTo>
+                    <a:pt x="644602" y="2330044"/>
+                  </a:lnTo>
+                  <a:lnTo>
+                    <a:pt x="572980" y="2323618"/>
+                  </a:lnTo>
+                  <a:lnTo>
+                    <a:pt x="501357" y="2317157"/>
+                  </a:lnTo>
+                  <a:lnTo>
+                    <a:pt x="429735" y="2310660"/>
+                  </a:lnTo>
+                  <a:lnTo>
+                    <a:pt x="358112" y="2304127"/>
+                  </a:lnTo>
+                  <a:lnTo>
+                    <a:pt x="286490" y="2297557"/>
+                  </a:lnTo>
+                  <a:lnTo>
+                    <a:pt x="214867" y="2290951"/>
+                  </a:lnTo>
+                  <a:lnTo>
+                    <a:pt x="143245" y="2284308"/>
+                  </a:lnTo>
+                  <a:lnTo>
+                    <a:pt x="71622" y="2277628"/>
+                  </a:lnTo>
+                  <a:lnTo>
+                    <a:pt x="0" y="2270911"/>
                   </a:lnTo>
                   <a:close/>
                 </a:path>
@@ -3516,195 +3513,192 @@
           </p:nvSpPr>
           <p:spPr>
             <a:xfrm>
-              <a:off x="4031102" y="2073503"/>
-              <a:ext cx="4231576" cy="2792190"/>
+              <a:off x="4096026" y="2073503"/>
+              <a:ext cx="4166653" cy="2783880"/>
             </a:xfrm>
             <a:custGeom>
               <a:avLst/>
               <a:pathLst>
-                <a:path w="4231576" h="2792190">
+                <a:path w="4166653" h="2783880">
                   <a:moveTo>
                     <a:pt x="0" y="0"/>
                   </a:moveTo>
                   <a:lnTo>
-                    <a:pt x="5847" y="14630"/>
-                  </a:lnTo>
-                  <a:lnTo>
-                    <a:pt x="77470" y="185024"/>
-                  </a:lnTo>
-                  <a:lnTo>
-                    <a:pt x="149092" y="347049"/>
-                  </a:lnTo>
-                  <a:lnTo>
-                    <a:pt x="220715" y="501116"/>
-                  </a:lnTo>
-                  <a:lnTo>
-                    <a:pt x="292337" y="647615"/>
-                  </a:lnTo>
-                  <a:lnTo>
-                    <a:pt x="363960" y="786919"/>
-                  </a:lnTo>
-                  <a:lnTo>
-                    <a:pt x="435582" y="919380"/>
-                  </a:lnTo>
-                  <a:lnTo>
-                    <a:pt x="507205" y="1045335"/>
-                  </a:lnTo>
-                  <a:lnTo>
-                    <a:pt x="578827" y="1165104"/>
-                  </a:lnTo>
-                  <a:lnTo>
-                    <a:pt x="650450" y="1278990"/>
-                  </a:lnTo>
-                  <a:lnTo>
-                    <a:pt x="722072" y="1387282"/>
-                  </a:lnTo>
-                  <a:lnTo>
-                    <a:pt x="793695" y="1490255"/>
-                  </a:lnTo>
-                  <a:lnTo>
-                    <a:pt x="865317" y="1588170"/>
-                  </a:lnTo>
-                  <a:lnTo>
-                    <a:pt x="936940" y="1681276"/>
-                  </a:lnTo>
-                  <a:lnTo>
-                    <a:pt x="1008563" y="1769809"/>
-                  </a:lnTo>
-                  <a:lnTo>
-                    <a:pt x="1080185" y="1853993"/>
-                  </a:lnTo>
-                  <a:lnTo>
-                    <a:pt x="1151808" y="1934043"/>
-                  </a:lnTo>
-                  <a:lnTo>
-                    <a:pt x="1223430" y="2010160"/>
-                  </a:lnTo>
-                  <a:lnTo>
-                    <a:pt x="1295053" y="2082539"/>
-                  </a:lnTo>
-                  <a:lnTo>
-                    <a:pt x="1366675" y="2151363"/>
-                  </a:lnTo>
-                  <a:lnTo>
-                    <a:pt x="1438298" y="2216806"/>
-                  </a:lnTo>
-                  <a:lnTo>
-                    <a:pt x="1509920" y="2279035"/>
-                  </a:lnTo>
-                  <a:lnTo>
-                    <a:pt x="1581543" y="2338207"/>
-                  </a:lnTo>
-                  <a:lnTo>
-                    <a:pt x="1653165" y="2394473"/>
-                  </a:lnTo>
-                  <a:lnTo>
-                    <a:pt x="1724788" y="2447976"/>
-                  </a:lnTo>
-                  <a:lnTo>
-                    <a:pt x="1796410" y="2498850"/>
-                  </a:lnTo>
-                  <a:lnTo>
-                    <a:pt x="1868033" y="2547226"/>
-                  </a:lnTo>
-                  <a:lnTo>
-                    <a:pt x="1939655" y="2593225"/>
-                  </a:lnTo>
-                  <a:lnTo>
-                    <a:pt x="2011278" y="2636965"/>
-                  </a:lnTo>
-                  <a:lnTo>
-                    <a:pt x="2082900" y="2657185"/>
-                  </a:lnTo>
-                  <a:lnTo>
-                    <a:pt x="2154523" y="2662084"/>
-                  </a:lnTo>
-                  <a:lnTo>
-                    <a:pt x="2226145" y="2666954"/>
-                  </a:lnTo>
-                  <a:lnTo>
-                    <a:pt x="2297768" y="2671795"/>
-                  </a:lnTo>
-                  <a:lnTo>
-                    <a:pt x="2369391" y="2676607"/>
-                  </a:lnTo>
-                  <a:lnTo>
-                    <a:pt x="2441013" y="2681391"/>
-                  </a:lnTo>
-                  <a:lnTo>
-                    <a:pt x="2512636" y="2686146"/>
-                  </a:lnTo>
-                  <a:lnTo>
-                    <a:pt x="2584258" y="2690873"/>
-                  </a:lnTo>
-                  <a:lnTo>
-                    <a:pt x="2655881" y="2695572"/>
-                  </a:lnTo>
-                  <a:lnTo>
-                    <a:pt x="2727503" y="2700243"/>
-                  </a:lnTo>
-                  <a:lnTo>
-                    <a:pt x="2799126" y="2704887"/>
-                  </a:lnTo>
-                  <a:lnTo>
-                    <a:pt x="2870748" y="2709503"/>
-                  </a:lnTo>
-                  <a:lnTo>
-                    <a:pt x="2942371" y="2714092"/>
-                  </a:lnTo>
-                  <a:lnTo>
-                    <a:pt x="3013993" y="2718653"/>
-                  </a:lnTo>
-                  <a:lnTo>
-                    <a:pt x="3085616" y="2723188"/>
-                  </a:lnTo>
-                  <a:lnTo>
-                    <a:pt x="3157238" y="2727695"/>
-                  </a:lnTo>
-                  <a:lnTo>
-                    <a:pt x="3228861" y="2732176"/>
-                  </a:lnTo>
-                  <a:lnTo>
-                    <a:pt x="3300483" y="2736630"/>
-                  </a:lnTo>
-                  <a:lnTo>
-                    <a:pt x="3372106" y="2741058"/>
-                  </a:lnTo>
-                  <a:lnTo>
-                    <a:pt x="3443728" y="2745460"/>
-                  </a:lnTo>
-                  <a:lnTo>
-                    <a:pt x="3515351" y="2749836"/>
-                  </a:lnTo>
-                  <a:lnTo>
-                    <a:pt x="3586973" y="2754185"/>
-                  </a:lnTo>
-                  <a:lnTo>
-                    <a:pt x="3658596" y="2758509"/>
-                  </a:lnTo>
-                  <a:lnTo>
-                    <a:pt x="3730219" y="2762807"/>
-                  </a:lnTo>
-                  <a:lnTo>
-                    <a:pt x="3801841" y="2767080"/>
-                  </a:lnTo>
-                  <a:lnTo>
-                    <a:pt x="3873464" y="2771327"/>
-                  </a:lnTo>
-                  <a:lnTo>
-                    <a:pt x="3945086" y="2775550"/>
-                  </a:lnTo>
-                  <a:lnTo>
-                    <a:pt x="4016709" y="2779747"/>
-                  </a:lnTo>
-                  <a:lnTo>
-                    <a:pt x="4088331" y="2783919"/>
-                  </a:lnTo>
-                  <a:lnTo>
-                    <a:pt x="4159954" y="2788067"/>
-                  </a:lnTo>
-                  <a:lnTo>
-                    <a:pt x="4231576" y="2792190"/>
+                    <a:pt x="12546" y="32282"/>
+                  </a:lnTo>
+                  <a:lnTo>
+                    <a:pt x="84169" y="207224"/>
+                  </a:lnTo>
+                  <a:lnTo>
+                    <a:pt x="155791" y="373299"/>
+                  </a:lnTo>
+                  <a:lnTo>
+                    <a:pt x="227414" y="530957"/>
+                  </a:lnTo>
+                  <a:lnTo>
+                    <a:pt x="299036" y="680623"/>
+                  </a:lnTo>
+                  <a:lnTo>
+                    <a:pt x="370659" y="822703"/>
+                  </a:lnTo>
+                  <a:lnTo>
+                    <a:pt x="442281" y="957582"/>
+                  </a:lnTo>
+                  <a:lnTo>
+                    <a:pt x="513904" y="1085624"/>
+                  </a:lnTo>
+                  <a:lnTo>
+                    <a:pt x="585526" y="1207176"/>
+                  </a:lnTo>
+                  <a:lnTo>
+                    <a:pt x="657149" y="1322568"/>
+                  </a:lnTo>
+                  <a:lnTo>
+                    <a:pt x="728772" y="1432110"/>
+                  </a:lnTo>
+                  <a:lnTo>
+                    <a:pt x="800394" y="1536100"/>
+                  </a:lnTo>
+                  <a:lnTo>
+                    <a:pt x="872017" y="1634819"/>
+                  </a:lnTo>
+                  <a:lnTo>
+                    <a:pt x="943639" y="1728535"/>
+                  </a:lnTo>
+                  <a:lnTo>
+                    <a:pt x="1015262" y="1817500"/>
+                  </a:lnTo>
+                  <a:lnTo>
+                    <a:pt x="1086884" y="1901956"/>
+                  </a:lnTo>
+                  <a:lnTo>
+                    <a:pt x="1158507" y="1982131"/>
+                  </a:lnTo>
+                  <a:lnTo>
+                    <a:pt x="1230129" y="2058243"/>
+                  </a:lnTo>
+                  <a:lnTo>
+                    <a:pt x="1301752" y="2130496"/>
+                  </a:lnTo>
+                  <a:lnTo>
+                    <a:pt x="1373374" y="2199088"/>
+                  </a:lnTo>
+                  <a:lnTo>
+                    <a:pt x="1444997" y="2264203"/>
+                  </a:lnTo>
+                  <a:lnTo>
+                    <a:pt x="1516619" y="2326017"/>
+                  </a:lnTo>
+                  <a:lnTo>
+                    <a:pt x="1588242" y="2384698"/>
+                  </a:lnTo>
+                  <a:lnTo>
+                    <a:pt x="1659864" y="2440405"/>
+                  </a:lnTo>
+                  <a:lnTo>
+                    <a:pt x="1731487" y="2493288"/>
+                  </a:lnTo>
+                  <a:lnTo>
+                    <a:pt x="1803109" y="2543491"/>
+                  </a:lnTo>
+                  <a:lnTo>
+                    <a:pt x="1874732" y="2591149"/>
+                  </a:lnTo>
+                  <a:lnTo>
+                    <a:pt x="1946354" y="2636392"/>
+                  </a:lnTo>
+                  <a:lnTo>
+                    <a:pt x="2017977" y="2656995"/>
+                  </a:lnTo>
+                  <a:lnTo>
+                    <a:pt x="2089600" y="2661574"/>
+                  </a:lnTo>
+                  <a:lnTo>
+                    <a:pt x="2161222" y="2666128"/>
+                  </a:lnTo>
+                  <a:lnTo>
+                    <a:pt x="2232845" y="2670656"/>
+                  </a:lnTo>
+                  <a:lnTo>
+                    <a:pt x="2304467" y="2675159"/>
+                  </a:lnTo>
+                  <a:lnTo>
+                    <a:pt x="2376090" y="2679637"/>
+                  </a:lnTo>
+                  <a:lnTo>
+                    <a:pt x="2447712" y="2684091"/>
+                  </a:lnTo>
+                  <a:lnTo>
+                    <a:pt x="2519335" y="2688520"/>
+                  </a:lnTo>
+                  <a:lnTo>
+                    <a:pt x="2590957" y="2692924"/>
+                  </a:lnTo>
+                  <a:lnTo>
+                    <a:pt x="2662580" y="2697304"/>
+                  </a:lnTo>
+                  <a:lnTo>
+                    <a:pt x="2734202" y="2701659"/>
+                  </a:lnTo>
+                  <a:lnTo>
+                    <a:pt x="2805825" y="2705991"/>
+                  </a:lnTo>
+                  <a:lnTo>
+                    <a:pt x="2877447" y="2710299"/>
+                  </a:lnTo>
+                  <a:lnTo>
+                    <a:pt x="2949070" y="2714582"/>
+                  </a:lnTo>
+                  <a:lnTo>
+                    <a:pt x="3020692" y="2718842"/>
+                  </a:lnTo>
+                  <a:lnTo>
+                    <a:pt x="3092315" y="2723078"/>
+                  </a:lnTo>
+                  <a:lnTo>
+                    <a:pt x="3163937" y="2727291"/>
+                  </a:lnTo>
+                  <a:lnTo>
+                    <a:pt x="3235560" y="2731481"/>
+                  </a:lnTo>
+                  <a:lnTo>
+                    <a:pt x="3307182" y="2735647"/>
+                  </a:lnTo>
+                  <a:lnTo>
+                    <a:pt x="3378805" y="2739791"/>
+                  </a:lnTo>
+                  <a:lnTo>
+                    <a:pt x="3450428" y="2743911"/>
+                  </a:lnTo>
+                  <a:lnTo>
+                    <a:pt x="3522050" y="2748008"/>
+                  </a:lnTo>
+                  <a:lnTo>
+                    <a:pt x="3593673" y="2752083"/>
+                  </a:lnTo>
+                  <a:lnTo>
+                    <a:pt x="3665295" y="2756135"/>
+                  </a:lnTo>
+                  <a:lnTo>
+                    <a:pt x="3736918" y="2760165"/>
+                  </a:lnTo>
+                  <a:lnTo>
+                    <a:pt x="3808540" y="2764173"/>
+                  </a:lnTo>
+                  <a:lnTo>
+                    <a:pt x="3880163" y="2768158"/>
+                  </a:lnTo>
+                  <a:lnTo>
+                    <a:pt x="3951785" y="2772121"/>
+                  </a:lnTo>
+                  <a:lnTo>
+                    <a:pt x="4023408" y="2776063"/>
+                  </a:lnTo>
+                  <a:lnTo>
+                    <a:pt x="4095030" y="2779982"/>
+                  </a:lnTo>
+                  <a:lnTo>
+                    <a:pt x="4166653" y="2783880"/>
                   </a:lnTo>
                 </a:path>
               </a:pathLst>
@@ -3724,309 +3718,309 @@
           </p:nvSpPr>
           <p:spPr>
             <a:xfrm>
-              <a:off x="1172049" y="4311578"/>
-              <a:ext cx="7090630" cy="1067965"/>
+              <a:off x="1172049" y="4344414"/>
+              <a:ext cx="7090630" cy="1043882"/>
             </a:xfrm>
             <a:custGeom>
               <a:avLst/>
               <a:pathLst>
-                <a:path w="7090630" h="1067965">
+                <a:path w="7090630" h="1043882">
                   <a:moveTo>
-                    <a:pt x="7090630" y="1067965"/>
+                    <a:pt x="7090630" y="1043882"/>
                   </a:moveTo>
                   <a:lnTo>
-                    <a:pt x="7019007" y="1058785"/>
-                  </a:lnTo>
-                  <a:lnTo>
-                    <a:pt x="6947385" y="1049132"/>
-                  </a:lnTo>
-                  <a:lnTo>
-                    <a:pt x="6875762" y="1038979"/>
-                  </a:lnTo>
-                  <a:lnTo>
-                    <a:pt x="6804139" y="1028303"/>
-                  </a:lnTo>
-                  <a:lnTo>
-                    <a:pt x="6732517" y="1017075"/>
-                  </a:lnTo>
-                  <a:lnTo>
-                    <a:pt x="6660894" y="1005267"/>
-                  </a:lnTo>
-                  <a:lnTo>
-                    <a:pt x="6589272" y="992849"/>
-                  </a:lnTo>
-                  <a:lnTo>
-                    <a:pt x="6517649" y="979789"/>
-                  </a:lnTo>
-                  <a:lnTo>
-                    <a:pt x="6446027" y="966055"/>
-                  </a:lnTo>
-                  <a:lnTo>
-                    <a:pt x="6374404" y="951612"/>
-                  </a:lnTo>
-                  <a:lnTo>
-                    <a:pt x="6302782" y="936422"/>
-                  </a:lnTo>
-                  <a:lnTo>
-                    <a:pt x="6231159" y="920448"/>
-                  </a:lnTo>
-                  <a:lnTo>
-                    <a:pt x="6159537" y="903649"/>
-                  </a:lnTo>
-                  <a:lnTo>
-                    <a:pt x="6087914" y="885982"/>
-                  </a:lnTo>
-                  <a:lnTo>
-                    <a:pt x="6016292" y="867402"/>
-                  </a:lnTo>
-                  <a:lnTo>
-                    <a:pt x="5944669" y="847863"/>
-                  </a:lnTo>
-                  <a:lnTo>
-                    <a:pt x="5873047" y="827314"/>
-                  </a:lnTo>
-                  <a:lnTo>
-                    <a:pt x="5801424" y="805704"/>
-                  </a:lnTo>
-                  <a:lnTo>
-                    <a:pt x="5729802" y="782978"/>
-                  </a:lnTo>
-                  <a:lnTo>
-                    <a:pt x="5658179" y="759077"/>
-                  </a:lnTo>
-                  <a:lnTo>
-                    <a:pt x="5586557" y="733943"/>
-                  </a:lnTo>
-                  <a:lnTo>
-                    <a:pt x="5514934" y="707509"/>
-                  </a:lnTo>
-                  <a:lnTo>
-                    <a:pt x="5443311" y="679711"/>
-                  </a:lnTo>
-                  <a:lnTo>
-                    <a:pt x="5371689" y="650476"/>
-                  </a:lnTo>
-                  <a:lnTo>
-                    <a:pt x="5300066" y="619732"/>
-                  </a:lnTo>
-                  <a:lnTo>
-                    <a:pt x="5228444" y="587399"/>
-                  </a:lnTo>
-                  <a:lnTo>
-                    <a:pt x="5156821" y="553396"/>
-                  </a:lnTo>
-                  <a:lnTo>
-                    <a:pt x="5085199" y="517637"/>
-                  </a:lnTo>
-                  <a:lnTo>
-                    <a:pt x="5013576" y="480031"/>
-                  </a:lnTo>
-                  <a:lnTo>
-                    <a:pt x="4941954" y="440482"/>
-                  </a:lnTo>
-                  <a:lnTo>
-                    <a:pt x="4870331" y="414182"/>
-                  </a:lnTo>
-                  <a:lnTo>
-                    <a:pt x="4798709" y="409225"/>
-                  </a:lnTo>
-                  <a:lnTo>
-                    <a:pt x="4727086" y="404238"/>
-                  </a:lnTo>
-                  <a:lnTo>
-                    <a:pt x="4655464" y="399222"/>
-                  </a:lnTo>
-                  <a:lnTo>
-                    <a:pt x="4583841" y="394175"/>
-                  </a:lnTo>
-                  <a:lnTo>
-                    <a:pt x="4512219" y="389098"/>
-                  </a:lnTo>
-                  <a:lnTo>
-                    <a:pt x="4440596" y="383992"/>
-                  </a:lnTo>
-                  <a:lnTo>
-                    <a:pt x="4368974" y="378854"/>
-                  </a:lnTo>
-                  <a:lnTo>
-                    <a:pt x="4297351" y="373686"/>
-                  </a:lnTo>
-                  <a:lnTo>
-                    <a:pt x="4225729" y="368487"/>
-                  </a:lnTo>
-                  <a:lnTo>
-                    <a:pt x="4154106" y="363258"/>
-                  </a:lnTo>
-                  <a:lnTo>
-                    <a:pt x="4082483" y="357997"/>
-                  </a:lnTo>
-                  <a:lnTo>
-                    <a:pt x="4010861" y="352704"/>
-                  </a:lnTo>
-                  <a:lnTo>
-                    <a:pt x="3939238" y="347381"/>
-                  </a:lnTo>
-                  <a:lnTo>
-                    <a:pt x="3867616" y="342025"/>
-                  </a:lnTo>
-                  <a:lnTo>
-                    <a:pt x="3795993" y="336637"/>
-                  </a:lnTo>
-                  <a:lnTo>
-                    <a:pt x="3724371" y="331218"/>
-                  </a:lnTo>
-                  <a:lnTo>
-                    <a:pt x="3652748" y="325766"/>
-                  </a:lnTo>
-                  <a:lnTo>
-                    <a:pt x="3581126" y="320281"/>
-                  </a:lnTo>
-                  <a:lnTo>
-                    <a:pt x="3509503" y="314764"/>
-                  </a:lnTo>
-                  <a:lnTo>
-                    <a:pt x="3437881" y="309214"/>
-                  </a:lnTo>
-                  <a:lnTo>
-                    <a:pt x="3366258" y="303631"/>
-                  </a:lnTo>
-                  <a:lnTo>
-                    <a:pt x="3294636" y="298014"/>
-                  </a:lnTo>
-                  <a:lnTo>
-                    <a:pt x="3223013" y="292365"/>
-                  </a:lnTo>
-                  <a:lnTo>
-                    <a:pt x="3151391" y="286681"/>
-                  </a:lnTo>
-                  <a:lnTo>
-                    <a:pt x="3079768" y="280963"/>
-                  </a:lnTo>
-                  <a:lnTo>
-                    <a:pt x="3008146" y="275212"/>
-                  </a:lnTo>
-                  <a:lnTo>
-                    <a:pt x="2936523" y="269426"/>
-                  </a:lnTo>
-                  <a:lnTo>
-                    <a:pt x="2864901" y="263606"/>
-                  </a:lnTo>
-                  <a:lnTo>
-                    <a:pt x="2793278" y="257750"/>
-                  </a:lnTo>
-                  <a:lnTo>
-                    <a:pt x="2721655" y="251860"/>
-                  </a:lnTo>
-                  <a:lnTo>
-                    <a:pt x="2650033" y="245935"/>
-                  </a:lnTo>
-                  <a:lnTo>
-                    <a:pt x="2578410" y="239975"/>
-                  </a:lnTo>
-                  <a:lnTo>
-                    <a:pt x="2506788" y="233979"/>
-                  </a:lnTo>
-                  <a:lnTo>
-                    <a:pt x="2435165" y="227947"/>
-                  </a:lnTo>
-                  <a:lnTo>
-                    <a:pt x="2363543" y="221880"/>
-                  </a:lnTo>
-                  <a:lnTo>
-                    <a:pt x="2291920" y="215776"/>
-                  </a:lnTo>
-                  <a:lnTo>
-                    <a:pt x="2220298" y="209636"/>
-                  </a:lnTo>
-                  <a:lnTo>
-                    <a:pt x="2148675" y="203459"/>
-                  </a:lnTo>
-                  <a:lnTo>
-                    <a:pt x="2077053" y="197245"/>
-                  </a:lnTo>
-                  <a:lnTo>
-                    <a:pt x="2005430" y="190994"/>
-                  </a:lnTo>
-                  <a:lnTo>
-                    <a:pt x="1933808" y="184706"/>
-                  </a:lnTo>
-                  <a:lnTo>
-                    <a:pt x="1862185" y="178381"/>
-                  </a:lnTo>
-                  <a:lnTo>
-                    <a:pt x="1790563" y="172018"/>
-                  </a:lnTo>
-                  <a:lnTo>
-                    <a:pt x="1718940" y="165616"/>
-                  </a:lnTo>
-                  <a:lnTo>
-                    <a:pt x="1647318" y="159177"/>
-                  </a:lnTo>
-                  <a:lnTo>
-                    <a:pt x="1575695" y="152700"/>
-                  </a:lnTo>
-                  <a:lnTo>
-                    <a:pt x="1504073" y="146183"/>
-                  </a:lnTo>
-                  <a:lnTo>
-                    <a:pt x="1432450" y="139628"/>
-                  </a:lnTo>
-                  <a:lnTo>
-                    <a:pt x="1360827" y="133034"/>
-                  </a:lnTo>
-                  <a:lnTo>
-                    <a:pt x="1289205" y="126400"/>
-                  </a:lnTo>
-                  <a:lnTo>
-                    <a:pt x="1217582" y="119727"/>
-                  </a:lnTo>
-                  <a:lnTo>
-                    <a:pt x="1145960" y="113014"/>
-                  </a:lnTo>
-                  <a:lnTo>
-                    <a:pt x="1074337" y="106261"/>
-                  </a:lnTo>
-                  <a:lnTo>
-                    <a:pt x="1002715" y="99468"/>
-                  </a:lnTo>
-                  <a:lnTo>
-                    <a:pt x="931092" y="92635"/>
-                  </a:lnTo>
-                  <a:lnTo>
-                    <a:pt x="859470" y="85760"/>
-                  </a:lnTo>
-                  <a:lnTo>
-                    <a:pt x="787847" y="78845"/>
-                  </a:lnTo>
-                  <a:lnTo>
-                    <a:pt x="716225" y="71888"/>
-                  </a:lnTo>
-                  <a:lnTo>
-                    <a:pt x="644602" y="64890"/>
-                  </a:lnTo>
-                  <a:lnTo>
-                    <a:pt x="572980" y="57850"/>
-                  </a:lnTo>
-                  <a:lnTo>
-                    <a:pt x="501357" y="50768"/>
-                  </a:lnTo>
-                  <a:lnTo>
-                    <a:pt x="429735" y="43644"/>
-                  </a:lnTo>
-                  <a:lnTo>
-                    <a:pt x="358112" y="36478"/>
-                  </a:lnTo>
-                  <a:lnTo>
-                    <a:pt x="286490" y="29269"/>
-                  </a:lnTo>
-                  <a:lnTo>
-                    <a:pt x="214867" y="22017"/>
-                  </a:lnTo>
-                  <a:lnTo>
-                    <a:pt x="143245" y="14721"/>
-                  </a:lnTo>
-                  <a:lnTo>
-                    <a:pt x="71622" y="7382"/>
+                    <a:pt x="7019007" y="1034861"/>
+                  </a:lnTo>
+                  <a:lnTo>
+                    <a:pt x="6947385" y="1025358"/>
+                  </a:lnTo>
+                  <a:lnTo>
+                    <a:pt x="6875762" y="1015348"/>
+                  </a:lnTo>
+                  <a:lnTo>
+                    <a:pt x="6804139" y="1004804"/>
+                  </a:lnTo>
+                  <a:lnTo>
+                    <a:pt x="6732517" y="993697"/>
+                  </a:lnTo>
+                  <a:lnTo>
+                    <a:pt x="6660894" y="981996"/>
+                  </a:lnTo>
+                  <a:lnTo>
+                    <a:pt x="6589272" y="969671"/>
+                  </a:lnTo>
+                  <a:lnTo>
+                    <a:pt x="6517649" y="956688"/>
+                  </a:lnTo>
+                  <a:lnTo>
+                    <a:pt x="6446027" y="943012"/>
+                  </a:lnTo>
+                  <a:lnTo>
+                    <a:pt x="6374404" y="928605"/>
+                  </a:lnTo>
+                  <a:lnTo>
+                    <a:pt x="6302782" y="913430"/>
+                  </a:lnTo>
+                  <a:lnTo>
+                    <a:pt x="6231159" y="897443"/>
+                  </a:lnTo>
+                  <a:lnTo>
+                    <a:pt x="6159537" y="880604"/>
+                  </a:lnTo>
+                  <a:lnTo>
+                    <a:pt x="6087914" y="862865"/>
+                  </a:lnTo>
+                  <a:lnTo>
+                    <a:pt x="6016292" y="844179"/>
+                  </a:lnTo>
+                  <a:lnTo>
+                    <a:pt x="5944669" y="824496"/>
+                  </a:lnTo>
+                  <a:lnTo>
+                    <a:pt x="5873047" y="803761"/>
+                  </a:lnTo>
+                  <a:lnTo>
+                    <a:pt x="5801424" y="781920"/>
+                  </a:lnTo>
+                  <a:lnTo>
+                    <a:pt x="5729802" y="758912"/>
+                  </a:lnTo>
+                  <a:lnTo>
+                    <a:pt x="5658179" y="734676"/>
+                  </a:lnTo>
+                  <a:lnTo>
+                    <a:pt x="5586557" y="709146"/>
+                  </a:lnTo>
+                  <a:lnTo>
+                    <a:pt x="5514934" y="682253"/>
+                  </a:lnTo>
+                  <a:lnTo>
+                    <a:pt x="5443311" y="653923"/>
+                  </a:lnTo>
+                  <a:lnTo>
+                    <a:pt x="5371689" y="624082"/>
+                  </a:lnTo>
+                  <a:lnTo>
+                    <a:pt x="5300066" y="592646"/>
+                  </a:lnTo>
+                  <a:lnTo>
+                    <a:pt x="5228444" y="559533"/>
+                  </a:lnTo>
+                  <a:lnTo>
+                    <a:pt x="5156821" y="524651"/>
+                  </a:lnTo>
+                  <a:lnTo>
+                    <a:pt x="5085199" y="487907"/>
+                  </a:lnTo>
+                  <a:lnTo>
+                    <a:pt x="5013576" y="449202"/>
+                  </a:lnTo>
+                  <a:lnTo>
+                    <a:pt x="4941954" y="408429"/>
+                  </a:lnTo>
+                  <a:lnTo>
+                    <a:pt x="4870331" y="381479"/>
+                  </a:lnTo>
+                  <a:lnTo>
+                    <a:pt x="4798709" y="376849"/>
+                  </a:lnTo>
+                  <a:lnTo>
+                    <a:pt x="4727086" y="372193"/>
+                  </a:lnTo>
+                  <a:lnTo>
+                    <a:pt x="4655464" y="367512"/>
+                  </a:lnTo>
+                  <a:lnTo>
+                    <a:pt x="4583841" y="362804"/>
+                  </a:lnTo>
+                  <a:lnTo>
+                    <a:pt x="4512219" y="358070"/>
+                  </a:lnTo>
+                  <a:lnTo>
+                    <a:pt x="4440596" y="353309"/>
+                  </a:lnTo>
+                  <a:lnTo>
+                    <a:pt x="4368974" y="348522"/>
+                  </a:lnTo>
+                  <a:lnTo>
+                    <a:pt x="4297351" y="343709"/>
+                  </a:lnTo>
+                  <a:lnTo>
+                    <a:pt x="4225729" y="338868"/>
+                  </a:lnTo>
+                  <a:lnTo>
+                    <a:pt x="4154106" y="334001"/>
+                  </a:lnTo>
+                  <a:lnTo>
+                    <a:pt x="4082483" y="329107"/>
+                  </a:lnTo>
+                  <a:lnTo>
+                    <a:pt x="4010861" y="324185"/>
+                  </a:lnTo>
+                  <a:lnTo>
+                    <a:pt x="3939238" y="319236"/>
+                  </a:lnTo>
+                  <a:lnTo>
+                    <a:pt x="3867616" y="314259"/>
+                  </a:lnTo>
+                  <a:lnTo>
+                    <a:pt x="3795993" y="309255"/>
+                  </a:lnTo>
+                  <a:lnTo>
+                    <a:pt x="3724371" y="304222"/>
+                  </a:lnTo>
+                  <a:lnTo>
+                    <a:pt x="3652748" y="299162"/>
+                  </a:lnTo>
+                  <a:lnTo>
+                    <a:pt x="3581126" y="294074"/>
+                  </a:lnTo>
+                  <a:lnTo>
+                    <a:pt x="3509503" y="288957"/>
+                  </a:lnTo>
+                  <a:lnTo>
+                    <a:pt x="3437881" y="283812"/>
+                  </a:lnTo>
+                  <a:lnTo>
+                    <a:pt x="3366258" y="278638"/>
+                  </a:lnTo>
+                  <a:lnTo>
+                    <a:pt x="3294636" y="273435"/>
+                  </a:lnTo>
+                  <a:lnTo>
+                    <a:pt x="3223013" y="268203"/>
+                  </a:lnTo>
+                  <a:lnTo>
+                    <a:pt x="3151391" y="262942"/>
+                  </a:lnTo>
+                  <a:lnTo>
+                    <a:pt x="3079768" y="257652"/>
+                  </a:lnTo>
+                  <a:lnTo>
+                    <a:pt x="3008146" y="252332"/>
+                  </a:lnTo>
+                  <a:lnTo>
+                    <a:pt x="2936523" y="246983"/>
+                  </a:lnTo>
+                  <a:lnTo>
+                    <a:pt x="2864901" y="241604"/>
+                  </a:lnTo>
+                  <a:lnTo>
+                    <a:pt x="2793278" y="236195"/>
+                  </a:lnTo>
+                  <a:lnTo>
+                    <a:pt x="2721655" y="230756"/>
+                  </a:lnTo>
+                  <a:lnTo>
+                    <a:pt x="2650033" y="225286"/>
+                  </a:lnTo>
+                  <a:lnTo>
+                    <a:pt x="2578410" y="219786"/>
+                  </a:lnTo>
+                  <a:lnTo>
+                    <a:pt x="2506788" y="214256"/>
+                  </a:lnTo>
+                  <a:lnTo>
+                    <a:pt x="2435165" y="208695"/>
+                  </a:lnTo>
+                  <a:lnTo>
+                    <a:pt x="2363543" y="203102"/>
+                  </a:lnTo>
+                  <a:lnTo>
+                    <a:pt x="2291920" y="197479"/>
+                  </a:lnTo>
+                  <a:lnTo>
+                    <a:pt x="2220298" y="191824"/>
+                  </a:lnTo>
+                  <a:lnTo>
+                    <a:pt x="2148675" y="186138"/>
+                  </a:lnTo>
+                  <a:lnTo>
+                    <a:pt x="2077053" y="180420"/>
+                  </a:lnTo>
+                  <a:lnTo>
+                    <a:pt x="2005430" y="174670"/>
+                  </a:lnTo>
+                  <a:lnTo>
+                    <a:pt x="1933808" y="168888"/>
+                  </a:lnTo>
+                  <a:lnTo>
+                    <a:pt x="1862185" y="163074"/>
+                  </a:lnTo>
+                  <a:lnTo>
+                    <a:pt x="1790563" y="157228"/>
+                  </a:lnTo>
+                  <a:lnTo>
+                    <a:pt x="1718940" y="151349"/>
+                  </a:lnTo>
+                  <a:lnTo>
+                    <a:pt x="1647318" y="145437"/>
+                  </a:lnTo>
+                  <a:lnTo>
+                    <a:pt x="1575695" y="139493"/>
+                  </a:lnTo>
+                  <a:lnTo>
+                    <a:pt x="1504073" y="133515"/>
+                  </a:lnTo>
+                  <a:lnTo>
+                    <a:pt x="1432450" y="127504"/>
+                  </a:lnTo>
+                  <a:lnTo>
+                    <a:pt x="1360827" y="121459"/>
+                  </a:lnTo>
+                  <a:lnTo>
+                    <a:pt x="1289205" y="115381"/>
+                  </a:lnTo>
+                  <a:lnTo>
+                    <a:pt x="1217582" y="109269"/>
+                  </a:lnTo>
+                  <a:lnTo>
+                    <a:pt x="1145960" y="103123"/>
+                  </a:lnTo>
+                  <a:lnTo>
+                    <a:pt x="1074337" y="96943"/>
+                  </a:lnTo>
+                  <a:lnTo>
+                    <a:pt x="1002715" y="90728"/>
+                  </a:lnTo>
+                  <a:lnTo>
+                    <a:pt x="931092" y="84479"/>
+                  </a:lnTo>
+                  <a:lnTo>
+                    <a:pt x="859470" y="78195"/>
+                  </a:lnTo>
+                  <a:lnTo>
+                    <a:pt x="787847" y="71876"/>
+                  </a:lnTo>
+                  <a:lnTo>
+                    <a:pt x="716225" y="65522"/>
+                  </a:lnTo>
+                  <a:lnTo>
+                    <a:pt x="644602" y="59132"/>
+                  </a:lnTo>
+                  <a:lnTo>
+                    <a:pt x="572980" y="52707"/>
+                  </a:lnTo>
+                  <a:lnTo>
+                    <a:pt x="501357" y="46246"/>
+                  </a:lnTo>
+                  <a:lnTo>
+                    <a:pt x="429735" y="39749"/>
+                  </a:lnTo>
+                  <a:lnTo>
+                    <a:pt x="358112" y="33215"/>
+                  </a:lnTo>
+                  <a:lnTo>
+                    <a:pt x="286490" y="26646"/>
+                  </a:lnTo>
+                  <a:lnTo>
+                    <a:pt x="214867" y="20040"/>
+                  </a:lnTo>
+                  <a:lnTo>
+                    <a:pt x="143245" y="13397"/>
+                  </a:lnTo>
+                  <a:lnTo>
+                    <a:pt x="71622" y="6717"/>
                   </a:lnTo>
                   <a:lnTo>
                     <a:pt x="0" y="0"/>
@@ -4049,261 +4043,258 @@
           </p:nvSpPr>
           <p:spPr>
             <a:xfrm>
-              <a:off x="2421290" y="2073503"/>
-              <a:ext cx="5841388" cy="3133184"/>
+              <a:off x="2501250" y="2073503"/>
+              <a:ext cx="5761428" cy="3139879"/>
             </a:xfrm>
             <a:custGeom>
               <a:avLst/>
               <a:pathLst>
-                <a:path w="5841388" h="3133184">
+                <a:path w="5761428" h="3139879">
                   <a:moveTo>
                     <a:pt x="0" y="0"/>
                   </a:moveTo>
                   <a:lnTo>
-                    <a:pt x="39964" y="54635"/>
-                  </a:lnTo>
-                  <a:lnTo>
-                    <a:pt x="111586" y="149834"/>
-                  </a:lnTo>
-                  <a:lnTo>
-                    <a:pt x="183209" y="242390"/>
-                  </a:lnTo>
-                  <a:lnTo>
-                    <a:pt x="254831" y="332376"/>
-                  </a:lnTo>
-                  <a:lnTo>
-                    <a:pt x="326454" y="419864"/>
-                  </a:lnTo>
-                  <a:lnTo>
-                    <a:pt x="398076" y="504923"/>
-                  </a:lnTo>
-                  <a:lnTo>
-                    <a:pt x="469699" y="587621"/>
-                  </a:lnTo>
-                  <a:lnTo>
-                    <a:pt x="541321" y="668023"/>
-                  </a:lnTo>
-                  <a:lnTo>
-                    <a:pt x="612944" y="746192"/>
-                  </a:lnTo>
-                  <a:lnTo>
-                    <a:pt x="684566" y="822192"/>
-                  </a:lnTo>
-                  <a:lnTo>
-                    <a:pt x="756189" y="896082"/>
-                  </a:lnTo>
-                  <a:lnTo>
-                    <a:pt x="827811" y="967920"/>
-                  </a:lnTo>
-                  <a:lnTo>
-                    <a:pt x="899434" y="1037764"/>
-                  </a:lnTo>
-                  <a:lnTo>
-                    <a:pt x="971056" y="1105669"/>
-                  </a:lnTo>
-                  <a:lnTo>
-                    <a:pt x="1042679" y="1171689"/>
-                  </a:lnTo>
-                  <a:lnTo>
-                    <a:pt x="1114302" y="1235876"/>
-                  </a:lnTo>
-                  <a:lnTo>
-                    <a:pt x="1185924" y="1298281"/>
-                  </a:lnTo>
-                  <a:lnTo>
-                    <a:pt x="1257547" y="1358954"/>
-                  </a:lnTo>
-                  <a:lnTo>
-                    <a:pt x="1329169" y="1417942"/>
-                  </a:lnTo>
-                  <a:lnTo>
-                    <a:pt x="1400792" y="1475293"/>
-                  </a:lnTo>
-                  <a:lnTo>
-                    <a:pt x="1472414" y="1531051"/>
-                  </a:lnTo>
-                  <a:lnTo>
-                    <a:pt x="1544037" y="1585262"/>
-                  </a:lnTo>
-                  <a:lnTo>
-                    <a:pt x="1615659" y="1637967"/>
-                  </a:lnTo>
-                  <a:lnTo>
-                    <a:pt x="1687282" y="1689210"/>
-                  </a:lnTo>
-                  <a:lnTo>
-                    <a:pt x="1758904" y="1739029"/>
-                  </a:lnTo>
-                  <a:lnTo>
-                    <a:pt x="1830527" y="1787466"/>
-                  </a:lnTo>
-                  <a:lnTo>
-                    <a:pt x="1902149" y="1834558"/>
-                  </a:lnTo>
-                  <a:lnTo>
-                    <a:pt x="1973772" y="1880342"/>
-                  </a:lnTo>
-                  <a:lnTo>
-                    <a:pt x="2045394" y="1924856"/>
-                  </a:lnTo>
-                  <a:lnTo>
-                    <a:pt x="2117017" y="1968134"/>
-                  </a:lnTo>
-                  <a:lnTo>
-                    <a:pt x="2188639" y="2010210"/>
-                  </a:lnTo>
-                  <a:lnTo>
-                    <a:pt x="2260262" y="2051118"/>
-                  </a:lnTo>
-                  <a:lnTo>
-                    <a:pt x="2331884" y="2090891"/>
-                  </a:lnTo>
-                  <a:lnTo>
-                    <a:pt x="2403507" y="2129559"/>
-                  </a:lnTo>
-                  <a:lnTo>
-                    <a:pt x="2475130" y="2167154"/>
-                  </a:lnTo>
-                  <a:lnTo>
-                    <a:pt x="2546752" y="2203705"/>
-                  </a:lnTo>
-                  <a:lnTo>
-                    <a:pt x="2618375" y="2239241"/>
-                  </a:lnTo>
-                  <a:lnTo>
-                    <a:pt x="2689997" y="2273791"/>
-                  </a:lnTo>
-                  <a:lnTo>
-                    <a:pt x="2761620" y="2307382"/>
-                  </a:lnTo>
-                  <a:lnTo>
-                    <a:pt x="2833242" y="2340040"/>
-                  </a:lnTo>
-                  <a:lnTo>
-                    <a:pt x="2904865" y="2371791"/>
-                  </a:lnTo>
-                  <a:lnTo>
-                    <a:pt x="2976487" y="2402661"/>
-                  </a:lnTo>
-                  <a:lnTo>
-                    <a:pt x="3048110" y="2432674"/>
-                  </a:lnTo>
-                  <a:lnTo>
-                    <a:pt x="3119732" y="2461854"/>
-                  </a:lnTo>
-                  <a:lnTo>
-                    <a:pt x="3191355" y="2490223"/>
-                  </a:lnTo>
-                  <a:lnTo>
-                    <a:pt x="3262977" y="2517806"/>
-                  </a:lnTo>
-                  <a:lnTo>
-                    <a:pt x="3334600" y="2544622"/>
-                  </a:lnTo>
-                  <a:lnTo>
-                    <a:pt x="3406222" y="2570694"/>
-                  </a:lnTo>
-                  <a:lnTo>
-                    <a:pt x="3477845" y="2596042"/>
-                  </a:lnTo>
-                  <a:lnTo>
-                    <a:pt x="3549467" y="2620686"/>
-                  </a:lnTo>
-                  <a:lnTo>
-                    <a:pt x="3621090" y="2644646"/>
-                  </a:lnTo>
-                  <a:lnTo>
-                    <a:pt x="3692712" y="2667941"/>
-                  </a:lnTo>
-                  <a:lnTo>
-                    <a:pt x="3764335" y="2690590"/>
-                  </a:lnTo>
-                  <a:lnTo>
-                    <a:pt x="3835958" y="2712609"/>
-                  </a:lnTo>
-                  <a:lnTo>
-                    <a:pt x="3907580" y="2734017"/>
-                  </a:lnTo>
-                  <a:lnTo>
-                    <a:pt x="3979203" y="2754831"/>
-                  </a:lnTo>
-                  <a:lnTo>
-                    <a:pt x="4050825" y="2775067"/>
-                  </a:lnTo>
-                  <a:lnTo>
-                    <a:pt x="4122448" y="2794742"/>
-                  </a:lnTo>
-                  <a:lnTo>
-                    <a:pt x="4194070" y="2813870"/>
-                  </a:lnTo>
-                  <a:lnTo>
-                    <a:pt x="4265693" y="2832467"/>
-                  </a:lnTo>
-                  <a:lnTo>
-                    <a:pt x="4337315" y="2850547"/>
-                  </a:lnTo>
-                  <a:lnTo>
-                    <a:pt x="4408938" y="2868126"/>
-                  </a:lnTo>
-                  <a:lnTo>
-                    <a:pt x="4480560" y="2885217"/>
-                  </a:lnTo>
-                  <a:lnTo>
-                    <a:pt x="4552183" y="2901833"/>
-                  </a:lnTo>
-                  <a:lnTo>
-                    <a:pt x="4623805" y="2917988"/>
-                  </a:lnTo>
-                  <a:lnTo>
-                    <a:pt x="4695428" y="2933695"/>
-                  </a:lnTo>
-                  <a:lnTo>
-                    <a:pt x="4767050" y="2948965"/>
-                  </a:lnTo>
-                  <a:lnTo>
-                    <a:pt x="4838673" y="2963812"/>
-                  </a:lnTo>
-                  <a:lnTo>
-                    <a:pt x="4910295" y="2978246"/>
-                  </a:lnTo>
-                  <a:lnTo>
-                    <a:pt x="4981918" y="2992280"/>
-                  </a:lnTo>
-                  <a:lnTo>
-                    <a:pt x="5053540" y="3005924"/>
-                  </a:lnTo>
-                  <a:lnTo>
-                    <a:pt x="5125163" y="3019189"/>
-                  </a:lnTo>
-                  <a:lnTo>
-                    <a:pt x="5196786" y="3032086"/>
-                  </a:lnTo>
-                  <a:lnTo>
-                    <a:pt x="5268408" y="3044625"/>
-                  </a:lnTo>
-                  <a:lnTo>
-                    <a:pt x="5340031" y="3056816"/>
-                  </a:lnTo>
-                  <a:lnTo>
-                    <a:pt x="5411653" y="3068668"/>
-                  </a:lnTo>
-                  <a:lnTo>
-                    <a:pt x="5483276" y="3080192"/>
-                  </a:lnTo>
-                  <a:lnTo>
-                    <a:pt x="5554898" y="3091395"/>
-                  </a:lnTo>
-                  <a:lnTo>
-                    <a:pt x="5626521" y="3102287"/>
-                  </a:lnTo>
-                  <a:lnTo>
-                    <a:pt x="5698143" y="3112877"/>
-                  </a:lnTo>
-                  <a:lnTo>
-                    <a:pt x="5769766" y="3123173"/>
-                  </a:lnTo>
-                  <a:lnTo>
-                    <a:pt x="5841388" y="3133184"/>
+                    <a:pt x="31626" y="44352"/>
+                  </a:lnTo>
+                  <a:lnTo>
+                    <a:pt x="103249" y="141943"/>
+                  </a:lnTo>
+                  <a:lnTo>
+                    <a:pt x="174871" y="236765"/>
+                  </a:lnTo>
+                  <a:lnTo>
+                    <a:pt x="246494" y="328897"/>
+                  </a:lnTo>
+                  <a:lnTo>
+                    <a:pt x="318116" y="418415"/>
+                  </a:lnTo>
+                  <a:lnTo>
+                    <a:pt x="389739" y="505392"/>
+                  </a:lnTo>
+                  <a:lnTo>
+                    <a:pt x="461361" y="589902"/>
+                  </a:lnTo>
+                  <a:lnTo>
+                    <a:pt x="532984" y="672014"/>
+                  </a:lnTo>
+                  <a:lnTo>
+                    <a:pt x="604606" y="751795"/>
+                  </a:lnTo>
+                  <a:lnTo>
+                    <a:pt x="676229" y="829313"/>
+                  </a:lnTo>
+                  <a:lnTo>
+                    <a:pt x="747851" y="904632"/>
+                  </a:lnTo>
+                  <a:lnTo>
+                    <a:pt x="819474" y="977813"/>
+                  </a:lnTo>
+                  <a:lnTo>
+                    <a:pt x="891096" y="1048918"/>
+                  </a:lnTo>
+                  <a:lnTo>
+                    <a:pt x="962719" y="1118005"/>
+                  </a:lnTo>
+                  <a:lnTo>
+                    <a:pt x="1034341" y="1185132"/>
+                  </a:lnTo>
+                  <a:lnTo>
+                    <a:pt x="1105964" y="1250355"/>
+                  </a:lnTo>
+                  <a:lnTo>
+                    <a:pt x="1177586" y="1313726"/>
+                  </a:lnTo>
+                  <a:lnTo>
+                    <a:pt x="1249209" y="1375300"/>
+                  </a:lnTo>
+                  <a:lnTo>
+                    <a:pt x="1320831" y="1435126"/>
+                  </a:lnTo>
+                  <a:lnTo>
+                    <a:pt x="1392454" y="1493255"/>
+                  </a:lnTo>
+                  <a:lnTo>
+                    <a:pt x="1464077" y="1549734"/>
+                  </a:lnTo>
+                  <a:lnTo>
+                    <a:pt x="1535699" y="1604611"/>
+                  </a:lnTo>
+                  <a:lnTo>
+                    <a:pt x="1607322" y="1657931"/>
+                  </a:lnTo>
+                  <a:lnTo>
+                    <a:pt x="1678944" y="1709738"/>
+                  </a:lnTo>
+                  <a:lnTo>
+                    <a:pt x="1750567" y="1760074"/>
+                  </a:lnTo>
+                  <a:lnTo>
+                    <a:pt x="1822189" y="1808983"/>
+                  </a:lnTo>
+                  <a:lnTo>
+                    <a:pt x="1893812" y="1856504"/>
+                  </a:lnTo>
+                  <a:lnTo>
+                    <a:pt x="1965434" y="1902676"/>
+                  </a:lnTo>
+                  <a:lnTo>
+                    <a:pt x="2037057" y="1947538"/>
+                  </a:lnTo>
+                  <a:lnTo>
+                    <a:pt x="2108679" y="1991128"/>
+                  </a:lnTo>
+                  <a:lnTo>
+                    <a:pt x="2180302" y="2033480"/>
+                  </a:lnTo>
+                  <a:lnTo>
+                    <a:pt x="2251924" y="2074631"/>
+                  </a:lnTo>
+                  <a:lnTo>
+                    <a:pt x="2323547" y="2114614"/>
+                  </a:lnTo>
+                  <a:lnTo>
+                    <a:pt x="2395169" y="2153462"/>
+                  </a:lnTo>
+                  <a:lnTo>
+                    <a:pt x="2466792" y="2191209"/>
+                  </a:lnTo>
+                  <a:lnTo>
+                    <a:pt x="2538414" y="2227884"/>
+                  </a:lnTo>
+                  <a:lnTo>
+                    <a:pt x="2610037" y="2263519"/>
+                  </a:lnTo>
+                  <a:lnTo>
+                    <a:pt x="2681659" y="2298142"/>
+                  </a:lnTo>
+                  <a:lnTo>
+                    <a:pt x="2753282" y="2331783"/>
+                  </a:lnTo>
+                  <a:lnTo>
+                    <a:pt x="2824905" y="2364470"/>
+                  </a:lnTo>
+                  <a:lnTo>
+                    <a:pt x="2896527" y="2396229"/>
+                  </a:lnTo>
+                  <a:lnTo>
+                    <a:pt x="2968150" y="2427086"/>
+                  </a:lnTo>
+                  <a:lnTo>
+                    <a:pt x="3039772" y="2457069"/>
+                  </a:lnTo>
+                  <a:lnTo>
+                    <a:pt x="3111395" y="2486200"/>
+                  </a:lnTo>
+                  <a:lnTo>
+                    <a:pt x="3183017" y="2514505"/>
+                  </a:lnTo>
+                  <a:lnTo>
+                    <a:pt x="3254640" y="2542007"/>
+                  </a:lnTo>
+                  <a:lnTo>
+                    <a:pt x="3326262" y="2568729"/>
+                  </a:lnTo>
+                  <a:lnTo>
+                    <a:pt x="3397885" y="2594692"/>
+                  </a:lnTo>
+                  <a:lnTo>
+                    <a:pt x="3469507" y="2619918"/>
+                  </a:lnTo>
+                  <a:lnTo>
+                    <a:pt x="3541130" y="2644429"/>
+                  </a:lnTo>
+                  <a:lnTo>
+                    <a:pt x="3612752" y="2668245"/>
+                  </a:lnTo>
+                  <a:lnTo>
+                    <a:pt x="3684375" y="2691384"/>
+                  </a:lnTo>
+                  <a:lnTo>
+                    <a:pt x="3755997" y="2713867"/>
+                  </a:lnTo>
+                  <a:lnTo>
+                    <a:pt x="3827620" y="2735712"/>
+                  </a:lnTo>
+                  <a:lnTo>
+                    <a:pt x="3899242" y="2756937"/>
+                  </a:lnTo>
+                  <a:lnTo>
+                    <a:pt x="3970865" y="2777560"/>
+                  </a:lnTo>
+                  <a:lnTo>
+                    <a:pt x="4042487" y="2797598"/>
+                  </a:lnTo>
+                  <a:lnTo>
+                    <a:pt x="4114110" y="2817067"/>
+                  </a:lnTo>
+                  <a:lnTo>
+                    <a:pt x="4185733" y="2835984"/>
+                  </a:lnTo>
+                  <a:lnTo>
+                    <a:pt x="4257355" y="2854364"/>
+                  </a:lnTo>
+                  <a:lnTo>
+                    <a:pt x="4328978" y="2872222"/>
+                  </a:lnTo>
+                  <a:lnTo>
+                    <a:pt x="4400600" y="2889574"/>
+                  </a:lnTo>
+                  <a:lnTo>
+                    <a:pt x="4472223" y="2906434"/>
+                  </a:lnTo>
+                  <a:lnTo>
+                    <a:pt x="4543845" y="2922815"/>
+                  </a:lnTo>
+                  <a:lnTo>
+                    <a:pt x="4615468" y="2938731"/>
+                  </a:lnTo>
+                  <a:lnTo>
+                    <a:pt x="4687090" y="2954195"/>
+                  </a:lnTo>
+                  <a:lnTo>
+                    <a:pt x="4758713" y="2969221"/>
+                  </a:lnTo>
+                  <a:lnTo>
+                    <a:pt x="4830335" y="2983821"/>
+                  </a:lnTo>
+                  <a:lnTo>
+                    <a:pt x="4901958" y="2998006"/>
+                  </a:lnTo>
+                  <a:lnTo>
+                    <a:pt x="4973580" y="3011788"/>
+                  </a:lnTo>
+                  <a:lnTo>
+                    <a:pt x="5045203" y="3025180"/>
+                  </a:lnTo>
+                  <a:lnTo>
+                    <a:pt x="5116825" y="3038192"/>
+                  </a:lnTo>
+                  <a:lnTo>
+                    <a:pt x="5188448" y="3050834"/>
+                  </a:lnTo>
+                  <a:lnTo>
+                    <a:pt x="5260070" y="3063118"/>
+                  </a:lnTo>
+                  <a:lnTo>
+                    <a:pt x="5331693" y="3075053"/>
+                  </a:lnTo>
+                  <a:lnTo>
+                    <a:pt x="5403315" y="3086650"/>
+                  </a:lnTo>
+                  <a:lnTo>
+                    <a:pt x="5474938" y="3097917"/>
+                  </a:lnTo>
+                  <a:lnTo>
+                    <a:pt x="5546561" y="3108865"/>
+                  </a:lnTo>
+                  <a:lnTo>
+                    <a:pt x="5618183" y="3119502"/>
+                  </a:lnTo>
+                  <a:lnTo>
+                    <a:pt x="5689806" y="3129837"/>
+                  </a:lnTo>
+                  <a:lnTo>
+                    <a:pt x="5761428" y="3139879"/>
                   </a:lnTo>
                 </a:path>
               </a:pathLst>
@@ -5043,7 +5034,7 @@
                   <a:latin typeface="Helvetica"/>
                   <a:cs typeface="Helvetica"/>
                 </a:rPr>
-                <a:t>subHR per 1 mL/min: 0.96 (0.94-0.99)  |  per IQR (Δ = 18.2): 0.52 (0.31-0.87)  |  IQR: [-11.5, 6.7]</a:t>
+                <a:t>subHR per 1 mL/min: 0.96 (0.94-0.99)  |  per IQR (Δ = 18.2): 0.51 (0.29-0.88)  |  IQR: [-11.5, 6.7]</a:t>
               </a:r>
             </a:p>
           </p:txBody>

--- a/docs/plots/carbo/jx_carbo_linsubhr_egfrdisc_anyhosp.pptx
+++ b/docs/plots/carbo/jx_carbo_linsubhr_egfrdisc_anyhosp.pptx
@@ -3142,7 +3142,7 @@
                     <a:pt x="5944669" y="2718842"/>
                   </a:lnTo>
                   <a:lnTo>
-                    <a:pt x="6016292" y="2723078"/>
+                    <a:pt x="6016292" y="2723079"/>
                   </a:lnTo>
                   <a:lnTo>
                     <a:pt x="6087914" y="2727291"/>
@@ -3340,7 +3340,7 @@
                     <a:pt x="3581126" y="2564985"/>
                   </a:lnTo>
                   <a:lnTo>
-                    <a:pt x="3509503" y="2559869"/>
+                    <a:pt x="3509503" y="2559868"/>
                   </a:lnTo>
                   <a:lnTo>
                     <a:pt x="3437881" y="2554723"/>
@@ -3382,7 +3382,7 @@
                     <a:pt x="2578410" y="2490698"/>
                   </a:lnTo>
                   <a:lnTo>
-                    <a:pt x="2506788" y="2485168"/>
+                    <a:pt x="2506788" y="2485167"/>
                   </a:lnTo>
                   <a:lnTo>
                     <a:pt x="2435165" y="2479606"/>
@@ -3400,7 +3400,7 @@
                     <a:pt x="2148675" y="2457049"/>
                   </a:lnTo>
                   <a:lnTo>
-                    <a:pt x="2077053" y="2451332"/>
+                    <a:pt x="2077053" y="2451331"/>
                   </a:lnTo>
                   <a:lnTo>
                     <a:pt x="2005430" y="2445582"/>
@@ -3412,10 +3412,10 @@
                     <a:pt x="1862185" y="2433986"/>
                   </a:lnTo>
                   <a:lnTo>
-                    <a:pt x="1790563" y="2428140"/>
-                  </a:lnTo>
-                  <a:lnTo>
-                    <a:pt x="1718940" y="2422261"/>
+                    <a:pt x="1790563" y="2428139"/>
+                  </a:lnTo>
+                  <a:lnTo>
+                    <a:pt x="1718940" y="2422260"/>
                   </a:lnTo>
                   <a:lnTo>
                     <a:pt x="1647318" y="2416349"/>
@@ -3424,10 +3424,10 @@
                     <a:pt x="1575695" y="2410404"/>
                   </a:lnTo>
                   <a:lnTo>
-                    <a:pt x="1504073" y="2404427"/>
-                  </a:lnTo>
-                  <a:lnTo>
-                    <a:pt x="1432450" y="2398416"/>
+                    <a:pt x="1504073" y="2404426"/>
+                  </a:lnTo>
+                  <a:lnTo>
+                    <a:pt x="1432450" y="2398415"/>
                   </a:lnTo>
                   <a:lnTo>
                     <a:pt x="1360827" y="2392371"/>
@@ -3451,16 +3451,16 @@
                     <a:pt x="931092" y="2355391"/>
                   </a:lnTo>
                   <a:lnTo>
-                    <a:pt x="859470" y="2349107"/>
-                  </a:lnTo>
-                  <a:lnTo>
-                    <a:pt x="787847" y="2342788"/>
+                    <a:pt x="859470" y="2349106"/>
+                  </a:lnTo>
+                  <a:lnTo>
+                    <a:pt x="787847" y="2342787"/>
                   </a:lnTo>
                   <a:lnTo>
                     <a:pt x="716225" y="2336433"/>
                   </a:lnTo>
                   <a:lnTo>
-                    <a:pt x="644602" y="2330044"/>
+                    <a:pt x="644602" y="2330043"/>
                   </a:lnTo>
                   <a:lnTo>
                     <a:pt x="572980" y="2323618"/>
@@ -3653,7 +3653,7 @@
                     <a:pt x="3020692" y="2718842"/>
                   </a:lnTo>
                   <a:lnTo>
-                    <a:pt x="3092315" y="2723078"/>
+                    <a:pt x="3092315" y="2723079"/>
                   </a:lnTo>
                   <a:lnTo>
                     <a:pt x="3163937" y="2727291"/>
@@ -3732,10 +3732,10 @@
                     <a:pt x="7019007" y="1034861"/>
                   </a:lnTo>
                   <a:lnTo>
-                    <a:pt x="6947385" y="1025358"/>
-                  </a:lnTo>
-                  <a:lnTo>
-                    <a:pt x="6875762" y="1015348"/>
+                    <a:pt x="6947385" y="1025359"/>
+                  </a:lnTo>
+                  <a:lnTo>
+                    <a:pt x="6875762" y="1015349"/>
                   </a:lnTo>
                   <a:lnTo>
                     <a:pt x="6804139" y="1004804"/>
@@ -3744,10 +3744,10 @@
                     <a:pt x="6732517" y="993697"/>
                   </a:lnTo>
                   <a:lnTo>
-                    <a:pt x="6660894" y="981996"/>
-                  </a:lnTo>
-                  <a:lnTo>
-                    <a:pt x="6589272" y="969671"/>
+                    <a:pt x="6660894" y="981997"/>
+                  </a:lnTo>
+                  <a:lnTo>
+                    <a:pt x="6589272" y="969672"/>
                   </a:lnTo>
                   <a:lnTo>
                     <a:pt x="6517649" y="956688"/>
@@ -3756,13 +3756,13 @@
                     <a:pt x="6446027" y="943012"/>
                   </a:lnTo>
                   <a:lnTo>
-                    <a:pt x="6374404" y="928605"/>
+                    <a:pt x="6374404" y="928606"/>
                   </a:lnTo>
                   <a:lnTo>
                     <a:pt x="6302782" y="913430"/>
                   </a:lnTo>
                   <a:lnTo>
-                    <a:pt x="6231159" y="897443"/>
+                    <a:pt x="6231159" y="897444"/>
                   </a:lnTo>
                   <a:lnTo>
                     <a:pt x="6159537" y="880604"/>
@@ -3771,13 +3771,13 @@
                     <a:pt x="6087914" y="862865"/>
                   </a:lnTo>
                   <a:lnTo>
-                    <a:pt x="6016292" y="844179"/>
+                    <a:pt x="6016292" y="844180"/>
                   </a:lnTo>
                   <a:lnTo>
                     <a:pt x="5944669" y="824496"/>
                   </a:lnTo>
                   <a:lnTo>
-                    <a:pt x="5873047" y="803761"/>
+                    <a:pt x="5873047" y="803762"/>
                   </a:lnTo>
                   <a:lnTo>
                     <a:pt x="5801424" y="781920"/>
@@ -3795,22 +3795,22 @@
                     <a:pt x="5514934" y="682253"/>
                   </a:lnTo>
                   <a:lnTo>
-                    <a:pt x="5443311" y="653923"/>
+                    <a:pt x="5443311" y="653924"/>
                   </a:lnTo>
                   <a:lnTo>
                     <a:pt x="5371689" y="624082"/>
                   </a:lnTo>
                   <a:lnTo>
-                    <a:pt x="5300066" y="592646"/>
+                    <a:pt x="5300066" y="592647"/>
                   </a:lnTo>
                   <a:lnTo>
                     <a:pt x="5228444" y="559533"/>
                   </a:lnTo>
                   <a:lnTo>
-                    <a:pt x="5156821" y="524651"/>
-                  </a:lnTo>
-                  <a:lnTo>
-                    <a:pt x="5085199" y="487907"/>
+                    <a:pt x="5156821" y="524652"/>
+                  </a:lnTo>
+                  <a:lnTo>
+                    <a:pt x="5085199" y="487908"/>
                   </a:lnTo>
                   <a:lnTo>
                     <a:pt x="5013576" y="449202"/>
@@ -3840,13 +3840,13 @@
                     <a:pt x="4440596" y="353309"/>
                   </a:lnTo>
                   <a:lnTo>
-                    <a:pt x="4368974" y="348522"/>
+                    <a:pt x="4368974" y="348523"/>
                   </a:lnTo>
                   <a:lnTo>
                     <a:pt x="4297351" y="343709"/>
                   </a:lnTo>
                   <a:lnTo>
-                    <a:pt x="4225729" y="338868"/>
+                    <a:pt x="4225729" y="338869"/>
                   </a:lnTo>
                   <a:lnTo>
                     <a:pt x="4154106" y="334001"/>
@@ -3867,7 +3867,7 @@
                     <a:pt x="3795993" y="309255"/>
                   </a:lnTo>
                   <a:lnTo>
-                    <a:pt x="3724371" y="304222"/>
+                    <a:pt x="3724371" y="304223"/>
                   </a:lnTo>
                   <a:lnTo>
                     <a:pt x="3652748" y="299162"/>
@@ -3897,7 +3897,7 @@
                     <a:pt x="3079768" y="257652"/>
                   </a:lnTo>
                   <a:lnTo>
-                    <a:pt x="3008146" y="252332"/>
+                    <a:pt x="3008146" y="252333"/>
                   </a:lnTo>
                   <a:lnTo>
                     <a:pt x="2936523" y="246983"/>
@@ -3912,10 +3912,10 @@
                     <a:pt x="2721655" y="230756"/>
                   </a:lnTo>
                   <a:lnTo>
-                    <a:pt x="2650033" y="225286"/>
-                  </a:lnTo>
-                  <a:lnTo>
-                    <a:pt x="2578410" y="219786"/>
+                    <a:pt x="2650033" y="225287"/>
+                  </a:lnTo>
+                  <a:lnTo>
+                    <a:pt x="2578410" y="219787"/>
                   </a:lnTo>
                   <a:lnTo>
                     <a:pt x="2506788" y="214256"/>
@@ -3966,7 +3966,7 @@
                     <a:pt x="1432450" y="127504"/>
                   </a:lnTo>
                   <a:lnTo>
-                    <a:pt x="1360827" y="121459"/>
+                    <a:pt x="1360827" y="121460"/>
                   </a:lnTo>
                   <a:lnTo>
                     <a:pt x="1289205" y="115381"/>
@@ -4043,7 +4043,7 @@
           </p:nvSpPr>
           <p:spPr>
             <a:xfrm>
-              <a:off x="2501250" y="2073503"/>
+              <a:off x="2501251" y="2073503"/>
               <a:ext cx="5761428" cy="3139879"/>
             </a:xfrm>
             <a:custGeom>
@@ -4054,28 +4054,28 @@
                     <a:pt x="0" y="0"/>
                   </a:moveTo>
                   <a:lnTo>
-                    <a:pt x="31626" y="44352"/>
-                  </a:lnTo>
-                  <a:lnTo>
-                    <a:pt x="103249" y="141943"/>
+                    <a:pt x="31626" y="44351"/>
+                  </a:lnTo>
+                  <a:lnTo>
+                    <a:pt x="103248" y="141943"/>
                   </a:lnTo>
                   <a:lnTo>
                     <a:pt x="174871" y="236765"/>
                   </a:lnTo>
                   <a:lnTo>
-                    <a:pt x="246494" y="328897"/>
+                    <a:pt x="246493" y="328897"/>
                   </a:lnTo>
                   <a:lnTo>
                     <a:pt x="318116" y="418415"/>
                   </a:lnTo>
                   <a:lnTo>
-                    <a:pt x="389739" y="505392"/>
+                    <a:pt x="389738" y="505392"/>
                   </a:lnTo>
                   <a:lnTo>
                     <a:pt x="461361" y="589902"/>
                   </a:lnTo>
                   <a:lnTo>
-                    <a:pt x="532984" y="672014"/>
+                    <a:pt x="532983" y="672013"/>
                   </a:lnTo>
                   <a:lnTo>
                     <a:pt x="604606" y="751795"/>
@@ -4114,25 +4114,25 @@
                     <a:pt x="1392454" y="1493255"/>
                   </a:lnTo>
                   <a:lnTo>
-                    <a:pt x="1464077" y="1549734"/>
+                    <a:pt x="1464076" y="1549734"/>
                   </a:lnTo>
                   <a:lnTo>
                     <a:pt x="1535699" y="1604611"/>
                   </a:lnTo>
                   <a:lnTo>
-                    <a:pt x="1607322" y="1657931"/>
+                    <a:pt x="1607321" y="1657931"/>
                   </a:lnTo>
                   <a:lnTo>
                     <a:pt x="1678944" y="1709738"/>
                   </a:lnTo>
                   <a:lnTo>
-                    <a:pt x="1750567" y="1760074"/>
+                    <a:pt x="1750566" y="1760074"/>
                   </a:lnTo>
                   <a:lnTo>
                     <a:pt x="1822189" y="1808983"/>
                   </a:lnTo>
                   <a:lnTo>
-                    <a:pt x="1893812" y="1856504"/>
+                    <a:pt x="1893811" y="1856504"/>
                   </a:lnTo>
                   <a:lnTo>
                     <a:pt x="1965434" y="1902676"/>
@@ -4141,7 +4141,7 @@
                     <a:pt x="2037057" y="1947538"/>
                   </a:lnTo>
                   <a:lnTo>
-                    <a:pt x="2108679" y="1991128"/>
+                    <a:pt x="2108679" y="1991127"/>
                   </a:lnTo>
                   <a:lnTo>
                     <a:pt x="2180302" y="2033480"/>
@@ -4171,25 +4171,25 @@
                     <a:pt x="2753282" y="2331783"/>
                   </a:lnTo>
                   <a:lnTo>
-                    <a:pt x="2824905" y="2364470"/>
+                    <a:pt x="2824904" y="2364470"/>
                   </a:lnTo>
                   <a:lnTo>
                     <a:pt x="2896527" y="2396229"/>
                   </a:lnTo>
                   <a:lnTo>
-                    <a:pt x="2968150" y="2427086"/>
+                    <a:pt x="2968149" y="2427086"/>
                   </a:lnTo>
                   <a:lnTo>
                     <a:pt x="3039772" y="2457069"/>
                   </a:lnTo>
                   <a:lnTo>
-                    <a:pt x="3111395" y="2486200"/>
+                    <a:pt x="3111394" y="2486200"/>
                   </a:lnTo>
                   <a:lnTo>
                     <a:pt x="3183017" y="2514505"/>
                   </a:lnTo>
                   <a:lnTo>
-                    <a:pt x="3254640" y="2542007"/>
+                    <a:pt x="3254639" y="2542007"/>
                   </a:lnTo>
                   <a:lnTo>
                     <a:pt x="3326262" y="2568729"/>
@@ -4228,25 +4228,25 @@
                     <a:pt x="4114110" y="2817067"/>
                   </a:lnTo>
                   <a:lnTo>
-                    <a:pt x="4185733" y="2835984"/>
+                    <a:pt x="4185732" y="2835984"/>
                   </a:lnTo>
                   <a:lnTo>
                     <a:pt x="4257355" y="2854364"/>
                   </a:lnTo>
                   <a:lnTo>
-                    <a:pt x="4328978" y="2872222"/>
+                    <a:pt x="4328977" y="2872222"/>
                   </a:lnTo>
                   <a:lnTo>
                     <a:pt x="4400600" y="2889574"/>
                   </a:lnTo>
                   <a:lnTo>
-                    <a:pt x="4472223" y="2906434"/>
+                    <a:pt x="4472222" y="2906434"/>
                   </a:lnTo>
                   <a:lnTo>
                     <a:pt x="4543845" y="2922815"/>
                   </a:lnTo>
                   <a:lnTo>
-                    <a:pt x="4615468" y="2938731"/>
+                    <a:pt x="4615467" y="2938731"/>
                   </a:lnTo>
                   <a:lnTo>
                     <a:pt x="4687090" y="2954195"/>
@@ -4261,7 +4261,7 @@
                     <a:pt x="4901958" y="2998006"/>
                   </a:lnTo>
                   <a:lnTo>
-                    <a:pt x="4973580" y="3011788"/>
+                    <a:pt x="4973580" y="3011789"/>
                   </a:lnTo>
                   <a:lnTo>
                     <a:pt x="5045203" y="3025180"/>
@@ -4285,13 +4285,13 @@
                     <a:pt x="5474938" y="3097917"/>
                   </a:lnTo>
                   <a:lnTo>
-                    <a:pt x="5546561" y="3108865"/>
+                    <a:pt x="5546560" y="3108865"/>
                   </a:lnTo>
                   <a:lnTo>
                     <a:pt x="5618183" y="3119502"/>
                   </a:lnTo>
                   <a:lnTo>
-                    <a:pt x="5689806" y="3129837"/>
+                    <a:pt x="5689805" y="3129837"/>
                   </a:lnTo>
                   <a:lnTo>
                     <a:pt x="5761428" y="3139879"/>

--- a/docs/plots/carbo/jx_carbo_linsubhr_egfrdisc_anyhosp.pptx
+++ b/docs/plots/carbo/jx_carbo_linsubhr_egfrdisc_anyhosp.pptx
@@ -5002,7 +5002,7 @@
           <p:spPr>
             <a:xfrm>
               <a:off x="817517" y="1896563"/>
-              <a:ext cx="4869911" cy="82021"/>
+              <a:ext cx="5413065" cy="82021"/>
             </a:xfrm>
             <a:prstGeom prst="rect">
               <a:avLst/>
@@ -5034,7 +5034,7 @@
                   <a:latin typeface="Helvetica"/>
                   <a:cs typeface="Helvetica"/>
                 </a:rPr>
-                <a:t>subHR per 1 mL/min: 0.96 (0.94-0.99)  |  per IQR (Δ = 18.2): 0.51 (0.29-0.88)  |  IQR: [-11.5, 6.7]</a:t>
+                <a:t>subHR per 1 mL/min: 0.96 (0.94-0.99), p = 0.015  |  per IQR (Δ = 18.2): 0.51 (0.29-0.88)  |  IQR: [-11.5, 6.7]</a:t>
               </a:r>
             </a:p>
           </p:txBody>

--- a/docs/plots/carbo/jx_carbo_linsubhr_egfrdisc_anyhosp.pptx
+++ b/docs/plots/carbo/jx_carbo_linsubhr_egfrdisc_anyhosp.pptx
@@ -2271,26 +2271,26 @@
           </p:nvSpPr>
           <p:spPr>
             <a:xfrm>
-              <a:off x="817517" y="5142518"/>
-              <a:ext cx="7799693" cy="0"/>
+              <a:off x="915645" y="5071743"/>
+              <a:ext cx="7682587" cy="0"/>
             </a:xfrm>
             <a:custGeom>
               <a:avLst/>
               <a:pathLst>
-                <a:path w="7799693" h="0">
+                <a:path w="7682587" h="0">
                   <a:moveTo>
                     <a:pt x="0" y="0"/>
                   </a:moveTo>
                   <a:lnTo>
-                    <a:pt x="7799693" y="0"/>
-                  </a:lnTo>
-                  <a:lnTo>
-                    <a:pt x="7799693" y="0"/>
+                    <a:pt x="7682587" y="0"/>
+                  </a:lnTo>
+                  <a:lnTo>
+                    <a:pt x="7682587" y="0"/>
                   </a:lnTo>
                 </a:path>
               </a:pathLst>
             </a:custGeom>
-            <a:ln w="6775" cap="flat">
+            <a:ln w="8623" cap="flat">
               <a:solidFill>
                 <a:srgbClr val="EBEBEB">
                   <a:alpha val="100000"/>
@@ -2314,26 +2314,26 @@
           </p:nvSpPr>
           <p:spPr>
             <a:xfrm>
-              <a:off x="817517" y="4313054"/>
-              <a:ext cx="7799693" cy="0"/>
+              <a:off x="915645" y="4298074"/>
+              <a:ext cx="7682587" cy="0"/>
             </a:xfrm>
             <a:custGeom>
               <a:avLst/>
               <a:pathLst>
-                <a:path w="7799693" h="0">
+                <a:path w="7682587" h="0">
                   <a:moveTo>
                     <a:pt x="0" y="0"/>
                   </a:moveTo>
                   <a:lnTo>
-                    <a:pt x="7799693" y="0"/>
-                  </a:lnTo>
-                  <a:lnTo>
-                    <a:pt x="7799693" y="0"/>
+                    <a:pt x="7682587" y="0"/>
+                  </a:lnTo>
+                  <a:lnTo>
+                    <a:pt x="7682587" y="0"/>
                   </a:lnTo>
                 </a:path>
               </a:pathLst>
             </a:custGeom>
-            <a:ln w="6775" cap="flat">
+            <a:ln w="8623" cap="flat">
               <a:solidFill>
                 <a:srgbClr val="EBEBEB">
                   <a:alpha val="100000"/>
@@ -2357,26 +2357,26 @@
           </p:nvSpPr>
           <p:spPr>
             <a:xfrm>
-              <a:off x="817517" y="3483591"/>
-              <a:ext cx="7799693" cy="0"/>
+              <a:off x="915645" y="3524405"/>
+              <a:ext cx="7682587" cy="0"/>
             </a:xfrm>
             <a:custGeom>
               <a:avLst/>
               <a:pathLst>
-                <a:path w="7799693" h="0">
+                <a:path w="7682587" h="0">
                   <a:moveTo>
                     <a:pt x="0" y="0"/>
                   </a:moveTo>
                   <a:lnTo>
-                    <a:pt x="7799693" y="0"/>
-                  </a:lnTo>
-                  <a:lnTo>
-                    <a:pt x="7799693" y="0"/>
+                    <a:pt x="7682587" y="0"/>
+                  </a:lnTo>
+                  <a:lnTo>
+                    <a:pt x="7682587" y="0"/>
                   </a:lnTo>
                 </a:path>
               </a:pathLst>
             </a:custGeom>
-            <a:ln w="6775" cap="flat">
+            <a:ln w="8623" cap="flat">
               <a:solidFill>
                 <a:srgbClr val="EBEBEB">
                   <a:alpha val="100000"/>
@@ -2400,26 +2400,26 @@
           </p:nvSpPr>
           <p:spPr>
             <a:xfrm>
-              <a:off x="817517" y="2654127"/>
-              <a:ext cx="7799693" cy="0"/>
+              <a:off x="915645" y="2750737"/>
+              <a:ext cx="7682587" cy="0"/>
             </a:xfrm>
             <a:custGeom>
               <a:avLst/>
               <a:pathLst>
-                <a:path w="7799693" h="0">
+                <a:path w="7682587" h="0">
                   <a:moveTo>
                     <a:pt x="0" y="0"/>
                   </a:moveTo>
                   <a:lnTo>
-                    <a:pt x="7799693" y="0"/>
-                  </a:lnTo>
-                  <a:lnTo>
-                    <a:pt x="7799693" y="0"/>
+                    <a:pt x="7682587" y="0"/>
+                  </a:lnTo>
+                  <a:lnTo>
+                    <a:pt x="7682587" y="0"/>
                   </a:lnTo>
                 </a:path>
               </a:pathLst>
             </a:custGeom>
-            <a:ln w="6775" cap="flat">
+            <a:ln w="8623" cap="flat">
               <a:solidFill>
                 <a:srgbClr val="EBEBEB">
                   <a:alpha val="100000"/>
@@ -2443,15 +2443,15 @@
           </p:nvSpPr>
           <p:spPr>
             <a:xfrm>
-              <a:off x="1487487" y="2073503"/>
-              <a:ext cx="0" cy="3649639"/>
+              <a:off x="1575555" y="2209169"/>
+              <a:ext cx="0" cy="3404141"/>
             </a:xfrm>
             <a:custGeom>
               <a:avLst/>
               <a:pathLst>
-                <a:path w="0" h="3649639">
+                <a:path w="0" h="3404141">
                   <a:moveTo>
-                    <a:pt x="0" y="3649639"/>
+                    <a:pt x="0" y="3404141"/>
                   </a:moveTo>
                   <a:lnTo>
                     <a:pt x="0" y="0"/>
@@ -2462,7 +2462,7 @@
                 </a:path>
               </a:pathLst>
             </a:custGeom>
-            <a:ln w="6775" cap="flat">
+            <a:ln w="8623" cap="flat">
               <a:solidFill>
                 <a:srgbClr val="EBEBEB">
                   <a:alpha val="100000"/>
@@ -2486,15 +2486,15 @@
           </p:nvSpPr>
           <p:spPr>
             <a:xfrm>
-              <a:off x="3337360" y="2073503"/>
-              <a:ext cx="0" cy="3649639"/>
+              <a:off x="3397654" y="2209169"/>
+              <a:ext cx="0" cy="3404141"/>
             </a:xfrm>
             <a:custGeom>
               <a:avLst/>
               <a:pathLst>
-                <a:path w="0" h="3649639">
+                <a:path w="0" h="3404141">
                   <a:moveTo>
-                    <a:pt x="0" y="3649639"/>
+                    <a:pt x="0" y="3404141"/>
                   </a:moveTo>
                   <a:lnTo>
                     <a:pt x="0" y="0"/>
@@ -2505,7 +2505,7 @@
                 </a:path>
               </a:pathLst>
             </a:custGeom>
-            <a:ln w="6775" cap="flat">
+            <a:ln w="8623" cap="flat">
               <a:solidFill>
                 <a:srgbClr val="EBEBEB">
                   <a:alpha val="100000"/>
@@ -2529,15 +2529,15 @@
           </p:nvSpPr>
           <p:spPr>
             <a:xfrm>
-              <a:off x="5187233" y="2073503"/>
-              <a:ext cx="0" cy="3649639"/>
+              <a:off x="5219752" y="2209169"/>
+              <a:ext cx="0" cy="3404141"/>
             </a:xfrm>
             <a:custGeom>
               <a:avLst/>
               <a:pathLst>
-                <a:path w="0" h="3649639">
+                <a:path w="0" h="3404141">
                   <a:moveTo>
-                    <a:pt x="0" y="3649639"/>
+                    <a:pt x="0" y="3404141"/>
                   </a:moveTo>
                   <a:lnTo>
                     <a:pt x="0" y="0"/>
@@ -2548,7 +2548,7 @@
                 </a:path>
               </a:pathLst>
             </a:custGeom>
-            <a:ln w="6775" cap="flat">
+            <a:ln w="8623" cap="flat">
               <a:solidFill>
                 <a:srgbClr val="EBEBEB">
                   <a:alpha val="100000"/>
@@ -2572,15 +2572,15 @@
           </p:nvSpPr>
           <p:spPr>
             <a:xfrm>
-              <a:off x="7037106" y="2073503"/>
-              <a:ext cx="0" cy="3649639"/>
+              <a:off x="7041851" y="2209169"/>
+              <a:ext cx="0" cy="3404141"/>
             </a:xfrm>
             <a:custGeom>
               <a:avLst/>
               <a:pathLst>
-                <a:path w="0" h="3649639">
+                <a:path w="0" h="3404141">
                   <a:moveTo>
-                    <a:pt x="0" y="3649639"/>
+                    <a:pt x="0" y="3404141"/>
                   </a:moveTo>
                   <a:lnTo>
                     <a:pt x="0" y="0"/>
@@ -2591,7 +2591,7 @@
                 </a:path>
               </a:pathLst>
             </a:custGeom>
-            <a:ln w="6775" cap="flat">
+            <a:ln w="8623" cap="flat">
               <a:solidFill>
                 <a:srgbClr val="EBEBEB">
                   <a:alpha val="100000"/>
@@ -2615,26 +2615,26 @@
           </p:nvSpPr>
           <p:spPr>
             <a:xfrm>
-              <a:off x="817517" y="5557249"/>
-              <a:ext cx="7799693" cy="0"/>
+              <a:off x="915645" y="5458577"/>
+              <a:ext cx="7682587" cy="0"/>
             </a:xfrm>
             <a:custGeom>
               <a:avLst/>
               <a:pathLst>
-                <a:path w="7799693" h="0">
+                <a:path w="7682587" h="0">
                   <a:moveTo>
                     <a:pt x="0" y="0"/>
                   </a:moveTo>
                   <a:lnTo>
-                    <a:pt x="7799693" y="0"/>
-                  </a:lnTo>
-                  <a:lnTo>
-                    <a:pt x="7799693" y="0"/>
+                    <a:pt x="7682587" y="0"/>
+                  </a:lnTo>
+                  <a:lnTo>
+                    <a:pt x="7682587" y="0"/>
                   </a:lnTo>
                 </a:path>
               </a:pathLst>
             </a:custGeom>
-            <a:ln w="13550" cap="flat">
+            <a:ln w="17246" cap="flat">
               <a:solidFill>
                 <a:srgbClr val="EBEBEB">
                   <a:alpha val="100000"/>
@@ -2658,26 +2658,26 @@
           </p:nvSpPr>
           <p:spPr>
             <a:xfrm>
-              <a:off x="817517" y="4727786"/>
-              <a:ext cx="7799693" cy="0"/>
+              <a:off x="915645" y="4684908"/>
+              <a:ext cx="7682587" cy="0"/>
             </a:xfrm>
             <a:custGeom>
               <a:avLst/>
               <a:pathLst>
-                <a:path w="7799693" h="0">
+                <a:path w="7682587" h="0">
                   <a:moveTo>
                     <a:pt x="0" y="0"/>
                   </a:moveTo>
                   <a:lnTo>
-                    <a:pt x="7799693" y="0"/>
-                  </a:lnTo>
-                  <a:lnTo>
-                    <a:pt x="7799693" y="0"/>
+                    <a:pt x="7682587" y="0"/>
+                  </a:lnTo>
+                  <a:lnTo>
+                    <a:pt x="7682587" y="0"/>
                   </a:lnTo>
                 </a:path>
               </a:pathLst>
             </a:custGeom>
-            <a:ln w="13550" cap="flat">
+            <a:ln w="17246" cap="flat">
               <a:solidFill>
                 <a:srgbClr val="EBEBEB">
                   <a:alpha val="100000"/>
@@ -2701,26 +2701,26 @@
           </p:nvSpPr>
           <p:spPr>
             <a:xfrm>
-              <a:off x="817517" y="3898322"/>
-              <a:ext cx="7799693" cy="0"/>
+              <a:off x="915645" y="3911240"/>
+              <a:ext cx="7682587" cy="0"/>
             </a:xfrm>
             <a:custGeom>
               <a:avLst/>
               <a:pathLst>
-                <a:path w="7799693" h="0">
+                <a:path w="7682587" h="0">
                   <a:moveTo>
                     <a:pt x="0" y="0"/>
                   </a:moveTo>
                   <a:lnTo>
-                    <a:pt x="7799693" y="0"/>
-                  </a:lnTo>
-                  <a:lnTo>
-                    <a:pt x="7799693" y="0"/>
+                    <a:pt x="7682587" y="0"/>
+                  </a:lnTo>
+                  <a:lnTo>
+                    <a:pt x="7682587" y="0"/>
                   </a:lnTo>
                 </a:path>
               </a:pathLst>
             </a:custGeom>
-            <a:ln w="13550" cap="flat">
+            <a:ln w="17246" cap="flat">
               <a:solidFill>
                 <a:srgbClr val="EBEBEB">
                   <a:alpha val="100000"/>
@@ -2744,26 +2744,26 @@
           </p:nvSpPr>
           <p:spPr>
             <a:xfrm>
-              <a:off x="817517" y="3068859"/>
-              <a:ext cx="7799693" cy="0"/>
+              <a:off x="915645" y="3137571"/>
+              <a:ext cx="7682587" cy="0"/>
             </a:xfrm>
             <a:custGeom>
               <a:avLst/>
               <a:pathLst>
-                <a:path w="7799693" h="0">
+                <a:path w="7682587" h="0">
                   <a:moveTo>
                     <a:pt x="0" y="0"/>
                   </a:moveTo>
                   <a:lnTo>
-                    <a:pt x="7799693" y="0"/>
-                  </a:lnTo>
-                  <a:lnTo>
-                    <a:pt x="7799693" y="0"/>
+                    <a:pt x="7682587" y="0"/>
+                  </a:lnTo>
+                  <a:lnTo>
+                    <a:pt x="7682587" y="0"/>
                   </a:lnTo>
                 </a:path>
               </a:pathLst>
             </a:custGeom>
-            <a:ln w="13550" cap="flat">
+            <a:ln w="17246" cap="flat">
               <a:solidFill>
                 <a:srgbClr val="EBEBEB">
                   <a:alpha val="100000"/>
@@ -2787,26 +2787,26 @@
           </p:nvSpPr>
           <p:spPr>
             <a:xfrm>
-              <a:off x="817517" y="2239395"/>
-              <a:ext cx="7799693" cy="0"/>
+              <a:off x="915645" y="2363903"/>
+              <a:ext cx="7682587" cy="0"/>
             </a:xfrm>
             <a:custGeom>
               <a:avLst/>
               <a:pathLst>
-                <a:path w="7799693" h="0">
+                <a:path w="7682587" h="0">
                   <a:moveTo>
                     <a:pt x="0" y="0"/>
                   </a:moveTo>
                   <a:lnTo>
-                    <a:pt x="7799693" y="0"/>
-                  </a:lnTo>
-                  <a:lnTo>
-                    <a:pt x="7799693" y="0"/>
+                    <a:pt x="7682587" y="0"/>
+                  </a:lnTo>
+                  <a:lnTo>
+                    <a:pt x="7682587" y="0"/>
                   </a:lnTo>
                 </a:path>
               </a:pathLst>
             </a:custGeom>
-            <a:ln w="13550" cap="flat">
+            <a:ln w="17246" cap="flat">
               <a:solidFill>
                 <a:srgbClr val="EBEBEB">
                   <a:alpha val="100000"/>
@@ -2830,15 +2830,15 @@
           </p:nvSpPr>
           <p:spPr>
             <a:xfrm>
-              <a:off x="2412424" y="2073503"/>
-              <a:ext cx="0" cy="3649639"/>
+              <a:off x="2486605" y="2209169"/>
+              <a:ext cx="0" cy="3404141"/>
             </a:xfrm>
             <a:custGeom>
               <a:avLst/>
               <a:pathLst>
-                <a:path w="0" h="3649639">
+                <a:path w="0" h="3404141">
                   <a:moveTo>
-                    <a:pt x="0" y="3649639"/>
+                    <a:pt x="0" y="3404141"/>
                   </a:moveTo>
                   <a:lnTo>
                     <a:pt x="0" y="0"/>
@@ -2849,7 +2849,7 @@
                 </a:path>
               </a:pathLst>
             </a:custGeom>
-            <a:ln w="13550" cap="flat">
+            <a:ln w="17246" cap="flat">
               <a:solidFill>
                 <a:srgbClr val="EBEBEB">
                   <a:alpha val="100000"/>
@@ -2873,15 +2873,15 @@
           </p:nvSpPr>
           <p:spPr>
             <a:xfrm>
-              <a:off x="4262297" y="2073503"/>
-              <a:ext cx="0" cy="3649639"/>
+              <a:off x="4308703" y="2209169"/>
+              <a:ext cx="0" cy="3404141"/>
             </a:xfrm>
             <a:custGeom>
               <a:avLst/>
               <a:pathLst>
-                <a:path w="0" h="3649639">
+                <a:path w="0" h="3404141">
                   <a:moveTo>
-                    <a:pt x="0" y="3649639"/>
+                    <a:pt x="0" y="3404141"/>
                   </a:moveTo>
                   <a:lnTo>
                     <a:pt x="0" y="0"/>
@@ -2892,7 +2892,7 @@
                 </a:path>
               </a:pathLst>
             </a:custGeom>
-            <a:ln w="13550" cap="flat">
+            <a:ln w="17246" cap="flat">
               <a:solidFill>
                 <a:srgbClr val="EBEBEB">
                   <a:alpha val="100000"/>
@@ -2916,15 +2916,15 @@
           </p:nvSpPr>
           <p:spPr>
             <a:xfrm>
-              <a:off x="6112169" y="2073503"/>
-              <a:ext cx="0" cy="3649639"/>
+              <a:off x="6130802" y="2209169"/>
+              <a:ext cx="0" cy="3404141"/>
             </a:xfrm>
             <a:custGeom>
               <a:avLst/>
               <a:pathLst>
-                <a:path w="0" h="3649639">
+                <a:path w="0" h="3404141">
                   <a:moveTo>
-                    <a:pt x="0" y="3649639"/>
+                    <a:pt x="0" y="3404141"/>
                   </a:moveTo>
                   <a:lnTo>
                     <a:pt x="0" y="0"/>
@@ -2935,7 +2935,7 @@
                 </a:path>
               </a:pathLst>
             </a:custGeom>
-            <a:ln w="13550" cap="flat">
+            <a:ln w="17246" cap="flat">
               <a:solidFill>
                 <a:srgbClr val="EBEBEB">
                   <a:alpha val="100000"/>
@@ -2959,15 +2959,15 @@
           </p:nvSpPr>
           <p:spPr>
             <a:xfrm>
-              <a:off x="7962042" y="2073503"/>
-              <a:ext cx="0" cy="3649639"/>
+              <a:off x="7952900" y="2209169"/>
+              <a:ext cx="0" cy="3404141"/>
             </a:xfrm>
             <a:custGeom>
               <a:avLst/>
               <a:pathLst>
-                <a:path w="0" h="3649639">
+                <a:path w="0" h="3404141">
                   <a:moveTo>
-                    <a:pt x="0" y="3649639"/>
+                    <a:pt x="0" y="3404141"/>
                   </a:moveTo>
                   <a:lnTo>
                     <a:pt x="0" y="0"/>
@@ -2978,7 +2978,7 @@
                 </a:path>
               </a:pathLst>
             </a:custGeom>
-            <a:ln w="13550" cap="flat">
+            <a:ln w="17246" cap="flat">
               <a:solidFill>
                 <a:srgbClr val="EBEBEB">
                   <a:alpha val="100000"/>
@@ -3002,492 +3002,492 @@
           </p:nvSpPr>
           <p:spPr>
             <a:xfrm>
-              <a:off x="1172049" y="2073503"/>
-              <a:ext cx="7090630" cy="3314793"/>
+              <a:off x="1264853" y="2209169"/>
+              <a:ext cx="6984170" cy="3091819"/>
             </a:xfrm>
             <a:custGeom>
               <a:avLst/>
               <a:pathLst>
-                <a:path w="7090630" h="3314793">
+                <a:path w="6984170" h="3091819">
                   <a:moveTo>
-                    <a:pt x="2923976" y="0"/>
+                    <a:pt x="2880075" y="0"/>
                   </a:moveTo>
                   <a:lnTo>
-                    <a:pt x="2936523" y="32282"/>
-                  </a:lnTo>
-                  <a:lnTo>
-                    <a:pt x="3008146" y="207224"/>
-                  </a:lnTo>
-                  <a:lnTo>
-                    <a:pt x="3079768" y="373299"/>
-                  </a:lnTo>
-                  <a:lnTo>
-                    <a:pt x="3151391" y="530957"/>
-                  </a:lnTo>
-                  <a:lnTo>
-                    <a:pt x="3223013" y="680623"/>
-                  </a:lnTo>
-                  <a:lnTo>
-                    <a:pt x="3294636" y="822703"/>
-                  </a:lnTo>
-                  <a:lnTo>
-                    <a:pt x="3366258" y="957582"/>
-                  </a:lnTo>
-                  <a:lnTo>
-                    <a:pt x="3437881" y="1085624"/>
-                  </a:lnTo>
-                  <a:lnTo>
-                    <a:pt x="3509503" y="1207176"/>
-                  </a:lnTo>
-                  <a:lnTo>
-                    <a:pt x="3581126" y="1322568"/>
-                  </a:lnTo>
-                  <a:lnTo>
-                    <a:pt x="3652748" y="1432110"/>
-                  </a:lnTo>
-                  <a:lnTo>
-                    <a:pt x="3724371" y="1536100"/>
-                  </a:lnTo>
-                  <a:lnTo>
-                    <a:pt x="3795993" y="1634819"/>
-                  </a:lnTo>
-                  <a:lnTo>
-                    <a:pt x="3867616" y="1728535"/>
-                  </a:lnTo>
-                  <a:lnTo>
-                    <a:pt x="3939238" y="1817500"/>
-                  </a:lnTo>
-                  <a:lnTo>
-                    <a:pt x="4010861" y="1901956"/>
-                  </a:lnTo>
-                  <a:lnTo>
-                    <a:pt x="4082483" y="1982131"/>
-                  </a:lnTo>
-                  <a:lnTo>
-                    <a:pt x="4154106" y="2058243"/>
-                  </a:lnTo>
-                  <a:lnTo>
-                    <a:pt x="4225729" y="2130496"/>
-                  </a:lnTo>
-                  <a:lnTo>
-                    <a:pt x="4297351" y="2199088"/>
-                  </a:lnTo>
-                  <a:lnTo>
-                    <a:pt x="4368974" y="2264203"/>
-                  </a:lnTo>
-                  <a:lnTo>
-                    <a:pt x="4440596" y="2326017"/>
-                  </a:lnTo>
-                  <a:lnTo>
-                    <a:pt x="4512219" y="2384698"/>
-                  </a:lnTo>
-                  <a:lnTo>
-                    <a:pt x="4583841" y="2440405"/>
-                  </a:lnTo>
-                  <a:lnTo>
-                    <a:pt x="4655464" y="2493288"/>
-                  </a:lnTo>
-                  <a:lnTo>
-                    <a:pt x="4727086" y="2543491"/>
-                  </a:lnTo>
-                  <a:lnTo>
-                    <a:pt x="4798709" y="2591149"/>
-                  </a:lnTo>
-                  <a:lnTo>
-                    <a:pt x="4870331" y="2636392"/>
-                  </a:lnTo>
-                  <a:lnTo>
-                    <a:pt x="4941954" y="2656995"/>
-                  </a:lnTo>
-                  <a:lnTo>
-                    <a:pt x="5013576" y="2661574"/>
-                  </a:lnTo>
-                  <a:lnTo>
-                    <a:pt x="5085199" y="2666128"/>
-                  </a:lnTo>
-                  <a:lnTo>
-                    <a:pt x="5156821" y="2670656"/>
-                  </a:lnTo>
-                  <a:lnTo>
-                    <a:pt x="5228444" y="2675159"/>
-                  </a:lnTo>
-                  <a:lnTo>
-                    <a:pt x="5300066" y="2679637"/>
-                  </a:lnTo>
-                  <a:lnTo>
-                    <a:pt x="5371689" y="2684091"/>
-                  </a:lnTo>
-                  <a:lnTo>
-                    <a:pt x="5443311" y="2688520"/>
-                  </a:lnTo>
-                  <a:lnTo>
-                    <a:pt x="5514934" y="2692924"/>
-                  </a:lnTo>
-                  <a:lnTo>
-                    <a:pt x="5586557" y="2697304"/>
-                  </a:lnTo>
-                  <a:lnTo>
-                    <a:pt x="5658179" y="2701659"/>
-                  </a:lnTo>
-                  <a:lnTo>
-                    <a:pt x="5729802" y="2705991"/>
-                  </a:lnTo>
-                  <a:lnTo>
-                    <a:pt x="5801424" y="2710299"/>
-                  </a:lnTo>
-                  <a:lnTo>
-                    <a:pt x="5873047" y="2714582"/>
-                  </a:lnTo>
-                  <a:lnTo>
-                    <a:pt x="5944669" y="2718842"/>
-                  </a:lnTo>
-                  <a:lnTo>
-                    <a:pt x="6016292" y="2723079"/>
-                  </a:lnTo>
-                  <a:lnTo>
-                    <a:pt x="6087914" y="2727291"/>
-                  </a:lnTo>
-                  <a:lnTo>
-                    <a:pt x="6159537" y="2731481"/>
-                  </a:lnTo>
-                  <a:lnTo>
-                    <a:pt x="6231159" y="2735647"/>
-                  </a:lnTo>
-                  <a:lnTo>
-                    <a:pt x="6302782" y="2739791"/>
-                  </a:lnTo>
-                  <a:lnTo>
-                    <a:pt x="6374404" y="2743911"/>
-                  </a:lnTo>
-                  <a:lnTo>
-                    <a:pt x="6446027" y="2748008"/>
-                  </a:lnTo>
-                  <a:lnTo>
-                    <a:pt x="6517649" y="2752083"/>
-                  </a:lnTo>
-                  <a:lnTo>
-                    <a:pt x="6589272" y="2756135"/>
-                  </a:lnTo>
-                  <a:lnTo>
-                    <a:pt x="6660894" y="2760165"/>
-                  </a:lnTo>
-                  <a:lnTo>
-                    <a:pt x="6732517" y="2764173"/>
-                  </a:lnTo>
-                  <a:lnTo>
-                    <a:pt x="6804139" y="2768158"/>
-                  </a:lnTo>
-                  <a:lnTo>
-                    <a:pt x="6875762" y="2772121"/>
-                  </a:lnTo>
-                  <a:lnTo>
-                    <a:pt x="6947385" y="2776063"/>
-                  </a:lnTo>
-                  <a:lnTo>
-                    <a:pt x="7019007" y="2779982"/>
-                  </a:lnTo>
-                  <a:lnTo>
-                    <a:pt x="7090630" y="2783880"/>
-                  </a:lnTo>
-                  <a:lnTo>
-                    <a:pt x="7090630" y="3314793"/>
-                  </a:lnTo>
-                  <a:lnTo>
-                    <a:pt x="7019007" y="3305772"/>
-                  </a:lnTo>
-                  <a:lnTo>
-                    <a:pt x="6947385" y="3296270"/>
-                  </a:lnTo>
-                  <a:lnTo>
-                    <a:pt x="6875762" y="3286260"/>
-                  </a:lnTo>
-                  <a:lnTo>
-                    <a:pt x="6804139" y="3275716"/>
-                  </a:lnTo>
-                  <a:lnTo>
-                    <a:pt x="6732517" y="3264608"/>
-                  </a:lnTo>
-                  <a:lnTo>
-                    <a:pt x="6660894" y="3252908"/>
-                  </a:lnTo>
-                  <a:lnTo>
-                    <a:pt x="6589272" y="3240583"/>
-                  </a:lnTo>
-                  <a:lnTo>
-                    <a:pt x="6517649" y="3227600"/>
-                  </a:lnTo>
-                  <a:lnTo>
-                    <a:pt x="6446027" y="3213924"/>
-                  </a:lnTo>
-                  <a:lnTo>
-                    <a:pt x="6374404" y="3199517"/>
-                  </a:lnTo>
-                  <a:lnTo>
-                    <a:pt x="6302782" y="3184341"/>
-                  </a:lnTo>
-                  <a:lnTo>
-                    <a:pt x="6231159" y="3168355"/>
-                  </a:lnTo>
-                  <a:lnTo>
-                    <a:pt x="6159537" y="3151516"/>
-                  </a:lnTo>
-                  <a:lnTo>
-                    <a:pt x="6087914" y="3133777"/>
-                  </a:lnTo>
-                  <a:lnTo>
-                    <a:pt x="6016292" y="3115091"/>
-                  </a:lnTo>
-                  <a:lnTo>
-                    <a:pt x="5944669" y="3095408"/>
-                  </a:lnTo>
-                  <a:lnTo>
-                    <a:pt x="5873047" y="3074673"/>
-                  </a:lnTo>
-                  <a:lnTo>
-                    <a:pt x="5801424" y="3052832"/>
-                  </a:lnTo>
-                  <a:lnTo>
-                    <a:pt x="5729802" y="3029824"/>
-                  </a:lnTo>
-                  <a:lnTo>
-                    <a:pt x="5658179" y="3005588"/>
-                  </a:lnTo>
-                  <a:lnTo>
-                    <a:pt x="5586557" y="2980058"/>
-                  </a:lnTo>
-                  <a:lnTo>
-                    <a:pt x="5514934" y="2953164"/>
-                  </a:lnTo>
-                  <a:lnTo>
-                    <a:pt x="5443311" y="2924835"/>
-                  </a:lnTo>
-                  <a:lnTo>
-                    <a:pt x="5371689" y="2894993"/>
-                  </a:lnTo>
-                  <a:lnTo>
-                    <a:pt x="5300066" y="2863558"/>
-                  </a:lnTo>
-                  <a:lnTo>
-                    <a:pt x="5228444" y="2830445"/>
-                  </a:lnTo>
-                  <a:lnTo>
-                    <a:pt x="5156821" y="2795563"/>
-                  </a:lnTo>
-                  <a:lnTo>
-                    <a:pt x="5085199" y="2758819"/>
-                  </a:lnTo>
-                  <a:lnTo>
-                    <a:pt x="5013576" y="2720113"/>
-                  </a:lnTo>
-                  <a:lnTo>
-                    <a:pt x="4941954" y="2679341"/>
-                  </a:lnTo>
-                  <a:lnTo>
-                    <a:pt x="4870331" y="2652391"/>
-                  </a:lnTo>
-                  <a:lnTo>
-                    <a:pt x="4798709" y="2647761"/>
-                  </a:lnTo>
-                  <a:lnTo>
-                    <a:pt x="4727086" y="2643105"/>
-                  </a:lnTo>
-                  <a:lnTo>
-                    <a:pt x="4655464" y="2638423"/>
-                  </a:lnTo>
-                  <a:lnTo>
-                    <a:pt x="4583841" y="2633715"/>
-                  </a:lnTo>
-                  <a:lnTo>
-                    <a:pt x="4512219" y="2628981"/>
-                  </a:lnTo>
-                  <a:lnTo>
-                    <a:pt x="4440596" y="2624221"/>
-                  </a:lnTo>
-                  <a:lnTo>
-                    <a:pt x="4368974" y="2619434"/>
-                  </a:lnTo>
-                  <a:lnTo>
-                    <a:pt x="4297351" y="2614620"/>
-                  </a:lnTo>
-                  <a:lnTo>
-                    <a:pt x="4225729" y="2609780"/>
-                  </a:lnTo>
-                  <a:lnTo>
-                    <a:pt x="4154106" y="2604913"/>
-                  </a:lnTo>
-                  <a:lnTo>
-                    <a:pt x="4082483" y="2600018"/>
-                  </a:lnTo>
-                  <a:lnTo>
-                    <a:pt x="4010861" y="2595097"/>
-                  </a:lnTo>
-                  <a:lnTo>
-                    <a:pt x="3939238" y="2590147"/>
-                  </a:lnTo>
-                  <a:lnTo>
-                    <a:pt x="3867616" y="2585171"/>
-                  </a:lnTo>
-                  <a:lnTo>
-                    <a:pt x="3795993" y="2580166"/>
-                  </a:lnTo>
-                  <a:lnTo>
-                    <a:pt x="3724371" y="2575134"/>
-                  </a:lnTo>
-                  <a:lnTo>
-                    <a:pt x="3652748" y="2570074"/>
-                  </a:lnTo>
-                  <a:lnTo>
-                    <a:pt x="3581126" y="2564985"/>
-                  </a:lnTo>
-                  <a:lnTo>
-                    <a:pt x="3509503" y="2559868"/>
-                  </a:lnTo>
-                  <a:lnTo>
-                    <a:pt x="3437881" y="2554723"/>
-                  </a:lnTo>
-                  <a:lnTo>
-                    <a:pt x="3366258" y="2549549"/>
-                  </a:lnTo>
-                  <a:lnTo>
-                    <a:pt x="3294636" y="2544346"/>
-                  </a:lnTo>
-                  <a:lnTo>
-                    <a:pt x="3223013" y="2539115"/>
-                  </a:lnTo>
-                  <a:lnTo>
-                    <a:pt x="3151391" y="2533854"/>
-                  </a:lnTo>
-                  <a:lnTo>
-                    <a:pt x="3079768" y="2528564"/>
-                  </a:lnTo>
-                  <a:lnTo>
-                    <a:pt x="3008146" y="2523244"/>
-                  </a:lnTo>
-                  <a:lnTo>
-                    <a:pt x="2936523" y="2517895"/>
-                  </a:lnTo>
-                  <a:lnTo>
-                    <a:pt x="2864901" y="2512516"/>
-                  </a:lnTo>
-                  <a:lnTo>
-                    <a:pt x="2793278" y="2507107"/>
-                  </a:lnTo>
-                  <a:lnTo>
-                    <a:pt x="2721655" y="2501667"/>
-                  </a:lnTo>
-                  <a:lnTo>
-                    <a:pt x="2650033" y="2496198"/>
-                  </a:lnTo>
-                  <a:lnTo>
-                    <a:pt x="2578410" y="2490698"/>
-                  </a:lnTo>
-                  <a:lnTo>
-                    <a:pt x="2506788" y="2485167"/>
-                  </a:lnTo>
-                  <a:lnTo>
-                    <a:pt x="2435165" y="2479606"/>
-                  </a:lnTo>
-                  <a:lnTo>
-                    <a:pt x="2363543" y="2474014"/>
-                  </a:lnTo>
-                  <a:lnTo>
-                    <a:pt x="2291920" y="2468390"/>
-                  </a:lnTo>
-                  <a:lnTo>
-                    <a:pt x="2220298" y="2462736"/>
-                  </a:lnTo>
-                  <a:lnTo>
-                    <a:pt x="2148675" y="2457049"/>
-                  </a:lnTo>
-                  <a:lnTo>
-                    <a:pt x="2077053" y="2451331"/>
-                  </a:lnTo>
-                  <a:lnTo>
-                    <a:pt x="2005430" y="2445582"/>
-                  </a:lnTo>
-                  <a:lnTo>
-                    <a:pt x="1933808" y="2439800"/>
-                  </a:lnTo>
-                  <a:lnTo>
-                    <a:pt x="1862185" y="2433986"/>
-                  </a:lnTo>
-                  <a:lnTo>
-                    <a:pt x="1790563" y="2428139"/>
-                  </a:lnTo>
-                  <a:lnTo>
-                    <a:pt x="1718940" y="2422260"/>
-                  </a:lnTo>
-                  <a:lnTo>
-                    <a:pt x="1647318" y="2416349"/>
-                  </a:lnTo>
-                  <a:lnTo>
-                    <a:pt x="1575695" y="2410404"/>
-                  </a:lnTo>
-                  <a:lnTo>
-                    <a:pt x="1504073" y="2404426"/>
-                  </a:lnTo>
-                  <a:lnTo>
-                    <a:pt x="1432450" y="2398415"/>
-                  </a:lnTo>
-                  <a:lnTo>
-                    <a:pt x="1360827" y="2392371"/>
-                  </a:lnTo>
-                  <a:lnTo>
-                    <a:pt x="1289205" y="2386293"/>
-                  </a:lnTo>
-                  <a:lnTo>
-                    <a:pt x="1217582" y="2380181"/>
-                  </a:lnTo>
-                  <a:lnTo>
-                    <a:pt x="1145960" y="2374035"/>
-                  </a:lnTo>
-                  <a:lnTo>
-                    <a:pt x="1074337" y="2367855"/>
-                  </a:lnTo>
-                  <a:lnTo>
-                    <a:pt x="1002715" y="2361640"/>
-                  </a:lnTo>
-                  <a:lnTo>
-                    <a:pt x="931092" y="2355391"/>
-                  </a:lnTo>
-                  <a:lnTo>
-                    <a:pt x="859470" y="2349106"/>
-                  </a:lnTo>
-                  <a:lnTo>
-                    <a:pt x="787847" y="2342787"/>
-                  </a:lnTo>
-                  <a:lnTo>
-                    <a:pt x="716225" y="2336433"/>
-                  </a:lnTo>
-                  <a:lnTo>
-                    <a:pt x="644602" y="2330043"/>
-                  </a:lnTo>
-                  <a:lnTo>
-                    <a:pt x="572980" y="2323618"/>
-                  </a:lnTo>
-                  <a:lnTo>
-                    <a:pt x="501357" y="2317157"/>
-                  </a:lnTo>
-                  <a:lnTo>
-                    <a:pt x="429735" y="2310660"/>
-                  </a:lnTo>
-                  <a:lnTo>
-                    <a:pt x="358112" y="2304127"/>
-                  </a:lnTo>
-                  <a:lnTo>
-                    <a:pt x="286490" y="2297557"/>
-                  </a:lnTo>
-                  <a:lnTo>
-                    <a:pt x="214867" y="2290951"/>
-                  </a:lnTo>
-                  <a:lnTo>
-                    <a:pt x="143245" y="2284308"/>
-                  </a:lnTo>
-                  <a:lnTo>
-                    <a:pt x="71622" y="2277628"/>
-                  </a:lnTo>
-                  <a:lnTo>
-                    <a:pt x="0" y="2270911"/>
+                    <a:pt x="2892434" y="30111"/>
+                  </a:lnTo>
+                  <a:lnTo>
+                    <a:pt x="2962981" y="193285"/>
+                  </a:lnTo>
+                  <a:lnTo>
+                    <a:pt x="3033528" y="348189"/>
+                  </a:lnTo>
+                  <a:lnTo>
+                    <a:pt x="3104075" y="495241"/>
+                  </a:lnTo>
+                  <a:lnTo>
+                    <a:pt x="3174622" y="634840"/>
+                  </a:lnTo>
+                  <a:lnTo>
+                    <a:pt x="3245169" y="767363"/>
+                  </a:lnTo>
+                  <a:lnTo>
+                    <a:pt x="3315717" y="893169"/>
+                  </a:lnTo>
+                  <a:lnTo>
+                    <a:pt x="3386264" y="1012598"/>
+                  </a:lnTo>
+                  <a:lnTo>
+                    <a:pt x="3456811" y="1125974"/>
+                  </a:lnTo>
+                  <a:lnTo>
+                    <a:pt x="3527358" y="1233603"/>
+                  </a:lnTo>
+                  <a:lnTo>
+                    <a:pt x="3597905" y="1335777"/>
+                  </a:lnTo>
+                  <a:lnTo>
+                    <a:pt x="3668452" y="1432772"/>
+                  </a:lnTo>
+                  <a:lnTo>
+                    <a:pt x="3739000" y="1524851"/>
+                  </a:lnTo>
+                  <a:lnTo>
+                    <a:pt x="3809547" y="1612262"/>
+                  </a:lnTo>
+                  <a:lnTo>
+                    <a:pt x="3880094" y="1695243"/>
+                  </a:lnTo>
+                  <a:lnTo>
+                    <a:pt x="3950641" y="1774018"/>
+                  </a:lnTo>
+                  <a:lnTo>
+                    <a:pt x="4021188" y="1848801"/>
+                  </a:lnTo>
+                  <a:lnTo>
+                    <a:pt x="4091736" y="1919792"/>
+                  </a:lnTo>
+                  <a:lnTo>
+                    <a:pt x="4162283" y="1987186"/>
+                  </a:lnTo>
+                  <a:lnTo>
+                    <a:pt x="4232830" y="2051163"/>
+                  </a:lnTo>
+                  <a:lnTo>
+                    <a:pt x="4303377" y="2111898"/>
+                  </a:lnTo>
+                  <a:lnTo>
+                    <a:pt x="4373924" y="2169554"/>
+                  </a:lnTo>
+                  <a:lnTo>
+                    <a:pt x="4444471" y="2224288"/>
+                  </a:lnTo>
+                  <a:lnTo>
+                    <a:pt x="4515019" y="2276248"/>
+                  </a:lnTo>
+                  <a:lnTo>
+                    <a:pt x="4585566" y="2325574"/>
+                  </a:lnTo>
+                  <a:lnTo>
+                    <a:pt x="4656113" y="2372399"/>
+                  </a:lnTo>
+                  <a:lnTo>
+                    <a:pt x="4726660" y="2416852"/>
+                  </a:lnTo>
+                  <a:lnTo>
+                    <a:pt x="4797207" y="2459051"/>
+                  </a:lnTo>
+                  <a:lnTo>
+                    <a:pt x="4867754" y="2478269"/>
+                  </a:lnTo>
+                  <a:lnTo>
+                    <a:pt x="4938302" y="2482540"/>
+                  </a:lnTo>
+                  <a:lnTo>
+                    <a:pt x="5008849" y="2486787"/>
+                  </a:lnTo>
+                  <a:lnTo>
+                    <a:pt x="5079396" y="2491011"/>
+                  </a:lnTo>
+                  <a:lnTo>
+                    <a:pt x="5149943" y="2495211"/>
+                  </a:lnTo>
+                  <a:lnTo>
+                    <a:pt x="5220490" y="2499388"/>
+                  </a:lnTo>
+                  <a:lnTo>
+                    <a:pt x="5291037" y="2503542"/>
+                  </a:lnTo>
+                  <a:lnTo>
+                    <a:pt x="5361585" y="2507673"/>
+                  </a:lnTo>
+                  <a:lnTo>
+                    <a:pt x="5432132" y="2511781"/>
+                  </a:lnTo>
+                  <a:lnTo>
+                    <a:pt x="5502679" y="2515866"/>
+                  </a:lnTo>
+                  <a:lnTo>
+                    <a:pt x="5573226" y="2519929"/>
+                  </a:lnTo>
+                  <a:lnTo>
+                    <a:pt x="5643773" y="2523969"/>
+                  </a:lnTo>
+                  <a:lnTo>
+                    <a:pt x="5714320" y="2527987"/>
+                  </a:lnTo>
+                  <a:lnTo>
+                    <a:pt x="5784868" y="2531982"/>
+                  </a:lnTo>
+                  <a:lnTo>
+                    <a:pt x="5855415" y="2535956"/>
+                  </a:lnTo>
+                  <a:lnTo>
+                    <a:pt x="5925962" y="2539907"/>
+                  </a:lnTo>
+                  <a:lnTo>
+                    <a:pt x="5996509" y="2543836"/>
+                  </a:lnTo>
+                  <a:lnTo>
+                    <a:pt x="6067056" y="2547744"/>
+                  </a:lnTo>
+                  <a:lnTo>
+                    <a:pt x="6137604" y="2551630"/>
+                  </a:lnTo>
+                  <a:lnTo>
+                    <a:pt x="6208151" y="2555495"/>
+                  </a:lnTo>
+                  <a:lnTo>
+                    <a:pt x="6278698" y="2559338"/>
+                  </a:lnTo>
+                  <a:lnTo>
+                    <a:pt x="6349245" y="2563160"/>
+                  </a:lnTo>
+                  <a:lnTo>
+                    <a:pt x="6419792" y="2566961"/>
+                  </a:lnTo>
+                  <a:lnTo>
+                    <a:pt x="6490339" y="2570740"/>
+                  </a:lnTo>
+                  <a:lnTo>
+                    <a:pt x="6560887" y="2574499"/>
+                  </a:lnTo>
+                  <a:lnTo>
+                    <a:pt x="6631434" y="2578237"/>
+                  </a:lnTo>
+                  <a:lnTo>
+                    <a:pt x="6701981" y="2581954"/>
+                  </a:lnTo>
+                  <a:lnTo>
+                    <a:pt x="6772528" y="2585651"/>
+                  </a:lnTo>
+                  <a:lnTo>
+                    <a:pt x="6843075" y="2589327"/>
+                  </a:lnTo>
+                  <a:lnTo>
+                    <a:pt x="6913622" y="2592983"/>
+                  </a:lnTo>
+                  <a:lnTo>
+                    <a:pt x="6984170" y="2596618"/>
+                  </a:lnTo>
+                  <a:lnTo>
+                    <a:pt x="6984170" y="3091819"/>
+                  </a:lnTo>
+                  <a:lnTo>
+                    <a:pt x="6913622" y="3083405"/>
+                  </a:lnTo>
+                  <a:lnTo>
+                    <a:pt x="6843075" y="3074542"/>
+                  </a:lnTo>
+                  <a:lnTo>
+                    <a:pt x="6772528" y="3065205"/>
+                  </a:lnTo>
+                  <a:lnTo>
+                    <a:pt x="6701981" y="3055370"/>
+                  </a:lnTo>
+                  <a:lnTo>
+                    <a:pt x="6631434" y="3045010"/>
+                  </a:lnTo>
+                  <a:lnTo>
+                    <a:pt x="6560887" y="3034097"/>
+                  </a:lnTo>
+                  <a:lnTo>
+                    <a:pt x="6490339" y="3022601"/>
+                  </a:lnTo>
+                  <a:lnTo>
+                    <a:pt x="6419792" y="3010491"/>
+                  </a:lnTo>
+                  <a:lnTo>
+                    <a:pt x="6349245" y="2997735"/>
+                  </a:lnTo>
+                  <a:lnTo>
+                    <a:pt x="6278698" y="2984297"/>
+                  </a:lnTo>
+                  <a:lnTo>
+                    <a:pt x="6208151" y="2970142"/>
+                  </a:lnTo>
+                  <a:lnTo>
+                    <a:pt x="6137604" y="2955231"/>
+                  </a:lnTo>
+                  <a:lnTo>
+                    <a:pt x="6067056" y="2939525"/>
+                  </a:lnTo>
+                  <a:lnTo>
+                    <a:pt x="5996509" y="2922979"/>
+                  </a:lnTo>
+                  <a:lnTo>
+                    <a:pt x="5925962" y="2905550"/>
+                  </a:lnTo>
+                  <a:lnTo>
+                    <a:pt x="5855415" y="2887191"/>
+                  </a:lnTo>
+                  <a:lnTo>
+                    <a:pt x="5784868" y="2867851"/>
+                  </a:lnTo>
+                  <a:lnTo>
+                    <a:pt x="5714320" y="2847479"/>
+                  </a:lnTo>
+                  <a:lnTo>
+                    <a:pt x="5643773" y="2826019"/>
+                  </a:lnTo>
+                  <a:lnTo>
+                    <a:pt x="5573226" y="2803413"/>
+                  </a:lnTo>
+                  <a:lnTo>
+                    <a:pt x="5502679" y="2779600"/>
+                  </a:lnTo>
+                  <a:lnTo>
+                    <a:pt x="5432132" y="2754516"/>
+                  </a:lnTo>
+                  <a:lnTo>
+                    <a:pt x="5361585" y="2728092"/>
+                  </a:lnTo>
+                  <a:lnTo>
+                    <a:pt x="5291037" y="2700258"/>
+                  </a:lnTo>
+                  <a:lnTo>
+                    <a:pt x="5220490" y="2670937"/>
+                  </a:lnTo>
+                  <a:lnTo>
+                    <a:pt x="5149943" y="2640051"/>
+                  </a:lnTo>
+                  <a:lnTo>
+                    <a:pt x="5079396" y="2607516"/>
+                  </a:lnTo>
+                  <a:lnTo>
+                    <a:pt x="5008849" y="2573243"/>
+                  </a:lnTo>
+                  <a:lnTo>
+                    <a:pt x="4938302" y="2537141"/>
+                  </a:lnTo>
+                  <a:lnTo>
+                    <a:pt x="4867754" y="2499111"/>
+                  </a:lnTo>
+                  <a:lnTo>
+                    <a:pt x="4797207" y="2473974"/>
+                  </a:lnTo>
+                  <a:lnTo>
+                    <a:pt x="4726660" y="2469656"/>
+                  </a:lnTo>
+                  <a:lnTo>
+                    <a:pt x="4656113" y="2465313"/>
+                  </a:lnTo>
+                  <a:lnTo>
+                    <a:pt x="4585566" y="2460946"/>
+                  </a:lnTo>
+                  <a:lnTo>
+                    <a:pt x="4515019" y="2456555"/>
+                  </a:lnTo>
+                  <a:lnTo>
+                    <a:pt x="4444471" y="2452139"/>
+                  </a:lnTo>
+                  <a:lnTo>
+                    <a:pt x="4373924" y="2447699"/>
+                  </a:lnTo>
+                  <a:lnTo>
+                    <a:pt x="4303377" y="2443234"/>
+                  </a:lnTo>
+                  <a:lnTo>
+                    <a:pt x="4232830" y="2438744"/>
+                  </a:lnTo>
+                  <a:lnTo>
+                    <a:pt x="4162283" y="2434230"/>
+                  </a:lnTo>
+                  <a:lnTo>
+                    <a:pt x="4091736" y="2429690"/>
+                  </a:lnTo>
+                  <a:lnTo>
+                    <a:pt x="4021188" y="2425125"/>
+                  </a:lnTo>
+                  <a:lnTo>
+                    <a:pt x="3950641" y="2420534"/>
+                  </a:lnTo>
+                  <a:lnTo>
+                    <a:pt x="3880094" y="2415918"/>
+                  </a:lnTo>
+                  <a:lnTo>
+                    <a:pt x="3809547" y="2411276"/>
+                  </a:lnTo>
+                  <a:lnTo>
+                    <a:pt x="3739000" y="2406608"/>
+                  </a:lnTo>
+                  <a:lnTo>
+                    <a:pt x="3668452" y="2401914"/>
+                  </a:lnTo>
+                  <a:lnTo>
+                    <a:pt x="3597905" y="2397194"/>
+                  </a:lnTo>
+                  <a:lnTo>
+                    <a:pt x="3527358" y="2392448"/>
+                  </a:lnTo>
+                  <a:lnTo>
+                    <a:pt x="3456811" y="2387676"/>
+                  </a:lnTo>
+                  <a:lnTo>
+                    <a:pt x="3386264" y="2382876"/>
+                  </a:lnTo>
+                  <a:lnTo>
+                    <a:pt x="3315717" y="2378050"/>
+                  </a:lnTo>
+                  <a:lnTo>
+                    <a:pt x="3245169" y="2373198"/>
+                  </a:lnTo>
+                  <a:lnTo>
+                    <a:pt x="3174622" y="2368318"/>
+                  </a:lnTo>
+                  <a:lnTo>
+                    <a:pt x="3104075" y="2363411"/>
+                  </a:lnTo>
+                  <a:lnTo>
+                    <a:pt x="3033528" y="2358476"/>
+                  </a:lnTo>
+                  <a:lnTo>
+                    <a:pt x="2962981" y="2353515"/>
+                  </a:lnTo>
+                  <a:lnTo>
+                    <a:pt x="2892434" y="2348525"/>
+                  </a:lnTo>
+                  <a:lnTo>
+                    <a:pt x="2821886" y="2343508"/>
+                  </a:lnTo>
+                  <a:lnTo>
+                    <a:pt x="2751339" y="2338463"/>
+                  </a:lnTo>
+                  <a:lnTo>
+                    <a:pt x="2680792" y="2333389"/>
+                  </a:lnTo>
+                  <a:lnTo>
+                    <a:pt x="2610245" y="2328288"/>
+                  </a:lnTo>
+                  <a:lnTo>
+                    <a:pt x="2539698" y="2323158"/>
+                  </a:lnTo>
+                  <a:lnTo>
+                    <a:pt x="2469151" y="2317999"/>
+                  </a:lnTo>
+                  <a:lnTo>
+                    <a:pt x="2398603" y="2312812"/>
+                  </a:lnTo>
+                  <a:lnTo>
+                    <a:pt x="2328056" y="2307596"/>
+                  </a:lnTo>
+                  <a:lnTo>
+                    <a:pt x="2257509" y="2302351"/>
+                  </a:lnTo>
+                  <a:lnTo>
+                    <a:pt x="2186962" y="2297076"/>
+                  </a:lnTo>
+                  <a:lnTo>
+                    <a:pt x="2116415" y="2291773"/>
+                  </a:lnTo>
+                  <a:lnTo>
+                    <a:pt x="2045868" y="2286439"/>
+                  </a:lnTo>
+                  <a:lnTo>
+                    <a:pt x="1975320" y="2281076"/>
+                  </a:lnTo>
+                  <a:lnTo>
+                    <a:pt x="1904773" y="2275683"/>
+                  </a:lnTo>
+                  <a:lnTo>
+                    <a:pt x="1834226" y="2270261"/>
+                  </a:lnTo>
+                  <a:lnTo>
+                    <a:pt x="1763679" y="2264807"/>
+                  </a:lnTo>
+                  <a:lnTo>
+                    <a:pt x="1693132" y="2259324"/>
+                  </a:lnTo>
+                  <a:lnTo>
+                    <a:pt x="1622584" y="2253810"/>
+                  </a:lnTo>
+                  <a:lnTo>
+                    <a:pt x="1552037" y="2248265"/>
+                  </a:lnTo>
+                  <a:lnTo>
+                    <a:pt x="1481490" y="2242690"/>
+                  </a:lnTo>
+                  <a:lnTo>
+                    <a:pt x="1410943" y="2237083"/>
+                  </a:lnTo>
+                  <a:lnTo>
+                    <a:pt x="1340396" y="2231445"/>
+                  </a:lnTo>
+                  <a:lnTo>
+                    <a:pt x="1269849" y="2225776"/>
+                  </a:lnTo>
+                  <a:lnTo>
+                    <a:pt x="1199301" y="2220075"/>
+                  </a:lnTo>
+                  <a:lnTo>
+                    <a:pt x="1128754" y="2214342"/>
+                  </a:lnTo>
+                  <a:lnTo>
+                    <a:pt x="1058207" y="2208578"/>
+                  </a:lnTo>
+                  <a:lnTo>
+                    <a:pt x="987660" y="2202781"/>
+                  </a:lnTo>
+                  <a:lnTo>
+                    <a:pt x="917113" y="2196952"/>
+                  </a:lnTo>
+                  <a:lnTo>
+                    <a:pt x="846566" y="2191091"/>
+                  </a:lnTo>
+                  <a:lnTo>
+                    <a:pt x="776018" y="2185197"/>
+                  </a:lnTo>
+                  <a:lnTo>
+                    <a:pt x="705471" y="2179270"/>
+                  </a:lnTo>
+                  <a:lnTo>
+                    <a:pt x="634924" y="2173310"/>
+                  </a:lnTo>
+                  <a:lnTo>
+                    <a:pt x="564377" y="2167317"/>
+                  </a:lnTo>
+                  <a:lnTo>
+                    <a:pt x="493830" y="2161290"/>
+                  </a:lnTo>
+                  <a:lnTo>
+                    <a:pt x="423283" y="2155230"/>
+                  </a:lnTo>
+                  <a:lnTo>
+                    <a:pt x="352735" y="2149137"/>
+                  </a:lnTo>
+                  <a:lnTo>
+                    <a:pt x="282188" y="2143009"/>
+                  </a:lnTo>
+                  <a:lnTo>
+                    <a:pt x="211641" y="2136847"/>
+                  </a:lnTo>
+                  <a:lnTo>
+                    <a:pt x="141094" y="2130651"/>
+                  </a:lnTo>
+                  <a:lnTo>
+                    <a:pt x="70547" y="2124420"/>
+                  </a:lnTo>
+                  <a:lnTo>
+                    <a:pt x="0" y="2118155"/>
                   </a:lnTo>
                   <a:close/>
                 </a:path>
@@ -3513,192 +3513,192 @@
           </p:nvSpPr>
           <p:spPr>
             <a:xfrm>
-              <a:off x="4096026" y="2073503"/>
-              <a:ext cx="4166653" cy="2783880"/>
+              <a:off x="4144929" y="2209169"/>
+              <a:ext cx="4104094" cy="2596618"/>
             </a:xfrm>
             <a:custGeom>
               <a:avLst/>
               <a:pathLst>
-                <a:path w="4166653" h="2783880">
+                <a:path w="4104094" h="2596618">
                   <a:moveTo>
                     <a:pt x="0" y="0"/>
                   </a:moveTo>
                   <a:lnTo>
-                    <a:pt x="12546" y="32282"/>
-                  </a:lnTo>
-                  <a:lnTo>
-                    <a:pt x="84169" y="207224"/>
-                  </a:lnTo>
-                  <a:lnTo>
-                    <a:pt x="155791" y="373299"/>
-                  </a:lnTo>
-                  <a:lnTo>
-                    <a:pt x="227414" y="530957"/>
-                  </a:lnTo>
-                  <a:lnTo>
-                    <a:pt x="299036" y="680623"/>
-                  </a:lnTo>
-                  <a:lnTo>
-                    <a:pt x="370659" y="822703"/>
-                  </a:lnTo>
-                  <a:lnTo>
-                    <a:pt x="442281" y="957582"/>
-                  </a:lnTo>
-                  <a:lnTo>
-                    <a:pt x="513904" y="1085624"/>
-                  </a:lnTo>
-                  <a:lnTo>
-                    <a:pt x="585526" y="1207176"/>
-                  </a:lnTo>
-                  <a:lnTo>
-                    <a:pt x="657149" y="1322568"/>
-                  </a:lnTo>
-                  <a:lnTo>
-                    <a:pt x="728772" y="1432110"/>
-                  </a:lnTo>
-                  <a:lnTo>
-                    <a:pt x="800394" y="1536100"/>
-                  </a:lnTo>
-                  <a:lnTo>
-                    <a:pt x="872017" y="1634819"/>
-                  </a:lnTo>
-                  <a:lnTo>
-                    <a:pt x="943639" y="1728535"/>
-                  </a:lnTo>
-                  <a:lnTo>
-                    <a:pt x="1015262" y="1817500"/>
-                  </a:lnTo>
-                  <a:lnTo>
-                    <a:pt x="1086884" y="1901956"/>
-                  </a:lnTo>
-                  <a:lnTo>
-                    <a:pt x="1158507" y="1982131"/>
-                  </a:lnTo>
-                  <a:lnTo>
-                    <a:pt x="1230129" y="2058243"/>
-                  </a:lnTo>
-                  <a:lnTo>
-                    <a:pt x="1301752" y="2130496"/>
-                  </a:lnTo>
-                  <a:lnTo>
-                    <a:pt x="1373374" y="2199088"/>
-                  </a:lnTo>
-                  <a:lnTo>
-                    <a:pt x="1444997" y="2264203"/>
-                  </a:lnTo>
-                  <a:lnTo>
-                    <a:pt x="1516619" y="2326017"/>
-                  </a:lnTo>
-                  <a:lnTo>
-                    <a:pt x="1588242" y="2384698"/>
-                  </a:lnTo>
-                  <a:lnTo>
-                    <a:pt x="1659864" y="2440405"/>
-                  </a:lnTo>
-                  <a:lnTo>
-                    <a:pt x="1731487" y="2493288"/>
-                  </a:lnTo>
-                  <a:lnTo>
-                    <a:pt x="1803109" y="2543491"/>
-                  </a:lnTo>
-                  <a:lnTo>
-                    <a:pt x="1874732" y="2591149"/>
-                  </a:lnTo>
-                  <a:lnTo>
-                    <a:pt x="1946354" y="2636392"/>
-                  </a:lnTo>
-                  <a:lnTo>
-                    <a:pt x="2017977" y="2656995"/>
-                  </a:lnTo>
-                  <a:lnTo>
-                    <a:pt x="2089600" y="2661574"/>
-                  </a:lnTo>
-                  <a:lnTo>
-                    <a:pt x="2161222" y="2666128"/>
-                  </a:lnTo>
-                  <a:lnTo>
-                    <a:pt x="2232845" y="2670656"/>
-                  </a:lnTo>
-                  <a:lnTo>
-                    <a:pt x="2304467" y="2675159"/>
-                  </a:lnTo>
-                  <a:lnTo>
-                    <a:pt x="2376090" y="2679637"/>
-                  </a:lnTo>
-                  <a:lnTo>
-                    <a:pt x="2447712" y="2684091"/>
-                  </a:lnTo>
-                  <a:lnTo>
-                    <a:pt x="2519335" y="2688520"/>
-                  </a:lnTo>
-                  <a:lnTo>
-                    <a:pt x="2590957" y="2692924"/>
-                  </a:lnTo>
-                  <a:lnTo>
-                    <a:pt x="2662580" y="2697304"/>
-                  </a:lnTo>
-                  <a:lnTo>
-                    <a:pt x="2734202" y="2701659"/>
-                  </a:lnTo>
-                  <a:lnTo>
-                    <a:pt x="2805825" y="2705991"/>
-                  </a:lnTo>
-                  <a:lnTo>
-                    <a:pt x="2877447" y="2710299"/>
-                  </a:lnTo>
-                  <a:lnTo>
-                    <a:pt x="2949070" y="2714582"/>
-                  </a:lnTo>
-                  <a:lnTo>
-                    <a:pt x="3020692" y="2718842"/>
-                  </a:lnTo>
-                  <a:lnTo>
-                    <a:pt x="3092315" y="2723079"/>
-                  </a:lnTo>
-                  <a:lnTo>
-                    <a:pt x="3163937" y="2727291"/>
-                  </a:lnTo>
-                  <a:lnTo>
-                    <a:pt x="3235560" y="2731481"/>
-                  </a:lnTo>
-                  <a:lnTo>
-                    <a:pt x="3307182" y="2735647"/>
-                  </a:lnTo>
-                  <a:lnTo>
-                    <a:pt x="3378805" y="2739791"/>
-                  </a:lnTo>
-                  <a:lnTo>
-                    <a:pt x="3450428" y="2743911"/>
-                  </a:lnTo>
-                  <a:lnTo>
-                    <a:pt x="3522050" y="2748008"/>
-                  </a:lnTo>
-                  <a:lnTo>
-                    <a:pt x="3593673" y="2752083"/>
-                  </a:lnTo>
-                  <a:lnTo>
-                    <a:pt x="3665295" y="2756135"/>
-                  </a:lnTo>
-                  <a:lnTo>
-                    <a:pt x="3736918" y="2760165"/>
-                  </a:lnTo>
-                  <a:lnTo>
-                    <a:pt x="3808540" y="2764173"/>
-                  </a:lnTo>
-                  <a:lnTo>
-                    <a:pt x="3880163" y="2768158"/>
-                  </a:lnTo>
-                  <a:lnTo>
-                    <a:pt x="3951785" y="2772121"/>
-                  </a:lnTo>
-                  <a:lnTo>
-                    <a:pt x="4023408" y="2776063"/>
-                  </a:lnTo>
-                  <a:lnTo>
-                    <a:pt x="4095030" y="2779982"/>
-                  </a:lnTo>
-                  <a:lnTo>
-                    <a:pt x="4166653" y="2783880"/>
+                    <a:pt x="12358" y="30111"/>
+                  </a:lnTo>
+                  <a:lnTo>
+                    <a:pt x="82905" y="193285"/>
+                  </a:lnTo>
+                  <a:lnTo>
+                    <a:pt x="153452" y="348189"/>
+                  </a:lnTo>
+                  <a:lnTo>
+                    <a:pt x="223999" y="495241"/>
+                  </a:lnTo>
+                  <a:lnTo>
+                    <a:pt x="294547" y="634840"/>
+                  </a:lnTo>
+                  <a:lnTo>
+                    <a:pt x="365094" y="767363"/>
+                  </a:lnTo>
+                  <a:lnTo>
+                    <a:pt x="435641" y="893169"/>
+                  </a:lnTo>
+                  <a:lnTo>
+                    <a:pt x="506188" y="1012598"/>
+                  </a:lnTo>
+                  <a:lnTo>
+                    <a:pt x="576735" y="1125974"/>
+                  </a:lnTo>
+                  <a:lnTo>
+                    <a:pt x="647282" y="1233603"/>
+                  </a:lnTo>
+                  <a:lnTo>
+                    <a:pt x="717830" y="1335777"/>
+                  </a:lnTo>
+                  <a:lnTo>
+                    <a:pt x="788377" y="1432772"/>
+                  </a:lnTo>
+                  <a:lnTo>
+                    <a:pt x="858924" y="1524851"/>
+                  </a:lnTo>
+                  <a:lnTo>
+                    <a:pt x="929471" y="1612262"/>
+                  </a:lnTo>
+                  <a:lnTo>
+                    <a:pt x="1000018" y="1695243"/>
+                  </a:lnTo>
+                  <a:lnTo>
+                    <a:pt x="1070565" y="1774018"/>
+                  </a:lnTo>
+                  <a:lnTo>
+                    <a:pt x="1141113" y="1848801"/>
+                  </a:lnTo>
+                  <a:lnTo>
+                    <a:pt x="1211660" y="1919792"/>
+                  </a:lnTo>
+                  <a:lnTo>
+                    <a:pt x="1282207" y="1987186"/>
+                  </a:lnTo>
+                  <a:lnTo>
+                    <a:pt x="1352754" y="2051163"/>
+                  </a:lnTo>
+                  <a:lnTo>
+                    <a:pt x="1423301" y="2111898"/>
+                  </a:lnTo>
+                  <a:lnTo>
+                    <a:pt x="1493849" y="2169554"/>
+                  </a:lnTo>
+                  <a:lnTo>
+                    <a:pt x="1564396" y="2224288"/>
+                  </a:lnTo>
+                  <a:lnTo>
+                    <a:pt x="1634943" y="2276248"/>
+                  </a:lnTo>
+                  <a:lnTo>
+                    <a:pt x="1705490" y="2325574"/>
+                  </a:lnTo>
+                  <a:lnTo>
+                    <a:pt x="1776037" y="2372399"/>
+                  </a:lnTo>
+                  <a:lnTo>
+                    <a:pt x="1846584" y="2416852"/>
+                  </a:lnTo>
+                  <a:lnTo>
+                    <a:pt x="1917132" y="2459051"/>
+                  </a:lnTo>
+                  <a:lnTo>
+                    <a:pt x="1987679" y="2478269"/>
+                  </a:lnTo>
+                  <a:lnTo>
+                    <a:pt x="2058226" y="2482540"/>
+                  </a:lnTo>
+                  <a:lnTo>
+                    <a:pt x="2128773" y="2486787"/>
+                  </a:lnTo>
+                  <a:lnTo>
+                    <a:pt x="2199320" y="2491011"/>
+                  </a:lnTo>
+                  <a:lnTo>
+                    <a:pt x="2269867" y="2495211"/>
+                  </a:lnTo>
+                  <a:lnTo>
+                    <a:pt x="2340415" y="2499388"/>
+                  </a:lnTo>
+                  <a:lnTo>
+                    <a:pt x="2410962" y="2503542"/>
+                  </a:lnTo>
+                  <a:lnTo>
+                    <a:pt x="2481509" y="2507673"/>
+                  </a:lnTo>
+                  <a:lnTo>
+                    <a:pt x="2552056" y="2511781"/>
+                  </a:lnTo>
+                  <a:lnTo>
+                    <a:pt x="2622603" y="2515866"/>
+                  </a:lnTo>
+                  <a:lnTo>
+                    <a:pt x="2693150" y="2519929"/>
+                  </a:lnTo>
+                  <a:lnTo>
+                    <a:pt x="2763698" y="2523969"/>
+                  </a:lnTo>
+                  <a:lnTo>
+                    <a:pt x="2834245" y="2527987"/>
+                  </a:lnTo>
+                  <a:lnTo>
+                    <a:pt x="2904792" y="2531982"/>
+                  </a:lnTo>
+                  <a:lnTo>
+                    <a:pt x="2975339" y="2535956"/>
+                  </a:lnTo>
+                  <a:lnTo>
+                    <a:pt x="3045886" y="2539907"/>
+                  </a:lnTo>
+                  <a:lnTo>
+                    <a:pt x="3116433" y="2543836"/>
+                  </a:lnTo>
+                  <a:lnTo>
+                    <a:pt x="3186981" y="2547744"/>
+                  </a:lnTo>
+                  <a:lnTo>
+                    <a:pt x="3257528" y="2551630"/>
+                  </a:lnTo>
+                  <a:lnTo>
+                    <a:pt x="3328075" y="2555495"/>
+                  </a:lnTo>
+                  <a:lnTo>
+                    <a:pt x="3398622" y="2559338"/>
+                  </a:lnTo>
+                  <a:lnTo>
+                    <a:pt x="3469169" y="2563160"/>
+                  </a:lnTo>
+                  <a:lnTo>
+                    <a:pt x="3539717" y="2566961"/>
+                  </a:lnTo>
+                  <a:lnTo>
+                    <a:pt x="3610264" y="2570740"/>
+                  </a:lnTo>
+                  <a:lnTo>
+                    <a:pt x="3680811" y="2574499"/>
+                  </a:lnTo>
+                  <a:lnTo>
+                    <a:pt x="3751358" y="2578237"/>
+                  </a:lnTo>
+                  <a:lnTo>
+                    <a:pt x="3821905" y="2581954"/>
+                  </a:lnTo>
+                  <a:lnTo>
+                    <a:pt x="3892452" y="2585651"/>
+                  </a:lnTo>
+                  <a:lnTo>
+                    <a:pt x="3963000" y="2589327"/>
+                  </a:lnTo>
+                  <a:lnTo>
+                    <a:pt x="4033547" y="2592983"/>
+                  </a:lnTo>
+                  <a:lnTo>
+                    <a:pt x="4104094" y="2596618"/>
                   </a:lnTo>
                 </a:path>
               </a:pathLst>
@@ -3718,309 +3718,309 @@
           </p:nvSpPr>
           <p:spPr>
             <a:xfrm>
-              <a:off x="1172049" y="4344414"/>
-              <a:ext cx="7090630" cy="1043882"/>
+              <a:off x="1264853" y="4327324"/>
+              <a:ext cx="6984170" cy="973664"/>
             </a:xfrm>
             <a:custGeom>
               <a:avLst/>
               <a:pathLst>
-                <a:path w="7090630" h="1043882">
+                <a:path w="6984170" h="973664">
                   <a:moveTo>
-                    <a:pt x="7090630" y="1043882"/>
+                    <a:pt x="6984170" y="973664"/>
                   </a:moveTo>
                   <a:lnTo>
-                    <a:pt x="7019007" y="1034861"/>
-                  </a:lnTo>
-                  <a:lnTo>
-                    <a:pt x="6947385" y="1025359"/>
-                  </a:lnTo>
-                  <a:lnTo>
-                    <a:pt x="6875762" y="1015349"/>
-                  </a:lnTo>
-                  <a:lnTo>
-                    <a:pt x="6804139" y="1004804"/>
-                  </a:lnTo>
-                  <a:lnTo>
-                    <a:pt x="6732517" y="993697"/>
-                  </a:lnTo>
-                  <a:lnTo>
-                    <a:pt x="6660894" y="981997"/>
-                  </a:lnTo>
-                  <a:lnTo>
-                    <a:pt x="6589272" y="969672"/>
-                  </a:lnTo>
-                  <a:lnTo>
-                    <a:pt x="6517649" y="956688"/>
-                  </a:lnTo>
-                  <a:lnTo>
-                    <a:pt x="6446027" y="943012"/>
-                  </a:lnTo>
-                  <a:lnTo>
-                    <a:pt x="6374404" y="928606"/>
-                  </a:lnTo>
-                  <a:lnTo>
-                    <a:pt x="6302782" y="913430"/>
-                  </a:lnTo>
-                  <a:lnTo>
-                    <a:pt x="6231159" y="897444"/>
-                  </a:lnTo>
-                  <a:lnTo>
-                    <a:pt x="6159537" y="880604"/>
-                  </a:lnTo>
-                  <a:lnTo>
-                    <a:pt x="6087914" y="862865"/>
-                  </a:lnTo>
-                  <a:lnTo>
-                    <a:pt x="6016292" y="844180"/>
-                  </a:lnTo>
-                  <a:lnTo>
-                    <a:pt x="5944669" y="824496"/>
-                  </a:lnTo>
-                  <a:lnTo>
-                    <a:pt x="5873047" y="803762"/>
-                  </a:lnTo>
-                  <a:lnTo>
-                    <a:pt x="5801424" y="781920"/>
-                  </a:lnTo>
-                  <a:lnTo>
-                    <a:pt x="5729802" y="758912"/>
-                  </a:lnTo>
-                  <a:lnTo>
-                    <a:pt x="5658179" y="734676"/>
-                  </a:lnTo>
-                  <a:lnTo>
-                    <a:pt x="5586557" y="709146"/>
-                  </a:lnTo>
-                  <a:lnTo>
-                    <a:pt x="5514934" y="682253"/>
-                  </a:lnTo>
-                  <a:lnTo>
-                    <a:pt x="5443311" y="653924"/>
-                  </a:lnTo>
-                  <a:lnTo>
-                    <a:pt x="5371689" y="624082"/>
-                  </a:lnTo>
-                  <a:lnTo>
-                    <a:pt x="5300066" y="592647"/>
-                  </a:lnTo>
-                  <a:lnTo>
-                    <a:pt x="5228444" y="559533"/>
-                  </a:lnTo>
-                  <a:lnTo>
-                    <a:pt x="5156821" y="524652"/>
-                  </a:lnTo>
-                  <a:lnTo>
-                    <a:pt x="5085199" y="487908"/>
-                  </a:lnTo>
-                  <a:lnTo>
-                    <a:pt x="5013576" y="449202"/>
-                  </a:lnTo>
-                  <a:lnTo>
-                    <a:pt x="4941954" y="408429"/>
-                  </a:lnTo>
-                  <a:lnTo>
-                    <a:pt x="4870331" y="381479"/>
-                  </a:lnTo>
-                  <a:lnTo>
-                    <a:pt x="4798709" y="376849"/>
-                  </a:lnTo>
-                  <a:lnTo>
-                    <a:pt x="4727086" y="372193"/>
-                  </a:lnTo>
-                  <a:lnTo>
-                    <a:pt x="4655464" y="367512"/>
-                  </a:lnTo>
-                  <a:lnTo>
-                    <a:pt x="4583841" y="362804"/>
-                  </a:lnTo>
-                  <a:lnTo>
-                    <a:pt x="4512219" y="358070"/>
-                  </a:lnTo>
-                  <a:lnTo>
-                    <a:pt x="4440596" y="353309"/>
-                  </a:lnTo>
-                  <a:lnTo>
-                    <a:pt x="4368974" y="348523"/>
-                  </a:lnTo>
-                  <a:lnTo>
-                    <a:pt x="4297351" y="343709"/>
-                  </a:lnTo>
-                  <a:lnTo>
-                    <a:pt x="4225729" y="338869"/>
-                  </a:lnTo>
-                  <a:lnTo>
-                    <a:pt x="4154106" y="334001"/>
-                  </a:lnTo>
-                  <a:lnTo>
-                    <a:pt x="4082483" y="329107"/>
-                  </a:lnTo>
-                  <a:lnTo>
-                    <a:pt x="4010861" y="324185"/>
-                  </a:lnTo>
-                  <a:lnTo>
-                    <a:pt x="3939238" y="319236"/>
-                  </a:lnTo>
-                  <a:lnTo>
-                    <a:pt x="3867616" y="314259"/>
-                  </a:lnTo>
-                  <a:lnTo>
-                    <a:pt x="3795993" y="309255"/>
-                  </a:lnTo>
-                  <a:lnTo>
-                    <a:pt x="3724371" y="304223"/>
-                  </a:lnTo>
-                  <a:lnTo>
-                    <a:pt x="3652748" y="299162"/>
-                  </a:lnTo>
-                  <a:lnTo>
-                    <a:pt x="3581126" y="294074"/>
-                  </a:lnTo>
-                  <a:lnTo>
-                    <a:pt x="3509503" y="288957"/>
-                  </a:lnTo>
-                  <a:lnTo>
-                    <a:pt x="3437881" y="283812"/>
-                  </a:lnTo>
-                  <a:lnTo>
-                    <a:pt x="3366258" y="278638"/>
-                  </a:lnTo>
-                  <a:lnTo>
-                    <a:pt x="3294636" y="273435"/>
-                  </a:lnTo>
-                  <a:lnTo>
-                    <a:pt x="3223013" y="268203"/>
-                  </a:lnTo>
-                  <a:lnTo>
-                    <a:pt x="3151391" y="262942"/>
-                  </a:lnTo>
-                  <a:lnTo>
-                    <a:pt x="3079768" y="257652"/>
-                  </a:lnTo>
-                  <a:lnTo>
-                    <a:pt x="3008146" y="252333"/>
-                  </a:lnTo>
-                  <a:lnTo>
-                    <a:pt x="2936523" y="246983"/>
-                  </a:lnTo>
-                  <a:lnTo>
-                    <a:pt x="2864901" y="241604"/>
-                  </a:lnTo>
-                  <a:lnTo>
-                    <a:pt x="2793278" y="236195"/>
-                  </a:lnTo>
-                  <a:lnTo>
-                    <a:pt x="2721655" y="230756"/>
-                  </a:lnTo>
-                  <a:lnTo>
-                    <a:pt x="2650033" y="225287"/>
-                  </a:lnTo>
-                  <a:lnTo>
-                    <a:pt x="2578410" y="219787"/>
-                  </a:lnTo>
-                  <a:lnTo>
-                    <a:pt x="2506788" y="214256"/>
-                  </a:lnTo>
-                  <a:lnTo>
-                    <a:pt x="2435165" y="208695"/>
-                  </a:lnTo>
-                  <a:lnTo>
-                    <a:pt x="2363543" y="203102"/>
-                  </a:lnTo>
-                  <a:lnTo>
-                    <a:pt x="2291920" y="197479"/>
-                  </a:lnTo>
-                  <a:lnTo>
-                    <a:pt x="2220298" y="191824"/>
-                  </a:lnTo>
-                  <a:lnTo>
-                    <a:pt x="2148675" y="186138"/>
-                  </a:lnTo>
-                  <a:lnTo>
-                    <a:pt x="2077053" y="180420"/>
-                  </a:lnTo>
-                  <a:lnTo>
-                    <a:pt x="2005430" y="174670"/>
-                  </a:lnTo>
-                  <a:lnTo>
-                    <a:pt x="1933808" y="168888"/>
-                  </a:lnTo>
-                  <a:lnTo>
-                    <a:pt x="1862185" y="163074"/>
-                  </a:lnTo>
-                  <a:lnTo>
-                    <a:pt x="1790563" y="157228"/>
-                  </a:lnTo>
-                  <a:lnTo>
-                    <a:pt x="1718940" y="151349"/>
-                  </a:lnTo>
-                  <a:lnTo>
-                    <a:pt x="1647318" y="145437"/>
-                  </a:lnTo>
-                  <a:lnTo>
-                    <a:pt x="1575695" y="139493"/>
-                  </a:lnTo>
-                  <a:lnTo>
-                    <a:pt x="1504073" y="133515"/>
-                  </a:lnTo>
-                  <a:lnTo>
-                    <a:pt x="1432450" y="127504"/>
-                  </a:lnTo>
-                  <a:lnTo>
-                    <a:pt x="1360827" y="121460"/>
-                  </a:lnTo>
-                  <a:lnTo>
-                    <a:pt x="1289205" y="115381"/>
-                  </a:lnTo>
-                  <a:lnTo>
-                    <a:pt x="1217582" y="109269"/>
-                  </a:lnTo>
-                  <a:lnTo>
-                    <a:pt x="1145960" y="103123"/>
-                  </a:lnTo>
-                  <a:lnTo>
-                    <a:pt x="1074337" y="96943"/>
-                  </a:lnTo>
-                  <a:lnTo>
-                    <a:pt x="1002715" y="90728"/>
-                  </a:lnTo>
-                  <a:lnTo>
-                    <a:pt x="931092" y="84479"/>
-                  </a:lnTo>
-                  <a:lnTo>
-                    <a:pt x="859470" y="78195"/>
-                  </a:lnTo>
-                  <a:lnTo>
-                    <a:pt x="787847" y="71876"/>
-                  </a:lnTo>
-                  <a:lnTo>
-                    <a:pt x="716225" y="65522"/>
-                  </a:lnTo>
-                  <a:lnTo>
-                    <a:pt x="644602" y="59132"/>
-                  </a:lnTo>
-                  <a:lnTo>
-                    <a:pt x="572980" y="52707"/>
-                  </a:lnTo>
-                  <a:lnTo>
-                    <a:pt x="501357" y="46246"/>
-                  </a:lnTo>
-                  <a:lnTo>
-                    <a:pt x="429735" y="39749"/>
-                  </a:lnTo>
-                  <a:lnTo>
-                    <a:pt x="358112" y="33215"/>
-                  </a:lnTo>
-                  <a:lnTo>
-                    <a:pt x="286490" y="26646"/>
-                  </a:lnTo>
-                  <a:lnTo>
-                    <a:pt x="214867" y="20040"/>
-                  </a:lnTo>
-                  <a:lnTo>
-                    <a:pt x="143245" y="13397"/>
-                  </a:lnTo>
-                  <a:lnTo>
-                    <a:pt x="71622" y="6717"/>
+                    <a:pt x="6913622" y="965250"/>
+                  </a:lnTo>
+                  <a:lnTo>
+                    <a:pt x="6843075" y="956386"/>
+                  </a:lnTo>
+                  <a:lnTo>
+                    <a:pt x="6772528" y="947050"/>
+                  </a:lnTo>
+                  <a:lnTo>
+                    <a:pt x="6701981" y="937215"/>
+                  </a:lnTo>
+                  <a:lnTo>
+                    <a:pt x="6631434" y="926855"/>
+                  </a:lnTo>
+                  <a:lnTo>
+                    <a:pt x="6560887" y="915941"/>
+                  </a:lnTo>
+                  <a:lnTo>
+                    <a:pt x="6490339" y="904445"/>
+                  </a:lnTo>
+                  <a:lnTo>
+                    <a:pt x="6419792" y="892336"/>
+                  </a:lnTo>
+                  <a:lnTo>
+                    <a:pt x="6349245" y="879579"/>
+                  </a:lnTo>
+                  <a:lnTo>
+                    <a:pt x="6278698" y="866142"/>
+                  </a:lnTo>
+                  <a:lnTo>
+                    <a:pt x="6208151" y="851987"/>
+                  </a:lnTo>
+                  <a:lnTo>
+                    <a:pt x="6137604" y="837076"/>
+                  </a:lnTo>
+                  <a:lnTo>
+                    <a:pt x="6067056" y="821369"/>
+                  </a:lnTo>
+                  <a:lnTo>
+                    <a:pt x="5996509" y="804824"/>
+                  </a:lnTo>
+                  <a:lnTo>
+                    <a:pt x="5925962" y="787395"/>
+                  </a:lnTo>
+                  <a:lnTo>
+                    <a:pt x="5855415" y="769035"/>
+                  </a:lnTo>
+                  <a:lnTo>
+                    <a:pt x="5784868" y="749696"/>
+                  </a:lnTo>
+                  <a:lnTo>
+                    <a:pt x="5714320" y="729323"/>
+                  </a:lnTo>
+                  <a:lnTo>
+                    <a:pt x="5643773" y="707863"/>
+                  </a:lnTo>
+                  <a:lnTo>
+                    <a:pt x="5573226" y="685257"/>
+                  </a:lnTo>
+                  <a:lnTo>
+                    <a:pt x="5502679" y="661444"/>
+                  </a:lnTo>
+                  <a:lnTo>
+                    <a:pt x="5432132" y="636360"/>
+                  </a:lnTo>
+                  <a:lnTo>
+                    <a:pt x="5361585" y="609937"/>
+                  </a:lnTo>
+                  <a:lnTo>
+                    <a:pt x="5291037" y="582102"/>
+                  </a:lnTo>
+                  <a:lnTo>
+                    <a:pt x="5220490" y="552782"/>
+                  </a:lnTo>
+                  <a:lnTo>
+                    <a:pt x="5149943" y="521895"/>
+                  </a:lnTo>
+                  <a:lnTo>
+                    <a:pt x="5079396" y="489360"/>
+                  </a:lnTo>
+                  <a:lnTo>
+                    <a:pt x="5008849" y="455088"/>
+                  </a:lnTo>
+                  <a:lnTo>
+                    <a:pt x="4938302" y="418986"/>
+                  </a:lnTo>
+                  <a:lnTo>
+                    <a:pt x="4867754" y="380956"/>
+                  </a:lnTo>
+                  <a:lnTo>
+                    <a:pt x="4797207" y="355819"/>
+                  </a:lnTo>
+                  <a:lnTo>
+                    <a:pt x="4726660" y="351500"/>
+                  </a:lnTo>
+                  <a:lnTo>
+                    <a:pt x="4656113" y="347157"/>
+                  </a:lnTo>
+                  <a:lnTo>
+                    <a:pt x="4585566" y="342791"/>
+                  </a:lnTo>
+                  <a:lnTo>
+                    <a:pt x="4515019" y="338399"/>
+                  </a:lnTo>
+                  <a:lnTo>
+                    <a:pt x="4444471" y="333984"/>
+                  </a:lnTo>
+                  <a:lnTo>
+                    <a:pt x="4373924" y="329544"/>
+                  </a:lnTo>
+                  <a:lnTo>
+                    <a:pt x="4303377" y="325079"/>
+                  </a:lnTo>
+                  <a:lnTo>
+                    <a:pt x="4232830" y="320589"/>
+                  </a:lnTo>
+                  <a:lnTo>
+                    <a:pt x="4162283" y="316074"/>
+                  </a:lnTo>
+                  <a:lnTo>
+                    <a:pt x="4091736" y="311534"/>
+                  </a:lnTo>
+                  <a:lnTo>
+                    <a:pt x="4021188" y="306969"/>
+                  </a:lnTo>
+                  <a:lnTo>
+                    <a:pt x="3950641" y="302378"/>
+                  </a:lnTo>
+                  <a:lnTo>
+                    <a:pt x="3880094" y="297762"/>
+                  </a:lnTo>
+                  <a:lnTo>
+                    <a:pt x="3809547" y="293120"/>
+                  </a:lnTo>
+                  <a:lnTo>
+                    <a:pt x="3739000" y="288452"/>
+                  </a:lnTo>
+                  <a:lnTo>
+                    <a:pt x="3668452" y="283759"/>
+                  </a:lnTo>
+                  <a:lnTo>
+                    <a:pt x="3597905" y="279039"/>
+                  </a:lnTo>
+                  <a:lnTo>
+                    <a:pt x="3527358" y="274293"/>
+                  </a:lnTo>
+                  <a:lnTo>
+                    <a:pt x="3456811" y="269520"/>
+                  </a:lnTo>
+                  <a:lnTo>
+                    <a:pt x="3386264" y="264721"/>
+                  </a:lnTo>
+                  <a:lnTo>
+                    <a:pt x="3315717" y="259895"/>
+                  </a:lnTo>
+                  <a:lnTo>
+                    <a:pt x="3245169" y="255042"/>
+                  </a:lnTo>
+                  <a:lnTo>
+                    <a:pt x="3174622" y="250162"/>
+                  </a:lnTo>
+                  <a:lnTo>
+                    <a:pt x="3104075" y="245255"/>
+                  </a:lnTo>
+                  <a:lnTo>
+                    <a:pt x="3033528" y="240321"/>
+                  </a:lnTo>
+                  <a:lnTo>
+                    <a:pt x="2962981" y="235359"/>
+                  </a:lnTo>
+                  <a:lnTo>
+                    <a:pt x="2892434" y="230370"/>
+                  </a:lnTo>
+                  <a:lnTo>
+                    <a:pt x="2821886" y="225352"/>
+                  </a:lnTo>
+                  <a:lnTo>
+                    <a:pt x="2751339" y="220307"/>
+                  </a:lnTo>
+                  <a:lnTo>
+                    <a:pt x="2680792" y="215234"/>
+                  </a:lnTo>
+                  <a:lnTo>
+                    <a:pt x="2610245" y="210132"/>
+                  </a:lnTo>
+                  <a:lnTo>
+                    <a:pt x="2539698" y="205002"/>
+                  </a:lnTo>
+                  <a:lnTo>
+                    <a:pt x="2469151" y="199844"/>
+                  </a:lnTo>
+                  <a:lnTo>
+                    <a:pt x="2398603" y="194657"/>
+                  </a:lnTo>
+                  <a:lnTo>
+                    <a:pt x="2328056" y="189440"/>
+                  </a:lnTo>
+                  <a:lnTo>
+                    <a:pt x="2257509" y="184195"/>
+                  </a:lnTo>
+                  <a:lnTo>
+                    <a:pt x="2186962" y="178921"/>
+                  </a:lnTo>
+                  <a:lnTo>
+                    <a:pt x="2116415" y="173617"/>
+                  </a:lnTo>
+                  <a:lnTo>
+                    <a:pt x="2045868" y="168284"/>
+                  </a:lnTo>
+                  <a:lnTo>
+                    <a:pt x="1975320" y="162921"/>
+                  </a:lnTo>
+                  <a:lnTo>
+                    <a:pt x="1904773" y="157528"/>
+                  </a:lnTo>
+                  <a:lnTo>
+                    <a:pt x="1834226" y="152105"/>
+                  </a:lnTo>
+                  <a:lnTo>
+                    <a:pt x="1763679" y="146652"/>
+                  </a:lnTo>
+                  <a:lnTo>
+                    <a:pt x="1693132" y="141168"/>
+                  </a:lnTo>
+                  <a:lnTo>
+                    <a:pt x="1622584" y="135654"/>
+                  </a:lnTo>
+                  <a:lnTo>
+                    <a:pt x="1552037" y="130110"/>
+                  </a:lnTo>
+                  <a:lnTo>
+                    <a:pt x="1481490" y="124534"/>
+                  </a:lnTo>
+                  <a:lnTo>
+                    <a:pt x="1410943" y="118927"/>
+                  </a:lnTo>
+                  <a:lnTo>
+                    <a:pt x="1340396" y="113289"/>
+                  </a:lnTo>
+                  <a:lnTo>
+                    <a:pt x="1269849" y="107620"/>
+                  </a:lnTo>
+                  <a:lnTo>
+                    <a:pt x="1199301" y="101919"/>
+                  </a:lnTo>
+                  <a:lnTo>
+                    <a:pt x="1128754" y="96187"/>
+                  </a:lnTo>
+                  <a:lnTo>
+                    <a:pt x="1058207" y="90422"/>
+                  </a:lnTo>
+                  <a:lnTo>
+                    <a:pt x="987660" y="84625"/>
+                  </a:lnTo>
+                  <a:lnTo>
+                    <a:pt x="917113" y="78797"/>
+                  </a:lnTo>
+                  <a:lnTo>
+                    <a:pt x="846566" y="72935"/>
+                  </a:lnTo>
+                  <a:lnTo>
+                    <a:pt x="776018" y="67041"/>
+                  </a:lnTo>
+                  <a:lnTo>
+                    <a:pt x="705471" y="61114"/>
+                  </a:lnTo>
+                  <a:lnTo>
+                    <a:pt x="634924" y="55154"/>
+                  </a:lnTo>
+                  <a:lnTo>
+                    <a:pt x="564377" y="49161"/>
+                  </a:lnTo>
+                  <a:lnTo>
+                    <a:pt x="493830" y="43135"/>
+                  </a:lnTo>
+                  <a:lnTo>
+                    <a:pt x="423283" y="37075"/>
+                  </a:lnTo>
+                  <a:lnTo>
+                    <a:pt x="352735" y="30981"/>
+                  </a:lnTo>
+                  <a:lnTo>
+                    <a:pt x="282188" y="24853"/>
+                  </a:lnTo>
+                  <a:lnTo>
+                    <a:pt x="211641" y="18692"/>
+                  </a:lnTo>
+                  <a:lnTo>
+                    <a:pt x="141094" y="12495"/>
+                  </a:lnTo>
+                  <a:lnTo>
+                    <a:pt x="70547" y="6265"/>
                   </a:lnTo>
                   <a:lnTo>
                     <a:pt x="0" y="0"/>
@@ -4043,258 +4043,258 @@
           </p:nvSpPr>
           <p:spPr>
             <a:xfrm>
-              <a:off x="2501251" y="2073503"/>
-              <a:ext cx="5761428" cy="3139879"/>
+              <a:off x="2574098" y="2209169"/>
+              <a:ext cx="5674925" cy="2928671"/>
             </a:xfrm>
             <a:custGeom>
               <a:avLst/>
               <a:pathLst>
-                <a:path w="5761428" h="3139879">
+                <a:path w="5674925" h="2928671">
                   <a:moveTo>
                     <a:pt x="0" y="0"/>
                   </a:moveTo>
                   <a:lnTo>
-                    <a:pt x="31626" y="44351"/>
-                  </a:lnTo>
-                  <a:lnTo>
-                    <a:pt x="103248" y="141943"/>
-                  </a:lnTo>
-                  <a:lnTo>
-                    <a:pt x="174871" y="236765"/>
-                  </a:lnTo>
-                  <a:lnTo>
-                    <a:pt x="246493" y="328897"/>
-                  </a:lnTo>
-                  <a:lnTo>
-                    <a:pt x="318116" y="418415"/>
-                  </a:lnTo>
-                  <a:lnTo>
-                    <a:pt x="389738" y="505392"/>
-                  </a:lnTo>
-                  <a:lnTo>
-                    <a:pt x="461361" y="589902"/>
-                  </a:lnTo>
-                  <a:lnTo>
-                    <a:pt x="532983" y="672013"/>
-                  </a:lnTo>
-                  <a:lnTo>
-                    <a:pt x="604606" y="751795"/>
-                  </a:lnTo>
-                  <a:lnTo>
-                    <a:pt x="676229" y="829313"/>
-                  </a:lnTo>
-                  <a:lnTo>
-                    <a:pt x="747851" y="904632"/>
-                  </a:lnTo>
-                  <a:lnTo>
-                    <a:pt x="819474" y="977813"/>
-                  </a:lnTo>
-                  <a:lnTo>
-                    <a:pt x="891096" y="1048918"/>
-                  </a:lnTo>
-                  <a:lnTo>
-                    <a:pt x="962719" y="1118005"/>
-                  </a:lnTo>
-                  <a:lnTo>
-                    <a:pt x="1034341" y="1185132"/>
-                  </a:lnTo>
-                  <a:lnTo>
-                    <a:pt x="1105964" y="1250355"/>
-                  </a:lnTo>
-                  <a:lnTo>
-                    <a:pt x="1177586" y="1313726"/>
-                  </a:lnTo>
-                  <a:lnTo>
-                    <a:pt x="1249209" y="1375300"/>
-                  </a:lnTo>
-                  <a:lnTo>
-                    <a:pt x="1320831" y="1435126"/>
-                  </a:lnTo>
-                  <a:lnTo>
-                    <a:pt x="1392454" y="1493255"/>
-                  </a:lnTo>
-                  <a:lnTo>
-                    <a:pt x="1464076" y="1549734"/>
-                  </a:lnTo>
-                  <a:lnTo>
-                    <a:pt x="1535699" y="1604611"/>
-                  </a:lnTo>
-                  <a:lnTo>
-                    <a:pt x="1607321" y="1657931"/>
-                  </a:lnTo>
-                  <a:lnTo>
-                    <a:pt x="1678944" y="1709738"/>
-                  </a:lnTo>
-                  <a:lnTo>
-                    <a:pt x="1750566" y="1760074"/>
-                  </a:lnTo>
-                  <a:lnTo>
-                    <a:pt x="1822189" y="1808983"/>
-                  </a:lnTo>
-                  <a:lnTo>
-                    <a:pt x="1893811" y="1856504"/>
-                  </a:lnTo>
-                  <a:lnTo>
-                    <a:pt x="1965434" y="1902676"/>
-                  </a:lnTo>
-                  <a:lnTo>
-                    <a:pt x="2037057" y="1947538"/>
-                  </a:lnTo>
-                  <a:lnTo>
-                    <a:pt x="2108679" y="1991127"/>
-                  </a:lnTo>
-                  <a:lnTo>
-                    <a:pt x="2180302" y="2033480"/>
-                  </a:lnTo>
-                  <a:lnTo>
-                    <a:pt x="2251924" y="2074631"/>
-                  </a:lnTo>
-                  <a:lnTo>
-                    <a:pt x="2323547" y="2114614"/>
-                  </a:lnTo>
-                  <a:lnTo>
-                    <a:pt x="2395169" y="2153462"/>
-                  </a:lnTo>
-                  <a:lnTo>
-                    <a:pt x="2466792" y="2191209"/>
-                  </a:lnTo>
-                  <a:lnTo>
-                    <a:pt x="2538414" y="2227884"/>
-                  </a:lnTo>
-                  <a:lnTo>
-                    <a:pt x="2610037" y="2263519"/>
-                  </a:lnTo>
-                  <a:lnTo>
-                    <a:pt x="2681659" y="2298142"/>
-                  </a:lnTo>
-                  <a:lnTo>
-                    <a:pt x="2753282" y="2331783"/>
-                  </a:lnTo>
-                  <a:lnTo>
-                    <a:pt x="2824904" y="2364470"/>
-                  </a:lnTo>
-                  <a:lnTo>
-                    <a:pt x="2896527" y="2396229"/>
-                  </a:lnTo>
-                  <a:lnTo>
-                    <a:pt x="2968149" y="2427086"/>
-                  </a:lnTo>
-                  <a:lnTo>
-                    <a:pt x="3039772" y="2457069"/>
-                  </a:lnTo>
-                  <a:lnTo>
-                    <a:pt x="3111394" y="2486200"/>
-                  </a:lnTo>
-                  <a:lnTo>
-                    <a:pt x="3183017" y="2514505"/>
-                  </a:lnTo>
-                  <a:lnTo>
-                    <a:pt x="3254639" y="2542007"/>
-                  </a:lnTo>
-                  <a:lnTo>
-                    <a:pt x="3326262" y="2568729"/>
-                  </a:lnTo>
-                  <a:lnTo>
-                    <a:pt x="3397885" y="2594692"/>
-                  </a:lnTo>
-                  <a:lnTo>
-                    <a:pt x="3469507" y="2619918"/>
-                  </a:lnTo>
-                  <a:lnTo>
-                    <a:pt x="3541130" y="2644429"/>
-                  </a:lnTo>
-                  <a:lnTo>
-                    <a:pt x="3612752" y="2668245"/>
-                  </a:lnTo>
-                  <a:lnTo>
-                    <a:pt x="3684375" y="2691384"/>
-                  </a:lnTo>
-                  <a:lnTo>
-                    <a:pt x="3755997" y="2713867"/>
-                  </a:lnTo>
-                  <a:lnTo>
-                    <a:pt x="3827620" y="2735712"/>
-                  </a:lnTo>
-                  <a:lnTo>
-                    <a:pt x="3899242" y="2756937"/>
-                  </a:lnTo>
-                  <a:lnTo>
-                    <a:pt x="3970865" y="2777560"/>
-                  </a:lnTo>
-                  <a:lnTo>
-                    <a:pt x="4042487" y="2797598"/>
-                  </a:lnTo>
-                  <a:lnTo>
-                    <a:pt x="4114110" y="2817067"/>
-                  </a:lnTo>
-                  <a:lnTo>
-                    <a:pt x="4185732" y="2835984"/>
-                  </a:lnTo>
-                  <a:lnTo>
-                    <a:pt x="4257355" y="2854364"/>
-                  </a:lnTo>
-                  <a:lnTo>
-                    <a:pt x="4328977" y="2872222"/>
-                  </a:lnTo>
-                  <a:lnTo>
-                    <a:pt x="4400600" y="2889574"/>
-                  </a:lnTo>
-                  <a:lnTo>
-                    <a:pt x="4472222" y="2906434"/>
-                  </a:lnTo>
-                  <a:lnTo>
-                    <a:pt x="4543845" y="2922815"/>
-                  </a:lnTo>
-                  <a:lnTo>
-                    <a:pt x="4615467" y="2938731"/>
-                  </a:lnTo>
-                  <a:lnTo>
-                    <a:pt x="4687090" y="2954195"/>
-                  </a:lnTo>
-                  <a:lnTo>
-                    <a:pt x="4758713" y="2969221"/>
-                  </a:lnTo>
-                  <a:lnTo>
-                    <a:pt x="4830335" y="2983821"/>
-                  </a:lnTo>
-                  <a:lnTo>
-                    <a:pt x="4901958" y="2998006"/>
-                  </a:lnTo>
-                  <a:lnTo>
-                    <a:pt x="4973580" y="3011789"/>
-                  </a:lnTo>
-                  <a:lnTo>
-                    <a:pt x="5045203" y="3025180"/>
-                  </a:lnTo>
-                  <a:lnTo>
-                    <a:pt x="5116825" y="3038192"/>
-                  </a:lnTo>
-                  <a:lnTo>
-                    <a:pt x="5188448" y="3050834"/>
-                  </a:lnTo>
-                  <a:lnTo>
-                    <a:pt x="5260070" y="3063118"/>
-                  </a:lnTo>
-                  <a:lnTo>
-                    <a:pt x="5331693" y="3075053"/>
-                  </a:lnTo>
-                  <a:lnTo>
-                    <a:pt x="5403315" y="3086650"/>
-                  </a:lnTo>
-                  <a:lnTo>
-                    <a:pt x="5474938" y="3097917"/>
-                  </a:lnTo>
-                  <a:lnTo>
-                    <a:pt x="5546560" y="3108865"/>
-                  </a:lnTo>
-                  <a:lnTo>
-                    <a:pt x="5618183" y="3119502"/>
-                  </a:lnTo>
-                  <a:lnTo>
-                    <a:pt x="5689805" y="3129837"/>
-                  </a:lnTo>
-                  <a:lnTo>
-                    <a:pt x="5761428" y="3139879"/>
+                    <a:pt x="31151" y="41368"/>
+                  </a:lnTo>
+                  <a:lnTo>
+                    <a:pt x="101698" y="132395"/>
+                  </a:lnTo>
+                  <a:lnTo>
+                    <a:pt x="172245" y="220839"/>
+                  </a:lnTo>
+                  <a:lnTo>
+                    <a:pt x="242792" y="306773"/>
+                  </a:lnTo>
+                  <a:lnTo>
+                    <a:pt x="313340" y="390269"/>
+                  </a:lnTo>
+                  <a:lnTo>
+                    <a:pt x="383887" y="471396"/>
+                  </a:lnTo>
+                  <a:lnTo>
+                    <a:pt x="454434" y="550221"/>
+                  </a:lnTo>
+                  <a:lnTo>
+                    <a:pt x="524981" y="626810"/>
+                  </a:lnTo>
+                  <a:lnTo>
+                    <a:pt x="595528" y="701225"/>
+                  </a:lnTo>
+                  <a:lnTo>
+                    <a:pt x="666076" y="773528"/>
+                  </a:lnTo>
+                  <a:lnTo>
+                    <a:pt x="736623" y="843781"/>
+                  </a:lnTo>
+                  <a:lnTo>
+                    <a:pt x="807170" y="912039"/>
+                  </a:lnTo>
+                  <a:lnTo>
+                    <a:pt x="877717" y="978361"/>
+                  </a:lnTo>
+                  <a:lnTo>
+                    <a:pt x="948264" y="1042801"/>
+                  </a:lnTo>
+                  <a:lnTo>
+                    <a:pt x="1018811" y="1105413"/>
+                  </a:lnTo>
+                  <a:lnTo>
+                    <a:pt x="1089359" y="1166248"/>
+                  </a:lnTo>
+                  <a:lnTo>
+                    <a:pt x="1159906" y="1225357"/>
+                  </a:lnTo>
+                  <a:lnTo>
+                    <a:pt x="1230453" y="1282788"/>
+                  </a:lnTo>
+                  <a:lnTo>
+                    <a:pt x="1301000" y="1338590"/>
+                  </a:lnTo>
+                  <a:lnTo>
+                    <a:pt x="1371547" y="1392809"/>
+                  </a:lnTo>
+                  <a:lnTo>
+                    <a:pt x="1442094" y="1445489"/>
+                  </a:lnTo>
+                  <a:lnTo>
+                    <a:pt x="1512642" y="1496675"/>
+                  </a:lnTo>
+                  <a:lnTo>
+                    <a:pt x="1583189" y="1546408"/>
+                  </a:lnTo>
+                  <a:lnTo>
+                    <a:pt x="1653736" y="1594730"/>
+                  </a:lnTo>
+                  <a:lnTo>
+                    <a:pt x="1724283" y="1641681"/>
+                  </a:lnTo>
+                  <a:lnTo>
+                    <a:pt x="1794830" y="1687299"/>
+                  </a:lnTo>
+                  <a:lnTo>
+                    <a:pt x="1865377" y="1731623"/>
+                  </a:lnTo>
+                  <a:lnTo>
+                    <a:pt x="1935925" y="1774690"/>
+                  </a:lnTo>
+                  <a:lnTo>
+                    <a:pt x="2006472" y="1816534"/>
+                  </a:lnTo>
+                  <a:lnTo>
+                    <a:pt x="2077019" y="1857192"/>
+                  </a:lnTo>
+                  <a:lnTo>
+                    <a:pt x="2147566" y="1896695"/>
+                  </a:lnTo>
+                  <a:lnTo>
+                    <a:pt x="2218113" y="1935078"/>
+                  </a:lnTo>
+                  <a:lnTo>
+                    <a:pt x="2288660" y="1972371"/>
+                  </a:lnTo>
+                  <a:lnTo>
+                    <a:pt x="2359208" y="2008607"/>
+                  </a:lnTo>
+                  <a:lnTo>
+                    <a:pt x="2429755" y="2043814"/>
+                  </a:lnTo>
+                  <a:lnTo>
+                    <a:pt x="2500302" y="2078022"/>
+                  </a:lnTo>
+                  <a:lnTo>
+                    <a:pt x="2570849" y="2111260"/>
+                  </a:lnTo>
+                  <a:lnTo>
+                    <a:pt x="2641396" y="2143554"/>
+                  </a:lnTo>
+                  <a:lnTo>
+                    <a:pt x="2711944" y="2174933"/>
+                  </a:lnTo>
+                  <a:lnTo>
+                    <a:pt x="2782491" y="2205420"/>
+                  </a:lnTo>
+                  <a:lnTo>
+                    <a:pt x="2853038" y="2235043"/>
+                  </a:lnTo>
+                  <a:lnTo>
+                    <a:pt x="2923585" y="2263825"/>
+                  </a:lnTo>
+                  <a:lnTo>
+                    <a:pt x="2994132" y="2291791"/>
+                  </a:lnTo>
+                  <a:lnTo>
+                    <a:pt x="3064679" y="2318963"/>
+                  </a:lnTo>
+                  <a:lnTo>
+                    <a:pt x="3135227" y="2345364"/>
+                  </a:lnTo>
+                  <a:lnTo>
+                    <a:pt x="3205774" y="2371016"/>
+                  </a:lnTo>
+                  <a:lnTo>
+                    <a:pt x="3276321" y="2395940"/>
+                  </a:lnTo>
+                  <a:lnTo>
+                    <a:pt x="3346868" y="2420156"/>
+                  </a:lnTo>
+                  <a:lnTo>
+                    <a:pt x="3417415" y="2443686"/>
+                  </a:lnTo>
+                  <a:lnTo>
+                    <a:pt x="3487962" y="2466548"/>
+                  </a:lnTo>
+                  <a:lnTo>
+                    <a:pt x="3558510" y="2488762"/>
+                  </a:lnTo>
+                  <a:lnTo>
+                    <a:pt x="3629057" y="2510345"/>
+                  </a:lnTo>
+                  <a:lnTo>
+                    <a:pt x="3699604" y="2531315"/>
+                  </a:lnTo>
+                  <a:lnTo>
+                    <a:pt x="3770151" y="2551691"/>
+                  </a:lnTo>
+                  <a:lnTo>
+                    <a:pt x="3840698" y="2571488"/>
+                  </a:lnTo>
+                  <a:lnTo>
+                    <a:pt x="3911245" y="2590724"/>
+                  </a:lnTo>
+                  <a:lnTo>
+                    <a:pt x="3981793" y="2609414"/>
+                  </a:lnTo>
+                  <a:lnTo>
+                    <a:pt x="4052340" y="2627573"/>
+                  </a:lnTo>
+                  <a:lnTo>
+                    <a:pt x="4122887" y="2645218"/>
+                  </a:lnTo>
+                  <a:lnTo>
+                    <a:pt x="4193434" y="2662361"/>
+                  </a:lnTo>
+                  <a:lnTo>
+                    <a:pt x="4263981" y="2679018"/>
+                  </a:lnTo>
+                  <a:lnTo>
+                    <a:pt x="4334528" y="2695203"/>
+                  </a:lnTo>
+                  <a:lnTo>
+                    <a:pt x="4405076" y="2710928"/>
+                  </a:lnTo>
+                  <a:lnTo>
+                    <a:pt x="4475623" y="2726208"/>
+                  </a:lnTo>
+                  <a:lnTo>
+                    <a:pt x="4546170" y="2741053"/>
+                  </a:lnTo>
+                  <a:lnTo>
+                    <a:pt x="4616717" y="2755477"/>
+                  </a:lnTo>
+                  <a:lnTo>
+                    <a:pt x="4687264" y="2769493"/>
+                  </a:lnTo>
+                  <a:lnTo>
+                    <a:pt x="4757812" y="2783110"/>
+                  </a:lnTo>
+                  <a:lnTo>
+                    <a:pt x="4828359" y="2796341"/>
+                  </a:lnTo>
+                  <a:lnTo>
+                    <a:pt x="4898906" y="2809197"/>
+                  </a:lnTo>
+                  <a:lnTo>
+                    <a:pt x="4969453" y="2821687"/>
+                  </a:lnTo>
+                  <a:lnTo>
+                    <a:pt x="5040000" y="2833824"/>
+                  </a:lnTo>
+                  <a:lnTo>
+                    <a:pt x="5110547" y="2845616"/>
+                  </a:lnTo>
+                  <a:lnTo>
+                    <a:pt x="5181095" y="2857073"/>
+                  </a:lnTo>
+                  <a:lnTo>
+                    <a:pt x="5251642" y="2868206"/>
+                  </a:lnTo>
+                  <a:lnTo>
+                    <a:pt x="5322189" y="2879022"/>
+                  </a:lnTo>
+                  <a:lnTo>
+                    <a:pt x="5392736" y="2889532"/>
+                  </a:lnTo>
+                  <a:lnTo>
+                    <a:pt x="5463283" y="2899743"/>
+                  </a:lnTo>
+                  <a:lnTo>
+                    <a:pt x="5533830" y="2909664"/>
+                  </a:lnTo>
+                  <a:lnTo>
+                    <a:pt x="5604378" y="2919305"/>
+                  </a:lnTo>
+                  <a:lnTo>
+                    <a:pt x="5674925" y="2928671"/>
                   </a:lnTo>
                 </a:path>
               </a:pathLst>
@@ -4323,21 +4323,21 @@
           </p:nvSpPr>
           <p:spPr>
             <a:xfrm>
-              <a:off x="817517" y="4727786"/>
-              <a:ext cx="7799693" cy="0"/>
+              <a:off x="915645" y="4684908"/>
+              <a:ext cx="7682587" cy="0"/>
             </a:xfrm>
             <a:custGeom>
               <a:avLst/>
               <a:pathLst>
-                <a:path w="7799693" h="0">
+                <a:path w="7682587" h="0">
                   <a:moveTo>
                     <a:pt x="0" y="0"/>
                   </a:moveTo>
                   <a:lnTo>
-                    <a:pt x="7799693" y="0"/>
-                  </a:lnTo>
-                  <a:lnTo>
-                    <a:pt x="7799693" y="0"/>
+                    <a:pt x="7682587" y="0"/>
+                  </a:lnTo>
+                  <a:lnTo>
+                    <a:pt x="7682587" y="0"/>
                   </a:lnTo>
                 </a:path>
               </a:pathLst>
@@ -4366,15 +4366,15 @@
           </p:nvSpPr>
           <p:spPr>
             <a:xfrm>
-              <a:off x="6071765" y="2073503"/>
-              <a:ext cx="0" cy="3649639"/>
+              <a:off x="6091004" y="2209169"/>
+              <a:ext cx="0" cy="3404141"/>
             </a:xfrm>
             <a:custGeom>
               <a:avLst/>
               <a:pathLst>
-                <a:path w="0" h="3649639">
+                <a:path w="0" h="3404141">
                   <a:moveTo>
-                    <a:pt x="0" y="3649639"/>
+                    <a:pt x="0" y="3404141"/>
                   </a:moveTo>
                   <a:lnTo>
                     <a:pt x="0" y="0"/>
@@ -4409,15 +4409,15 @@
           </p:nvSpPr>
           <p:spPr>
             <a:xfrm>
-              <a:off x="5051213" y="2073503"/>
-              <a:ext cx="0" cy="3649639"/>
+              <a:off x="5085775" y="2209169"/>
+              <a:ext cx="0" cy="3404141"/>
             </a:xfrm>
             <a:custGeom>
               <a:avLst/>
               <a:pathLst>
-                <a:path w="0" h="3649639">
+                <a:path w="0" h="3404141">
                   <a:moveTo>
-                    <a:pt x="0" y="3649639"/>
+                    <a:pt x="0" y="3404141"/>
                   </a:moveTo>
                   <a:lnTo>
                     <a:pt x="0" y="0"/>
@@ -4452,15 +4452,15 @@
           </p:nvSpPr>
           <p:spPr>
             <a:xfrm>
-              <a:off x="6733531" y="2073503"/>
-              <a:ext cx="0" cy="3649639"/>
+              <a:off x="6742834" y="2209169"/>
+              <a:ext cx="0" cy="3404141"/>
             </a:xfrm>
             <a:custGeom>
               <a:avLst/>
               <a:pathLst>
-                <a:path w="0" h="3649639">
+                <a:path w="0" h="3404141">
                   <a:moveTo>
-                    <a:pt x="0" y="3649639"/>
+                    <a:pt x="0" y="3404141"/>
                   </a:moveTo>
                   <a:lnTo>
                     <a:pt x="0" y="0"/>
@@ -4495,8 +4495,8 @@
           </p:nvSpPr>
           <p:spPr>
             <a:xfrm>
-              <a:off x="692708" y="5517199"/>
-              <a:ext cx="62179" cy="80101"/>
+              <a:off x="756929" y="5407599"/>
+              <a:ext cx="79004" cy="101955"/>
             </a:xfrm>
             <a:prstGeom prst="rect">
               <a:avLst/>
@@ -4509,7 +4509,7 @@
             <a:p>
               <a:pPr algn="l" marL="0" marR="0" indent="0">
                 <a:lnSpc>
-                  <a:spcPts val="880"/>
+                  <a:spcPts val="1120"/>
                 </a:lnSpc>
                 <a:spcBef>
                   <a:spcPts val="0"/>
@@ -4519,7 +4519,7 @@
                 </a:spcAft>
               </a:pPr>
               <a:r>
-                <a:rPr sz="880">
+                <a:rPr sz="1120">
                   <a:solidFill>
                     <a:srgbClr val="4D4D4D">
                       <a:alpha val="100000"/>
@@ -4541,8 +4541,8 @@
           </p:nvSpPr>
           <p:spPr>
             <a:xfrm>
-              <a:off x="692708" y="4687735"/>
-              <a:ext cx="62179" cy="80101"/>
+              <a:off x="756929" y="4633931"/>
+              <a:ext cx="79004" cy="101955"/>
             </a:xfrm>
             <a:prstGeom prst="rect">
               <a:avLst/>
@@ -4555,7 +4555,7 @@
             <a:p>
               <a:pPr algn="l" marL="0" marR="0" indent="0">
                 <a:lnSpc>
-                  <a:spcPts val="880"/>
+                  <a:spcPts val="1120"/>
                 </a:lnSpc>
                 <a:spcBef>
                   <a:spcPts val="0"/>
@@ -4565,7 +4565,7 @@
                 </a:spcAft>
               </a:pPr>
               <a:r>
-                <a:rPr sz="880">
+                <a:rPr sz="1120">
                   <a:solidFill>
                     <a:srgbClr val="4D4D4D">
                       <a:alpha val="100000"/>
@@ -4587,8 +4587,8 @@
           </p:nvSpPr>
           <p:spPr>
             <a:xfrm>
-              <a:off x="692708" y="3858272"/>
-              <a:ext cx="62179" cy="80101"/>
+              <a:off x="756929" y="3860262"/>
+              <a:ext cx="79004" cy="101955"/>
             </a:xfrm>
             <a:prstGeom prst="rect">
               <a:avLst/>
@@ -4601,7 +4601,7 @@
             <a:p>
               <a:pPr algn="l" marL="0" marR="0" indent="0">
                 <a:lnSpc>
-                  <a:spcPts val="880"/>
+                  <a:spcPts val="1120"/>
                 </a:lnSpc>
                 <a:spcBef>
                   <a:spcPts val="0"/>
@@ -4611,7 +4611,7 @@
                 </a:spcAft>
               </a:pPr>
               <a:r>
-                <a:rPr sz="880">
+                <a:rPr sz="1120">
                   <a:solidFill>
                     <a:srgbClr val="4D4D4D">
                       <a:alpha val="100000"/>
@@ -4633,8 +4633,8 @@
           </p:nvSpPr>
           <p:spPr>
             <a:xfrm>
-              <a:off x="692708" y="3028808"/>
-              <a:ext cx="62179" cy="80101"/>
+              <a:off x="756929" y="3086593"/>
+              <a:ext cx="79004" cy="101955"/>
             </a:xfrm>
             <a:prstGeom prst="rect">
               <a:avLst/>
@@ -4647,7 +4647,7 @@
             <a:p>
               <a:pPr algn="l" marL="0" marR="0" indent="0">
                 <a:lnSpc>
-                  <a:spcPts val="880"/>
+                  <a:spcPts val="1120"/>
                 </a:lnSpc>
                 <a:spcBef>
                   <a:spcPts val="0"/>
@@ -4657,7 +4657,7 @@
                 </a:spcAft>
               </a:pPr>
               <a:r>
-                <a:rPr sz="880">
+                <a:rPr sz="1120">
                   <a:solidFill>
                     <a:srgbClr val="4D4D4D">
                       <a:alpha val="100000"/>
@@ -4679,8 +4679,8 @@
           </p:nvSpPr>
           <p:spPr>
             <a:xfrm>
-              <a:off x="692708" y="2199345"/>
-              <a:ext cx="62179" cy="80101"/>
+              <a:off x="756929" y="2312925"/>
+              <a:ext cx="79004" cy="101955"/>
             </a:xfrm>
             <a:prstGeom prst="rect">
               <a:avLst/>
@@ -4693,7 +4693,7 @@
             <a:p>
               <a:pPr algn="l" marL="0" marR="0" indent="0">
                 <a:lnSpc>
-                  <a:spcPts val="880"/>
+                  <a:spcPts val="1120"/>
                 </a:lnSpc>
                 <a:spcBef>
                   <a:spcPts val="0"/>
@@ -4703,7 +4703,7 @@
                 </a:spcAft>
               </a:pPr>
               <a:r>
-                <a:rPr sz="880">
+                <a:rPr sz="1120">
                   <a:solidFill>
                     <a:srgbClr val="4D4D4D">
                       <a:alpha val="100000"/>
@@ -4725,8 +4725,8 @@
           </p:nvSpPr>
           <p:spPr>
             <a:xfrm>
-              <a:off x="2331636" y="5785772"/>
-              <a:ext cx="161574" cy="80101"/>
+              <a:off x="2383963" y="5693022"/>
+              <a:ext cx="205282" cy="101955"/>
             </a:xfrm>
             <a:prstGeom prst="rect">
               <a:avLst/>
@@ -4739,7 +4739,7 @@
             <a:p>
               <a:pPr algn="l" marL="0" marR="0" indent="0">
                 <a:lnSpc>
-                  <a:spcPts val="880"/>
+                  <a:spcPts val="1120"/>
                 </a:lnSpc>
                 <a:spcBef>
                   <a:spcPts val="0"/>
@@ -4749,7 +4749,7 @@
                 </a:spcAft>
               </a:pPr>
               <a:r>
-                <a:rPr sz="880">
+                <a:rPr sz="1120">
                   <a:solidFill>
                     <a:srgbClr val="4D4D4D">
                       <a:alpha val="100000"/>
@@ -4771,8 +4771,8 @@
           </p:nvSpPr>
           <p:spPr>
             <a:xfrm>
-              <a:off x="4181509" y="5785772"/>
-              <a:ext cx="161574" cy="80101"/>
+              <a:off x="4206062" y="5693022"/>
+              <a:ext cx="205282" cy="101955"/>
             </a:xfrm>
             <a:prstGeom prst="rect">
               <a:avLst/>
@@ -4785,7 +4785,7 @@
             <a:p>
               <a:pPr algn="l" marL="0" marR="0" indent="0">
                 <a:lnSpc>
-                  <a:spcPts val="880"/>
+                  <a:spcPts val="1120"/>
                 </a:lnSpc>
                 <a:spcBef>
                   <a:spcPts val="0"/>
@@ -4795,7 +4795,7 @@
                 </a:spcAft>
               </a:pPr>
               <a:r>
-                <a:rPr sz="880">
+                <a:rPr sz="1120">
                   <a:solidFill>
                     <a:srgbClr val="4D4D4D">
                       <a:alpha val="100000"/>
@@ -4817,8 +4817,8 @@
           </p:nvSpPr>
           <p:spPr>
             <a:xfrm>
-              <a:off x="6081080" y="5785772"/>
-              <a:ext cx="62179" cy="80101"/>
+              <a:off x="6091300" y="5693022"/>
+              <a:ext cx="79004" cy="101955"/>
             </a:xfrm>
             <a:prstGeom prst="rect">
               <a:avLst/>
@@ -4831,7 +4831,7 @@
             <a:p>
               <a:pPr algn="l" marL="0" marR="0" indent="0">
                 <a:lnSpc>
-                  <a:spcPts val="880"/>
+                  <a:spcPts val="1120"/>
                 </a:lnSpc>
                 <a:spcBef>
                   <a:spcPts val="0"/>
@@ -4841,7 +4841,7 @@
                 </a:spcAft>
               </a:pPr>
               <a:r>
-                <a:rPr sz="880">
+                <a:rPr sz="1120">
                   <a:solidFill>
                     <a:srgbClr val="4D4D4D">
                       <a:alpha val="100000"/>
@@ -4863,8 +4863,8 @@
           </p:nvSpPr>
           <p:spPr>
             <a:xfrm>
-              <a:off x="7899863" y="5785772"/>
-              <a:ext cx="124358" cy="80101"/>
+              <a:off x="7873896" y="5693022"/>
+              <a:ext cx="158008" cy="101955"/>
             </a:xfrm>
             <a:prstGeom prst="rect">
               <a:avLst/>
@@ -4877,7 +4877,7 @@
             <a:p>
               <a:pPr algn="l" marL="0" marR="0" indent="0">
                 <a:lnSpc>
-                  <a:spcPts val="880"/>
+                  <a:spcPts val="1120"/>
                 </a:lnSpc>
                 <a:spcBef>
                   <a:spcPts val="0"/>
@@ -4887,7 +4887,7 @@
                 </a:spcAft>
               </a:pPr>
               <a:r>
-                <a:rPr sz="880">
+                <a:rPr sz="1120">
                   <a:solidFill>
                     <a:srgbClr val="4D4D4D">
                       <a:alpha val="100000"/>
@@ -4909,8 +4909,8 @@
           </p:nvSpPr>
           <p:spPr>
             <a:xfrm>
-              <a:off x="3832408" y="5925448"/>
-              <a:ext cx="1769912" cy="100218"/>
+              <a:off x="3630809" y="5870717"/>
+              <a:ext cx="2252258" cy="127558"/>
             </a:xfrm>
             <a:prstGeom prst="rect">
               <a:avLst/>
@@ -4923,7 +4923,7 @@
             <a:p>
               <a:pPr algn="l" marL="0" marR="0" indent="0">
                 <a:lnSpc>
-                  <a:spcPts val="1100"/>
+                  <a:spcPts val="1400"/>
                 </a:lnSpc>
                 <a:spcBef>
                   <a:spcPts val="0"/>
@@ -4933,7 +4933,7 @@
                 </a:spcAft>
               </a:pPr>
               <a:r>
-                <a:rPr sz="1100">
+                <a:rPr sz="1400">
                   <a:solidFill>
                     <a:srgbClr val="000000">
                       <a:alpha val="100000"/>
@@ -4955,8 +4955,8 @@
           </p:nvSpPr>
           <p:spPr>
             <a:xfrm rot="-5400000">
-              <a:off x="68446" y="3848213"/>
-              <a:ext cx="1016904" cy="100218"/>
+              <a:off x="-37527" y="3847460"/>
+              <a:ext cx="1294150" cy="127558"/>
             </a:xfrm>
             <a:prstGeom prst="rect">
               <a:avLst/>
@@ -4969,7 +4969,7 @@
             <a:p>
               <a:pPr algn="l" marL="0" marR="0" indent="0">
                 <a:lnSpc>
-                  <a:spcPts val="1100"/>
+                  <a:spcPts val="1400"/>
                 </a:lnSpc>
                 <a:spcBef>
                   <a:spcPts val="0"/>
@@ -4979,7 +4979,7 @@
                 </a:spcAft>
               </a:pPr>
               <a:r>
-                <a:rPr sz="1100">
+                <a:rPr sz="1400">
                   <a:solidFill>
                     <a:srgbClr val="000000">
                       <a:alpha val="100000"/>
@@ -5001,8 +5001,8 @@
           </p:nvSpPr>
           <p:spPr>
             <a:xfrm>
-              <a:off x="817517" y="1896563"/>
-              <a:ext cx="5413065" cy="82021"/>
+              <a:off x="915645" y="1977589"/>
+              <a:ext cx="7220102" cy="109362"/>
             </a:xfrm>
             <a:prstGeom prst="rect">
               <a:avLst/>
@@ -5015,7 +5015,7 @@
             <a:p>
               <a:pPr algn="l" marL="0" marR="0" indent="0">
                 <a:lnSpc>
-                  <a:spcPts val="900"/>
+                  <a:spcPts val="1200"/>
                 </a:lnSpc>
                 <a:spcBef>
                   <a:spcPts val="0"/>
@@ -5025,7 +5025,7 @@
                 </a:spcAft>
               </a:pPr>
               <a:r>
-                <a:rPr sz="900">
+                <a:rPr sz="1200">
                   <a:solidFill>
                     <a:srgbClr val="404040">
                       <a:alpha val="100000"/>
@@ -5047,8 +5047,8 @@
           </p:nvSpPr>
           <p:spPr>
             <a:xfrm>
-              <a:off x="817517" y="1669789"/>
-              <a:ext cx="2681569" cy="120152"/>
+              <a:off x="915645" y="1688767"/>
+              <a:ext cx="3413729" cy="153070"/>
             </a:xfrm>
             <a:prstGeom prst="rect">
               <a:avLst/>
@@ -5061,7 +5061,7 @@
             <a:p>
               <a:pPr algn="l" marL="0" marR="0" indent="0">
                 <a:lnSpc>
-                  <a:spcPts val="1320"/>
+                  <a:spcPts val="1680"/>
                 </a:lnSpc>
                 <a:spcBef>
                   <a:spcPts val="0"/>
@@ -5071,7 +5071,7 @@
                 </a:spcAft>
               </a:pPr>
               <a:r>
-                <a:rPr sz="1320">
+                <a:rPr sz="1680">
                   <a:solidFill>
                     <a:srgbClr val="000000">
                       <a:alpha val="100000"/>
